--- a/source/Instructor Week 1 Grams/Instructor Week 1 Grams.pptx
+++ b/source/Instructor Week 1 Grams/Instructor Week 1 Grams.pptx
@@ -3143,11 +3143,11 @@
       </p:sp>
       <p:sp>
         <p:nvSpPr>
-          <p:cNvPr id="3" name="Rounded Rectangle 2"/>
+          <p:cNvPr id="3" name="Rounded Rectangle 2">
+            <a:hlinkClick r:id="rId2"/>
+          </p:cNvPr>
           <p:cNvSpPr/>
-          <p:nvPr>
-            <a:hlinkClick r:id="rId2"/>
-          </p:nvPr>
+          <p:nvPr/>
         </p:nvSpPr>
         <p:spPr>
           <a:xfrm>
@@ -3229,11 +3229,11 @@
       </p:sp>
       <p:sp>
         <p:nvSpPr>
-          <p:cNvPr id="5" name="Rounded Rectangle 4"/>
+          <p:cNvPr id="5" name="Rounded Rectangle 4">
+            <a:hlinkClick r:id="rId4"/>
+          </p:cNvPr>
           <p:cNvSpPr/>
-          <p:nvPr>
-            <a:hlinkClick r:id="rId4"/>
-          </p:nvPr>
+          <p:nvPr/>
         </p:nvSpPr>
         <p:spPr>
           <a:xfrm>
@@ -3339,11 +3339,11 @@
       </p:sp>
       <p:sp>
         <p:nvSpPr>
-          <p:cNvPr id="7" name="Rounded Rectangle 6"/>
+          <p:cNvPr id="7" name="Rounded Rectangle 6">
+            <a:hlinkClick r:id="rId9"/>
+          </p:cNvPr>
           <p:cNvSpPr/>
-          <p:nvPr>
-            <a:hlinkClick r:id="rId9"/>
-          </p:nvPr>
+          <p:nvPr/>
         </p:nvSpPr>
         <p:spPr>
           <a:xfrm>
@@ -3425,11 +3425,11 @@
       </p:sp>
       <p:sp>
         <p:nvSpPr>
-          <p:cNvPr id="9" name="Rounded Rectangle 8"/>
+          <p:cNvPr id="9" name="Rounded Rectangle 8">
+            <a:hlinkClick r:id="rId11"/>
+          </p:cNvPr>
           <p:cNvSpPr/>
-          <p:nvPr>
-            <a:hlinkClick r:id="rId11"/>
-          </p:nvPr>
+          <p:nvPr/>
         </p:nvSpPr>
         <p:spPr>
           <a:xfrm>
@@ -3519,11 +3519,11 @@
       </p:sp>
       <p:sp>
         <p:nvSpPr>
-          <p:cNvPr id="11" name="Rounded Rectangle 10"/>
+          <p:cNvPr id="11" name="Rounded Rectangle 10">
+            <a:hlinkClick r:id="rId14"/>
+          </p:cNvPr>
           <p:cNvSpPr/>
-          <p:nvPr>
-            <a:hlinkClick r:id="rId14"/>
-          </p:nvPr>
+          <p:nvPr/>
         </p:nvSpPr>
         <p:spPr>
           <a:xfrm>
@@ -3605,11 +3605,11 @@
       </p:sp>
       <p:sp>
         <p:nvSpPr>
-          <p:cNvPr id="13" name="Rounded Rectangle 12"/>
+          <p:cNvPr id="13" name="Rounded Rectangle 12">
+            <a:hlinkClick r:id="rId16"/>
+          </p:cNvPr>
           <p:cNvSpPr/>
-          <p:nvPr>
-            <a:hlinkClick r:id="rId16"/>
-          </p:nvPr>
+          <p:nvPr/>
         </p:nvSpPr>
         <p:spPr>
           <a:xfrm>
@@ -3707,11 +3707,11 @@
       </p:sp>
       <p:sp>
         <p:nvSpPr>
-          <p:cNvPr id="15" name="Rounded Rectangle 14"/>
+          <p:cNvPr id="15" name="Rounded Rectangle 14">
+            <a:hlinkClick r:id="rId20"/>
+          </p:cNvPr>
           <p:cNvSpPr/>
-          <p:nvPr>
-            <a:hlinkClick r:id="rId20"/>
-          </p:nvPr>
+          <p:nvPr/>
         </p:nvSpPr>
         <p:spPr>
           <a:xfrm>
@@ -3793,11 +3793,11 @@
       </p:sp>
       <p:sp>
         <p:nvSpPr>
-          <p:cNvPr id="17" name="Rounded Rectangle 16"/>
+          <p:cNvPr id="17" name="Rounded Rectangle 16">
+            <a:hlinkClick r:id="rId22"/>
+          </p:cNvPr>
           <p:cNvSpPr/>
-          <p:nvPr>
-            <a:hlinkClick r:id="rId22"/>
-          </p:nvPr>
+          <p:nvPr/>
         </p:nvSpPr>
         <p:spPr>
           <a:xfrm>
@@ -3879,11 +3879,11 @@
       </p:sp>
       <p:sp>
         <p:nvSpPr>
-          <p:cNvPr id="19" name="Rounded Rectangle 18"/>
+          <p:cNvPr id="19" name="Rounded Rectangle 18">
+            <a:hlinkClick r:id="rId24"/>
+          </p:cNvPr>
           <p:cNvSpPr/>
-          <p:nvPr>
-            <a:hlinkClick r:id="rId24"/>
-          </p:nvPr>
+          <p:nvPr/>
         </p:nvSpPr>
         <p:spPr>
           <a:xfrm>
@@ -3989,11 +3989,11 @@
       </p:sp>
       <p:sp>
         <p:nvSpPr>
-          <p:cNvPr id="21" name="Rounded Rectangle 20"/>
+          <p:cNvPr id="21" name="Rounded Rectangle 20">
+            <a:hlinkClick r:id="rId29"/>
+          </p:cNvPr>
           <p:cNvSpPr/>
-          <p:nvPr>
-            <a:hlinkClick r:id="rId29"/>
-          </p:nvPr>
+          <p:nvPr/>
         </p:nvSpPr>
         <p:spPr>
           <a:xfrm>
@@ -4075,11 +4075,11 @@
       </p:sp>
       <p:sp>
         <p:nvSpPr>
-          <p:cNvPr id="23" name="Rounded Rectangle 22"/>
+          <p:cNvPr id="23" name="Rounded Rectangle 22">
+            <a:hlinkClick r:id="rId31"/>
+          </p:cNvPr>
           <p:cNvSpPr/>
-          <p:nvPr>
-            <a:hlinkClick r:id="rId31"/>
-          </p:nvPr>
+          <p:nvPr/>
         </p:nvSpPr>
         <p:spPr>
           <a:xfrm>
@@ -4185,11 +4185,11 @@
       </p:sp>
       <p:sp>
         <p:nvSpPr>
-          <p:cNvPr id="25" name="Rounded Rectangle 24"/>
+          <p:cNvPr id="25" name="Rounded Rectangle 24">
+            <a:hlinkClick r:id="rId36"/>
+          </p:cNvPr>
           <p:cNvSpPr/>
-          <p:nvPr>
-            <a:hlinkClick r:id="rId36"/>
-          </p:nvPr>
+          <p:nvPr/>
         </p:nvSpPr>
         <p:spPr>
           <a:xfrm>
@@ -4295,11 +4295,11 @@
       </p:sp>
       <p:sp>
         <p:nvSpPr>
-          <p:cNvPr id="27" name="Rounded Rectangle 26"/>
+          <p:cNvPr id="27" name="Rounded Rectangle 26">
+            <a:hlinkClick r:id="rId41"/>
+          </p:cNvPr>
           <p:cNvSpPr/>
-          <p:nvPr>
-            <a:hlinkClick r:id="rId41"/>
-          </p:nvPr>
+          <p:nvPr/>
         </p:nvSpPr>
         <p:spPr>
           <a:xfrm>
@@ -4397,11 +4397,11 @@
       </p:sp>
       <p:sp>
         <p:nvSpPr>
-          <p:cNvPr id="29" name="Rounded Rectangle 28"/>
+          <p:cNvPr id="29" name="Rounded Rectangle 28">
+            <a:hlinkClick r:id="rId45"/>
+          </p:cNvPr>
           <p:cNvSpPr/>
-          <p:nvPr>
-            <a:hlinkClick r:id="rId45"/>
-          </p:nvPr>
+          <p:nvPr/>
         </p:nvSpPr>
         <p:spPr>
           <a:xfrm>
@@ -4499,11 +4499,11 @@
       </p:sp>
       <p:sp>
         <p:nvSpPr>
-          <p:cNvPr id="31" name="Rounded Rectangle 30"/>
+          <p:cNvPr id="31" name="Rounded Rectangle 30">
+            <a:hlinkClick r:id="rId49"/>
+          </p:cNvPr>
           <p:cNvSpPr/>
-          <p:nvPr>
-            <a:hlinkClick r:id="rId49"/>
-          </p:nvPr>
+          <p:nvPr/>
         </p:nvSpPr>
         <p:spPr>
           <a:xfrm>
@@ -4670,11 +4670,11 @@
       </p:sp>
       <p:sp>
         <p:nvSpPr>
-          <p:cNvPr id="3" name="Rounded Rectangle 2"/>
+          <p:cNvPr id="3" name="Rounded Rectangle 2">
+            <a:hlinkClick r:id="rId2"/>
+          </p:cNvPr>
           <p:cNvSpPr/>
-          <p:nvPr>
-            <a:hlinkClick r:id="rId2"/>
-          </p:nvPr>
+          <p:nvPr/>
         </p:nvSpPr>
         <p:spPr>
           <a:xfrm>
@@ -4780,11 +4780,11 @@
       </p:sp>
       <p:sp>
         <p:nvSpPr>
-          <p:cNvPr id="5" name="Rounded Rectangle 4"/>
+          <p:cNvPr id="5" name="Rounded Rectangle 4">
+            <a:hlinkClick r:id="rId7"/>
+          </p:cNvPr>
           <p:cNvSpPr/>
-          <p:nvPr>
-            <a:hlinkClick r:id="rId7"/>
-          </p:nvPr>
+          <p:nvPr/>
         </p:nvSpPr>
         <p:spPr>
           <a:xfrm>
@@ -4874,11 +4874,11 @@
       </p:sp>
       <p:sp>
         <p:nvSpPr>
-          <p:cNvPr id="7" name="Rounded Rectangle 6"/>
+          <p:cNvPr id="7" name="Rounded Rectangle 6">
+            <a:hlinkClick r:id="rId10"/>
+          </p:cNvPr>
           <p:cNvSpPr/>
-          <p:nvPr>
-            <a:hlinkClick r:id="rId10"/>
-          </p:nvPr>
+          <p:nvPr/>
         </p:nvSpPr>
         <p:spPr>
           <a:xfrm>
@@ -4968,11 +4968,11 @@
       </p:sp>
       <p:sp>
         <p:nvSpPr>
-          <p:cNvPr id="9" name="Rounded Rectangle 8"/>
+          <p:cNvPr id="9" name="Rounded Rectangle 8">
+            <a:hlinkClick r:id="rId13"/>
+          </p:cNvPr>
           <p:cNvSpPr/>
-          <p:nvPr>
-            <a:hlinkClick r:id="rId13"/>
-          </p:nvPr>
+          <p:nvPr/>
         </p:nvSpPr>
         <p:spPr>
           <a:xfrm>
@@ -5078,11 +5078,11 @@
       </p:sp>
       <p:sp>
         <p:nvSpPr>
-          <p:cNvPr id="11" name="Rounded Rectangle 10"/>
+          <p:cNvPr id="11" name="Rounded Rectangle 10">
+            <a:hlinkClick r:id="rId18"/>
+          </p:cNvPr>
           <p:cNvSpPr/>
-          <p:nvPr>
-            <a:hlinkClick r:id="rId18"/>
-          </p:nvPr>
+          <p:nvPr/>
         </p:nvSpPr>
         <p:spPr>
           <a:xfrm>
@@ -5172,11 +5172,11 @@
       </p:sp>
       <p:sp>
         <p:nvSpPr>
-          <p:cNvPr id="13" name="Rounded Rectangle 12"/>
+          <p:cNvPr id="13" name="Rounded Rectangle 12">
+            <a:hlinkClick r:id="rId21"/>
+          </p:cNvPr>
           <p:cNvSpPr/>
-          <p:nvPr>
-            <a:hlinkClick r:id="rId21"/>
-          </p:nvPr>
+          <p:nvPr/>
         </p:nvSpPr>
         <p:spPr>
           <a:xfrm>
@@ -5274,11 +5274,11 @@
       </p:sp>
       <p:sp>
         <p:nvSpPr>
-          <p:cNvPr id="15" name="Rounded Rectangle 14"/>
+          <p:cNvPr id="15" name="Rounded Rectangle 14">
+            <a:hlinkClick r:id="rId25"/>
+          </p:cNvPr>
           <p:cNvSpPr/>
-          <p:nvPr>
-            <a:hlinkClick r:id="rId25"/>
-          </p:nvPr>
+          <p:nvPr/>
         </p:nvSpPr>
         <p:spPr>
           <a:xfrm>
@@ -5384,11 +5384,11 @@
       </p:sp>
       <p:sp>
         <p:nvSpPr>
-          <p:cNvPr id="17" name="Rounded Rectangle 16"/>
+          <p:cNvPr id="17" name="Rounded Rectangle 16">
+            <a:hlinkClick r:id="rId30"/>
+          </p:cNvPr>
           <p:cNvSpPr/>
-          <p:nvPr>
-            <a:hlinkClick r:id="rId30"/>
-          </p:nvPr>
+          <p:nvPr/>
         </p:nvSpPr>
         <p:spPr>
           <a:xfrm>
@@ -5486,11 +5486,11 @@
       </p:sp>
       <p:sp>
         <p:nvSpPr>
-          <p:cNvPr id="19" name="Rounded Rectangle 18"/>
+          <p:cNvPr id="19" name="Rounded Rectangle 18">
+            <a:hlinkClick r:id="rId34"/>
+          </p:cNvPr>
           <p:cNvSpPr/>
-          <p:nvPr>
-            <a:hlinkClick r:id="rId34"/>
-          </p:nvPr>
+          <p:nvPr/>
         </p:nvSpPr>
         <p:spPr>
           <a:xfrm>
@@ -5588,11 +5588,11 @@
       </p:sp>
       <p:sp>
         <p:nvSpPr>
-          <p:cNvPr id="21" name="Rounded Rectangle 20"/>
+          <p:cNvPr id="21" name="Rounded Rectangle 20">
+            <a:hlinkClick r:id="rId38"/>
+          </p:cNvPr>
           <p:cNvSpPr/>
-          <p:nvPr>
-            <a:hlinkClick r:id="rId38"/>
-          </p:nvPr>
+          <p:nvPr/>
         </p:nvSpPr>
         <p:spPr>
           <a:xfrm>
@@ -5682,11 +5682,11 @@
       </p:sp>
       <p:sp>
         <p:nvSpPr>
-          <p:cNvPr id="23" name="Rounded Rectangle 22"/>
+          <p:cNvPr id="23" name="Rounded Rectangle 22">
+            <a:hlinkClick r:id="rId41"/>
+          </p:cNvPr>
           <p:cNvSpPr/>
-          <p:nvPr>
-            <a:hlinkClick r:id="rId41"/>
-          </p:nvPr>
+          <p:nvPr/>
         </p:nvSpPr>
         <p:spPr>
           <a:xfrm>
@@ -5776,11 +5776,11 @@
       </p:sp>
       <p:sp>
         <p:nvSpPr>
-          <p:cNvPr id="25" name="Rounded Rectangle 24"/>
+          <p:cNvPr id="25" name="Rounded Rectangle 24">
+            <a:hlinkClick r:id="rId44"/>
+          </p:cNvPr>
           <p:cNvSpPr/>
-          <p:nvPr>
-            <a:hlinkClick r:id="rId44"/>
-          </p:nvPr>
+          <p:nvPr/>
         </p:nvSpPr>
         <p:spPr>
           <a:xfrm>
@@ -5862,11 +5862,11 @@
       </p:sp>
       <p:sp>
         <p:nvSpPr>
-          <p:cNvPr id="27" name="Rounded Rectangle 26"/>
+          <p:cNvPr id="27" name="Rounded Rectangle 26">
+            <a:hlinkClick r:id="rId46"/>
+          </p:cNvPr>
           <p:cNvSpPr/>
-          <p:nvPr>
-            <a:hlinkClick r:id="rId46"/>
-          </p:nvPr>
+          <p:nvPr/>
         </p:nvSpPr>
         <p:spPr>
           <a:xfrm>
@@ -5948,11 +5948,11 @@
       </p:sp>
       <p:sp>
         <p:nvSpPr>
-          <p:cNvPr id="29" name="Rounded Rectangle 28"/>
+          <p:cNvPr id="29" name="Rounded Rectangle 28">
+            <a:hlinkClick r:id="rId48"/>
+          </p:cNvPr>
           <p:cNvSpPr/>
-          <p:nvPr>
-            <a:hlinkClick r:id="rId48"/>
-          </p:nvPr>
+          <p:nvPr/>
         </p:nvSpPr>
         <p:spPr>
           <a:xfrm>
@@ -6050,11 +6050,11 @@
       </p:sp>
       <p:sp>
         <p:nvSpPr>
-          <p:cNvPr id="31" name="Rounded Rectangle 30"/>
+          <p:cNvPr id="31" name="Rounded Rectangle 30">
+            <a:hlinkClick r:id="rId52"/>
+          </p:cNvPr>
           <p:cNvSpPr/>
-          <p:nvPr>
-            <a:hlinkClick r:id="rId52"/>
-          </p:nvPr>
+          <p:nvPr/>
         </p:nvSpPr>
         <p:spPr>
           <a:xfrm>
@@ -6205,11 +6205,11 @@
       </p:sp>
       <p:sp>
         <p:nvSpPr>
-          <p:cNvPr id="3" name="Rounded Rectangle 2"/>
+          <p:cNvPr id="3" name="Rounded Rectangle 2">
+            <a:hlinkClick r:id="rId2"/>
+          </p:cNvPr>
           <p:cNvSpPr/>
-          <p:nvPr>
-            <a:hlinkClick r:id="rId2"/>
-          </p:nvPr>
+          <p:nvPr/>
         </p:nvSpPr>
         <p:spPr>
           <a:xfrm>
@@ -6315,11 +6315,11 @@
       </p:sp>
       <p:sp>
         <p:nvSpPr>
-          <p:cNvPr id="5" name="Rounded Rectangle 4"/>
+          <p:cNvPr id="5" name="Rounded Rectangle 4">
+            <a:hlinkClick r:id="rId7"/>
+          </p:cNvPr>
           <p:cNvSpPr/>
-          <p:nvPr>
-            <a:hlinkClick r:id="rId7"/>
-          </p:nvPr>
+          <p:nvPr/>
         </p:nvSpPr>
         <p:spPr>
           <a:xfrm>
@@ -6401,11 +6401,11 @@
       </p:sp>
       <p:sp>
         <p:nvSpPr>
-          <p:cNvPr id="7" name="Rounded Rectangle 6"/>
+          <p:cNvPr id="7" name="Rounded Rectangle 6">
+            <a:hlinkClick r:id="rId9"/>
+          </p:cNvPr>
           <p:cNvSpPr/>
-          <p:nvPr>
-            <a:hlinkClick r:id="rId9"/>
-          </p:nvPr>
+          <p:nvPr/>
         </p:nvSpPr>
         <p:spPr>
           <a:xfrm>
@@ -6511,11 +6511,11 @@
       </p:sp>
       <p:sp>
         <p:nvSpPr>
-          <p:cNvPr id="9" name="Rounded Rectangle 8"/>
+          <p:cNvPr id="9" name="Rounded Rectangle 8">
+            <a:hlinkClick r:id="rId14"/>
+          </p:cNvPr>
           <p:cNvSpPr/>
-          <p:nvPr>
-            <a:hlinkClick r:id="rId14"/>
-          </p:nvPr>
+          <p:nvPr/>
         </p:nvSpPr>
         <p:spPr>
           <a:xfrm>
@@ -6621,11 +6621,11 @@
       </p:sp>
       <p:sp>
         <p:nvSpPr>
-          <p:cNvPr id="11" name="Rounded Rectangle 10"/>
+          <p:cNvPr id="11" name="Rounded Rectangle 10">
+            <a:hlinkClick r:id="rId19"/>
+          </p:cNvPr>
           <p:cNvSpPr/>
-          <p:nvPr>
-            <a:hlinkClick r:id="rId19"/>
-          </p:nvPr>
+          <p:nvPr/>
         </p:nvSpPr>
         <p:spPr>
           <a:xfrm>

--- a/source/Instructor Week 1 Grams/Instructor Week 1 Grams.pptx
+++ b/source/Instructor Week 1 Grams/Instructor Week 1 Grams.pptx
@@ -8,6 +8,8 @@
     <p:sldId id="256" r:id="rId7"/>
     <p:sldId id="257" r:id="rId8"/>
     <p:sldId id="258" r:id="rId9"/>
+    <p:sldId id="259" r:id="rId10"/>
+    <p:sldId id="260" r:id="rId11"/>
   </p:sldIdLst>
   <p:sldSz cx="12188952" cy="6858000" type="screen4x3"/>
   <p:notesSz cx="6858000" cy="9144000"/>
@@ -3092,120 +3094,48 @@
       <p:grpSpPr/>
       <p:sp>
         <p:nvSpPr>
-          <p:cNvPr id="2" name="Rectangle 1"/>
-          <p:cNvSpPr/>
+          <p:cNvPr id="2" name="TextBox 1"/>
+          <p:cNvSpPr txBox="1"/>
           <p:nvPr/>
         </p:nvSpPr>
         <p:spPr>
           <a:xfrm>
-            <a:off x="0" y="0"/>
-            <a:ext cx="12188952" cy="548640"/>
+            <a:off x="914400" y="2377440"/>
+            <a:ext cx="10360152" cy="1280160"/>
           </a:xfrm>
           <a:prstGeom prst="rect">
             <a:avLst/>
           </a:prstGeom>
-          <a:solidFill>
-            <a:srgbClr val="1F3A5F"/>
-          </a:solidFill>
-          <a:ln>
-            <a:noFill/>
-          </a:ln>
-        </p:spPr>
-        <p:style>
-          <a:lnRef idx="1">
-            <a:schemeClr val="accent1"/>
-          </a:lnRef>
-          <a:fillRef idx="3">
-            <a:schemeClr val="accent1"/>
-          </a:fillRef>
-          <a:effectRef idx="2">
-            <a:schemeClr val="accent1"/>
-          </a:effectRef>
-          <a:fontRef idx="minor">
-            <a:schemeClr val="lt1"/>
-          </a:fontRef>
-        </p:style>
-        <p:txBody>
-          <a:bodyPr rtlCol="0" anchor="ctr" lIns="182880" rIns="182880"/>
+          <a:noFill/>
+        </p:spPr>
+        <p:txBody>
+          <a:bodyPr wrap="square">
+            <a:spAutoFit/>
+          </a:bodyPr>
           <a:lstStyle/>
           <a:p>
             <a:pPr algn="ctr"/>
             <a:r>
-              <a:rPr sz="2000" b="1">
-                <a:solidFill>
-                  <a:srgbClr val="FFFFFF"/>
-                </a:solidFill>
-              </a:rPr>
-              <a:t>Instructor Week 1 Grams — Page 1 of 3</a:t>
-            </a:r>
-          </a:p>
-        </p:txBody>
-      </p:sp>
-      <p:sp>
-        <p:nvSpPr>
-          <p:cNvPr id="3" name="Rounded Rectangle 2"/>
-          <p:cNvSpPr/>
-          <p:nvPr>
-            <a:hlinkClick r:id="rId2"/>
-          </p:nvPr>
-        </p:nvSpPr>
-        <p:spPr>
-          <a:xfrm>
-            <a:off x="365760" y="731520"/>
-            <a:ext cx="2200046" cy="365760"/>
-          </a:xfrm>
-          <a:prstGeom prst="roundRect">
-            <a:avLst/>
-          </a:prstGeom>
-          <a:solidFill>
-            <a:srgbClr val="E8EEF7"/>
-          </a:solidFill>
-          <a:ln>
-            <a:solidFill>
-              <a:srgbClr val="1F3A5F"/>
-            </a:solidFill>
-          </a:ln>
-        </p:spPr>
-        <p:style>
-          <a:lnRef idx="1">
-            <a:schemeClr val="accent1"/>
-          </a:lnRef>
-          <a:fillRef idx="3">
-            <a:schemeClr val="accent1"/>
-          </a:fillRef>
-          <a:effectRef idx="2">
-            <a:schemeClr val="accent1"/>
-          </a:effectRef>
-          <a:fontRef idx="minor">
-            <a:schemeClr val="lt1"/>
-          </a:fontRef>
-        </p:style>
-        <p:txBody>
-          <a:bodyPr rtlCol="0" anchor="ctr" lIns="45720" rIns="45720"/>
-          <a:lstStyle/>
-          <a:p>
-            <a:pPr algn="ctr"/>
-            <a:r>
-              <a:rPr sz="900">
+              <a:rPr sz="4000" b="1">
                 <a:solidFill>
                   <a:srgbClr val="1F3A5F"/>
                 </a:solidFill>
               </a:rPr>
-              <a:t>Gram 1: FR Razor Crest, Category 3, Mustafar</a:t>
-            </a:r>
-          </a:p>
-        </p:txBody>
-      </p:sp>
-      <p:sp>
-        <p:nvSpPr>
-          <p:cNvPr id="4" name="TextBox 3"/>
+              <a:t>Welcome to Instructor Week 1 Grams</a:t>
+            </a:r>
+          </a:p>
+        </p:txBody>
+      </p:sp>
+      <p:sp>
+        <p:nvSpPr>
+          <p:cNvPr id="3" name="TextBox 2"/>
           <p:cNvSpPr txBox="1"/>
           <p:nvPr/>
         </p:nvSpPr>
         <p:spPr>
           <a:xfrm>
-            <a:off x="365760" y="1115568"/>
-            <a:ext cx="2200046" cy="1447800"/>
+            <a:off x="914400" y="3840480"/>
+            <a:ext cx="10360152" cy="731520"/>
           </a:xfrm>
           <a:prstGeom prst="rect">
             <a:avLst/>
@@ -3213,1388 +3143,19 @@
           <a:noFill/>
         </p:spPr>
         <p:txBody>
-          <a:bodyPr wrap="square">
+          <a:bodyPr wrap="none">
             <a:spAutoFit/>
           </a:bodyPr>
           <a:lstStyle/>
           <a:p>
-            <a:r>
-              <a:rPr sz="800">
-                <a:hlinkClick r:id="rId3"/>
-              </a:rPr>
-              <a:t>Lofar 1</a:t>
-            </a:r>
-          </a:p>
-        </p:txBody>
-      </p:sp>
-      <p:sp>
-        <p:nvSpPr>
-          <p:cNvPr id="5" name="Rounded Rectangle 4"/>
-          <p:cNvSpPr/>
-          <p:nvPr>
-            <a:hlinkClick r:id="rId4"/>
-          </p:nvPr>
-        </p:nvSpPr>
-        <p:spPr>
-          <a:xfrm>
-            <a:off x="2657246" y="731520"/>
-            <a:ext cx="2200046" cy="365760"/>
-          </a:xfrm>
-          <a:prstGeom prst="roundRect">
-            <a:avLst/>
-          </a:prstGeom>
-          <a:solidFill>
-            <a:srgbClr val="E8EEF7"/>
-          </a:solidFill>
-          <a:ln>
-            <a:solidFill>
-              <a:srgbClr val="1F3A5F"/>
-            </a:solidFill>
-          </a:ln>
-        </p:spPr>
-        <p:style>
-          <a:lnRef idx="1">
-            <a:schemeClr val="accent1"/>
-          </a:lnRef>
-          <a:fillRef idx="3">
-            <a:schemeClr val="accent1"/>
-          </a:fillRef>
-          <a:effectRef idx="2">
-            <a:schemeClr val="accent1"/>
-          </a:effectRef>
-          <a:fontRef idx="minor">
-            <a:schemeClr val="lt1"/>
-          </a:fontRef>
-        </p:style>
-        <p:txBody>
-          <a:bodyPr rtlCol="0" anchor="ctr" lIns="45720" rIns="45720"/>
-          <a:lstStyle/>
-          <a:p>
             <a:pPr algn="ctr"/>
             <a:r>
-              <a:rPr sz="900">
+              <a:rPr sz="2400">
                 <a:solidFill>
                   <a:srgbClr val="1F3A5F"/>
                 </a:solidFill>
               </a:rPr>
-              <a:t>Gram 2: FR Tantive IV, Category 1, Romulus</a:t>
-            </a:r>
-          </a:p>
-        </p:txBody>
-      </p:sp>
-      <p:sp>
-        <p:nvSpPr>
-          <p:cNvPr id="6" name="TextBox 5"/>
-          <p:cNvSpPr txBox="1"/>
-          <p:nvPr/>
-        </p:nvSpPr>
-        <p:spPr>
-          <a:xfrm>
-            <a:off x="2657246" y="1115568"/>
-            <a:ext cx="2200046" cy="1447800"/>
-          </a:xfrm>
-          <a:prstGeom prst="rect">
-            <a:avLst/>
-          </a:prstGeom>
-          <a:noFill/>
-        </p:spPr>
-        <p:txBody>
-          <a:bodyPr wrap="square">
-            <a:spAutoFit/>
-          </a:bodyPr>
-          <a:lstStyle/>
-          <a:p>
-            <a:r>
-              <a:rPr sz="800">
-                <a:hlinkClick r:id="rId5"/>
-              </a:rPr>
-              <a:t>Lofar 1</a:t>
-            </a:r>
-          </a:p>
-          <a:p>
-            <a:r>
-              <a:rPr sz="800">
-                <a:hlinkClick r:id="rId6"/>
-              </a:rPr>
-              <a:t>Lofar 2</a:t>
-            </a:r>
-          </a:p>
-          <a:p>
-            <a:r>
-              <a:rPr sz="800">
-                <a:hlinkClick r:id="rId7"/>
-              </a:rPr>
-              <a:t>Lofar 3</a:t>
-            </a:r>
-          </a:p>
-          <a:p>
-            <a:r>
-              <a:rPr sz="800">
-                <a:hlinkClick r:id="rId8"/>
-              </a:rPr>
-              <a:t>Lofar 4</a:t>
-            </a:r>
-          </a:p>
-        </p:txBody>
-      </p:sp>
-      <p:sp>
-        <p:nvSpPr>
-          <p:cNvPr id="7" name="Rounded Rectangle 6"/>
-          <p:cNvSpPr/>
-          <p:nvPr>
-            <a:hlinkClick r:id="rId9"/>
-          </p:nvPr>
-        </p:nvSpPr>
-        <p:spPr>
-          <a:xfrm>
-            <a:off x="4948732" y="731520"/>
-            <a:ext cx="2200046" cy="365760"/>
-          </a:xfrm>
-          <a:prstGeom prst="roundRect">
-            <a:avLst/>
-          </a:prstGeom>
-          <a:solidFill>
-            <a:srgbClr val="E8EEF7"/>
-          </a:solidFill>
-          <a:ln>
-            <a:solidFill>
-              <a:srgbClr val="1F3A5F"/>
-            </a:solidFill>
-          </a:ln>
-        </p:spPr>
-        <p:style>
-          <a:lnRef idx="1">
-            <a:schemeClr val="accent1"/>
-          </a:lnRef>
-          <a:fillRef idx="3">
-            <a:schemeClr val="accent1"/>
-          </a:fillRef>
-          <a:effectRef idx="2">
-            <a:schemeClr val="accent1"/>
-          </a:effectRef>
-          <a:fontRef idx="minor">
-            <a:schemeClr val="lt1"/>
-          </a:fontRef>
-        </p:style>
-        <p:txBody>
-          <a:bodyPr rtlCol="0" anchor="ctr" lIns="45720" rIns="45720"/>
-          <a:lstStyle/>
-          <a:p>
-            <a:pPr algn="ctr"/>
-            <a:r>
-              <a:rPr sz="900">
-                <a:solidFill>
-                  <a:srgbClr val="1F3A5F"/>
-                </a:solidFill>
-              </a:rPr>
-              <a:t>Gram 3: FR Sovereign-class, Category 4, Defiant</a:t>
-            </a:r>
-          </a:p>
-        </p:txBody>
-      </p:sp>
-      <p:sp>
-        <p:nvSpPr>
-          <p:cNvPr id="8" name="TextBox 7"/>
-          <p:cNvSpPr txBox="1"/>
-          <p:nvPr/>
-        </p:nvSpPr>
-        <p:spPr>
-          <a:xfrm>
-            <a:off x="4948732" y="1115568"/>
-            <a:ext cx="2200046" cy="1447800"/>
-          </a:xfrm>
-          <a:prstGeom prst="rect">
-            <a:avLst/>
-          </a:prstGeom>
-          <a:noFill/>
-        </p:spPr>
-        <p:txBody>
-          <a:bodyPr wrap="square">
-            <a:spAutoFit/>
-          </a:bodyPr>
-          <a:lstStyle/>
-          <a:p>
-            <a:r>
-              <a:rPr sz="800">
-                <a:hlinkClick r:id="rId10"/>
-              </a:rPr>
-              <a:t>Lofar 1</a:t>
-            </a:r>
-          </a:p>
-        </p:txBody>
-      </p:sp>
-      <p:sp>
-        <p:nvSpPr>
-          <p:cNvPr id="9" name="Rounded Rectangle 8"/>
-          <p:cNvSpPr/>
-          <p:nvPr>
-            <a:hlinkClick r:id="rId11"/>
-          </p:nvPr>
-        </p:nvSpPr>
-        <p:spPr>
-          <a:xfrm>
-            <a:off x="7240219" y="731520"/>
-            <a:ext cx="2200046" cy="365760"/>
-          </a:xfrm>
-          <a:prstGeom prst="roundRect">
-            <a:avLst/>
-          </a:prstGeom>
-          <a:solidFill>
-            <a:srgbClr val="E8EEF7"/>
-          </a:solidFill>
-          <a:ln>
-            <a:solidFill>
-              <a:srgbClr val="1F3A5F"/>
-            </a:solidFill>
-          </a:ln>
-        </p:spPr>
-        <p:style>
-          <a:lnRef idx="1">
-            <a:schemeClr val="accent1"/>
-          </a:lnRef>
-          <a:fillRef idx="3">
-            <a:schemeClr val="accent1"/>
-          </a:fillRef>
-          <a:effectRef idx="2">
-            <a:schemeClr val="accent1"/>
-          </a:effectRef>
-          <a:fontRef idx="minor">
-            <a:schemeClr val="lt1"/>
-          </a:fontRef>
-        </p:style>
-        <p:txBody>
-          <a:bodyPr rtlCol="0" anchor="ctr" lIns="45720" rIns="45720"/>
-          <a:lstStyle/>
-          <a:p>
-            <a:pPr algn="ctr"/>
-            <a:r>
-              <a:rPr sz="900">
-                <a:solidFill>
-                  <a:srgbClr val="1F3A5F"/>
-                </a:solidFill>
-              </a:rPr>
-              <a:t>Gram 4: FR Cerritos, Category 3, Coruscant</a:t>
-            </a:r>
-          </a:p>
-        </p:txBody>
-      </p:sp>
-      <p:sp>
-        <p:nvSpPr>
-          <p:cNvPr id="10" name="TextBox 9"/>
-          <p:cNvSpPr txBox="1"/>
-          <p:nvPr/>
-        </p:nvSpPr>
-        <p:spPr>
-          <a:xfrm>
-            <a:off x="7240219" y="1115568"/>
-            <a:ext cx="2200046" cy="1447800"/>
-          </a:xfrm>
-          <a:prstGeom prst="rect">
-            <a:avLst/>
-          </a:prstGeom>
-          <a:noFill/>
-        </p:spPr>
-        <p:txBody>
-          <a:bodyPr wrap="square">
-            <a:spAutoFit/>
-          </a:bodyPr>
-          <a:lstStyle/>
-          <a:p>
-            <a:r>
-              <a:rPr sz="800">
-                <a:hlinkClick r:id="rId12"/>
-              </a:rPr>
-              <a:t>Lofar 1</a:t>
-            </a:r>
-          </a:p>
-          <a:p>
-            <a:r>
-              <a:rPr sz="800">
-                <a:hlinkClick r:id="rId13"/>
-              </a:rPr>
-              <a:t>Lofar 2</a:t>
-            </a:r>
-          </a:p>
-        </p:txBody>
-      </p:sp>
-      <p:sp>
-        <p:nvSpPr>
-          <p:cNvPr id="11" name="Rounded Rectangle 10"/>
-          <p:cNvSpPr/>
-          <p:nvPr>
-            <a:hlinkClick r:id="rId14"/>
-          </p:nvPr>
-        </p:nvSpPr>
-        <p:spPr>
-          <a:xfrm>
-            <a:off x="9531705" y="731520"/>
-            <a:ext cx="2200046" cy="365760"/>
-          </a:xfrm>
-          <a:prstGeom prst="roundRect">
-            <a:avLst/>
-          </a:prstGeom>
-          <a:solidFill>
-            <a:srgbClr val="E8EEF7"/>
-          </a:solidFill>
-          <a:ln>
-            <a:solidFill>
-              <a:srgbClr val="1F3A5F"/>
-            </a:solidFill>
-          </a:ln>
-        </p:spPr>
-        <p:style>
-          <a:lnRef idx="1">
-            <a:schemeClr val="accent1"/>
-          </a:lnRef>
-          <a:fillRef idx="3">
-            <a:schemeClr val="accent1"/>
-          </a:fillRef>
-          <a:effectRef idx="2">
-            <a:schemeClr val="accent1"/>
-          </a:effectRef>
-          <a:fontRef idx="minor">
-            <a:schemeClr val="lt1"/>
-          </a:fontRef>
-        </p:style>
-        <p:txBody>
-          <a:bodyPr rtlCol="0" anchor="ctr" lIns="45720" rIns="45720"/>
-          <a:lstStyle/>
-          <a:p>
-            <a:pPr algn="ctr"/>
-            <a:r>
-              <a:rPr sz="900">
-                <a:solidFill>
-                  <a:srgbClr val="1F3A5F"/>
-                </a:solidFill>
-              </a:rPr>
-              <a:t>Gram 5: FR Y-wing, Category 3, Gandalf</a:t>
-            </a:r>
-          </a:p>
-        </p:txBody>
-      </p:sp>
-      <p:sp>
-        <p:nvSpPr>
-          <p:cNvPr id="12" name="TextBox 11"/>
-          <p:cNvSpPr txBox="1"/>
-          <p:nvPr/>
-        </p:nvSpPr>
-        <p:spPr>
-          <a:xfrm>
-            <a:off x="9531705" y="1115568"/>
-            <a:ext cx="2200046" cy="1447800"/>
-          </a:xfrm>
-          <a:prstGeom prst="rect">
-            <a:avLst/>
-          </a:prstGeom>
-          <a:noFill/>
-        </p:spPr>
-        <p:txBody>
-          <a:bodyPr wrap="square">
-            <a:spAutoFit/>
-          </a:bodyPr>
-          <a:lstStyle/>
-          <a:p>
-            <a:r>
-              <a:rPr sz="800">
-                <a:hlinkClick r:id="rId15"/>
-              </a:rPr>
-              <a:t>Lofar 1</a:t>
-            </a:r>
-          </a:p>
-        </p:txBody>
-      </p:sp>
-      <p:sp>
-        <p:nvSpPr>
-          <p:cNvPr id="13" name="Rounded Rectangle 12"/>
-          <p:cNvSpPr/>
-          <p:nvPr>
-            <a:hlinkClick r:id="rId16"/>
-          </p:nvPr>
-        </p:nvSpPr>
-        <p:spPr>
-          <a:xfrm>
-            <a:off x="365760" y="2682240"/>
-            <a:ext cx="2200046" cy="365760"/>
-          </a:xfrm>
-          <a:prstGeom prst="roundRect">
-            <a:avLst/>
-          </a:prstGeom>
-          <a:solidFill>
-            <a:srgbClr val="E8EEF7"/>
-          </a:solidFill>
-          <a:ln>
-            <a:solidFill>
-              <a:srgbClr val="1F3A5F"/>
-            </a:solidFill>
-          </a:ln>
-        </p:spPr>
-        <p:style>
-          <a:lnRef idx="1">
-            <a:schemeClr val="accent1"/>
-          </a:lnRef>
-          <a:fillRef idx="3">
-            <a:schemeClr val="accent1"/>
-          </a:fillRef>
-          <a:effectRef idx="2">
-            <a:schemeClr val="accent1"/>
-          </a:effectRef>
-          <a:fontRef idx="minor">
-            <a:schemeClr val="lt1"/>
-          </a:fontRef>
-        </p:style>
-        <p:txBody>
-          <a:bodyPr rtlCol="0" anchor="ctr" lIns="45720" rIns="45720"/>
-          <a:lstStyle/>
-          <a:p>
-            <a:pPr algn="ctr"/>
-            <a:r>
-              <a:rPr sz="900">
-                <a:solidFill>
-                  <a:srgbClr val="1F3A5F"/>
-                </a:solidFill>
-              </a:rPr>
-              <a:t>Gram 6: FR Constitution-class, Category 2, Cardassia</a:t>
-            </a:r>
-          </a:p>
-        </p:txBody>
-      </p:sp>
-      <p:sp>
-        <p:nvSpPr>
-          <p:cNvPr id="14" name="TextBox 13"/>
-          <p:cNvSpPr txBox="1"/>
-          <p:nvPr/>
-        </p:nvSpPr>
-        <p:spPr>
-          <a:xfrm>
-            <a:off x="365760" y="3066288"/>
-            <a:ext cx="2200046" cy="1447800"/>
-          </a:xfrm>
-          <a:prstGeom prst="rect">
-            <a:avLst/>
-          </a:prstGeom>
-          <a:noFill/>
-        </p:spPr>
-        <p:txBody>
-          <a:bodyPr wrap="square">
-            <a:spAutoFit/>
-          </a:bodyPr>
-          <a:lstStyle/>
-          <a:p>
-            <a:r>
-              <a:rPr sz="800">
-                <a:hlinkClick r:id="rId17"/>
-              </a:rPr>
-              <a:t>Lofar 1</a:t>
-            </a:r>
-          </a:p>
-          <a:p>
-            <a:r>
-              <a:rPr sz="800">
-                <a:hlinkClick r:id="rId18"/>
-              </a:rPr>
-              <a:t>Lofar 2</a:t>
-            </a:r>
-          </a:p>
-          <a:p>
-            <a:r>
-              <a:rPr sz="800">
-                <a:hlinkClick r:id="rId19"/>
-              </a:rPr>
-              <a:t>Lofar 3</a:t>
-            </a:r>
-          </a:p>
-        </p:txBody>
-      </p:sp>
-      <p:sp>
-        <p:nvSpPr>
-          <p:cNvPr id="15" name="Rounded Rectangle 14"/>
-          <p:cNvSpPr/>
-          <p:nvPr>
-            <a:hlinkClick r:id="rId20"/>
-          </p:nvPr>
-        </p:nvSpPr>
-        <p:spPr>
-          <a:xfrm>
-            <a:off x="2657246" y="2682240"/>
-            <a:ext cx="2200046" cy="365760"/>
-          </a:xfrm>
-          <a:prstGeom prst="roundRect">
-            <a:avLst/>
-          </a:prstGeom>
-          <a:solidFill>
-            <a:srgbClr val="E8EEF7"/>
-          </a:solidFill>
-          <a:ln>
-            <a:solidFill>
-              <a:srgbClr val="1F3A5F"/>
-            </a:solidFill>
-          </a:ln>
-        </p:spPr>
-        <p:style>
-          <a:lnRef idx="1">
-            <a:schemeClr val="accent1"/>
-          </a:lnRef>
-          <a:fillRef idx="3">
-            <a:schemeClr val="accent1"/>
-          </a:fillRef>
-          <a:effectRef idx="2">
-            <a:schemeClr val="accent1"/>
-          </a:effectRef>
-          <a:fontRef idx="minor">
-            <a:schemeClr val="lt1"/>
-          </a:fontRef>
-        </p:style>
-        <p:txBody>
-          <a:bodyPr rtlCol="0" anchor="ctr" lIns="45720" rIns="45720"/>
-          <a:lstStyle/>
-          <a:p>
-            <a:pPr algn="ctr"/>
-            <a:r>
-              <a:rPr sz="900">
-                <a:solidFill>
-                  <a:srgbClr val="1F3A5F"/>
-                </a:solidFill>
-              </a:rPr>
-              <a:t>Gram 7: Lambda Shuttle contact bearing 152, codename Tatooine</a:t>
-            </a:r>
-          </a:p>
-        </p:txBody>
-      </p:sp>
-      <p:sp>
-        <p:nvSpPr>
-          <p:cNvPr id="16" name="TextBox 15"/>
-          <p:cNvSpPr txBox="1"/>
-          <p:nvPr/>
-        </p:nvSpPr>
-        <p:spPr>
-          <a:xfrm>
-            <a:off x="2657246" y="3066288"/>
-            <a:ext cx="2200046" cy="1447800"/>
-          </a:xfrm>
-          <a:prstGeom prst="rect">
-            <a:avLst/>
-          </a:prstGeom>
-          <a:noFill/>
-        </p:spPr>
-        <p:txBody>
-          <a:bodyPr wrap="square">
-            <a:spAutoFit/>
-          </a:bodyPr>
-          <a:lstStyle/>
-          <a:p>
-            <a:r>
-              <a:rPr sz="800">
-                <a:hlinkClick r:id="rId21"/>
-              </a:rPr>
-              <a:t>Lofar 1</a:t>
-            </a:r>
-          </a:p>
-        </p:txBody>
-      </p:sp>
-      <p:sp>
-        <p:nvSpPr>
-          <p:cNvPr id="17" name="Rounded Rectangle 16"/>
-          <p:cNvSpPr/>
-          <p:nvPr>
-            <a:hlinkClick r:id="rId22"/>
-          </p:nvPr>
-        </p:nvSpPr>
-        <p:spPr>
-          <a:xfrm>
-            <a:off x="4948732" y="2682240"/>
-            <a:ext cx="2200046" cy="365760"/>
-          </a:xfrm>
-          <a:prstGeom prst="roundRect">
-            <a:avLst/>
-          </a:prstGeom>
-          <a:solidFill>
-            <a:srgbClr val="E8EEF7"/>
-          </a:solidFill>
-          <a:ln>
-            <a:solidFill>
-              <a:srgbClr val="1F3A5F"/>
-            </a:solidFill>
-          </a:ln>
-        </p:spPr>
-        <p:style>
-          <a:lnRef idx="1">
-            <a:schemeClr val="accent1"/>
-          </a:lnRef>
-          <a:fillRef idx="3">
-            <a:schemeClr val="accent1"/>
-          </a:fillRef>
-          <a:effectRef idx="2">
-            <a:schemeClr val="accent1"/>
-          </a:effectRef>
-          <a:fontRef idx="minor">
-            <a:schemeClr val="lt1"/>
-          </a:fontRef>
-        </p:style>
-        <p:txBody>
-          <a:bodyPr rtlCol="0" anchor="ctr" lIns="45720" rIns="45720"/>
-          <a:lstStyle/>
-          <a:p>
-            <a:pPr algn="ctr"/>
-            <a:r>
-              <a:rPr sz="900">
-                <a:solidFill>
-                  <a:srgbClr val="1F3A5F"/>
-                </a:solidFill>
-              </a:rPr>
-              <a:t>Gram 8: FR Y-wing, Category 1, Betazed</a:t>
-            </a:r>
-          </a:p>
-        </p:txBody>
-      </p:sp>
-      <p:sp>
-        <p:nvSpPr>
-          <p:cNvPr id="18" name="TextBox 17"/>
-          <p:cNvSpPr txBox="1"/>
-          <p:nvPr/>
-        </p:nvSpPr>
-        <p:spPr>
-          <a:xfrm>
-            <a:off x="4948732" y="3066288"/>
-            <a:ext cx="2200046" cy="1447800"/>
-          </a:xfrm>
-          <a:prstGeom prst="rect">
-            <a:avLst/>
-          </a:prstGeom>
-          <a:noFill/>
-        </p:spPr>
-        <p:txBody>
-          <a:bodyPr wrap="square">
-            <a:spAutoFit/>
-          </a:bodyPr>
-          <a:lstStyle/>
-          <a:p>
-            <a:r>
-              <a:rPr sz="800">
-                <a:hlinkClick r:id="rId23"/>
-              </a:rPr>
-              <a:t>Lofar 1</a:t>
-            </a:r>
-          </a:p>
-        </p:txBody>
-      </p:sp>
-      <p:sp>
-        <p:nvSpPr>
-          <p:cNvPr id="19" name="Rounded Rectangle 18"/>
-          <p:cNvSpPr/>
-          <p:nvPr>
-            <a:hlinkClick r:id="rId24"/>
-          </p:nvPr>
-        </p:nvSpPr>
-        <p:spPr>
-          <a:xfrm>
-            <a:off x="7240219" y="2682240"/>
-            <a:ext cx="2200046" cy="365760"/>
-          </a:xfrm>
-          <a:prstGeom prst="roundRect">
-            <a:avLst/>
-          </a:prstGeom>
-          <a:solidFill>
-            <a:srgbClr val="E8EEF7"/>
-          </a:solidFill>
-          <a:ln>
-            <a:solidFill>
-              <a:srgbClr val="1F3A5F"/>
-            </a:solidFill>
-          </a:ln>
-        </p:spPr>
-        <p:style>
-          <a:lnRef idx="1">
-            <a:schemeClr val="accent1"/>
-          </a:lnRef>
-          <a:fillRef idx="3">
-            <a:schemeClr val="accent1"/>
-          </a:fillRef>
-          <a:effectRef idx="2">
-            <a:schemeClr val="accent1"/>
-          </a:effectRef>
-          <a:fontRef idx="minor">
-            <a:schemeClr val="lt1"/>
-          </a:fontRef>
-        </p:style>
-        <p:txBody>
-          <a:bodyPr rtlCol="0" anchor="ctr" lIns="45720" rIns="45720"/>
-          <a:lstStyle/>
-          <a:p>
-            <a:pPr algn="ctr"/>
-            <a:r>
-              <a:rPr sz="900">
-                <a:solidFill>
-                  <a:srgbClr val="1F3A5F"/>
-                </a:solidFill>
-              </a:rPr>
-              <a:t>Gram 9: FR Venator-class, Category 4, Kobol</a:t>
-            </a:r>
-          </a:p>
-        </p:txBody>
-      </p:sp>
-      <p:sp>
-        <p:nvSpPr>
-          <p:cNvPr id="20" name="TextBox 19"/>
-          <p:cNvSpPr txBox="1"/>
-          <p:nvPr/>
-        </p:nvSpPr>
-        <p:spPr>
-          <a:xfrm>
-            <a:off x="7240219" y="3066288"/>
-            <a:ext cx="2200046" cy="1447800"/>
-          </a:xfrm>
-          <a:prstGeom prst="rect">
-            <a:avLst/>
-          </a:prstGeom>
-          <a:noFill/>
-        </p:spPr>
-        <p:txBody>
-          <a:bodyPr wrap="square">
-            <a:spAutoFit/>
-          </a:bodyPr>
-          <a:lstStyle/>
-          <a:p>
-            <a:r>
-              <a:rPr sz="800">
-                <a:hlinkClick r:id="rId25"/>
-              </a:rPr>
-              <a:t>Lofar 1</a:t>
-            </a:r>
-          </a:p>
-          <a:p>
-            <a:r>
-              <a:rPr sz="800">
-                <a:hlinkClick r:id="rId26"/>
-              </a:rPr>
-              <a:t>Lofar 2</a:t>
-            </a:r>
-          </a:p>
-          <a:p>
-            <a:r>
-              <a:rPr sz="800">
-                <a:hlinkClick r:id="rId27"/>
-              </a:rPr>
-              <a:t>Lofar 3</a:t>
-            </a:r>
-          </a:p>
-          <a:p>
-            <a:r>
-              <a:rPr sz="800">
-                <a:hlinkClick r:id="rId28"/>
-              </a:rPr>
-              <a:t>Lofar 4</a:t>
-            </a:r>
-          </a:p>
-        </p:txBody>
-      </p:sp>
-      <p:sp>
-        <p:nvSpPr>
-          <p:cNvPr id="21" name="Rounded Rectangle 20"/>
-          <p:cNvSpPr/>
-          <p:nvPr>
-            <a:hlinkClick r:id="rId29"/>
-          </p:nvPr>
-        </p:nvSpPr>
-        <p:spPr>
-          <a:xfrm>
-            <a:off x="9531705" y="2682240"/>
-            <a:ext cx="2200046" cy="365760"/>
-          </a:xfrm>
-          <a:prstGeom prst="roundRect">
-            <a:avLst/>
-          </a:prstGeom>
-          <a:solidFill>
-            <a:srgbClr val="E8EEF7"/>
-          </a:solidFill>
-          <a:ln>
-            <a:solidFill>
-              <a:srgbClr val="1F3A5F"/>
-            </a:solidFill>
-          </a:ln>
-        </p:spPr>
-        <p:style>
-          <a:lnRef idx="1">
-            <a:schemeClr val="accent1"/>
-          </a:lnRef>
-          <a:fillRef idx="3">
-            <a:schemeClr val="accent1"/>
-          </a:fillRef>
-          <a:effectRef idx="2">
-            <a:schemeClr val="accent1"/>
-          </a:effectRef>
-          <a:fontRef idx="minor">
-            <a:schemeClr val="lt1"/>
-          </a:fontRef>
-        </p:style>
-        <p:txBody>
-          <a:bodyPr rtlCol="0" anchor="ctr" lIns="45720" rIns="45720"/>
-          <a:lstStyle/>
-          <a:p>
-            <a:pPr algn="ctr"/>
-            <a:r>
-              <a:rPr sz="900">
-                <a:solidFill>
-                  <a:srgbClr val="1F3A5F"/>
-                </a:solidFill>
-              </a:rPr>
-              <a:t>Gram 11: FR Sovereign-class, Category 4, Bespin</a:t>
-            </a:r>
-          </a:p>
-        </p:txBody>
-      </p:sp>
-      <p:sp>
-        <p:nvSpPr>
-          <p:cNvPr id="22" name="TextBox 21"/>
-          <p:cNvSpPr txBox="1"/>
-          <p:nvPr/>
-        </p:nvSpPr>
-        <p:spPr>
-          <a:xfrm>
-            <a:off x="9531705" y="3066288"/>
-            <a:ext cx="2200046" cy="1447800"/>
-          </a:xfrm>
-          <a:prstGeom prst="rect">
-            <a:avLst/>
-          </a:prstGeom>
-          <a:noFill/>
-        </p:spPr>
-        <p:txBody>
-          <a:bodyPr wrap="square">
-            <a:spAutoFit/>
-          </a:bodyPr>
-          <a:lstStyle/>
-          <a:p>
-            <a:r>
-              <a:rPr sz="800">
-                <a:hlinkClick r:id="rId30"/>
-              </a:rPr>
-              <a:t>Lofar 1</a:t>
-            </a:r>
-          </a:p>
-        </p:txBody>
-      </p:sp>
-      <p:sp>
-        <p:nvSpPr>
-          <p:cNvPr id="23" name="Rounded Rectangle 22"/>
-          <p:cNvSpPr/>
-          <p:nvPr>
-            <a:hlinkClick r:id="rId31"/>
-          </p:nvPr>
-        </p:nvSpPr>
-        <p:spPr>
-          <a:xfrm>
-            <a:off x="365760" y="4632960"/>
-            <a:ext cx="2200046" cy="365760"/>
-          </a:xfrm>
-          <a:prstGeom prst="roundRect">
-            <a:avLst/>
-          </a:prstGeom>
-          <a:solidFill>
-            <a:srgbClr val="E8EEF7"/>
-          </a:solidFill>
-          <a:ln>
-            <a:solidFill>
-              <a:srgbClr val="1F3A5F"/>
-            </a:solidFill>
-          </a:ln>
-        </p:spPr>
-        <p:style>
-          <a:lnRef idx="1">
-            <a:schemeClr val="accent1"/>
-          </a:lnRef>
-          <a:fillRef idx="3">
-            <a:schemeClr val="accent1"/>
-          </a:fillRef>
-          <a:effectRef idx="2">
-            <a:schemeClr val="accent1"/>
-          </a:effectRef>
-          <a:fontRef idx="minor">
-            <a:schemeClr val="lt1"/>
-          </a:fontRef>
-        </p:style>
-        <p:txBody>
-          <a:bodyPr rtlCol="0" anchor="ctr" lIns="45720" rIns="45720"/>
-          <a:lstStyle/>
-          <a:p>
-            <a:pPr algn="ctr"/>
-            <a:r>
-              <a:rPr sz="900">
-                <a:solidFill>
-                  <a:srgbClr val="1F3A5F"/>
-                </a:solidFill>
-              </a:rPr>
-              <a:t>Gram 13: Razor Crest contact bearing 010, codename Bajor</a:t>
-            </a:r>
-          </a:p>
-        </p:txBody>
-      </p:sp>
-      <p:sp>
-        <p:nvSpPr>
-          <p:cNvPr id="24" name="TextBox 23"/>
-          <p:cNvSpPr txBox="1"/>
-          <p:nvPr/>
-        </p:nvSpPr>
-        <p:spPr>
-          <a:xfrm>
-            <a:off x="365760" y="5017008"/>
-            <a:ext cx="2200046" cy="1447800"/>
-          </a:xfrm>
-          <a:prstGeom prst="rect">
-            <a:avLst/>
-          </a:prstGeom>
-          <a:noFill/>
-        </p:spPr>
-        <p:txBody>
-          <a:bodyPr wrap="square">
-            <a:spAutoFit/>
-          </a:bodyPr>
-          <a:lstStyle/>
-          <a:p>
-            <a:r>
-              <a:rPr sz="800">
-                <a:hlinkClick r:id="rId32"/>
-              </a:rPr>
-              <a:t>Lofar 1</a:t>
-            </a:r>
-          </a:p>
-          <a:p>
-            <a:r>
-              <a:rPr sz="800">
-                <a:hlinkClick r:id="rId33"/>
-              </a:rPr>
-              <a:t>Lofar 2</a:t>
-            </a:r>
-          </a:p>
-          <a:p>
-            <a:r>
-              <a:rPr sz="800">
-                <a:hlinkClick r:id="rId34"/>
-              </a:rPr>
-              <a:t>Lofar 3</a:t>
-            </a:r>
-          </a:p>
-          <a:p>
-            <a:r>
-              <a:rPr sz="800">
-                <a:hlinkClick r:id="rId35"/>
-              </a:rPr>
-              <a:t>Lofar 4</a:t>
-            </a:r>
-          </a:p>
-        </p:txBody>
-      </p:sp>
-      <p:sp>
-        <p:nvSpPr>
-          <p:cNvPr id="25" name="Rounded Rectangle 24"/>
-          <p:cNvSpPr/>
-          <p:nvPr>
-            <a:hlinkClick r:id="rId36"/>
-          </p:nvPr>
-        </p:nvSpPr>
-        <p:spPr>
-          <a:xfrm>
-            <a:off x="2657246" y="4632960"/>
-            <a:ext cx="2200046" cy="365760"/>
-          </a:xfrm>
-          <a:prstGeom prst="roundRect">
-            <a:avLst/>
-          </a:prstGeom>
-          <a:solidFill>
-            <a:srgbClr val="E8EEF7"/>
-          </a:solidFill>
-          <a:ln>
-            <a:solidFill>
-              <a:srgbClr val="1F3A5F"/>
-            </a:solidFill>
-          </a:ln>
-        </p:spPr>
-        <p:style>
-          <a:lnRef idx="1">
-            <a:schemeClr val="accent1"/>
-          </a:lnRef>
-          <a:fillRef idx="3">
-            <a:schemeClr val="accent1"/>
-          </a:fillRef>
-          <a:effectRef idx="2">
-            <a:schemeClr val="accent1"/>
-          </a:effectRef>
-          <a:fontRef idx="minor">
-            <a:schemeClr val="lt1"/>
-          </a:fontRef>
-        </p:style>
-        <p:txBody>
-          <a:bodyPr rtlCol="0" anchor="ctr" lIns="45720" rIns="45720"/>
-          <a:lstStyle/>
-          <a:p>
-            <a:pPr algn="ctr"/>
-            <a:r>
-              <a:rPr sz="900">
-                <a:solidFill>
-                  <a:srgbClr val="1F3A5F"/>
-                </a:solidFill>
-              </a:rPr>
-              <a:t>Gram 14: FR Defiant-class, Category 3, Romulus</a:t>
-            </a:r>
-          </a:p>
-        </p:txBody>
-      </p:sp>
-      <p:sp>
-        <p:nvSpPr>
-          <p:cNvPr id="26" name="TextBox 25"/>
-          <p:cNvSpPr txBox="1"/>
-          <p:nvPr/>
-        </p:nvSpPr>
-        <p:spPr>
-          <a:xfrm>
-            <a:off x="2657246" y="5017008"/>
-            <a:ext cx="2200046" cy="1447800"/>
-          </a:xfrm>
-          <a:prstGeom prst="rect">
-            <a:avLst/>
-          </a:prstGeom>
-          <a:noFill/>
-        </p:spPr>
-        <p:txBody>
-          <a:bodyPr wrap="square">
-            <a:spAutoFit/>
-          </a:bodyPr>
-          <a:lstStyle/>
-          <a:p>
-            <a:r>
-              <a:rPr sz="800">
-                <a:hlinkClick r:id="rId37"/>
-              </a:rPr>
-              <a:t>Lofar 1</a:t>
-            </a:r>
-          </a:p>
-          <a:p>
-            <a:r>
-              <a:rPr sz="800">
-                <a:hlinkClick r:id="rId38"/>
-              </a:rPr>
-              <a:t>Lofar 2</a:t>
-            </a:r>
-          </a:p>
-          <a:p>
-            <a:r>
-              <a:rPr sz="800">
-                <a:hlinkClick r:id="rId39"/>
-              </a:rPr>
-              <a:t>Lofar 3</a:t>
-            </a:r>
-          </a:p>
-          <a:p>
-            <a:r>
-              <a:rPr sz="800">
-                <a:hlinkClick r:id="rId40"/>
-              </a:rPr>
-              <a:t>Lofar 4</a:t>
-            </a:r>
-          </a:p>
-        </p:txBody>
-      </p:sp>
-      <p:sp>
-        <p:nvSpPr>
-          <p:cNvPr id="27" name="Rounded Rectangle 26"/>
-          <p:cNvSpPr/>
-          <p:nvPr>
-            <a:hlinkClick r:id="rId41"/>
-          </p:nvPr>
-        </p:nvSpPr>
-        <p:spPr>
-          <a:xfrm>
-            <a:off x="4948732" y="4632960"/>
-            <a:ext cx="2200046" cy="365760"/>
-          </a:xfrm>
-          <a:prstGeom prst="roundRect">
-            <a:avLst/>
-          </a:prstGeom>
-          <a:solidFill>
-            <a:srgbClr val="E8EEF7"/>
-          </a:solidFill>
-          <a:ln>
-            <a:solidFill>
-              <a:srgbClr val="1F3A5F"/>
-            </a:solidFill>
-          </a:ln>
-        </p:spPr>
-        <p:style>
-          <a:lnRef idx="1">
-            <a:schemeClr val="accent1"/>
-          </a:lnRef>
-          <a:fillRef idx="3">
-            <a:schemeClr val="accent1"/>
-          </a:fillRef>
-          <a:effectRef idx="2">
-            <a:schemeClr val="accent1"/>
-          </a:effectRef>
-          <a:fontRef idx="minor">
-            <a:schemeClr val="lt1"/>
-          </a:fontRef>
-        </p:style>
-        <p:txBody>
-          <a:bodyPr rtlCol="0" anchor="ctr" lIns="45720" rIns="45720"/>
-          <a:lstStyle/>
-          <a:p>
-            <a:pPr algn="ctr"/>
-            <a:r>
-              <a:rPr sz="900">
-                <a:solidFill>
-                  <a:srgbClr val="1F3A5F"/>
-                </a:solidFill>
-              </a:rPr>
-              <a:t>Gram 15: FR Acclamator-class, Category 3, Dank</a:t>
-            </a:r>
-          </a:p>
-        </p:txBody>
-      </p:sp>
-      <p:sp>
-        <p:nvSpPr>
-          <p:cNvPr id="28" name="TextBox 27"/>
-          <p:cNvSpPr txBox="1"/>
-          <p:nvPr/>
-        </p:nvSpPr>
-        <p:spPr>
-          <a:xfrm>
-            <a:off x="4948732" y="5017008"/>
-            <a:ext cx="2200046" cy="1447800"/>
-          </a:xfrm>
-          <a:prstGeom prst="rect">
-            <a:avLst/>
-          </a:prstGeom>
-          <a:noFill/>
-        </p:spPr>
-        <p:txBody>
-          <a:bodyPr wrap="square">
-            <a:spAutoFit/>
-          </a:bodyPr>
-          <a:lstStyle/>
-          <a:p>
-            <a:r>
-              <a:rPr sz="800">
-                <a:hlinkClick r:id="rId42"/>
-              </a:rPr>
-              <a:t>Lofar 1</a:t>
-            </a:r>
-          </a:p>
-          <a:p>
-            <a:r>
-              <a:rPr sz="800">
-                <a:hlinkClick r:id="rId43"/>
-              </a:rPr>
-              <a:t>Lofar 2</a:t>
-            </a:r>
-          </a:p>
-          <a:p>
-            <a:r>
-              <a:rPr sz="800">
-                <a:hlinkClick r:id="rId44"/>
-              </a:rPr>
-              <a:t>Lofar 3</a:t>
-            </a:r>
-          </a:p>
-        </p:txBody>
-      </p:sp>
-      <p:sp>
-        <p:nvSpPr>
-          <p:cNvPr id="29" name="Rounded Rectangle 28"/>
-          <p:cNvSpPr/>
-          <p:nvPr>
-            <a:hlinkClick r:id="rId45"/>
-          </p:nvPr>
-        </p:nvSpPr>
-        <p:spPr>
-          <a:xfrm>
-            <a:off x="7240219" y="4632960"/>
-            <a:ext cx="2200046" cy="365760"/>
-          </a:xfrm>
-          <a:prstGeom prst="roundRect">
-            <a:avLst/>
-          </a:prstGeom>
-          <a:solidFill>
-            <a:srgbClr val="E8EEF7"/>
-          </a:solidFill>
-          <a:ln>
-            <a:solidFill>
-              <a:srgbClr val="1F3A5F"/>
-            </a:solidFill>
-          </a:ln>
-        </p:spPr>
-        <p:style>
-          <a:lnRef idx="1">
-            <a:schemeClr val="accent1"/>
-          </a:lnRef>
-          <a:fillRef idx="3">
-            <a:schemeClr val="accent1"/>
-          </a:fillRef>
-          <a:effectRef idx="2">
-            <a:schemeClr val="accent1"/>
-          </a:effectRef>
-          <a:fontRef idx="minor">
-            <a:schemeClr val="lt1"/>
-          </a:fontRef>
-        </p:style>
-        <p:txBody>
-          <a:bodyPr rtlCol="0" anchor="ctr" lIns="45720" rIns="45720"/>
-          <a:lstStyle/>
-          <a:p>
-            <a:pPr algn="ctr"/>
-            <a:r>
-              <a:rPr sz="900">
-                <a:solidFill>
-                  <a:srgbClr val="1F3A5F"/>
-                </a:solidFill>
-              </a:rPr>
-              <a:t>Gram 16: FR Reliant, Category 1, Dank</a:t>
-            </a:r>
-          </a:p>
-        </p:txBody>
-      </p:sp>
-      <p:sp>
-        <p:nvSpPr>
-          <p:cNvPr id="30" name="TextBox 29"/>
-          <p:cNvSpPr txBox="1"/>
-          <p:nvPr/>
-        </p:nvSpPr>
-        <p:spPr>
-          <a:xfrm>
-            <a:off x="7240219" y="5017008"/>
-            <a:ext cx="2200046" cy="1447800"/>
-          </a:xfrm>
-          <a:prstGeom prst="rect">
-            <a:avLst/>
-          </a:prstGeom>
-          <a:noFill/>
-        </p:spPr>
-        <p:txBody>
-          <a:bodyPr wrap="square">
-            <a:spAutoFit/>
-          </a:bodyPr>
-          <a:lstStyle/>
-          <a:p>
-            <a:r>
-              <a:rPr sz="800">
-                <a:hlinkClick r:id="rId46"/>
-              </a:rPr>
-              <a:t>Lofar 1</a:t>
-            </a:r>
-          </a:p>
-          <a:p>
-            <a:r>
-              <a:rPr sz="800">
-                <a:hlinkClick r:id="rId47"/>
-              </a:rPr>
-              <a:t>Lofar 2</a:t>
-            </a:r>
-          </a:p>
-          <a:p>
-            <a:r>
-              <a:rPr sz="800">
-                <a:hlinkClick r:id="rId48"/>
-              </a:rPr>
-              <a:t>Lofar 3</a:t>
-            </a:r>
-          </a:p>
-        </p:txBody>
-      </p:sp>
-      <p:sp>
-        <p:nvSpPr>
-          <p:cNvPr id="31" name="Rounded Rectangle 30"/>
-          <p:cNvSpPr/>
-          <p:nvPr>
-            <a:hlinkClick r:id="rId49"/>
-          </p:nvPr>
-        </p:nvSpPr>
-        <p:spPr>
-          <a:xfrm>
-            <a:off x="9531705" y="4632960"/>
-            <a:ext cx="2200046" cy="365760"/>
-          </a:xfrm>
-          <a:prstGeom prst="roundRect">
-            <a:avLst/>
-          </a:prstGeom>
-          <a:solidFill>
-            <a:srgbClr val="E8EEF7"/>
-          </a:solidFill>
-          <a:ln>
-            <a:solidFill>
-              <a:srgbClr val="1F3A5F"/>
-            </a:solidFill>
-          </a:ln>
-        </p:spPr>
-        <p:style>
-          <a:lnRef idx="1">
-            <a:schemeClr val="accent1"/>
-          </a:lnRef>
-          <a:fillRef idx="3">
-            <a:schemeClr val="accent1"/>
-          </a:fillRef>
-          <a:effectRef idx="2">
-            <a:schemeClr val="accent1"/>
-          </a:effectRef>
-          <a:fontRef idx="minor">
-            <a:schemeClr val="lt1"/>
-          </a:fontRef>
-        </p:style>
-        <p:txBody>
-          <a:bodyPr rtlCol="0" anchor="ctr" lIns="45720" rIns="45720"/>
-          <a:lstStyle/>
-          <a:p>
-            <a:pPr algn="ctr"/>
-            <a:r>
-              <a:rPr sz="900">
-                <a:solidFill>
-                  <a:srgbClr val="1F3A5F"/>
-                </a:solidFill>
-              </a:rPr>
-              <a:t>Gram 17: FR Y-wing, Category 4, Hoth</a:t>
-            </a:r>
-          </a:p>
-        </p:txBody>
-      </p:sp>
-      <p:sp>
-        <p:nvSpPr>
-          <p:cNvPr id="32" name="TextBox 31"/>
-          <p:cNvSpPr txBox="1"/>
-          <p:nvPr/>
-        </p:nvSpPr>
-        <p:spPr>
-          <a:xfrm>
-            <a:off x="9531705" y="5017008"/>
-            <a:ext cx="2200046" cy="1447800"/>
-          </a:xfrm>
-          <a:prstGeom prst="rect">
-            <a:avLst/>
-          </a:prstGeom>
-          <a:noFill/>
-        </p:spPr>
-        <p:txBody>
-          <a:bodyPr wrap="square">
-            <a:spAutoFit/>
-          </a:bodyPr>
-          <a:lstStyle/>
-          <a:p>
-            <a:r>
-              <a:rPr sz="800">
-                <a:hlinkClick r:id="rId50"/>
-              </a:rPr>
-              <a:t>Lofar 1</a:t>
-            </a:r>
-          </a:p>
-          <a:p>
-            <a:r>
-              <a:rPr sz="800">
-                <a:hlinkClick r:id="rId51"/>
-              </a:rPr>
-              <a:t>Lofar 2</a:t>
-            </a:r>
-          </a:p>
-          <a:p>
-            <a:r>
-              <a:rPr sz="800">
-                <a:hlinkClick r:id="rId52"/>
-              </a:rPr>
-              <a:t>Lofar 3</a:t>
+              <a:t>Instructor Version</a:t>
             </a:r>
           </a:p>
         </p:txBody>
@@ -4663,7 +3224,7 @@
                   <a:srgbClr val="FFFFFF"/>
                 </a:solidFill>
               </a:rPr>
-              <a:t>Instructor Week 1 Grams — Page 2 of 3</a:t>
+              <a:t>Instructor Week 1 Grams — Page 1 of 3</a:t>
             </a:r>
           </a:p>
         </p:txBody>
@@ -4718,7 +3279,7 @@
                   <a:srgbClr val="1F3A5F"/>
                 </a:solidFill>
               </a:rPr>
-              <a:t>Gram 19: FR TIE Bomber, Category 4, Kobol</a:t>
+              <a:t>Gram 1: FR Razor Crest, Category 3, Mustafar</a:t>
             </a:r>
           </a:p>
         </p:txBody>
@@ -4752,30 +3313,6 @@
               <a:t>Lofar 1</a:t>
             </a:r>
           </a:p>
-          <a:p>
-            <a:r>
-              <a:rPr sz="800">
-                <a:hlinkClick r:id="rId4"/>
-              </a:rPr>
-              <a:t>Lofar 2</a:t>
-            </a:r>
-          </a:p>
-          <a:p>
-            <a:r>
-              <a:rPr sz="800">
-                <a:hlinkClick r:id="rId5"/>
-              </a:rPr>
-              <a:t>Lofar 3</a:t>
-            </a:r>
-          </a:p>
-          <a:p>
-            <a:r>
-              <a:rPr sz="800">
-                <a:hlinkClick r:id="rId6"/>
-              </a:rPr>
-              <a:t>Lofar 4</a:t>
-            </a:r>
-          </a:p>
         </p:txBody>
       </p:sp>
       <p:sp>
@@ -4783,7 +3320,7 @@
           <p:cNvPr id="5" name="Rounded Rectangle 4"/>
           <p:cNvSpPr/>
           <p:nvPr>
-            <a:hlinkClick r:id="rId7"/>
+            <a:hlinkClick r:id="rId4"/>
           </p:nvPr>
         </p:nvSpPr>
         <p:spPr>
@@ -4828,7 +3365,7 @@
                   <a:srgbClr val="1F3A5F"/>
                 </a:solidFill>
               </a:rPr>
-              <a:t>Gram 21: FR Venator-class, Category 4, Endor</a:t>
+              <a:t>Gram 2: FR Tantive IV, Category 1, Romulus</a:t>
             </a:r>
           </a:p>
         </p:txBody>
@@ -4857,17 +3394,33 @@
           <a:p>
             <a:r>
               <a:rPr sz="800">
+                <a:hlinkClick r:id="rId5"/>
+              </a:rPr>
+              <a:t>Lofar 1</a:t>
+            </a:r>
+          </a:p>
+          <a:p>
+            <a:r>
+              <a:rPr sz="800">
+                <a:hlinkClick r:id="rId6"/>
+              </a:rPr>
+              <a:t>Lofar 2</a:t>
+            </a:r>
+          </a:p>
+          <a:p>
+            <a:r>
+              <a:rPr sz="800">
+                <a:hlinkClick r:id="rId7"/>
+              </a:rPr>
+              <a:t>Lofar 3</a:t>
+            </a:r>
+          </a:p>
+          <a:p>
+            <a:r>
+              <a:rPr sz="800">
                 <a:hlinkClick r:id="rId8"/>
               </a:rPr>
-              <a:t>Lofar 1</a:t>
-            </a:r>
-          </a:p>
-          <a:p>
-            <a:r>
-              <a:rPr sz="800">
-                <a:hlinkClick r:id="rId9"/>
-              </a:rPr>
-              <a:t>Lofar 2</a:t>
+              <a:t>Lofar 4</a:t>
             </a:r>
           </a:p>
         </p:txBody>
@@ -4877,7 +3430,7 @@
           <p:cNvPr id="7" name="Rounded Rectangle 6"/>
           <p:cNvSpPr/>
           <p:nvPr>
-            <a:hlinkClick r:id="rId10"/>
+            <a:hlinkClick r:id="rId9"/>
           </p:nvPr>
         </p:nvSpPr>
         <p:spPr>
@@ -4922,7 +3475,7 @@
                   <a:srgbClr val="1F3A5F"/>
                 </a:solidFill>
               </a:rPr>
-              <a:t>Gram 22: FR Intrepid-class, Category 1, Bajor</a:t>
+              <a:t>Gram 3: FR Sovereign-class, Category 4, Defiant</a:t>
             </a:r>
           </a:p>
         </p:txBody>
@@ -4951,17 +3504,9 @@
           <a:p>
             <a:r>
               <a:rPr sz="800">
-                <a:hlinkClick r:id="rId11"/>
+                <a:hlinkClick r:id="rId10"/>
               </a:rPr>
               <a:t>Lofar 1</a:t>
-            </a:r>
-          </a:p>
-          <a:p>
-            <a:r>
-              <a:rPr sz="800">
-                <a:hlinkClick r:id="rId12"/>
-              </a:rPr>
-              <a:t>Lofar 2</a:t>
             </a:r>
           </a:p>
         </p:txBody>
@@ -4971,7 +3516,7 @@
           <p:cNvPr id="9" name="Rounded Rectangle 8"/>
           <p:cNvSpPr/>
           <p:nvPr>
-            <a:hlinkClick r:id="rId13"/>
+            <a:hlinkClick r:id="rId11"/>
           </p:nvPr>
         </p:nvSpPr>
         <p:spPr>
@@ -5016,7 +3561,7 @@
                   <a:srgbClr val="1F3A5F"/>
                 </a:solidFill>
               </a:rPr>
-              <a:t>Gram 23: FR Voyager, Category 4, Defiant</a:t>
+              <a:t>Gram 4: FR Cerritos, Category 3, Coruscant</a:t>
             </a:r>
           </a:p>
         </p:txBody>
@@ -5045,7 +3590,7 @@
           <a:p>
             <a:r>
               <a:rPr sz="800">
-                <a:hlinkClick r:id="rId14"/>
+                <a:hlinkClick r:id="rId12"/>
               </a:rPr>
               <a:t>Lofar 1</a:t>
             </a:r>
@@ -5053,25 +3598,9 @@
           <a:p>
             <a:r>
               <a:rPr sz="800">
-                <a:hlinkClick r:id="rId15"/>
+                <a:hlinkClick r:id="rId13"/>
               </a:rPr>
               <a:t>Lofar 2</a:t>
-            </a:r>
-          </a:p>
-          <a:p>
-            <a:r>
-              <a:rPr sz="800">
-                <a:hlinkClick r:id="rId16"/>
-              </a:rPr>
-              <a:t>Lofar 3</a:t>
-            </a:r>
-          </a:p>
-          <a:p>
-            <a:r>
-              <a:rPr sz="800">
-                <a:hlinkClick r:id="rId17"/>
-              </a:rPr>
-              <a:t>Lofar 4</a:t>
             </a:r>
           </a:p>
         </p:txBody>
@@ -5081,7 +3610,7 @@
           <p:cNvPr id="11" name="Rounded Rectangle 10"/>
           <p:cNvSpPr/>
           <p:nvPr>
-            <a:hlinkClick r:id="rId18"/>
+            <a:hlinkClick r:id="rId14"/>
           </p:nvPr>
         </p:nvSpPr>
         <p:spPr>
@@ -5126,7 +3655,7 @@
                   <a:srgbClr val="1F3A5F"/>
                 </a:solidFill>
               </a:rPr>
-              <a:t>Gram 24: FR Tantive IV, Category 4, Tatooine</a:t>
+              <a:t>Gram 5: FR Y-wing, Category 3, Gandalf</a:t>
             </a:r>
           </a:p>
         </p:txBody>
@@ -5155,17 +3684,9 @@
           <a:p>
             <a:r>
               <a:rPr sz="800">
-                <a:hlinkClick r:id="rId19"/>
+                <a:hlinkClick r:id="rId15"/>
               </a:rPr>
               <a:t>Lofar 1</a:t>
-            </a:r>
-          </a:p>
-          <a:p>
-            <a:r>
-              <a:rPr sz="800">
-                <a:hlinkClick r:id="rId20"/>
-              </a:rPr>
-              <a:t>Lofar 2</a:t>
             </a:r>
           </a:p>
         </p:txBody>
@@ -5175,7 +3696,7 @@
           <p:cNvPr id="13" name="Rounded Rectangle 12"/>
           <p:cNvSpPr/>
           <p:nvPr>
-            <a:hlinkClick r:id="rId21"/>
+            <a:hlinkClick r:id="rId16"/>
           </p:nvPr>
         </p:nvSpPr>
         <p:spPr>
@@ -5220,7 +3741,7 @@
                   <a:srgbClr val="1F3A5F"/>
                 </a:solidFill>
               </a:rPr>
-              <a:t>Gram 25: Nebula-class contact bearing 065, codename Tantive</a:t>
+              <a:t>Gram 6: FR Constitution-class, Category 2, Cardassia</a:t>
             </a:r>
           </a:p>
         </p:txBody>
@@ -5249,7 +3770,7 @@
           <a:p>
             <a:r>
               <a:rPr sz="800">
-                <a:hlinkClick r:id="rId22"/>
+                <a:hlinkClick r:id="rId17"/>
               </a:rPr>
               <a:t>Lofar 1</a:t>
             </a:r>
@@ -5257,7 +3778,7 @@
           <a:p>
             <a:r>
               <a:rPr sz="800">
-                <a:hlinkClick r:id="rId23"/>
+                <a:hlinkClick r:id="rId18"/>
               </a:rPr>
               <a:t>Lofar 2</a:t>
             </a:r>
@@ -5265,7 +3786,7 @@
           <a:p>
             <a:r>
               <a:rPr sz="800">
-                <a:hlinkClick r:id="rId24"/>
+                <a:hlinkClick r:id="rId19"/>
               </a:rPr>
               <a:t>Lofar 3</a:t>
             </a:r>
@@ -5277,7 +3798,7 @@
           <p:cNvPr id="15" name="Rounded Rectangle 14"/>
           <p:cNvSpPr/>
           <p:nvPr>
-            <a:hlinkClick r:id="rId25"/>
+            <a:hlinkClick r:id="rId20"/>
           </p:nvPr>
         </p:nvSpPr>
         <p:spPr>
@@ -5322,7 +3843,7 @@
                   <a:srgbClr val="1F3A5F"/>
                 </a:solidFill>
               </a:rPr>
-              <a:t>Gram 26: Nebula-class contact bearing 271, codename Trill</a:t>
+              <a:t>Gram 7: Lambda Shuttle contact bearing 152, codename Tatooine</a:t>
             </a:r>
           </a:p>
         </p:txBody>
@@ -5351,33 +3872,9 @@
           <a:p>
             <a:r>
               <a:rPr sz="800">
-                <a:hlinkClick r:id="rId26"/>
+                <a:hlinkClick r:id="rId21"/>
               </a:rPr>
               <a:t>Lofar 1</a:t>
-            </a:r>
-          </a:p>
-          <a:p>
-            <a:r>
-              <a:rPr sz="800">
-                <a:hlinkClick r:id="rId27"/>
-              </a:rPr>
-              <a:t>Lofar 2</a:t>
-            </a:r>
-          </a:p>
-          <a:p>
-            <a:r>
-              <a:rPr sz="800">
-                <a:hlinkClick r:id="rId28"/>
-              </a:rPr>
-              <a:t>Lofar 3</a:t>
-            </a:r>
-          </a:p>
-          <a:p>
-            <a:r>
-              <a:rPr sz="800">
-                <a:hlinkClick r:id="rId29"/>
-              </a:rPr>
-              <a:t>Lofar 4</a:t>
             </a:r>
           </a:p>
         </p:txBody>
@@ -5387,7 +3884,7 @@
           <p:cNvPr id="17" name="Rounded Rectangle 16"/>
           <p:cNvSpPr/>
           <p:nvPr>
-            <a:hlinkClick r:id="rId30"/>
+            <a:hlinkClick r:id="rId22"/>
           </p:nvPr>
         </p:nvSpPr>
         <p:spPr>
@@ -5432,7 +3929,7 @@
                   <a:srgbClr val="1F3A5F"/>
                 </a:solidFill>
               </a:rPr>
-              <a:t>Gram 28: Sovereign-class contact bearing 118, codename Yavin</a:t>
+              <a:t>Gram 8: FR Y-wing, Category 1, Betazed</a:t>
             </a:r>
           </a:p>
         </p:txBody>
@@ -5461,25 +3958,9 @@
           <a:p>
             <a:r>
               <a:rPr sz="800">
-                <a:hlinkClick r:id="rId31"/>
+                <a:hlinkClick r:id="rId23"/>
               </a:rPr>
               <a:t>Lofar 1</a:t>
-            </a:r>
-          </a:p>
-          <a:p>
-            <a:r>
-              <a:rPr sz="800">
-                <a:hlinkClick r:id="rId32"/>
-              </a:rPr>
-              <a:t>Lofar 2</a:t>
-            </a:r>
-          </a:p>
-          <a:p>
-            <a:r>
-              <a:rPr sz="800">
-                <a:hlinkClick r:id="rId33"/>
-              </a:rPr>
-              <a:t>Lofar 3</a:t>
             </a:r>
           </a:p>
         </p:txBody>
@@ -5489,7 +3970,7 @@
           <p:cNvPr id="19" name="Rounded Rectangle 18"/>
           <p:cNvSpPr/>
           <p:nvPr>
-            <a:hlinkClick r:id="rId34"/>
+            <a:hlinkClick r:id="rId24"/>
           </p:nvPr>
         </p:nvSpPr>
         <p:spPr>
@@ -5534,7 +4015,7 @@
                   <a:srgbClr val="1F3A5F"/>
                 </a:solidFill>
               </a:rPr>
-              <a:t>Gram 30: FR Y-wing, Category 3, Yavin</a:t>
+              <a:t>Gram 9: FR Venator-class, Category 4, Kobol</a:t>
             </a:r>
           </a:p>
         </p:txBody>
@@ -5563,7 +4044,7 @@
           <a:p>
             <a:r>
               <a:rPr sz="800">
-                <a:hlinkClick r:id="rId35"/>
+                <a:hlinkClick r:id="rId25"/>
               </a:rPr>
               <a:t>Lofar 1</a:t>
             </a:r>
@@ -5571,7 +4052,7 @@
           <a:p>
             <a:r>
               <a:rPr sz="800">
-                <a:hlinkClick r:id="rId36"/>
+                <a:hlinkClick r:id="rId26"/>
               </a:rPr>
               <a:t>Lofar 2</a:t>
             </a:r>
@@ -5579,9 +4060,17 @@
           <a:p>
             <a:r>
               <a:rPr sz="800">
-                <a:hlinkClick r:id="rId37"/>
+                <a:hlinkClick r:id="rId27"/>
               </a:rPr>
               <a:t>Lofar 3</a:t>
+            </a:r>
+          </a:p>
+          <a:p>
+            <a:r>
+              <a:rPr sz="800">
+                <a:hlinkClick r:id="rId28"/>
+              </a:rPr>
+              <a:t>Lofar 4</a:t>
             </a:r>
           </a:p>
         </p:txBody>
@@ -5591,7 +4080,7 @@
           <p:cNvPr id="21" name="Rounded Rectangle 20"/>
           <p:cNvSpPr/>
           <p:nvPr>
-            <a:hlinkClick r:id="rId38"/>
+            <a:hlinkClick r:id="rId29"/>
           </p:nvPr>
         </p:nvSpPr>
         <p:spPr>
@@ -5636,7 +4125,7 @@
                   <a:srgbClr val="1F3A5F"/>
                 </a:solidFill>
               </a:rPr>
-              <a:t>Gram 31: FR Nebula-class, Category 3, Bajor</a:t>
+              <a:t>Gram 11: FR Sovereign-class, Category 4, Bespin</a:t>
             </a:r>
           </a:p>
         </p:txBody>
@@ -5665,17 +4154,9 @@
           <a:p>
             <a:r>
               <a:rPr sz="800">
-                <a:hlinkClick r:id="rId39"/>
+                <a:hlinkClick r:id="rId30"/>
               </a:rPr>
               <a:t>Lofar 1</a:t>
-            </a:r>
-          </a:p>
-          <a:p>
-            <a:r>
-              <a:rPr sz="800">
-                <a:hlinkClick r:id="rId40"/>
-              </a:rPr>
-              <a:t>Lofar 2</a:t>
             </a:r>
           </a:p>
         </p:txBody>
@@ -5685,7 +4166,7 @@
           <p:cNvPr id="23" name="Rounded Rectangle 22"/>
           <p:cNvSpPr/>
           <p:nvPr>
-            <a:hlinkClick r:id="rId41"/>
+            <a:hlinkClick r:id="rId31"/>
           </p:nvPr>
         </p:nvSpPr>
         <p:spPr>
@@ -5730,7 +4211,7 @@
                   <a:srgbClr val="1F3A5F"/>
                 </a:solidFill>
               </a:rPr>
-              <a:t>Gram 32: FR Outrider, Category 4, Risa</a:t>
+              <a:t>Gram 13: Razor Crest contact bearing 010, codename Bajor</a:t>
             </a:r>
           </a:p>
         </p:txBody>
@@ -5759,7 +4240,7 @@
           <a:p>
             <a:r>
               <a:rPr sz="800">
-                <a:hlinkClick r:id="rId42"/>
+                <a:hlinkClick r:id="rId32"/>
               </a:rPr>
               <a:t>Lofar 1</a:t>
             </a:r>
@@ -5767,9 +4248,25 @@
           <a:p>
             <a:r>
               <a:rPr sz="800">
-                <a:hlinkClick r:id="rId43"/>
+                <a:hlinkClick r:id="rId33"/>
               </a:rPr>
               <a:t>Lofar 2</a:t>
+            </a:r>
+          </a:p>
+          <a:p>
+            <a:r>
+              <a:rPr sz="800">
+                <a:hlinkClick r:id="rId34"/>
+              </a:rPr>
+              <a:t>Lofar 3</a:t>
+            </a:r>
+          </a:p>
+          <a:p>
+            <a:r>
+              <a:rPr sz="800">
+                <a:hlinkClick r:id="rId35"/>
+              </a:rPr>
+              <a:t>Lofar 4</a:t>
             </a:r>
           </a:p>
         </p:txBody>
@@ -5779,7 +4276,7 @@
           <p:cNvPr id="25" name="Rounded Rectangle 24"/>
           <p:cNvSpPr/>
           <p:nvPr>
-            <a:hlinkClick r:id="rId44"/>
+            <a:hlinkClick r:id="rId36"/>
           </p:nvPr>
         </p:nvSpPr>
         <p:spPr>
@@ -5824,7 +4321,7 @@
                   <a:srgbClr val="1F3A5F"/>
                 </a:solidFill>
               </a:rPr>
-              <a:t>Gram 33: FR A-wing, Category 4, Defiant</a:t>
+              <a:t>Gram 14: FR Defiant-class, Category 3, Romulus</a:t>
             </a:r>
           </a:p>
         </p:txBody>
@@ -5853,9 +4350,33 @@
           <a:p>
             <a:r>
               <a:rPr sz="800">
-                <a:hlinkClick r:id="rId45"/>
+                <a:hlinkClick r:id="rId37"/>
               </a:rPr>
               <a:t>Lofar 1</a:t>
+            </a:r>
+          </a:p>
+          <a:p>
+            <a:r>
+              <a:rPr sz="800">
+                <a:hlinkClick r:id="rId38"/>
+              </a:rPr>
+              <a:t>Lofar 2</a:t>
+            </a:r>
+          </a:p>
+          <a:p>
+            <a:r>
+              <a:rPr sz="800">
+                <a:hlinkClick r:id="rId39"/>
+              </a:rPr>
+              <a:t>Lofar 3</a:t>
+            </a:r>
+          </a:p>
+          <a:p>
+            <a:r>
+              <a:rPr sz="800">
+                <a:hlinkClick r:id="rId40"/>
+              </a:rPr>
+              <a:t>Lofar 4</a:t>
             </a:r>
           </a:p>
         </p:txBody>
@@ -5865,7 +4386,7 @@
           <p:cNvPr id="27" name="Rounded Rectangle 26"/>
           <p:cNvSpPr/>
           <p:nvPr>
-            <a:hlinkClick r:id="rId46"/>
+            <a:hlinkClick r:id="rId41"/>
           </p:nvPr>
         </p:nvSpPr>
         <p:spPr>
@@ -5910,7 +4431,7 @@
                   <a:srgbClr val="1F3A5F"/>
                 </a:solidFill>
               </a:rPr>
-              <a:t>Gram 35: Reliant contact bearing 251, codename Bespin</a:t>
+              <a:t>Gram 15: FR Acclamator-class, Category 3, Dank</a:t>
             </a:r>
           </a:p>
         </p:txBody>
@@ -5939,9 +4460,25 @@
           <a:p>
             <a:r>
               <a:rPr sz="800">
-                <a:hlinkClick r:id="rId47"/>
+                <a:hlinkClick r:id="rId42"/>
               </a:rPr>
               <a:t>Lofar 1</a:t>
+            </a:r>
+          </a:p>
+          <a:p>
+            <a:r>
+              <a:rPr sz="800">
+                <a:hlinkClick r:id="rId43"/>
+              </a:rPr>
+              <a:t>Lofar 2</a:t>
+            </a:r>
+          </a:p>
+          <a:p>
+            <a:r>
+              <a:rPr sz="800">
+                <a:hlinkClick r:id="rId44"/>
+              </a:rPr>
+              <a:t>Lofar 3</a:t>
             </a:r>
           </a:p>
         </p:txBody>
@@ -5951,7 +4488,7 @@
           <p:cNvPr id="29" name="Rounded Rectangle 28"/>
           <p:cNvSpPr/>
           <p:nvPr>
-            <a:hlinkClick r:id="rId48"/>
+            <a:hlinkClick r:id="rId45"/>
           </p:nvPr>
         </p:nvSpPr>
         <p:spPr>
@@ -5996,7 +4533,7 @@
                   <a:srgbClr val="1F3A5F"/>
                 </a:solidFill>
               </a:rPr>
-              <a:t>Gram 36: FR Sovereign-class, Category 2, Yavin</a:t>
+              <a:t>Gram 16: FR Reliant, Category 1, Dank</a:t>
             </a:r>
           </a:p>
         </p:txBody>
@@ -6025,7 +4562,7 @@
           <a:p>
             <a:r>
               <a:rPr sz="800">
-                <a:hlinkClick r:id="rId49"/>
+                <a:hlinkClick r:id="rId46"/>
               </a:rPr>
               <a:t>Lofar 1</a:t>
             </a:r>
@@ -6033,7 +4570,7 @@
           <a:p>
             <a:r>
               <a:rPr sz="800">
-                <a:hlinkClick r:id="rId50"/>
+                <a:hlinkClick r:id="rId47"/>
               </a:rPr>
               <a:t>Lofar 2</a:t>
             </a:r>
@@ -6041,7 +4578,7 @@
           <a:p>
             <a:r>
               <a:rPr sz="800">
-                <a:hlinkClick r:id="rId51"/>
+                <a:hlinkClick r:id="rId48"/>
               </a:rPr>
               <a:t>Lofar 3</a:t>
             </a:r>
@@ -6053,7 +4590,7 @@
           <p:cNvPr id="31" name="Rounded Rectangle 30"/>
           <p:cNvSpPr/>
           <p:nvPr>
-            <a:hlinkClick r:id="rId52"/>
+            <a:hlinkClick r:id="rId49"/>
           </p:nvPr>
         </p:nvSpPr>
         <p:spPr>
@@ -6098,7 +4635,7 @@
                   <a:srgbClr val="1F3A5F"/>
                 </a:solidFill>
               </a:rPr>
-              <a:t>Gram 37: FR Akira-class, Category 4, Kobol</a:t>
+              <a:t>Gram 17: FR Y-wing, Category 4, Hoth</a:t>
             </a:r>
           </a:p>
         </p:txBody>
@@ -6127,9 +4664,25 @@
           <a:p>
             <a:r>
               <a:rPr sz="800">
-                <a:hlinkClick r:id="rId53"/>
+                <a:hlinkClick r:id="rId50"/>
               </a:rPr>
               <a:t>Lofar 1</a:t>
+            </a:r>
+          </a:p>
+          <a:p>
+            <a:r>
+              <a:rPr sz="800">
+                <a:hlinkClick r:id="rId51"/>
+              </a:rPr>
+              <a:t>Lofar 2</a:t>
+            </a:r>
+          </a:p>
+          <a:p>
+            <a:r>
+              <a:rPr sz="800">
+                <a:hlinkClick r:id="rId52"/>
+              </a:rPr>
+              <a:t>Lofar 3</a:t>
             </a:r>
           </a:p>
         </p:txBody>
@@ -6198,7 +4751,7 @@
                   <a:srgbClr val="FFFFFF"/>
                 </a:solidFill>
               </a:rPr>
-              <a:t>Instructor Week 1 Grams — Page 3 of 3</a:t>
+              <a:t>Instructor Week 1 Grams — Page 2 of 3</a:t>
             </a:r>
           </a:p>
         </p:txBody>
@@ -6253,7 +4806,7 @@
                   <a:srgbClr val="1F3A5F"/>
                 </a:solidFill>
               </a:rPr>
-              <a:t>Gram 38: FR Razor Crest, Category 3, Dank</a:t>
+              <a:t>Gram 19: FR TIE Bomber, Category 4, Kobol</a:t>
             </a:r>
           </a:p>
         </p:txBody>
@@ -6363,7 +4916,7 @@
                   <a:srgbClr val="1F3A5F"/>
                 </a:solidFill>
               </a:rPr>
-              <a:t>Gram 39: FR Slave I, Category 3, Kronos</a:t>
+              <a:t>Gram 21: FR Venator-class, Category 4, Endor</a:t>
             </a:r>
           </a:p>
         </p:txBody>
@@ -6397,6 +4950,14 @@
               <a:t>Lofar 1</a:t>
             </a:r>
           </a:p>
+          <a:p>
+            <a:r>
+              <a:rPr sz="800">
+                <a:hlinkClick r:id="rId9"/>
+              </a:rPr>
+              <a:t>Lofar 2</a:t>
+            </a:r>
+          </a:p>
         </p:txBody>
       </p:sp>
       <p:sp>
@@ -6404,7 +4965,7 @@
           <p:cNvPr id="7" name="Rounded Rectangle 6"/>
           <p:cNvSpPr/>
           <p:nvPr>
-            <a:hlinkClick r:id="rId9"/>
+            <a:hlinkClick r:id="rId10"/>
           </p:nvPr>
         </p:nvSpPr>
         <p:spPr>
@@ -6449,7 +5010,7 @@
                   <a:srgbClr val="1F3A5F"/>
                 </a:solidFill>
               </a:rPr>
-              <a:t>Gram 40: FR Razor Crest, Category 3, Dank</a:t>
+              <a:t>Gram 22: FR Intrepid-class, Category 1, Bajor</a:t>
             </a:r>
           </a:p>
         </p:txBody>
@@ -6478,7 +5039,7 @@
           <a:p>
             <a:r>
               <a:rPr sz="800">
-                <a:hlinkClick r:id="rId10"/>
+                <a:hlinkClick r:id="rId11"/>
               </a:rPr>
               <a:t>Lofar 1</a:t>
             </a:r>
@@ -6486,25 +5047,9 @@
           <a:p>
             <a:r>
               <a:rPr sz="800">
-                <a:hlinkClick r:id="rId11"/>
+                <a:hlinkClick r:id="rId12"/>
               </a:rPr>
               <a:t>Lofar 2</a:t>
-            </a:r>
-          </a:p>
-          <a:p>
-            <a:r>
-              <a:rPr sz="800">
-                <a:hlinkClick r:id="rId12"/>
-              </a:rPr>
-              <a:t>Lofar 3</a:t>
-            </a:r>
-          </a:p>
-          <a:p>
-            <a:r>
-              <a:rPr sz="800">
-                <a:hlinkClick r:id="rId13"/>
-              </a:rPr>
-              <a:t>Lofar 4</a:t>
             </a:r>
           </a:p>
         </p:txBody>
@@ -6514,7 +5059,7 @@
           <p:cNvPr id="9" name="Rounded Rectangle 8"/>
           <p:cNvSpPr/>
           <p:nvPr>
-            <a:hlinkClick r:id="rId14"/>
+            <a:hlinkClick r:id="rId13"/>
           </p:nvPr>
         </p:nvSpPr>
         <p:spPr>
@@ -6559,7 +5104,7 @@
                   <a:srgbClr val="1F3A5F"/>
                 </a:solidFill>
               </a:rPr>
-              <a:t>Gram 41: Ghost contact bearing 208, codename Betazed</a:t>
+              <a:t>Gram 23: FR Voyager, Category 4, Defiant</a:t>
             </a:r>
           </a:p>
         </p:txBody>
@@ -6588,9 +5133,17 @@
           <a:p>
             <a:r>
               <a:rPr sz="800">
+                <a:hlinkClick r:id="rId14"/>
+              </a:rPr>
+              <a:t>Lofar 1</a:t>
+            </a:r>
+          </a:p>
+          <a:p>
+            <a:r>
+              <a:rPr sz="800">
                 <a:hlinkClick r:id="rId15"/>
               </a:rPr>
-              <a:t>Lofar 1</a:t>
+              <a:t>Lofar 2</a:t>
             </a:r>
           </a:p>
           <a:p>
@@ -6598,21 +5151,13 @@
               <a:rPr sz="800">
                 <a:hlinkClick r:id="rId16"/>
               </a:rPr>
-              <a:t>Lofar 2</a:t>
+              <a:t>Lofar 3</a:t>
             </a:r>
           </a:p>
           <a:p>
             <a:r>
               <a:rPr sz="800">
                 <a:hlinkClick r:id="rId17"/>
-              </a:rPr>
-              <a:t>Lofar 3</a:t>
-            </a:r>
-          </a:p>
-          <a:p>
-            <a:r>
-              <a:rPr sz="800">
-                <a:hlinkClick r:id="rId18"/>
               </a:rPr>
               <a:t>Lofar 4</a:t>
             </a:r>
@@ -6624,7 +5169,7 @@
           <p:cNvPr id="11" name="Rounded Rectangle 10"/>
           <p:cNvSpPr/>
           <p:nvPr>
-            <a:hlinkClick r:id="rId19"/>
+            <a:hlinkClick r:id="rId18"/>
           </p:nvPr>
         </p:nvSpPr>
         <p:spPr>
@@ -6669,7 +5214,7 @@
                   <a:srgbClr val="1F3A5F"/>
                 </a:solidFill>
               </a:rPr>
-              <a:t>Gram 42: FR Acclamator-class, Category 2, Trill</a:t>
+              <a:t>Gram 24: FR Tantive IV, Category 4, Tatooine</a:t>
             </a:r>
           </a:p>
         </p:txBody>
@@ -6698,14 +5243,1557 @@
           <a:p>
             <a:r>
               <a:rPr sz="800">
+                <a:hlinkClick r:id="rId19"/>
+              </a:rPr>
+              <a:t>Lofar 1</a:t>
+            </a:r>
+          </a:p>
+          <a:p>
+            <a:r>
+              <a:rPr sz="800">
                 <a:hlinkClick r:id="rId20"/>
               </a:rPr>
+              <a:t>Lofar 2</a:t>
+            </a:r>
+          </a:p>
+        </p:txBody>
+      </p:sp>
+      <p:sp>
+        <p:nvSpPr>
+          <p:cNvPr id="13" name="Rounded Rectangle 12"/>
+          <p:cNvSpPr/>
+          <p:nvPr>
+            <a:hlinkClick r:id="rId21"/>
+          </p:nvPr>
+        </p:nvSpPr>
+        <p:spPr>
+          <a:xfrm>
+            <a:off x="365760" y="2682240"/>
+            <a:ext cx="2200046" cy="365760"/>
+          </a:xfrm>
+          <a:prstGeom prst="roundRect">
+            <a:avLst/>
+          </a:prstGeom>
+          <a:solidFill>
+            <a:srgbClr val="E8EEF7"/>
+          </a:solidFill>
+          <a:ln>
+            <a:solidFill>
+              <a:srgbClr val="1F3A5F"/>
+            </a:solidFill>
+          </a:ln>
+        </p:spPr>
+        <p:style>
+          <a:lnRef idx="1">
+            <a:schemeClr val="accent1"/>
+          </a:lnRef>
+          <a:fillRef idx="3">
+            <a:schemeClr val="accent1"/>
+          </a:fillRef>
+          <a:effectRef idx="2">
+            <a:schemeClr val="accent1"/>
+          </a:effectRef>
+          <a:fontRef idx="minor">
+            <a:schemeClr val="lt1"/>
+          </a:fontRef>
+        </p:style>
+        <p:txBody>
+          <a:bodyPr rtlCol="0" anchor="ctr" lIns="45720" rIns="45720"/>
+          <a:lstStyle/>
+          <a:p>
+            <a:pPr algn="ctr"/>
+            <a:r>
+              <a:rPr sz="900">
+                <a:solidFill>
+                  <a:srgbClr val="1F3A5F"/>
+                </a:solidFill>
+              </a:rPr>
+              <a:t>Gram 25: Nebula-class contact bearing 065, codename Tantive</a:t>
+            </a:r>
+          </a:p>
+        </p:txBody>
+      </p:sp>
+      <p:sp>
+        <p:nvSpPr>
+          <p:cNvPr id="14" name="TextBox 13"/>
+          <p:cNvSpPr txBox="1"/>
+          <p:nvPr/>
+        </p:nvSpPr>
+        <p:spPr>
+          <a:xfrm>
+            <a:off x="365760" y="3066288"/>
+            <a:ext cx="2200046" cy="1447800"/>
+          </a:xfrm>
+          <a:prstGeom prst="rect">
+            <a:avLst/>
+          </a:prstGeom>
+          <a:noFill/>
+        </p:spPr>
+        <p:txBody>
+          <a:bodyPr wrap="square">
+            <a:spAutoFit/>
+          </a:bodyPr>
+          <a:lstStyle/>
+          <a:p>
+            <a:r>
+              <a:rPr sz="800">
+                <a:hlinkClick r:id="rId22"/>
+              </a:rPr>
               <a:t>Lofar 1</a:t>
             </a:r>
           </a:p>
           <a:p>
             <a:r>
               <a:rPr sz="800">
+                <a:hlinkClick r:id="rId23"/>
+              </a:rPr>
+              <a:t>Lofar 2</a:t>
+            </a:r>
+          </a:p>
+          <a:p>
+            <a:r>
+              <a:rPr sz="800">
+                <a:hlinkClick r:id="rId24"/>
+              </a:rPr>
+              <a:t>Lofar 3</a:t>
+            </a:r>
+          </a:p>
+        </p:txBody>
+      </p:sp>
+      <p:sp>
+        <p:nvSpPr>
+          <p:cNvPr id="15" name="Rounded Rectangle 14"/>
+          <p:cNvSpPr/>
+          <p:nvPr>
+            <a:hlinkClick r:id="rId25"/>
+          </p:nvPr>
+        </p:nvSpPr>
+        <p:spPr>
+          <a:xfrm>
+            <a:off x="2657246" y="2682240"/>
+            <a:ext cx="2200046" cy="365760"/>
+          </a:xfrm>
+          <a:prstGeom prst="roundRect">
+            <a:avLst/>
+          </a:prstGeom>
+          <a:solidFill>
+            <a:srgbClr val="E8EEF7"/>
+          </a:solidFill>
+          <a:ln>
+            <a:solidFill>
+              <a:srgbClr val="1F3A5F"/>
+            </a:solidFill>
+          </a:ln>
+        </p:spPr>
+        <p:style>
+          <a:lnRef idx="1">
+            <a:schemeClr val="accent1"/>
+          </a:lnRef>
+          <a:fillRef idx="3">
+            <a:schemeClr val="accent1"/>
+          </a:fillRef>
+          <a:effectRef idx="2">
+            <a:schemeClr val="accent1"/>
+          </a:effectRef>
+          <a:fontRef idx="minor">
+            <a:schemeClr val="lt1"/>
+          </a:fontRef>
+        </p:style>
+        <p:txBody>
+          <a:bodyPr rtlCol="0" anchor="ctr" lIns="45720" rIns="45720"/>
+          <a:lstStyle/>
+          <a:p>
+            <a:pPr algn="ctr"/>
+            <a:r>
+              <a:rPr sz="900">
+                <a:solidFill>
+                  <a:srgbClr val="1F3A5F"/>
+                </a:solidFill>
+              </a:rPr>
+              <a:t>Gram 26: Nebula-class contact bearing 271, codename Trill</a:t>
+            </a:r>
+          </a:p>
+        </p:txBody>
+      </p:sp>
+      <p:sp>
+        <p:nvSpPr>
+          <p:cNvPr id="16" name="TextBox 15"/>
+          <p:cNvSpPr txBox="1"/>
+          <p:nvPr/>
+        </p:nvSpPr>
+        <p:spPr>
+          <a:xfrm>
+            <a:off x="2657246" y="3066288"/>
+            <a:ext cx="2200046" cy="1447800"/>
+          </a:xfrm>
+          <a:prstGeom prst="rect">
+            <a:avLst/>
+          </a:prstGeom>
+          <a:noFill/>
+        </p:spPr>
+        <p:txBody>
+          <a:bodyPr wrap="square">
+            <a:spAutoFit/>
+          </a:bodyPr>
+          <a:lstStyle/>
+          <a:p>
+            <a:r>
+              <a:rPr sz="800">
+                <a:hlinkClick r:id="rId26"/>
+              </a:rPr>
+              <a:t>Lofar 1</a:t>
+            </a:r>
+          </a:p>
+          <a:p>
+            <a:r>
+              <a:rPr sz="800">
+                <a:hlinkClick r:id="rId27"/>
+              </a:rPr>
+              <a:t>Lofar 2</a:t>
+            </a:r>
+          </a:p>
+          <a:p>
+            <a:r>
+              <a:rPr sz="800">
+                <a:hlinkClick r:id="rId28"/>
+              </a:rPr>
+              <a:t>Lofar 3</a:t>
+            </a:r>
+          </a:p>
+          <a:p>
+            <a:r>
+              <a:rPr sz="800">
+                <a:hlinkClick r:id="rId29"/>
+              </a:rPr>
+              <a:t>Lofar 4</a:t>
+            </a:r>
+          </a:p>
+        </p:txBody>
+      </p:sp>
+      <p:sp>
+        <p:nvSpPr>
+          <p:cNvPr id="17" name="Rounded Rectangle 16"/>
+          <p:cNvSpPr/>
+          <p:nvPr>
+            <a:hlinkClick r:id="rId30"/>
+          </p:nvPr>
+        </p:nvSpPr>
+        <p:spPr>
+          <a:xfrm>
+            <a:off x="4948732" y="2682240"/>
+            <a:ext cx="2200046" cy="365760"/>
+          </a:xfrm>
+          <a:prstGeom prst="roundRect">
+            <a:avLst/>
+          </a:prstGeom>
+          <a:solidFill>
+            <a:srgbClr val="E8EEF7"/>
+          </a:solidFill>
+          <a:ln>
+            <a:solidFill>
+              <a:srgbClr val="1F3A5F"/>
+            </a:solidFill>
+          </a:ln>
+        </p:spPr>
+        <p:style>
+          <a:lnRef idx="1">
+            <a:schemeClr val="accent1"/>
+          </a:lnRef>
+          <a:fillRef idx="3">
+            <a:schemeClr val="accent1"/>
+          </a:fillRef>
+          <a:effectRef idx="2">
+            <a:schemeClr val="accent1"/>
+          </a:effectRef>
+          <a:fontRef idx="minor">
+            <a:schemeClr val="lt1"/>
+          </a:fontRef>
+        </p:style>
+        <p:txBody>
+          <a:bodyPr rtlCol="0" anchor="ctr" lIns="45720" rIns="45720"/>
+          <a:lstStyle/>
+          <a:p>
+            <a:pPr algn="ctr"/>
+            <a:r>
+              <a:rPr sz="900">
+                <a:solidFill>
+                  <a:srgbClr val="1F3A5F"/>
+                </a:solidFill>
+              </a:rPr>
+              <a:t>Gram 28: Sovereign-class contact bearing 118, codename Yavin</a:t>
+            </a:r>
+          </a:p>
+        </p:txBody>
+      </p:sp>
+      <p:sp>
+        <p:nvSpPr>
+          <p:cNvPr id="18" name="TextBox 17"/>
+          <p:cNvSpPr txBox="1"/>
+          <p:nvPr/>
+        </p:nvSpPr>
+        <p:spPr>
+          <a:xfrm>
+            <a:off x="4948732" y="3066288"/>
+            <a:ext cx="2200046" cy="1447800"/>
+          </a:xfrm>
+          <a:prstGeom prst="rect">
+            <a:avLst/>
+          </a:prstGeom>
+          <a:noFill/>
+        </p:spPr>
+        <p:txBody>
+          <a:bodyPr wrap="square">
+            <a:spAutoFit/>
+          </a:bodyPr>
+          <a:lstStyle/>
+          <a:p>
+            <a:r>
+              <a:rPr sz="800">
+                <a:hlinkClick r:id="rId31"/>
+              </a:rPr>
+              <a:t>Lofar 1</a:t>
+            </a:r>
+          </a:p>
+          <a:p>
+            <a:r>
+              <a:rPr sz="800">
+                <a:hlinkClick r:id="rId32"/>
+              </a:rPr>
+              <a:t>Lofar 2</a:t>
+            </a:r>
+          </a:p>
+          <a:p>
+            <a:r>
+              <a:rPr sz="800">
+                <a:hlinkClick r:id="rId33"/>
+              </a:rPr>
+              <a:t>Lofar 3</a:t>
+            </a:r>
+          </a:p>
+        </p:txBody>
+      </p:sp>
+      <p:sp>
+        <p:nvSpPr>
+          <p:cNvPr id="19" name="Rounded Rectangle 18"/>
+          <p:cNvSpPr/>
+          <p:nvPr>
+            <a:hlinkClick r:id="rId34"/>
+          </p:nvPr>
+        </p:nvSpPr>
+        <p:spPr>
+          <a:xfrm>
+            <a:off x="7240219" y="2682240"/>
+            <a:ext cx="2200046" cy="365760"/>
+          </a:xfrm>
+          <a:prstGeom prst="roundRect">
+            <a:avLst/>
+          </a:prstGeom>
+          <a:solidFill>
+            <a:srgbClr val="E8EEF7"/>
+          </a:solidFill>
+          <a:ln>
+            <a:solidFill>
+              <a:srgbClr val="1F3A5F"/>
+            </a:solidFill>
+          </a:ln>
+        </p:spPr>
+        <p:style>
+          <a:lnRef idx="1">
+            <a:schemeClr val="accent1"/>
+          </a:lnRef>
+          <a:fillRef idx="3">
+            <a:schemeClr val="accent1"/>
+          </a:fillRef>
+          <a:effectRef idx="2">
+            <a:schemeClr val="accent1"/>
+          </a:effectRef>
+          <a:fontRef idx="minor">
+            <a:schemeClr val="lt1"/>
+          </a:fontRef>
+        </p:style>
+        <p:txBody>
+          <a:bodyPr rtlCol="0" anchor="ctr" lIns="45720" rIns="45720"/>
+          <a:lstStyle/>
+          <a:p>
+            <a:pPr algn="ctr"/>
+            <a:r>
+              <a:rPr sz="900">
+                <a:solidFill>
+                  <a:srgbClr val="1F3A5F"/>
+                </a:solidFill>
+              </a:rPr>
+              <a:t>Gram 30: FR Y-wing, Category 3, Yavin</a:t>
+            </a:r>
+          </a:p>
+        </p:txBody>
+      </p:sp>
+      <p:sp>
+        <p:nvSpPr>
+          <p:cNvPr id="20" name="TextBox 19"/>
+          <p:cNvSpPr txBox="1"/>
+          <p:nvPr/>
+        </p:nvSpPr>
+        <p:spPr>
+          <a:xfrm>
+            <a:off x="7240219" y="3066288"/>
+            <a:ext cx="2200046" cy="1447800"/>
+          </a:xfrm>
+          <a:prstGeom prst="rect">
+            <a:avLst/>
+          </a:prstGeom>
+          <a:noFill/>
+        </p:spPr>
+        <p:txBody>
+          <a:bodyPr wrap="square">
+            <a:spAutoFit/>
+          </a:bodyPr>
+          <a:lstStyle/>
+          <a:p>
+            <a:r>
+              <a:rPr sz="800">
+                <a:hlinkClick r:id="rId35"/>
+              </a:rPr>
+              <a:t>Lofar 1</a:t>
+            </a:r>
+          </a:p>
+          <a:p>
+            <a:r>
+              <a:rPr sz="800">
+                <a:hlinkClick r:id="rId36"/>
+              </a:rPr>
+              <a:t>Lofar 2</a:t>
+            </a:r>
+          </a:p>
+          <a:p>
+            <a:r>
+              <a:rPr sz="800">
+                <a:hlinkClick r:id="rId37"/>
+              </a:rPr>
+              <a:t>Lofar 3</a:t>
+            </a:r>
+          </a:p>
+        </p:txBody>
+      </p:sp>
+      <p:sp>
+        <p:nvSpPr>
+          <p:cNvPr id="21" name="Rounded Rectangle 20"/>
+          <p:cNvSpPr/>
+          <p:nvPr>
+            <a:hlinkClick r:id="rId38"/>
+          </p:nvPr>
+        </p:nvSpPr>
+        <p:spPr>
+          <a:xfrm>
+            <a:off x="9531705" y="2682240"/>
+            <a:ext cx="2200046" cy="365760"/>
+          </a:xfrm>
+          <a:prstGeom prst="roundRect">
+            <a:avLst/>
+          </a:prstGeom>
+          <a:solidFill>
+            <a:srgbClr val="E8EEF7"/>
+          </a:solidFill>
+          <a:ln>
+            <a:solidFill>
+              <a:srgbClr val="1F3A5F"/>
+            </a:solidFill>
+          </a:ln>
+        </p:spPr>
+        <p:style>
+          <a:lnRef idx="1">
+            <a:schemeClr val="accent1"/>
+          </a:lnRef>
+          <a:fillRef idx="3">
+            <a:schemeClr val="accent1"/>
+          </a:fillRef>
+          <a:effectRef idx="2">
+            <a:schemeClr val="accent1"/>
+          </a:effectRef>
+          <a:fontRef idx="minor">
+            <a:schemeClr val="lt1"/>
+          </a:fontRef>
+        </p:style>
+        <p:txBody>
+          <a:bodyPr rtlCol="0" anchor="ctr" lIns="45720" rIns="45720"/>
+          <a:lstStyle/>
+          <a:p>
+            <a:pPr algn="ctr"/>
+            <a:r>
+              <a:rPr sz="900">
+                <a:solidFill>
+                  <a:srgbClr val="1F3A5F"/>
+                </a:solidFill>
+              </a:rPr>
+              <a:t>Gram 31: FR Nebula-class, Category 3, Bajor</a:t>
+            </a:r>
+          </a:p>
+        </p:txBody>
+      </p:sp>
+      <p:sp>
+        <p:nvSpPr>
+          <p:cNvPr id="22" name="TextBox 21"/>
+          <p:cNvSpPr txBox="1"/>
+          <p:nvPr/>
+        </p:nvSpPr>
+        <p:spPr>
+          <a:xfrm>
+            <a:off x="9531705" y="3066288"/>
+            <a:ext cx="2200046" cy="1447800"/>
+          </a:xfrm>
+          <a:prstGeom prst="rect">
+            <a:avLst/>
+          </a:prstGeom>
+          <a:noFill/>
+        </p:spPr>
+        <p:txBody>
+          <a:bodyPr wrap="square">
+            <a:spAutoFit/>
+          </a:bodyPr>
+          <a:lstStyle/>
+          <a:p>
+            <a:r>
+              <a:rPr sz="800">
+                <a:hlinkClick r:id="rId39"/>
+              </a:rPr>
+              <a:t>Lofar 1</a:t>
+            </a:r>
+          </a:p>
+          <a:p>
+            <a:r>
+              <a:rPr sz="800">
+                <a:hlinkClick r:id="rId40"/>
+              </a:rPr>
+              <a:t>Lofar 2</a:t>
+            </a:r>
+          </a:p>
+        </p:txBody>
+      </p:sp>
+      <p:sp>
+        <p:nvSpPr>
+          <p:cNvPr id="23" name="Rounded Rectangle 22"/>
+          <p:cNvSpPr/>
+          <p:nvPr>
+            <a:hlinkClick r:id="rId41"/>
+          </p:nvPr>
+        </p:nvSpPr>
+        <p:spPr>
+          <a:xfrm>
+            <a:off x="365760" y="4632960"/>
+            <a:ext cx="2200046" cy="365760"/>
+          </a:xfrm>
+          <a:prstGeom prst="roundRect">
+            <a:avLst/>
+          </a:prstGeom>
+          <a:solidFill>
+            <a:srgbClr val="E8EEF7"/>
+          </a:solidFill>
+          <a:ln>
+            <a:solidFill>
+              <a:srgbClr val="1F3A5F"/>
+            </a:solidFill>
+          </a:ln>
+        </p:spPr>
+        <p:style>
+          <a:lnRef idx="1">
+            <a:schemeClr val="accent1"/>
+          </a:lnRef>
+          <a:fillRef idx="3">
+            <a:schemeClr val="accent1"/>
+          </a:fillRef>
+          <a:effectRef idx="2">
+            <a:schemeClr val="accent1"/>
+          </a:effectRef>
+          <a:fontRef idx="minor">
+            <a:schemeClr val="lt1"/>
+          </a:fontRef>
+        </p:style>
+        <p:txBody>
+          <a:bodyPr rtlCol="0" anchor="ctr" lIns="45720" rIns="45720"/>
+          <a:lstStyle/>
+          <a:p>
+            <a:pPr algn="ctr"/>
+            <a:r>
+              <a:rPr sz="900">
+                <a:solidFill>
+                  <a:srgbClr val="1F3A5F"/>
+                </a:solidFill>
+              </a:rPr>
+              <a:t>Gram 32: FR Outrider, Category 4, Risa</a:t>
+            </a:r>
+          </a:p>
+        </p:txBody>
+      </p:sp>
+      <p:sp>
+        <p:nvSpPr>
+          <p:cNvPr id="24" name="TextBox 23"/>
+          <p:cNvSpPr txBox="1"/>
+          <p:nvPr/>
+        </p:nvSpPr>
+        <p:spPr>
+          <a:xfrm>
+            <a:off x="365760" y="5017008"/>
+            <a:ext cx="2200046" cy="1447800"/>
+          </a:xfrm>
+          <a:prstGeom prst="rect">
+            <a:avLst/>
+          </a:prstGeom>
+          <a:noFill/>
+        </p:spPr>
+        <p:txBody>
+          <a:bodyPr wrap="square">
+            <a:spAutoFit/>
+          </a:bodyPr>
+          <a:lstStyle/>
+          <a:p>
+            <a:r>
+              <a:rPr sz="800">
+                <a:hlinkClick r:id="rId42"/>
+              </a:rPr>
+              <a:t>Lofar 1</a:t>
+            </a:r>
+          </a:p>
+          <a:p>
+            <a:r>
+              <a:rPr sz="800">
+                <a:hlinkClick r:id="rId43"/>
+              </a:rPr>
+              <a:t>Lofar 2</a:t>
+            </a:r>
+          </a:p>
+        </p:txBody>
+      </p:sp>
+      <p:sp>
+        <p:nvSpPr>
+          <p:cNvPr id="25" name="Rounded Rectangle 24"/>
+          <p:cNvSpPr/>
+          <p:nvPr>
+            <a:hlinkClick r:id="rId44"/>
+          </p:nvPr>
+        </p:nvSpPr>
+        <p:spPr>
+          <a:xfrm>
+            <a:off x="2657246" y="4632960"/>
+            <a:ext cx="2200046" cy="365760"/>
+          </a:xfrm>
+          <a:prstGeom prst="roundRect">
+            <a:avLst/>
+          </a:prstGeom>
+          <a:solidFill>
+            <a:srgbClr val="E8EEF7"/>
+          </a:solidFill>
+          <a:ln>
+            <a:solidFill>
+              <a:srgbClr val="1F3A5F"/>
+            </a:solidFill>
+          </a:ln>
+        </p:spPr>
+        <p:style>
+          <a:lnRef idx="1">
+            <a:schemeClr val="accent1"/>
+          </a:lnRef>
+          <a:fillRef idx="3">
+            <a:schemeClr val="accent1"/>
+          </a:fillRef>
+          <a:effectRef idx="2">
+            <a:schemeClr val="accent1"/>
+          </a:effectRef>
+          <a:fontRef idx="minor">
+            <a:schemeClr val="lt1"/>
+          </a:fontRef>
+        </p:style>
+        <p:txBody>
+          <a:bodyPr rtlCol="0" anchor="ctr" lIns="45720" rIns="45720"/>
+          <a:lstStyle/>
+          <a:p>
+            <a:pPr algn="ctr"/>
+            <a:r>
+              <a:rPr sz="900">
+                <a:solidFill>
+                  <a:srgbClr val="1F3A5F"/>
+                </a:solidFill>
+              </a:rPr>
+              <a:t>Gram 33: FR A-wing, Category 4, Defiant</a:t>
+            </a:r>
+          </a:p>
+        </p:txBody>
+      </p:sp>
+      <p:sp>
+        <p:nvSpPr>
+          <p:cNvPr id="26" name="TextBox 25"/>
+          <p:cNvSpPr txBox="1"/>
+          <p:nvPr/>
+        </p:nvSpPr>
+        <p:spPr>
+          <a:xfrm>
+            <a:off x="2657246" y="5017008"/>
+            <a:ext cx="2200046" cy="1447800"/>
+          </a:xfrm>
+          <a:prstGeom prst="rect">
+            <a:avLst/>
+          </a:prstGeom>
+          <a:noFill/>
+        </p:spPr>
+        <p:txBody>
+          <a:bodyPr wrap="square">
+            <a:spAutoFit/>
+          </a:bodyPr>
+          <a:lstStyle/>
+          <a:p>
+            <a:r>
+              <a:rPr sz="800">
+                <a:hlinkClick r:id="rId45"/>
+              </a:rPr>
+              <a:t>Lofar 1</a:t>
+            </a:r>
+          </a:p>
+        </p:txBody>
+      </p:sp>
+      <p:sp>
+        <p:nvSpPr>
+          <p:cNvPr id="27" name="Rounded Rectangle 26"/>
+          <p:cNvSpPr/>
+          <p:nvPr>
+            <a:hlinkClick r:id="rId46"/>
+          </p:nvPr>
+        </p:nvSpPr>
+        <p:spPr>
+          <a:xfrm>
+            <a:off x="4948732" y="4632960"/>
+            <a:ext cx="2200046" cy="365760"/>
+          </a:xfrm>
+          <a:prstGeom prst="roundRect">
+            <a:avLst/>
+          </a:prstGeom>
+          <a:solidFill>
+            <a:srgbClr val="E8EEF7"/>
+          </a:solidFill>
+          <a:ln>
+            <a:solidFill>
+              <a:srgbClr val="1F3A5F"/>
+            </a:solidFill>
+          </a:ln>
+        </p:spPr>
+        <p:style>
+          <a:lnRef idx="1">
+            <a:schemeClr val="accent1"/>
+          </a:lnRef>
+          <a:fillRef idx="3">
+            <a:schemeClr val="accent1"/>
+          </a:fillRef>
+          <a:effectRef idx="2">
+            <a:schemeClr val="accent1"/>
+          </a:effectRef>
+          <a:fontRef idx="minor">
+            <a:schemeClr val="lt1"/>
+          </a:fontRef>
+        </p:style>
+        <p:txBody>
+          <a:bodyPr rtlCol="0" anchor="ctr" lIns="45720" rIns="45720"/>
+          <a:lstStyle/>
+          <a:p>
+            <a:pPr algn="ctr"/>
+            <a:r>
+              <a:rPr sz="900">
+                <a:solidFill>
+                  <a:srgbClr val="1F3A5F"/>
+                </a:solidFill>
+              </a:rPr>
+              <a:t>Gram 35: Reliant contact bearing 251, codename Bespin</a:t>
+            </a:r>
+          </a:p>
+        </p:txBody>
+      </p:sp>
+      <p:sp>
+        <p:nvSpPr>
+          <p:cNvPr id="28" name="TextBox 27"/>
+          <p:cNvSpPr txBox="1"/>
+          <p:nvPr/>
+        </p:nvSpPr>
+        <p:spPr>
+          <a:xfrm>
+            <a:off x="4948732" y="5017008"/>
+            <a:ext cx="2200046" cy="1447800"/>
+          </a:xfrm>
+          <a:prstGeom prst="rect">
+            <a:avLst/>
+          </a:prstGeom>
+          <a:noFill/>
+        </p:spPr>
+        <p:txBody>
+          <a:bodyPr wrap="square">
+            <a:spAutoFit/>
+          </a:bodyPr>
+          <a:lstStyle/>
+          <a:p>
+            <a:r>
+              <a:rPr sz="800">
+                <a:hlinkClick r:id="rId47"/>
+              </a:rPr>
+              <a:t>Lofar 1</a:t>
+            </a:r>
+          </a:p>
+        </p:txBody>
+      </p:sp>
+      <p:sp>
+        <p:nvSpPr>
+          <p:cNvPr id="29" name="Rounded Rectangle 28"/>
+          <p:cNvSpPr/>
+          <p:nvPr>
+            <a:hlinkClick r:id="rId48"/>
+          </p:nvPr>
+        </p:nvSpPr>
+        <p:spPr>
+          <a:xfrm>
+            <a:off x="7240219" y="4632960"/>
+            <a:ext cx="2200046" cy="365760"/>
+          </a:xfrm>
+          <a:prstGeom prst="roundRect">
+            <a:avLst/>
+          </a:prstGeom>
+          <a:solidFill>
+            <a:srgbClr val="E8EEF7"/>
+          </a:solidFill>
+          <a:ln>
+            <a:solidFill>
+              <a:srgbClr val="1F3A5F"/>
+            </a:solidFill>
+          </a:ln>
+        </p:spPr>
+        <p:style>
+          <a:lnRef idx="1">
+            <a:schemeClr val="accent1"/>
+          </a:lnRef>
+          <a:fillRef idx="3">
+            <a:schemeClr val="accent1"/>
+          </a:fillRef>
+          <a:effectRef idx="2">
+            <a:schemeClr val="accent1"/>
+          </a:effectRef>
+          <a:fontRef idx="minor">
+            <a:schemeClr val="lt1"/>
+          </a:fontRef>
+        </p:style>
+        <p:txBody>
+          <a:bodyPr rtlCol="0" anchor="ctr" lIns="45720" rIns="45720"/>
+          <a:lstStyle/>
+          <a:p>
+            <a:pPr algn="ctr"/>
+            <a:r>
+              <a:rPr sz="900">
+                <a:solidFill>
+                  <a:srgbClr val="1F3A5F"/>
+                </a:solidFill>
+              </a:rPr>
+              <a:t>Gram 36: FR Sovereign-class, Category 2, Yavin</a:t>
+            </a:r>
+          </a:p>
+        </p:txBody>
+      </p:sp>
+      <p:sp>
+        <p:nvSpPr>
+          <p:cNvPr id="30" name="TextBox 29"/>
+          <p:cNvSpPr txBox="1"/>
+          <p:nvPr/>
+        </p:nvSpPr>
+        <p:spPr>
+          <a:xfrm>
+            <a:off x="7240219" y="5017008"/>
+            <a:ext cx="2200046" cy="1447800"/>
+          </a:xfrm>
+          <a:prstGeom prst="rect">
+            <a:avLst/>
+          </a:prstGeom>
+          <a:noFill/>
+        </p:spPr>
+        <p:txBody>
+          <a:bodyPr wrap="square">
+            <a:spAutoFit/>
+          </a:bodyPr>
+          <a:lstStyle/>
+          <a:p>
+            <a:r>
+              <a:rPr sz="800">
+                <a:hlinkClick r:id="rId49"/>
+              </a:rPr>
+              <a:t>Lofar 1</a:t>
+            </a:r>
+          </a:p>
+          <a:p>
+            <a:r>
+              <a:rPr sz="800">
+                <a:hlinkClick r:id="rId50"/>
+              </a:rPr>
+              <a:t>Lofar 2</a:t>
+            </a:r>
+          </a:p>
+          <a:p>
+            <a:r>
+              <a:rPr sz="800">
+                <a:hlinkClick r:id="rId51"/>
+              </a:rPr>
+              <a:t>Lofar 3</a:t>
+            </a:r>
+          </a:p>
+        </p:txBody>
+      </p:sp>
+      <p:sp>
+        <p:nvSpPr>
+          <p:cNvPr id="31" name="Rounded Rectangle 30"/>
+          <p:cNvSpPr/>
+          <p:nvPr>
+            <a:hlinkClick r:id="rId52"/>
+          </p:nvPr>
+        </p:nvSpPr>
+        <p:spPr>
+          <a:xfrm>
+            <a:off x="9531705" y="4632960"/>
+            <a:ext cx="2200046" cy="365760"/>
+          </a:xfrm>
+          <a:prstGeom prst="roundRect">
+            <a:avLst/>
+          </a:prstGeom>
+          <a:solidFill>
+            <a:srgbClr val="E8EEF7"/>
+          </a:solidFill>
+          <a:ln>
+            <a:solidFill>
+              <a:srgbClr val="1F3A5F"/>
+            </a:solidFill>
+          </a:ln>
+        </p:spPr>
+        <p:style>
+          <a:lnRef idx="1">
+            <a:schemeClr val="accent1"/>
+          </a:lnRef>
+          <a:fillRef idx="3">
+            <a:schemeClr val="accent1"/>
+          </a:fillRef>
+          <a:effectRef idx="2">
+            <a:schemeClr val="accent1"/>
+          </a:effectRef>
+          <a:fontRef idx="minor">
+            <a:schemeClr val="lt1"/>
+          </a:fontRef>
+        </p:style>
+        <p:txBody>
+          <a:bodyPr rtlCol="0" anchor="ctr" lIns="45720" rIns="45720"/>
+          <a:lstStyle/>
+          <a:p>
+            <a:pPr algn="ctr"/>
+            <a:r>
+              <a:rPr sz="900">
+                <a:solidFill>
+                  <a:srgbClr val="1F3A5F"/>
+                </a:solidFill>
+              </a:rPr>
+              <a:t>Gram 37: FR Akira-class, Category 4, Kobol</a:t>
+            </a:r>
+          </a:p>
+        </p:txBody>
+      </p:sp>
+      <p:sp>
+        <p:nvSpPr>
+          <p:cNvPr id="32" name="TextBox 31"/>
+          <p:cNvSpPr txBox="1"/>
+          <p:nvPr/>
+        </p:nvSpPr>
+        <p:spPr>
+          <a:xfrm>
+            <a:off x="9531705" y="5017008"/>
+            <a:ext cx="2200046" cy="1447800"/>
+          </a:xfrm>
+          <a:prstGeom prst="rect">
+            <a:avLst/>
+          </a:prstGeom>
+          <a:noFill/>
+        </p:spPr>
+        <p:txBody>
+          <a:bodyPr wrap="square">
+            <a:spAutoFit/>
+          </a:bodyPr>
+          <a:lstStyle/>
+          <a:p>
+            <a:r>
+              <a:rPr sz="800">
+                <a:hlinkClick r:id="rId53"/>
+              </a:rPr>
+              <a:t>Lofar 1</a:t>
+            </a:r>
+          </a:p>
+        </p:txBody>
+      </p:sp>
+    </p:spTree>
+  </p:cSld>
+  <p:clrMapOvr>
+    <a:masterClrMapping/>
+  </p:clrMapOvr>
+</p:sld>
+</file>
+
+<file path=ppt/slides/slide4.xml><?xml version="1.0" encoding="utf-8"?>
+<p:sld xmlns:a="http://schemas.openxmlformats.org/drawingml/2006/main" xmlns:p="http://schemas.openxmlformats.org/presentationml/2006/main" xmlns:r="http://schemas.openxmlformats.org/officeDocument/2006/relationships">
+  <p:cSld>
+    <p:spTree>
+      <p:nvGrpSpPr>
+        <p:cNvPr id="1" name=""/>
+        <p:cNvGrpSpPr/>
+        <p:nvPr/>
+      </p:nvGrpSpPr>
+      <p:grpSpPr/>
+      <p:sp>
+        <p:nvSpPr>
+          <p:cNvPr id="2" name="Rectangle 1"/>
+          <p:cNvSpPr/>
+          <p:nvPr/>
+        </p:nvSpPr>
+        <p:spPr>
+          <a:xfrm>
+            <a:off x="0" y="0"/>
+            <a:ext cx="12188952" cy="548640"/>
+          </a:xfrm>
+          <a:prstGeom prst="rect">
+            <a:avLst/>
+          </a:prstGeom>
+          <a:solidFill>
+            <a:srgbClr val="1F3A5F"/>
+          </a:solidFill>
+          <a:ln>
+            <a:noFill/>
+          </a:ln>
+        </p:spPr>
+        <p:style>
+          <a:lnRef idx="1">
+            <a:schemeClr val="accent1"/>
+          </a:lnRef>
+          <a:fillRef idx="3">
+            <a:schemeClr val="accent1"/>
+          </a:fillRef>
+          <a:effectRef idx="2">
+            <a:schemeClr val="accent1"/>
+          </a:effectRef>
+          <a:fontRef idx="minor">
+            <a:schemeClr val="lt1"/>
+          </a:fontRef>
+        </p:style>
+        <p:txBody>
+          <a:bodyPr rtlCol="0" anchor="ctr" lIns="182880" rIns="182880"/>
+          <a:lstStyle/>
+          <a:p>
+            <a:pPr algn="ctr"/>
+            <a:r>
+              <a:rPr sz="2000" b="1">
+                <a:solidFill>
+                  <a:srgbClr val="FFFFFF"/>
+                </a:solidFill>
+              </a:rPr>
+              <a:t>Instructor Week 1 Grams — Page 3 of 3</a:t>
+            </a:r>
+          </a:p>
+        </p:txBody>
+      </p:sp>
+      <p:sp>
+        <p:nvSpPr>
+          <p:cNvPr id="3" name="Rounded Rectangle 2"/>
+          <p:cNvSpPr/>
+          <p:nvPr>
+            <a:hlinkClick r:id="rId2"/>
+          </p:nvPr>
+        </p:nvSpPr>
+        <p:spPr>
+          <a:xfrm>
+            <a:off x="365760" y="731520"/>
+            <a:ext cx="2200046" cy="365760"/>
+          </a:xfrm>
+          <a:prstGeom prst="roundRect">
+            <a:avLst/>
+          </a:prstGeom>
+          <a:solidFill>
+            <a:srgbClr val="E8EEF7"/>
+          </a:solidFill>
+          <a:ln>
+            <a:solidFill>
+              <a:srgbClr val="1F3A5F"/>
+            </a:solidFill>
+          </a:ln>
+        </p:spPr>
+        <p:style>
+          <a:lnRef idx="1">
+            <a:schemeClr val="accent1"/>
+          </a:lnRef>
+          <a:fillRef idx="3">
+            <a:schemeClr val="accent1"/>
+          </a:fillRef>
+          <a:effectRef idx="2">
+            <a:schemeClr val="accent1"/>
+          </a:effectRef>
+          <a:fontRef idx="minor">
+            <a:schemeClr val="lt1"/>
+          </a:fontRef>
+        </p:style>
+        <p:txBody>
+          <a:bodyPr rtlCol="0" anchor="ctr" lIns="45720" rIns="45720"/>
+          <a:lstStyle/>
+          <a:p>
+            <a:pPr algn="ctr"/>
+            <a:r>
+              <a:rPr sz="900">
+                <a:solidFill>
+                  <a:srgbClr val="1F3A5F"/>
+                </a:solidFill>
+              </a:rPr>
+              <a:t>Gram 38: FR Razor Crest, Category 3, Dank</a:t>
+            </a:r>
+          </a:p>
+        </p:txBody>
+      </p:sp>
+      <p:sp>
+        <p:nvSpPr>
+          <p:cNvPr id="4" name="TextBox 3"/>
+          <p:cNvSpPr txBox="1"/>
+          <p:nvPr/>
+        </p:nvSpPr>
+        <p:spPr>
+          <a:xfrm>
+            <a:off x="365760" y="1115568"/>
+            <a:ext cx="2200046" cy="1447800"/>
+          </a:xfrm>
+          <a:prstGeom prst="rect">
+            <a:avLst/>
+          </a:prstGeom>
+          <a:noFill/>
+        </p:spPr>
+        <p:txBody>
+          <a:bodyPr wrap="square">
+            <a:spAutoFit/>
+          </a:bodyPr>
+          <a:lstStyle/>
+          <a:p>
+            <a:r>
+              <a:rPr sz="800">
+                <a:hlinkClick r:id="rId3"/>
+              </a:rPr>
+              <a:t>Lofar 1</a:t>
+            </a:r>
+          </a:p>
+          <a:p>
+            <a:r>
+              <a:rPr sz="800">
+                <a:hlinkClick r:id="rId4"/>
+              </a:rPr>
+              <a:t>Lofar 2</a:t>
+            </a:r>
+          </a:p>
+          <a:p>
+            <a:r>
+              <a:rPr sz="800">
+                <a:hlinkClick r:id="rId5"/>
+              </a:rPr>
+              <a:t>Lofar 3</a:t>
+            </a:r>
+          </a:p>
+          <a:p>
+            <a:r>
+              <a:rPr sz="800">
+                <a:hlinkClick r:id="rId6"/>
+              </a:rPr>
+              <a:t>Lofar 4</a:t>
+            </a:r>
+          </a:p>
+        </p:txBody>
+      </p:sp>
+      <p:sp>
+        <p:nvSpPr>
+          <p:cNvPr id="5" name="Rounded Rectangle 4"/>
+          <p:cNvSpPr/>
+          <p:nvPr>
+            <a:hlinkClick r:id="rId7"/>
+          </p:nvPr>
+        </p:nvSpPr>
+        <p:spPr>
+          <a:xfrm>
+            <a:off x="2657246" y="731520"/>
+            <a:ext cx="2200046" cy="365760"/>
+          </a:xfrm>
+          <a:prstGeom prst="roundRect">
+            <a:avLst/>
+          </a:prstGeom>
+          <a:solidFill>
+            <a:srgbClr val="E8EEF7"/>
+          </a:solidFill>
+          <a:ln>
+            <a:solidFill>
+              <a:srgbClr val="1F3A5F"/>
+            </a:solidFill>
+          </a:ln>
+        </p:spPr>
+        <p:style>
+          <a:lnRef idx="1">
+            <a:schemeClr val="accent1"/>
+          </a:lnRef>
+          <a:fillRef idx="3">
+            <a:schemeClr val="accent1"/>
+          </a:fillRef>
+          <a:effectRef idx="2">
+            <a:schemeClr val="accent1"/>
+          </a:effectRef>
+          <a:fontRef idx="minor">
+            <a:schemeClr val="lt1"/>
+          </a:fontRef>
+        </p:style>
+        <p:txBody>
+          <a:bodyPr rtlCol="0" anchor="ctr" lIns="45720" rIns="45720"/>
+          <a:lstStyle/>
+          <a:p>
+            <a:pPr algn="ctr"/>
+            <a:r>
+              <a:rPr sz="900">
+                <a:solidFill>
+                  <a:srgbClr val="1F3A5F"/>
+                </a:solidFill>
+              </a:rPr>
+              <a:t>Gram 39: FR Slave I, Category 3, Kronos</a:t>
+            </a:r>
+          </a:p>
+        </p:txBody>
+      </p:sp>
+      <p:sp>
+        <p:nvSpPr>
+          <p:cNvPr id="6" name="TextBox 5"/>
+          <p:cNvSpPr txBox="1"/>
+          <p:nvPr/>
+        </p:nvSpPr>
+        <p:spPr>
+          <a:xfrm>
+            <a:off x="2657246" y="1115568"/>
+            <a:ext cx="2200046" cy="1447800"/>
+          </a:xfrm>
+          <a:prstGeom prst="rect">
+            <a:avLst/>
+          </a:prstGeom>
+          <a:noFill/>
+        </p:spPr>
+        <p:txBody>
+          <a:bodyPr wrap="square">
+            <a:spAutoFit/>
+          </a:bodyPr>
+          <a:lstStyle/>
+          <a:p>
+            <a:r>
+              <a:rPr sz="800">
+                <a:hlinkClick r:id="rId8"/>
+              </a:rPr>
+              <a:t>Lofar 1</a:t>
+            </a:r>
+          </a:p>
+        </p:txBody>
+      </p:sp>
+      <p:sp>
+        <p:nvSpPr>
+          <p:cNvPr id="7" name="Rounded Rectangle 6"/>
+          <p:cNvSpPr/>
+          <p:nvPr>
+            <a:hlinkClick r:id="rId9"/>
+          </p:nvPr>
+        </p:nvSpPr>
+        <p:spPr>
+          <a:xfrm>
+            <a:off x="4948732" y="731520"/>
+            <a:ext cx="2200046" cy="365760"/>
+          </a:xfrm>
+          <a:prstGeom prst="roundRect">
+            <a:avLst/>
+          </a:prstGeom>
+          <a:solidFill>
+            <a:srgbClr val="E8EEF7"/>
+          </a:solidFill>
+          <a:ln>
+            <a:solidFill>
+              <a:srgbClr val="1F3A5F"/>
+            </a:solidFill>
+          </a:ln>
+        </p:spPr>
+        <p:style>
+          <a:lnRef idx="1">
+            <a:schemeClr val="accent1"/>
+          </a:lnRef>
+          <a:fillRef idx="3">
+            <a:schemeClr val="accent1"/>
+          </a:fillRef>
+          <a:effectRef idx="2">
+            <a:schemeClr val="accent1"/>
+          </a:effectRef>
+          <a:fontRef idx="minor">
+            <a:schemeClr val="lt1"/>
+          </a:fontRef>
+        </p:style>
+        <p:txBody>
+          <a:bodyPr rtlCol="0" anchor="ctr" lIns="45720" rIns="45720"/>
+          <a:lstStyle/>
+          <a:p>
+            <a:pPr algn="ctr"/>
+            <a:r>
+              <a:rPr sz="900">
+                <a:solidFill>
+                  <a:srgbClr val="1F3A5F"/>
+                </a:solidFill>
+              </a:rPr>
+              <a:t>Gram 40: FR Razor Crest, Category 3, Dank</a:t>
+            </a:r>
+          </a:p>
+        </p:txBody>
+      </p:sp>
+      <p:sp>
+        <p:nvSpPr>
+          <p:cNvPr id="8" name="TextBox 7"/>
+          <p:cNvSpPr txBox="1"/>
+          <p:nvPr/>
+        </p:nvSpPr>
+        <p:spPr>
+          <a:xfrm>
+            <a:off x="4948732" y="1115568"/>
+            <a:ext cx="2200046" cy="1447800"/>
+          </a:xfrm>
+          <a:prstGeom prst="rect">
+            <a:avLst/>
+          </a:prstGeom>
+          <a:noFill/>
+        </p:spPr>
+        <p:txBody>
+          <a:bodyPr wrap="square">
+            <a:spAutoFit/>
+          </a:bodyPr>
+          <a:lstStyle/>
+          <a:p>
+            <a:r>
+              <a:rPr sz="800">
+                <a:hlinkClick r:id="rId10"/>
+              </a:rPr>
+              <a:t>Lofar 1</a:t>
+            </a:r>
+          </a:p>
+          <a:p>
+            <a:r>
+              <a:rPr sz="800">
+                <a:hlinkClick r:id="rId11"/>
+              </a:rPr>
+              <a:t>Lofar 2</a:t>
+            </a:r>
+          </a:p>
+          <a:p>
+            <a:r>
+              <a:rPr sz="800">
+                <a:hlinkClick r:id="rId12"/>
+              </a:rPr>
+              <a:t>Lofar 3</a:t>
+            </a:r>
+          </a:p>
+          <a:p>
+            <a:r>
+              <a:rPr sz="800">
+                <a:hlinkClick r:id="rId13"/>
+              </a:rPr>
+              <a:t>Lofar 4</a:t>
+            </a:r>
+          </a:p>
+        </p:txBody>
+      </p:sp>
+      <p:sp>
+        <p:nvSpPr>
+          <p:cNvPr id="9" name="Rounded Rectangle 8"/>
+          <p:cNvSpPr/>
+          <p:nvPr>
+            <a:hlinkClick r:id="rId14"/>
+          </p:nvPr>
+        </p:nvSpPr>
+        <p:spPr>
+          <a:xfrm>
+            <a:off x="7240219" y="731520"/>
+            <a:ext cx="2200046" cy="365760"/>
+          </a:xfrm>
+          <a:prstGeom prst="roundRect">
+            <a:avLst/>
+          </a:prstGeom>
+          <a:solidFill>
+            <a:srgbClr val="E8EEF7"/>
+          </a:solidFill>
+          <a:ln>
+            <a:solidFill>
+              <a:srgbClr val="1F3A5F"/>
+            </a:solidFill>
+          </a:ln>
+        </p:spPr>
+        <p:style>
+          <a:lnRef idx="1">
+            <a:schemeClr val="accent1"/>
+          </a:lnRef>
+          <a:fillRef idx="3">
+            <a:schemeClr val="accent1"/>
+          </a:fillRef>
+          <a:effectRef idx="2">
+            <a:schemeClr val="accent1"/>
+          </a:effectRef>
+          <a:fontRef idx="minor">
+            <a:schemeClr val="lt1"/>
+          </a:fontRef>
+        </p:style>
+        <p:txBody>
+          <a:bodyPr rtlCol="0" anchor="ctr" lIns="45720" rIns="45720"/>
+          <a:lstStyle/>
+          <a:p>
+            <a:pPr algn="ctr"/>
+            <a:r>
+              <a:rPr sz="900">
+                <a:solidFill>
+                  <a:srgbClr val="1F3A5F"/>
+                </a:solidFill>
+              </a:rPr>
+              <a:t>Gram 41: Ghost contact bearing 208, codename Betazed</a:t>
+            </a:r>
+          </a:p>
+        </p:txBody>
+      </p:sp>
+      <p:sp>
+        <p:nvSpPr>
+          <p:cNvPr id="10" name="TextBox 9"/>
+          <p:cNvSpPr txBox="1"/>
+          <p:nvPr/>
+        </p:nvSpPr>
+        <p:spPr>
+          <a:xfrm>
+            <a:off x="7240219" y="1115568"/>
+            <a:ext cx="2200046" cy="1447800"/>
+          </a:xfrm>
+          <a:prstGeom prst="rect">
+            <a:avLst/>
+          </a:prstGeom>
+          <a:noFill/>
+        </p:spPr>
+        <p:txBody>
+          <a:bodyPr wrap="square">
+            <a:spAutoFit/>
+          </a:bodyPr>
+          <a:lstStyle/>
+          <a:p>
+            <a:r>
+              <a:rPr sz="800">
+                <a:hlinkClick r:id="rId15"/>
+              </a:rPr>
+              <a:t>Lofar 1</a:t>
+            </a:r>
+          </a:p>
+          <a:p>
+            <a:r>
+              <a:rPr sz="800">
+                <a:hlinkClick r:id="rId16"/>
+              </a:rPr>
+              <a:t>Lofar 2</a:t>
+            </a:r>
+          </a:p>
+          <a:p>
+            <a:r>
+              <a:rPr sz="800">
+                <a:hlinkClick r:id="rId17"/>
+              </a:rPr>
+              <a:t>Lofar 3</a:t>
+            </a:r>
+          </a:p>
+          <a:p>
+            <a:r>
+              <a:rPr sz="800">
+                <a:hlinkClick r:id="rId18"/>
+              </a:rPr>
+              <a:t>Lofar 4</a:t>
+            </a:r>
+          </a:p>
+        </p:txBody>
+      </p:sp>
+      <p:sp>
+        <p:nvSpPr>
+          <p:cNvPr id="11" name="Rounded Rectangle 10"/>
+          <p:cNvSpPr/>
+          <p:nvPr>
+            <a:hlinkClick r:id="rId19"/>
+          </p:nvPr>
+        </p:nvSpPr>
+        <p:spPr>
+          <a:xfrm>
+            <a:off x="9531705" y="731520"/>
+            <a:ext cx="2200046" cy="365760"/>
+          </a:xfrm>
+          <a:prstGeom prst="roundRect">
+            <a:avLst/>
+          </a:prstGeom>
+          <a:solidFill>
+            <a:srgbClr val="E8EEF7"/>
+          </a:solidFill>
+          <a:ln>
+            <a:solidFill>
+              <a:srgbClr val="1F3A5F"/>
+            </a:solidFill>
+          </a:ln>
+        </p:spPr>
+        <p:style>
+          <a:lnRef idx="1">
+            <a:schemeClr val="accent1"/>
+          </a:lnRef>
+          <a:fillRef idx="3">
+            <a:schemeClr val="accent1"/>
+          </a:fillRef>
+          <a:effectRef idx="2">
+            <a:schemeClr val="accent1"/>
+          </a:effectRef>
+          <a:fontRef idx="minor">
+            <a:schemeClr val="lt1"/>
+          </a:fontRef>
+        </p:style>
+        <p:txBody>
+          <a:bodyPr rtlCol="0" anchor="ctr" lIns="45720" rIns="45720"/>
+          <a:lstStyle/>
+          <a:p>
+            <a:pPr algn="ctr"/>
+            <a:r>
+              <a:rPr sz="900">
+                <a:solidFill>
+                  <a:srgbClr val="1F3A5F"/>
+                </a:solidFill>
+              </a:rPr>
+              <a:t>Gram 42: FR Acclamator-class, Category 2, Trill</a:t>
+            </a:r>
+          </a:p>
+        </p:txBody>
+      </p:sp>
+      <p:sp>
+        <p:nvSpPr>
+          <p:cNvPr id="12" name="TextBox 11"/>
+          <p:cNvSpPr txBox="1"/>
+          <p:nvPr/>
+        </p:nvSpPr>
+        <p:spPr>
+          <a:xfrm>
+            <a:off x="9531705" y="1115568"/>
+            <a:ext cx="2200046" cy="1447800"/>
+          </a:xfrm>
+          <a:prstGeom prst="rect">
+            <a:avLst/>
+          </a:prstGeom>
+          <a:noFill/>
+        </p:spPr>
+        <p:txBody>
+          <a:bodyPr wrap="square">
+            <a:spAutoFit/>
+          </a:bodyPr>
+          <a:lstStyle/>
+          <a:p>
+            <a:r>
+              <a:rPr sz="800">
+                <a:hlinkClick r:id="rId20"/>
+              </a:rPr>
+              <a:t>Lofar 1</a:t>
+            </a:r>
+          </a:p>
+          <a:p>
+            <a:r>
+              <a:rPr sz="800">
                 <a:hlinkClick r:id="rId21"/>
               </a:rPr>
               <a:t>Lofar 2</a:t>
@@ -6717,6 +6805,92 @@
                 <a:hlinkClick r:id="rId22"/>
               </a:rPr>
               <a:t>Lofar 3</a:t>
+            </a:r>
+          </a:p>
+        </p:txBody>
+      </p:sp>
+    </p:spTree>
+  </p:cSld>
+  <p:clrMapOvr>
+    <a:masterClrMapping/>
+  </p:clrMapOvr>
+</p:sld>
+</file>
+
+<file path=ppt/slides/slide5.xml><?xml version="1.0" encoding="utf-8"?>
+<p:sld xmlns:a="http://schemas.openxmlformats.org/drawingml/2006/main" xmlns:p="http://schemas.openxmlformats.org/presentationml/2006/main" xmlns:r="http://schemas.openxmlformats.org/officeDocument/2006/relationships">
+  <p:cSld>
+    <p:spTree>
+      <p:nvGrpSpPr>
+        <p:cNvPr id="1" name=""/>
+        <p:cNvGrpSpPr/>
+        <p:nvPr/>
+      </p:nvGrpSpPr>
+      <p:grpSpPr/>
+      <p:sp>
+        <p:nvSpPr>
+          <p:cNvPr id="2" name="TextBox 1"/>
+          <p:cNvSpPr txBox="1"/>
+          <p:nvPr/>
+        </p:nvSpPr>
+        <p:spPr>
+          <a:xfrm>
+            <a:off x="914400" y="2377440"/>
+            <a:ext cx="10360152" cy="1280160"/>
+          </a:xfrm>
+          <a:prstGeom prst="rect">
+            <a:avLst/>
+          </a:prstGeom>
+          <a:noFill/>
+        </p:spPr>
+        <p:txBody>
+          <a:bodyPr wrap="square">
+            <a:spAutoFit/>
+          </a:bodyPr>
+          <a:lstStyle/>
+          <a:p>
+            <a:pPr algn="ctr"/>
+            <a:r>
+              <a:rPr sz="4000" b="1">
+                <a:solidFill>
+                  <a:srgbClr val="1F3A5F"/>
+                </a:solidFill>
+              </a:rPr>
+              <a:t>End of Instructor Week 1 Grams</a:t>
+            </a:r>
+          </a:p>
+        </p:txBody>
+      </p:sp>
+      <p:sp>
+        <p:nvSpPr>
+          <p:cNvPr id="3" name="TextBox 2"/>
+          <p:cNvSpPr txBox="1"/>
+          <p:nvPr/>
+        </p:nvSpPr>
+        <p:spPr>
+          <a:xfrm>
+            <a:off x="914400" y="3840480"/>
+            <a:ext cx="10360152" cy="731520"/>
+          </a:xfrm>
+          <a:prstGeom prst="rect">
+            <a:avLst/>
+          </a:prstGeom>
+          <a:noFill/>
+        </p:spPr>
+        <p:txBody>
+          <a:bodyPr wrap="none">
+            <a:spAutoFit/>
+          </a:bodyPr>
+          <a:lstStyle/>
+          <a:p>
+            <a:pPr algn="ctr"/>
+            <a:r>
+              <a:rPr sz="2400">
+                <a:solidFill>
+                  <a:srgbClr val="1F3A5F"/>
+                </a:solidFill>
+              </a:rPr>
+              <a:t>Instructor Version</a:t>
             </a:r>
           </a:p>
         </p:txBody>

--- a/source/Instructor Week 1 Grams/Instructor Week 1 Grams.pptx
+++ b/source/Instructor Week 1 Grams/Instructor Week 1 Grams.pptx
@@ -8,8 +8,6 @@
     <p:sldId id="256" r:id="rId7"/>
     <p:sldId id="257" r:id="rId8"/>
     <p:sldId id="258" r:id="rId9"/>
-    <p:sldId id="259" r:id="rId10"/>
-    <p:sldId id="260" r:id="rId11"/>
   </p:sldIdLst>
   <p:sldSz cx="12188952" cy="6858000" type="screen4x3"/>
   <p:notesSz cx="6858000" cy="9144000"/>
@@ -3094,14 +3092,120 @@
       <p:grpSpPr/>
       <p:sp>
         <p:nvSpPr>
-          <p:cNvPr id="2" name="TextBox 1"/>
+          <p:cNvPr id="2" name="Rectangle 1"/>
+          <p:cNvSpPr/>
+          <p:nvPr/>
+        </p:nvSpPr>
+        <p:spPr>
+          <a:xfrm>
+            <a:off x="0" y="0"/>
+            <a:ext cx="12188952" cy="548640"/>
+          </a:xfrm>
+          <a:prstGeom prst="rect">
+            <a:avLst/>
+          </a:prstGeom>
+          <a:solidFill>
+            <a:srgbClr val="1F3A5F"/>
+          </a:solidFill>
+          <a:ln>
+            <a:noFill/>
+          </a:ln>
+        </p:spPr>
+        <p:style>
+          <a:lnRef idx="1">
+            <a:schemeClr val="accent1"/>
+          </a:lnRef>
+          <a:fillRef idx="3">
+            <a:schemeClr val="accent1"/>
+          </a:fillRef>
+          <a:effectRef idx="2">
+            <a:schemeClr val="accent1"/>
+          </a:effectRef>
+          <a:fontRef idx="minor">
+            <a:schemeClr val="lt1"/>
+          </a:fontRef>
+        </p:style>
+        <p:txBody>
+          <a:bodyPr rtlCol="0" anchor="ctr" lIns="182880" rIns="182880"/>
+          <a:lstStyle/>
+          <a:p>
+            <a:pPr algn="ctr"/>
+            <a:r>
+              <a:rPr sz="2000" b="1">
+                <a:solidFill>
+                  <a:srgbClr val="FFFFFF"/>
+                </a:solidFill>
+              </a:rPr>
+              <a:t>Instructor Week 1 Grams — Page 1 of 3</a:t>
+            </a:r>
+          </a:p>
+        </p:txBody>
+      </p:sp>
+      <p:sp>
+        <p:nvSpPr>
+          <p:cNvPr id="3" name="Rounded Rectangle 2">
+            <a:hlinkClick r:id="rId2"/>
+          </p:cNvPr>
+          <p:cNvSpPr/>
+          <p:nvPr/>
+        </p:nvSpPr>
+        <p:spPr>
+          <a:xfrm>
+            <a:off x="365760" y="731520"/>
+            <a:ext cx="2200046" cy="365760"/>
+          </a:xfrm>
+          <a:prstGeom prst="roundRect">
+            <a:avLst/>
+          </a:prstGeom>
+          <a:solidFill>
+            <a:srgbClr val="E8EEF7"/>
+          </a:solidFill>
+          <a:ln>
+            <a:solidFill>
+              <a:srgbClr val="1F3A5F"/>
+            </a:solidFill>
+          </a:ln>
+        </p:spPr>
+        <p:style>
+          <a:lnRef idx="1">
+            <a:schemeClr val="accent1"/>
+          </a:lnRef>
+          <a:fillRef idx="3">
+            <a:schemeClr val="accent1"/>
+          </a:fillRef>
+          <a:effectRef idx="2">
+            <a:schemeClr val="accent1"/>
+          </a:effectRef>
+          <a:fontRef idx="minor">
+            <a:schemeClr val="lt1"/>
+          </a:fontRef>
+        </p:style>
+        <p:txBody>
+          <a:bodyPr rtlCol="0" anchor="ctr" lIns="45720" rIns="45720"/>
+          <a:lstStyle/>
+          <a:p>
+            <a:pPr algn="ctr"/>
+            <a:r>
+              <a:rPr sz="900">
+                <a:solidFill>
+                  <a:srgbClr val="1F3A5F"/>
+                </a:solidFill>
+              </a:rPr>
+              <a:t>Gram 1: FR Razor Crest, Category 3, Mustafar</a:t>
+            </a:r>
+          </a:p>
+        </p:txBody>
+      </p:sp>
+      <p:sp>
+        <p:nvSpPr>
+          <p:cNvPr id="4" name="TextBox 3"/>
           <p:cNvSpPr txBox="1"/>
           <p:nvPr/>
         </p:nvSpPr>
         <p:spPr>
           <a:xfrm>
-            <a:off x="914400" y="2377440"/>
-            <a:ext cx="10360152" cy="1280160"/>
+            <a:off x="365760" y="1115568"/>
+            <a:ext cx="2200046" cy="1447800"/>
           </a:xfrm>
           <a:prstGeom prst="rect">
             <a:avLst/>
@@ -3114,28 +3218,80 @@
           </a:bodyPr>
           <a:lstStyle/>
           <a:p>
+            <a:r>
+              <a:rPr sz="800">
+                <a:hlinkClick r:id="rId3"/>
+              </a:rPr>
+              <a:t>Lofar 1</a:t>
+            </a:r>
+          </a:p>
+        </p:txBody>
+      </p:sp>
+      <p:sp>
+        <p:nvSpPr>
+          <p:cNvPr id="5" name="Rounded Rectangle 4">
+            <a:hlinkClick r:id="rId4"/>
+          </p:cNvPr>
+          <p:cNvSpPr/>
+          <p:nvPr/>
+        </p:nvSpPr>
+        <p:spPr>
+          <a:xfrm>
+            <a:off x="2657246" y="731520"/>
+            <a:ext cx="2200046" cy="365760"/>
+          </a:xfrm>
+          <a:prstGeom prst="roundRect">
+            <a:avLst/>
+          </a:prstGeom>
+          <a:solidFill>
+            <a:srgbClr val="E8EEF7"/>
+          </a:solidFill>
+          <a:ln>
+            <a:solidFill>
+              <a:srgbClr val="1F3A5F"/>
+            </a:solidFill>
+          </a:ln>
+        </p:spPr>
+        <p:style>
+          <a:lnRef idx="1">
+            <a:schemeClr val="accent1"/>
+          </a:lnRef>
+          <a:fillRef idx="3">
+            <a:schemeClr val="accent1"/>
+          </a:fillRef>
+          <a:effectRef idx="2">
+            <a:schemeClr val="accent1"/>
+          </a:effectRef>
+          <a:fontRef idx="minor">
+            <a:schemeClr val="lt1"/>
+          </a:fontRef>
+        </p:style>
+        <p:txBody>
+          <a:bodyPr rtlCol="0" anchor="ctr" lIns="45720" rIns="45720"/>
+          <a:lstStyle/>
+          <a:p>
             <a:pPr algn="ctr"/>
             <a:r>
-              <a:rPr sz="4000" b="1">
+              <a:rPr sz="900">
                 <a:solidFill>
                   <a:srgbClr val="1F3A5F"/>
                 </a:solidFill>
               </a:rPr>
-              <a:t>Welcome to Instructor Week 1 Grams</a:t>
-            </a:r>
-          </a:p>
-        </p:txBody>
-      </p:sp>
-      <p:sp>
-        <p:nvSpPr>
-          <p:cNvPr id="3" name="TextBox 2"/>
+              <a:t>Gram 2: FR Tantive IV, Category 1, Romulus</a:t>
+            </a:r>
+          </a:p>
+        </p:txBody>
+      </p:sp>
+      <p:sp>
+        <p:nvSpPr>
+          <p:cNvPr id="6" name="TextBox 5"/>
           <p:cNvSpPr txBox="1"/>
           <p:nvPr/>
         </p:nvSpPr>
         <p:spPr>
           <a:xfrm>
-            <a:off x="914400" y="3840480"/>
-            <a:ext cx="10360152" cy="731520"/>
+            <a:off x="2657246" y="1115568"/>
+            <a:ext cx="2200046" cy="1447800"/>
           </a:xfrm>
           <a:prstGeom prst="rect">
             <a:avLst/>
@@ -3143,19 +3299,1302 @@
           <a:noFill/>
         </p:spPr>
         <p:txBody>
-          <a:bodyPr wrap="none">
+          <a:bodyPr wrap="square">
             <a:spAutoFit/>
           </a:bodyPr>
           <a:lstStyle/>
           <a:p>
+            <a:r>
+              <a:rPr sz="800">
+                <a:hlinkClick r:id="rId5"/>
+              </a:rPr>
+              <a:t>Lofar 1</a:t>
+            </a:r>
+          </a:p>
+          <a:p>
+            <a:r>
+              <a:rPr sz="800">
+                <a:hlinkClick r:id="rId6"/>
+              </a:rPr>
+              <a:t>Lofar 2</a:t>
+            </a:r>
+          </a:p>
+          <a:p>
+            <a:r>
+              <a:rPr sz="800">
+                <a:hlinkClick r:id="rId7"/>
+              </a:rPr>
+              <a:t>Lofar 3</a:t>
+            </a:r>
+          </a:p>
+          <a:p>
+            <a:r>
+              <a:rPr sz="800">
+                <a:hlinkClick r:id="rId8"/>
+              </a:rPr>
+              <a:t>Lofar 4</a:t>
+            </a:r>
+          </a:p>
+        </p:txBody>
+      </p:sp>
+      <p:sp>
+        <p:nvSpPr>
+          <p:cNvPr id="7" name="Rounded Rectangle 6">
+            <a:hlinkClick r:id="rId9"/>
+          </p:cNvPr>
+          <p:cNvSpPr/>
+          <p:nvPr/>
+        </p:nvSpPr>
+        <p:spPr>
+          <a:xfrm>
+            <a:off x="4948732" y="731520"/>
+            <a:ext cx="2200046" cy="365760"/>
+          </a:xfrm>
+          <a:prstGeom prst="roundRect">
+            <a:avLst/>
+          </a:prstGeom>
+          <a:solidFill>
+            <a:srgbClr val="E8EEF7"/>
+          </a:solidFill>
+          <a:ln>
+            <a:solidFill>
+              <a:srgbClr val="1F3A5F"/>
+            </a:solidFill>
+          </a:ln>
+        </p:spPr>
+        <p:style>
+          <a:lnRef idx="1">
+            <a:schemeClr val="accent1"/>
+          </a:lnRef>
+          <a:fillRef idx="3">
+            <a:schemeClr val="accent1"/>
+          </a:fillRef>
+          <a:effectRef idx="2">
+            <a:schemeClr val="accent1"/>
+          </a:effectRef>
+          <a:fontRef idx="minor">
+            <a:schemeClr val="lt1"/>
+          </a:fontRef>
+        </p:style>
+        <p:txBody>
+          <a:bodyPr rtlCol="0" anchor="ctr" lIns="45720" rIns="45720"/>
+          <a:lstStyle/>
+          <a:p>
             <a:pPr algn="ctr"/>
             <a:r>
-              <a:rPr sz="2400">
+              <a:rPr sz="900">
                 <a:solidFill>
                   <a:srgbClr val="1F3A5F"/>
                 </a:solidFill>
               </a:rPr>
-              <a:t>Instructor Version</a:t>
+              <a:t>Gram 3: FR Sovereign-class, Category 4, Defiant</a:t>
+            </a:r>
+          </a:p>
+        </p:txBody>
+      </p:sp>
+      <p:sp>
+        <p:nvSpPr>
+          <p:cNvPr id="8" name="TextBox 7"/>
+          <p:cNvSpPr txBox="1"/>
+          <p:nvPr/>
+        </p:nvSpPr>
+        <p:spPr>
+          <a:xfrm>
+            <a:off x="4948732" y="1115568"/>
+            <a:ext cx="2200046" cy="1447800"/>
+          </a:xfrm>
+          <a:prstGeom prst="rect">
+            <a:avLst/>
+          </a:prstGeom>
+          <a:noFill/>
+        </p:spPr>
+        <p:txBody>
+          <a:bodyPr wrap="square">
+            <a:spAutoFit/>
+          </a:bodyPr>
+          <a:lstStyle/>
+          <a:p>
+            <a:r>
+              <a:rPr sz="800">
+                <a:hlinkClick r:id="rId10"/>
+              </a:rPr>
+              <a:t>Lofar 1</a:t>
+            </a:r>
+          </a:p>
+        </p:txBody>
+      </p:sp>
+      <p:sp>
+        <p:nvSpPr>
+          <p:cNvPr id="9" name="Rounded Rectangle 8">
+            <a:hlinkClick r:id="rId11"/>
+          </p:cNvPr>
+          <p:cNvSpPr/>
+          <p:nvPr/>
+        </p:nvSpPr>
+        <p:spPr>
+          <a:xfrm>
+            <a:off x="7240219" y="731520"/>
+            <a:ext cx="2200046" cy="365760"/>
+          </a:xfrm>
+          <a:prstGeom prst="roundRect">
+            <a:avLst/>
+          </a:prstGeom>
+          <a:solidFill>
+            <a:srgbClr val="E8EEF7"/>
+          </a:solidFill>
+          <a:ln>
+            <a:solidFill>
+              <a:srgbClr val="1F3A5F"/>
+            </a:solidFill>
+          </a:ln>
+        </p:spPr>
+        <p:style>
+          <a:lnRef idx="1">
+            <a:schemeClr val="accent1"/>
+          </a:lnRef>
+          <a:fillRef idx="3">
+            <a:schemeClr val="accent1"/>
+          </a:fillRef>
+          <a:effectRef idx="2">
+            <a:schemeClr val="accent1"/>
+          </a:effectRef>
+          <a:fontRef idx="minor">
+            <a:schemeClr val="lt1"/>
+          </a:fontRef>
+        </p:style>
+        <p:txBody>
+          <a:bodyPr rtlCol="0" anchor="ctr" lIns="45720" rIns="45720"/>
+          <a:lstStyle/>
+          <a:p>
+            <a:pPr algn="ctr"/>
+            <a:r>
+              <a:rPr sz="900">
+                <a:solidFill>
+                  <a:srgbClr val="1F3A5F"/>
+                </a:solidFill>
+              </a:rPr>
+              <a:t>Gram 4: FR Cerritos, Category 3, Coruscant</a:t>
+            </a:r>
+          </a:p>
+        </p:txBody>
+      </p:sp>
+      <p:sp>
+        <p:nvSpPr>
+          <p:cNvPr id="10" name="TextBox 9"/>
+          <p:cNvSpPr txBox="1"/>
+          <p:nvPr/>
+        </p:nvSpPr>
+        <p:spPr>
+          <a:xfrm>
+            <a:off x="7240219" y="1115568"/>
+            <a:ext cx="2200046" cy="1447800"/>
+          </a:xfrm>
+          <a:prstGeom prst="rect">
+            <a:avLst/>
+          </a:prstGeom>
+          <a:noFill/>
+        </p:spPr>
+        <p:txBody>
+          <a:bodyPr wrap="square">
+            <a:spAutoFit/>
+          </a:bodyPr>
+          <a:lstStyle/>
+          <a:p>
+            <a:r>
+              <a:rPr sz="800">
+                <a:hlinkClick r:id="rId12"/>
+              </a:rPr>
+              <a:t>Lofar 1</a:t>
+            </a:r>
+          </a:p>
+          <a:p>
+            <a:r>
+              <a:rPr sz="800">
+                <a:hlinkClick r:id="rId13"/>
+              </a:rPr>
+              <a:t>Lofar 2</a:t>
+            </a:r>
+          </a:p>
+        </p:txBody>
+      </p:sp>
+      <p:sp>
+        <p:nvSpPr>
+          <p:cNvPr id="11" name="Rounded Rectangle 10">
+            <a:hlinkClick r:id="rId14"/>
+          </p:cNvPr>
+          <p:cNvSpPr/>
+          <p:nvPr/>
+        </p:nvSpPr>
+        <p:spPr>
+          <a:xfrm>
+            <a:off x="9531705" y="731520"/>
+            <a:ext cx="2200046" cy="365760"/>
+          </a:xfrm>
+          <a:prstGeom prst="roundRect">
+            <a:avLst/>
+          </a:prstGeom>
+          <a:solidFill>
+            <a:srgbClr val="E8EEF7"/>
+          </a:solidFill>
+          <a:ln>
+            <a:solidFill>
+              <a:srgbClr val="1F3A5F"/>
+            </a:solidFill>
+          </a:ln>
+        </p:spPr>
+        <p:style>
+          <a:lnRef idx="1">
+            <a:schemeClr val="accent1"/>
+          </a:lnRef>
+          <a:fillRef idx="3">
+            <a:schemeClr val="accent1"/>
+          </a:fillRef>
+          <a:effectRef idx="2">
+            <a:schemeClr val="accent1"/>
+          </a:effectRef>
+          <a:fontRef idx="minor">
+            <a:schemeClr val="lt1"/>
+          </a:fontRef>
+        </p:style>
+        <p:txBody>
+          <a:bodyPr rtlCol="0" anchor="ctr" lIns="45720" rIns="45720"/>
+          <a:lstStyle/>
+          <a:p>
+            <a:pPr algn="ctr"/>
+            <a:r>
+              <a:rPr sz="900">
+                <a:solidFill>
+                  <a:srgbClr val="1F3A5F"/>
+                </a:solidFill>
+              </a:rPr>
+              <a:t>Gram 5: FR Y-wing, Category 3, Gandalf</a:t>
+            </a:r>
+          </a:p>
+        </p:txBody>
+      </p:sp>
+      <p:sp>
+        <p:nvSpPr>
+          <p:cNvPr id="12" name="TextBox 11"/>
+          <p:cNvSpPr txBox="1"/>
+          <p:nvPr/>
+        </p:nvSpPr>
+        <p:spPr>
+          <a:xfrm>
+            <a:off x="9531705" y="1115568"/>
+            <a:ext cx="2200046" cy="1447800"/>
+          </a:xfrm>
+          <a:prstGeom prst="rect">
+            <a:avLst/>
+          </a:prstGeom>
+          <a:noFill/>
+        </p:spPr>
+        <p:txBody>
+          <a:bodyPr wrap="square">
+            <a:spAutoFit/>
+          </a:bodyPr>
+          <a:lstStyle/>
+          <a:p>
+            <a:r>
+              <a:rPr sz="800">
+                <a:hlinkClick r:id="rId15"/>
+              </a:rPr>
+              <a:t>Lofar 1</a:t>
+            </a:r>
+          </a:p>
+        </p:txBody>
+      </p:sp>
+      <p:sp>
+        <p:nvSpPr>
+          <p:cNvPr id="13" name="Rounded Rectangle 12">
+            <a:hlinkClick r:id="rId16"/>
+          </p:cNvPr>
+          <p:cNvSpPr/>
+          <p:nvPr/>
+        </p:nvSpPr>
+        <p:spPr>
+          <a:xfrm>
+            <a:off x="365760" y="2682240"/>
+            <a:ext cx="2200046" cy="365760"/>
+          </a:xfrm>
+          <a:prstGeom prst="roundRect">
+            <a:avLst/>
+          </a:prstGeom>
+          <a:solidFill>
+            <a:srgbClr val="E8EEF7"/>
+          </a:solidFill>
+          <a:ln>
+            <a:solidFill>
+              <a:srgbClr val="1F3A5F"/>
+            </a:solidFill>
+          </a:ln>
+        </p:spPr>
+        <p:style>
+          <a:lnRef idx="1">
+            <a:schemeClr val="accent1"/>
+          </a:lnRef>
+          <a:fillRef idx="3">
+            <a:schemeClr val="accent1"/>
+          </a:fillRef>
+          <a:effectRef idx="2">
+            <a:schemeClr val="accent1"/>
+          </a:effectRef>
+          <a:fontRef idx="minor">
+            <a:schemeClr val="lt1"/>
+          </a:fontRef>
+        </p:style>
+        <p:txBody>
+          <a:bodyPr rtlCol="0" anchor="ctr" lIns="45720" rIns="45720"/>
+          <a:lstStyle/>
+          <a:p>
+            <a:pPr algn="ctr"/>
+            <a:r>
+              <a:rPr sz="900">
+                <a:solidFill>
+                  <a:srgbClr val="1F3A5F"/>
+                </a:solidFill>
+              </a:rPr>
+              <a:t>Gram 6: FR Constitution-class, Category 2, Cardassia</a:t>
+            </a:r>
+          </a:p>
+        </p:txBody>
+      </p:sp>
+      <p:sp>
+        <p:nvSpPr>
+          <p:cNvPr id="14" name="TextBox 13"/>
+          <p:cNvSpPr txBox="1"/>
+          <p:nvPr/>
+        </p:nvSpPr>
+        <p:spPr>
+          <a:xfrm>
+            <a:off x="365760" y="3066288"/>
+            <a:ext cx="2200046" cy="1447800"/>
+          </a:xfrm>
+          <a:prstGeom prst="rect">
+            <a:avLst/>
+          </a:prstGeom>
+          <a:noFill/>
+        </p:spPr>
+        <p:txBody>
+          <a:bodyPr wrap="square">
+            <a:spAutoFit/>
+          </a:bodyPr>
+          <a:lstStyle/>
+          <a:p>
+            <a:r>
+              <a:rPr sz="800">
+                <a:hlinkClick r:id="rId17"/>
+              </a:rPr>
+              <a:t>Lofar 1</a:t>
+            </a:r>
+          </a:p>
+          <a:p>
+            <a:r>
+              <a:rPr sz="800">
+                <a:hlinkClick r:id="rId18"/>
+              </a:rPr>
+              <a:t>Lofar 2</a:t>
+            </a:r>
+          </a:p>
+          <a:p>
+            <a:r>
+              <a:rPr sz="800">
+                <a:hlinkClick r:id="rId19"/>
+              </a:rPr>
+              <a:t>Lofar 3</a:t>
+            </a:r>
+          </a:p>
+        </p:txBody>
+      </p:sp>
+      <p:sp>
+        <p:nvSpPr>
+          <p:cNvPr id="15" name="Rounded Rectangle 14">
+            <a:hlinkClick r:id="rId20"/>
+          </p:cNvPr>
+          <p:cNvSpPr/>
+          <p:nvPr/>
+        </p:nvSpPr>
+        <p:spPr>
+          <a:xfrm>
+            <a:off x="2657246" y="2682240"/>
+            <a:ext cx="2200046" cy="365760"/>
+          </a:xfrm>
+          <a:prstGeom prst="roundRect">
+            <a:avLst/>
+          </a:prstGeom>
+          <a:solidFill>
+            <a:srgbClr val="E8EEF7"/>
+          </a:solidFill>
+          <a:ln>
+            <a:solidFill>
+              <a:srgbClr val="1F3A5F"/>
+            </a:solidFill>
+          </a:ln>
+        </p:spPr>
+        <p:style>
+          <a:lnRef idx="1">
+            <a:schemeClr val="accent1"/>
+          </a:lnRef>
+          <a:fillRef idx="3">
+            <a:schemeClr val="accent1"/>
+          </a:fillRef>
+          <a:effectRef idx="2">
+            <a:schemeClr val="accent1"/>
+          </a:effectRef>
+          <a:fontRef idx="minor">
+            <a:schemeClr val="lt1"/>
+          </a:fontRef>
+        </p:style>
+        <p:txBody>
+          <a:bodyPr rtlCol="0" anchor="ctr" lIns="45720" rIns="45720"/>
+          <a:lstStyle/>
+          <a:p>
+            <a:pPr algn="ctr"/>
+            <a:r>
+              <a:rPr sz="900">
+                <a:solidFill>
+                  <a:srgbClr val="1F3A5F"/>
+                </a:solidFill>
+              </a:rPr>
+              <a:t>Gram 7: Lambda Shuttle contact bearing 152, codename Tatooine</a:t>
+            </a:r>
+          </a:p>
+        </p:txBody>
+      </p:sp>
+      <p:sp>
+        <p:nvSpPr>
+          <p:cNvPr id="16" name="TextBox 15"/>
+          <p:cNvSpPr txBox="1"/>
+          <p:nvPr/>
+        </p:nvSpPr>
+        <p:spPr>
+          <a:xfrm>
+            <a:off x="2657246" y="3066288"/>
+            <a:ext cx="2200046" cy="1447800"/>
+          </a:xfrm>
+          <a:prstGeom prst="rect">
+            <a:avLst/>
+          </a:prstGeom>
+          <a:noFill/>
+        </p:spPr>
+        <p:txBody>
+          <a:bodyPr wrap="square">
+            <a:spAutoFit/>
+          </a:bodyPr>
+          <a:lstStyle/>
+          <a:p>
+            <a:r>
+              <a:rPr sz="800">
+                <a:hlinkClick r:id="rId21"/>
+              </a:rPr>
+              <a:t>Lofar 1</a:t>
+            </a:r>
+          </a:p>
+        </p:txBody>
+      </p:sp>
+      <p:sp>
+        <p:nvSpPr>
+          <p:cNvPr id="17" name="Rounded Rectangle 16">
+            <a:hlinkClick r:id="rId22"/>
+          </p:cNvPr>
+          <p:cNvSpPr/>
+          <p:nvPr/>
+        </p:nvSpPr>
+        <p:spPr>
+          <a:xfrm>
+            <a:off x="4948732" y="2682240"/>
+            <a:ext cx="2200046" cy="365760"/>
+          </a:xfrm>
+          <a:prstGeom prst="roundRect">
+            <a:avLst/>
+          </a:prstGeom>
+          <a:solidFill>
+            <a:srgbClr val="E8EEF7"/>
+          </a:solidFill>
+          <a:ln>
+            <a:solidFill>
+              <a:srgbClr val="1F3A5F"/>
+            </a:solidFill>
+          </a:ln>
+        </p:spPr>
+        <p:style>
+          <a:lnRef idx="1">
+            <a:schemeClr val="accent1"/>
+          </a:lnRef>
+          <a:fillRef idx="3">
+            <a:schemeClr val="accent1"/>
+          </a:fillRef>
+          <a:effectRef idx="2">
+            <a:schemeClr val="accent1"/>
+          </a:effectRef>
+          <a:fontRef idx="minor">
+            <a:schemeClr val="lt1"/>
+          </a:fontRef>
+        </p:style>
+        <p:txBody>
+          <a:bodyPr rtlCol="0" anchor="ctr" lIns="45720" rIns="45720"/>
+          <a:lstStyle/>
+          <a:p>
+            <a:pPr algn="ctr"/>
+            <a:r>
+              <a:rPr sz="900">
+                <a:solidFill>
+                  <a:srgbClr val="1F3A5F"/>
+                </a:solidFill>
+              </a:rPr>
+              <a:t>Gram 8: FR Y-wing, Category 1, Betazed</a:t>
+            </a:r>
+          </a:p>
+        </p:txBody>
+      </p:sp>
+      <p:sp>
+        <p:nvSpPr>
+          <p:cNvPr id="18" name="TextBox 17"/>
+          <p:cNvSpPr txBox="1"/>
+          <p:nvPr/>
+        </p:nvSpPr>
+        <p:spPr>
+          <a:xfrm>
+            <a:off x="4948732" y="3066288"/>
+            <a:ext cx="2200046" cy="1447800"/>
+          </a:xfrm>
+          <a:prstGeom prst="rect">
+            <a:avLst/>
+          </a:prstGeom>
+          <a:noFill/>
+        </p:spPr>
+        <p:txBody>
+          <a:bodyPr wrap="square">
+            <a:spAutoFit/>
+          </a:bodyPr>
+          <a:lstStyle/>
+          <a:p>
+            <a:r>
+              <a:rPr sz="800">
+                <a:hlinkClick r:id="rId23"/>
+              </a:rPr>
+              <a:t>Lofar 1</a:t>
+            </a:r>
+          </a:p>
+        </p:txBody>
+      </p:sp>
+      <p:sp>
+        <p:nvSpPr>
+          <p:cNvPr id="19" name="Rounded Rectangle 18">
+            <a:hlinkClick r:id="rId24"/>
+          </p:cNvPr>
+          <p:cNvSpPr/>
+          <p:nvPr/>
+        </p:nvSpPr>
+        <p:spPr>
+          <a:xfrm>
+            <a:off x="7240219" y="2682240"/>
+            <a:ext cx="2200046" cy="365760"/>
+          </a:xfrm>
+          <a:prstGeom prst="roundRect">
+            <a:avLst/>
+          </a:prstGeom>
+          <a:solidFill>
+            <a:srgbClr val="E8EEF7"/>
+          </a:solidFill>
+          <a:ln>
+            <a:solidFill>
+              <a:srgbClr val="1F3A5F"/>
+            </a:solidFill>
+          </a:ln>
+        </p:spPr>
+        <p:style>
+          <a:lnRef idx="1">
+            <a:schemeClr val="accent1"/>
+          </a:lnRef>
+          <a:fillRef idx="3">
+            <a:schemeClr val="accent1"/>
+          </a:fillRef>
+          <a:effectRef idx="2">
+            <a:schemeClr val="accent1"/>
+          </a:effectRef>
+          <a:fontRef idx="minor">
+            <a:schemeClr val="lt1"/>
+          </a:fontRef>
+        </p:style>
+        <p:txBody>
+          <a:bodyPr rtlCol="0" anchor="ctr" lIns="45720" rIns="45720"/>
+          <a:lstStyle/>
+          <a:p>
+            <a:pPr algn="ctr"/>
+            <a:r>
+              <a:rPr sz="900">
+                <a:solidFill>
+                  <a:srgbClr val="1F3A5F"/>
+                </a:solidFill>
+              </a:rPr>
+              <a:t>Gram 9: FR Venator-class, Category 4, Kobol</a:t>
+            </a:r>
+          </a:p>
+        </p:txBody>
+      </p:sp>
+      <p:sp>
+        <p:nvSpPr>
+          <p:cNvPr id="20" name="TextBox 19"/>
+          <p:cNvSpPr txBox="1"/>
+          <p:nvPr/>
+        </p:nvSpPr>
+        <p:spPr>
+          <a:xfrm>
+            <a:off x="7240219" y="3066288"/>
+            <a:ext cx="2200046" cy="1447800"/>
+          </a:xfrm>
+          <a:prstGeom prst="rect">
+            <a:avLst/>
+          </a:prstGeom>
+          <a:noFill/>
+        </p:spPr>
+        <p:txBody>
+          <a:bodyPr wrap="square">
+            <a:spAutoFit/>
+          </a:bodyPr>
+          <a:lstStyle/>
+          <a:p>
+            <a:r>
+              <a:rPr sz="800">
+                <a:hlinkClick r:id="rId25"/>
+              </a:rPr>
+              <a:t>Lofar 1</a:t>
+            </a:r>
+          </a:p>
+          <a:p>
+            <a:r>
+              <a:rPr sz="800">
+                <a:hlinkClick r:id="rId26"/>
+              </a:rPr>
+              <a:t>Lofar 2</a:t>
+            </a:r>
+          </a:p>
+          <a:p>
+            <a:r>
+              <a:rPr sz="800">
+                <a:hlinkClick r:id="rId27"/>
+              </a:rPr>
+              <a:t>Lofar 3</a:t>
+            </a:r>
+          </a:p>
+          <a:p>
+            <a:r>
+              <a:rPr sz="800">
+                <a:hlinkClick r:id="rId28"/>
+              </a:rPr>
+              <a:t>Lofar 4</a:t>
+            </a:r>
+          </a:p>
+        </p:txBody>
+      </p:sp>
+      <p:sp>
+        <p:nvSpPr>
+          <p:cNvPr id="21" name="Rounded Rectangle 20">
+            <a:hlinkClick r:id="rId29"/>
+          </p:cNvPr>
+          <p:cNvSpPr/>
+          <p:nvPr/>
+        </p:nvSpPr>
+        <p:spPr>
+          <a:xfrm>
+            <a:off x="9531705" y="2682240"/>
+            <a:ext cx="2200046" cy="365760"/>
+          </a:xfrm>
+          <a:prstGeom prst="roundRect">
+            <a:avLst/>
+          </a:prstGeom>
+          <a:solidFill>
+            <a:srgbClr val="E8EEF7"/>
+          </a:solidFill>
+          <a:ln>
+            <a:solidFill>
+              <a:srgbClr val="1F3A5F"/>
+            </a:solidFill>
+          </a:ln>
+        </p:spPr>
+        <p:style>
+          <a:lnRef idx="1">
+            <a:schemeClr val="accent1"/>
+          </a:lnRef>
+          <a:fillRef idx="3">
+            <a:schemeClr val="accent1"/>
+          </a:fillRef>
+          <a:effectRef idx="2">
+            <a:schemeClr val="accent1"/>
+          </a:effectRef>
+          <a:fontRef idx="minor">
+            <a:schemeClr val="lt1"/>
+          </a:fontRef>
+        </p:style>
+        <p:txBody>
+          <a:bodyPr rtlCol="0" anchor="ctr" lIns="45720" rIns="45720"/>
+          <a:lstStyle/>
+          <a:p>
+            <a:pPr algn="ctr"/>
+            <a:r>
+              <a:rPr sz="900">
+                <a:solidFill>
+                  <a:srgbClr val="1F3A5F"/>
+                </a:solidFill>
+              </a:rPr>
+              <a:t>Gram 11: FR Sovereign-class, Category 4, Bespin</a:t>
+            </a:r>
+          </a:p>
+        </p:txBody>
+      </p:sp>
+      <p:sp>
+        <p:nvSpPr>
+          <p:cNvPr id="22" name="TextBox 21"/>
+          <p:cNvSpPr txBox="1"/>
+          <p:nvPr/>
+        </p:nvSpPr>
+        <p:spPr>
+          <a:xfrm>
+            <a:off x="9531705" y="3066288"/>
+            <a:ext cx="2200046" cy="1447800"/>
+          </a:xfrm>
+          <a:prstGeom prst="rect">
+            <a:avLst/>
+          </a:prstGeom>
+          <a:noFill/>
+        </p:spPr>
+        <p:txBody>
+          <a:bodyPr wrap="square">
+            <a:spAutoFit/>
+          </a:bodyPr>
+          <a:lstStyle/>
+          <a:p>
+            <a:r>
+              <a:rPr sz="800">
+                <a:hlinkClick r:id="rId30"/>
+              </a:rPr>
+              <a:t>Lofar 1</a:t>
+            </a:r>
+          </a:p>
+        </p:txBody>
+      </p:sp>
+      <p:sp>
+        <p:nvSpPr>
+          <p:cNvPr id="23" name="Rounded Rectangle 22">
+            <a:hlinkClick r:id="rId31"/>
+          </p:cNvPr>
+          <p:cNvSpPr/>
+          <p:nvPr/>
+        </p:nvSpPr>
+        <p:spPr>
+          <a:xfrm>
+            <a:off x="365760" y="4632960"/>
+            <a:ext cx="2200046" cy="365760"/>
+          </a:xfrm>
+          <a:prstGeom prst="roundRect">
+            <a:avLst/>
+          </a:prstGeom>
+          <a:solidFill>
+            <a:srgbClr val="E8EEF7"/>
+          </a:solidFill>
+          <a:ln>
+            <a:solidFill>
+              <a:srgbClr val="1F3A5F"/>
+            </a:solidFill>
+          </a:ln>
+        </p:spPr>
+        <p:style>
+          <a:lnRef idx="1">
+            <a:schemeClr val="accent1"/>
+          </a:lnRef>
+          <a:fillRef idx="3">
+            <a:schemeClr val="accent1"/>
+          </a:fillRef>
+          <a:effectRef idx="2">
+            <a:schemeClr val="accent1"/>
+          </a:effectRef>
+          <a:fontRef idx="minor">
+            <a:schemeClr val="lt1"/>
+          </a:fontRef>
+        </p:style>
+        <p:txBody>
+          <a:bodyPr rtlCol="0" anchor="ctr" lIns="45720" rIns="45720"/>
+          <a:lstStyle/>
+          <a:p>
+            <a:pPr algn="ctr"/>
+            <a:r>
+              <a:rPr sz="900">
+                <a:solidFill>
+                  <a:srgbClr val="1F3A5F"/>
+                </a:solidFill>
+              </a:rPr>
+              <a:t>Gram 13: Razor Crest contact bearing 010, codename Bajor</a:t>
+            </a:r>
+          </a:p>
+        </p:txBody>
+      </p:sp>
+      <p:sp>
+        <p:nvSpPr>
+          <p:cNvPr id="24" name="TextBox 23"/>
+          <p:cNvSpPr txBox="1"/>
+          <p:nvPr/>
+        </p:nvSpPr>
+        <p:spPr>
+          <a:xfrm>
+            <a:off x="365760" y="5017008"/>
+            <a:ext cx="2200046" cy="1447800"/>
+          </a:xfrm>
+          <a:prstGeom prst="rect">
+            <a:avLst/>
+          </a:prstGeom>
+          <a:noFill/>
+        </p:spPr>
+        <p:txBody>
+          <a:bodyPr wrap="square">
+            <a:spAutoFit/>
+          </a:bodyPr>
+          <a:lstStyle/>
+          <a:p>
+            <a:r>
+              <a:rPr sz="800">
+                <a:hlinkClick r:id="rId32"/>
+              </a:rPr>
+              <a:t>Lofar 1</a:t>
+            </a:r>
+          </a:p>
+          <a:p>
+            <a:r>
+              <a:rPr sz="800">
+                <a:hlinkClick r:id="rId33"/>
+              </a:rPr>
+              <a:t>Lofar 2</a:t>
+            </a:r>
+          </a:p>
+          <a:p>
+            <a:r>
+              <a:rPr sz="800">
+                <a:hlinkClick r:id="rId34"/>
+              </a:rPr>
+              <a:t>Lofar 3</a:t>
+            </a:r>
+          </a:p>
+          <a:p>
+            <a:r>
+              <a:rPr sz="800">
+                <a:hlinkClick r:id="rId35"/>
+              </a:rPr>
+              <a:t>Lofar 4</a:t>
+            </a:r>
+          </a:p>
+        </p:txBody>
+      </p:sp>
+      <p:sp>
+        <p:nvSpPr>
+          <p:cNvPr id="25" name="Rounded Rectangle 24">
+            <a:hlinkClick r:id="rId36"/>
+          </p:cNvPr>
+          <p:cNvSpPr/>
+          <p:nvPr/>
+        </p:nvSpPr>
+        <p:spPr>
+          <a:xfrm>
+            <a:off x="2657246" y="4632960"/>
+            <a:ext cx="2200046" cy="365760"/>
+          </a:xfrm>
+          <a:prstGeom prst="roundRect">
+            <a:avLst/>
+          </a:prstGeom>
+          <a:solidFill>
+            <a:srgbClr val="E8EEF7"/>
+          </a:solidFill>
+          <a:ln>
+            <a:solidFill>
+              <a:srgbClr val="1F3A5F"/>
+            </a:solidFill>
+          </a:ln>
+        </p:spPr>
+        <p:style>
+          <a:lnRef idx="1">
+            <a:schemeClr val="accent1"/>
+          </a:lnRef>
+          <a:fillRef idx="3">
+            <a:schemeClr val="accent1"/>
+          </a:fillRef>
+          <a:effectRef idx="2">
+            <a:schemeClr val="accent1"/>
+          </a:effectRef>
+          <a:fontRef idx="minor">
+            <a:schemeClr val="lt1"/>
+          </a:fontRef>
+        </p:style>
+        <p:txBody>
+          <a:bodyPr rtlCol="0" anchor="ctr" lIns="45720" rIns="45720"/>
+          <a:lstStyle/>
+          <a:p>
+            <a:pPr algn="ctr"/>
+            <a:r>
+              <a:rPr sz="900">
+                <a:solidFill>
+                  <a:srgbClr val="1F3A5F"/>
+                </a:solidFill>
+              </a:rPr>
+              <a:t>Gram 14: FR Defiant-class, Category 3, Romulus</a:t>
+            </a:r>
+          </a:p>
+        </p:txBody>
+      </p:sp>
+      <p:sp>
+        <p:nvSpPr>
+          <p:cNvPr id="26" name="TextBox 25"/>
+          <p:cNvSpPr txBox="1"/>
+          <p:nvPr/>
+        </p:nvSpPr>
+        <p:spPr>
+          <a:xfrm>
+            <a:off x="2657246" y="5017008"/>
+            <a:ext cx="2200046" cy="1447800"/>
+          </a:xfrm>
+          <a:prstGeom prst="rect">
+            <a:avLst/>
+          </a:prstGeom>
+          <a:noFill/>
+        </p:spPr>
+        <p:txBody>
+          <a:bodyPr wrap="square">
+            <a:spAutoFit/>
+          </a:bodyPr>
+          <a:lstStyle/>
+          <a:p>
+            <a:r>
+              <a:rPr sz="800">
+                <a:hlinkClick r:id="rId37"/>
+              </a:rPr>
+              <a:t>Lofar 1</a:t>
+            </a:r>
+          </a:p>
+          <a:p>
+            <a:r>
+              <a:rPr sz="800">
+                <a:hlinkClick r:id="rId38"/>
+              </a:rPr>
+              <a:t>Lofar 2</a:t>
+            </a:r>
+          </a:p>
+          <a:p>
+            <a:r>
+              <a:rPr sz="800">
+                <a:hlinkClick r:id="rId39"/>
+              </a:rPr>
+              <a:t>Lofar 3</a:t>
+            </a:r>
+          </a:p>
+          <a:p>
+            <a:r>
+              <a:rPr sz="800">
+                <a:hlinkClick r:id="rId40"/>
+              </a:rPr>
+              <a:t>Lofar 4</a:t>
+            </a:r>
+          </a:p>
+        </p:txBody>
+      </p:sp>
+      <p:sp>
+        <p:nvSpPr>
+          <p:cNvPr id="27" name="Rounded Rectangle 26">
+            <a:hlinkClick r:id="rId41"/>
+          </p:cNvPr>
+          <p:cNvSpPr/>
+          <p:nvPr/>
+        </p:nvSpPr>
+        <p:spPr>
+          <a:xfrm>
+            <a:off x="4948732" y="4632960"/>
+            <a:ext cx="2200046" cy="365760"/>
+          </a:xfrm>
+          <a:prstGeom prst="roundRect">
+            <a:avLst/>
+          </a:prstGeom>
+          <a:solidFill>
+            <a:srgbClr val="E8EEF7"/>
+          </a:solidFill>
+          <a:ln>
+            <a:solidFill>
+              <a:srgbClr val="1F3A5F"/>
+            </a:solidFill>
+          </a:ln>
+        </p:spPr>
+        <p:style>
+          <a:lnRef idx="1">
+            <a:schemeClr val="accent1"/>
+          </a:lnRef>
+          <a:fillRef idx="3">
+            <a:schemeClr val="accent1"/>
+          </a:fillRef>
+          <a:effectRef idx="2">
+            <a:schemeClr val="accent1"/>
+          </a:effectRef>
+          <a:fontRef idx="minor">
+            <a:schemeClr val="lt1"/>
+          </a:fontRef>
+        </p:style>
+        <p:txBody>
+          <a:bodyPr rtlCol="0" anchor="ctr" lIns="45720" rIns="45720"/>
+          <a:lstStyle/>
+          <a:p>
+            <a:pPr algn="ctr"/>
+            <a:r>
+              <a:rPr sz="900">
+                <a:solidFill>
+                  <a:srgbClr val="1F3A5F"/>
+                </a:solidFill>
+              </a:rPr>
+              <a:t>Gram 15: FR Acclamator-class, Category 3, Dank</a:t>
+            </a:r>
+          </a:p>
+        </p:txBody>
+      </p:sp>
+      <p:sp>
+        <p:nvSpPr>
+          <p:cNvPr id="28" name="TextBox 27"/>
+          <p:cNvSpPr txBox="1"/>
+          <p:nvPr/>
+        </p:nvSpPr>
+        <p:spPr>
+          <a:xfrm>
+            <a:off x="4948732" y="5017008"/>
+            <a:ext cx="2200046" cy="1447800"/>
+          </a:xfrm>
+          <a:prstGeom prst="rect">
+            <a:avLst/>
+          </a:prstGeom>
+          <a:noFill/>
+        </p:spPr>
+        <p:txBody>
+          <a:bodyPr wrap="square">
+            <a:spAutoFit/>
+          </a:bodyPr>
+          <a:lstStyle/>
+          <a:p>
+            <a:r>
+              <a:rPr sz="800">
+                <a:hlinkClick r:id="rId42"/>
+              </a:rPr>
+              <a:t>Lofar 1</a:t>
+            </a:r>
+          </a:p>
+          <a:p>
+            <a:r>
+              <a:rPr sz="800">
+                <a:hlinkClick r:id="rId43"/>
+              </a:rPr>
+              <a:t>Lofar 2</a:t>
+            </a:r>
+          </a:p>
+          <a:p>
+            <a:r>
+              <a:rPr sz="800">
+                <a:hlinkClick r:id="rId44"/>
+              </a:rPr>
+              <a:t>Lofar 3</a:t>
+            </a:r>
+          </a:p>
+        </p:txBody>
+      </p:sp>
+      <p:sp>
+        <p:nvSpPr>
+          <p:cNvPr id="29" name="Rounded Rectangle 28">
+            <a:hlinkClick r:id="rId45"/>
+          </p:cNvPr>
+          <p:cNvSpPr/>
+          <p:nvPr/>
+        </p:nvSpPr>
+        <p:spPr>
+          <a:xfrm>
+            <a:off x="7240219" y="4632960"/>
+            <a:ext cx="2200046" cy="365760"/>
+          </a:xfrm>
+          <a:prstGeom prst="roundRect">
+            <a:avLst/>
+          </a:prstGeom>
+          <a:solidFill>
+            <a:srgbClr val="E8EEF7"/>
+          </a:solidFill>
+          <a:ln>
+            <a:solidFill>
+              <a:srgbClr val="1F3A5F"/>
+            </a:solidFill>
+          </a:ln>
+        </p:spPr>
+        <p:style>
+          <a:lnRef idx="1">
+            <a:schemeClr val="accent1"/>
+          </a:lnRef>
+          <a:fillRef idx="3">
+            <a:schemeClr val="accent1"/>
+          </a:fillRef>
+          <a:effectRef idx="2">
+            <a:schemeClr val="accent1"/>
+          </a:effectRef>
+          <a:fontRef idx="minor">
+            <a:schemeClr val="lt1"/>
+          </a:fontRef>
+        </p:style>
+        <p:txBody>
+          <a:bodyPr rtlCol="0" anchor="ctr" lIns="45720" rIns="45720"/>
+          <a:lstStyle/>
+          <a:p>
+            <a:pPr algn="ctr"/>
+            <a:r>
+              <a:rPr sz="900">
+                <a:solidFill>
+                  <a:srgbClr val="1F3A5F"/>
+                </a:solidFill>
+              </a:rPr>
+              <a:t>Gram 16: FR Reliant, Category 1, Dank</a:t>
+            </a:r>
+          </a:p>
+        </p:txBody>
+      </p:sp>
+      <p:sp>
+        <p:nvSpPr>
+          <p:cNvPr id="30" name="TextBox 29"/>
+          <p:cNvSpPr txBox="1"/>
+          <p:nvPr/>
+        </p:nvSpPr>
+        <p:spPr>
+          <a:xfrm>
+            <a:off x="7240219" y="5017008"/>
+            <a:ext cx="2200046" cy="1447800"/>
+          </a:xfrm>
+          <a:prstGeom prst="rect">
+            <a:avLst/>
+          </a:prstGeom>
+          <a:noFill/>
+        </p:spPr>
+        <p:txBody>
+          <a:bodyPr wrap="square">
+            <a:spAutoFit/>
+          </a:bodyPr>
+          <a:lstStyle/>
+          <a:p>
+            <a:r>
+              <a:rPr sz="800">
+                <a:hlinkClick r:id="rId46"/>
+              </a:rPr>
+              <a:t>Lofar 1</a:t>
+            </a:r>
+          </a:p>
+          <a:p>
+            <a:r>
+              <a:rPr sz="800">
+                <a:hlinkClick r:id="rId47"/>
+              </a:rPr>
+              <a:t>Lofar 2</a:t>
+            </a:r>
+          </a:p>
+          <a:p>
+            <a:r>
+              <a:rPr sz="800">
+                <a:hlinkClick r:id="rId48"/>
+              </a:rPr>
+              <a:t>Lofar 3</a:t>
+            </a:r>
+          </a:p>
+        </p:txBody>
+      </p:sp>
+      <p:sp>
+        <p:nvSpPr>
+          <p:cNvPr id="31" name="Rounded Rectangle 30">
+            <a:hlinkClick r:id="rId49"/>
+          </p:cNvPr>
+          <p:cNvSpPr/>
+          <p:nvPr/>
+        </p:nvSpPr>
+        <p:spPr>
+          <a:xfrm>
+            <a:off x="9531705" y="4632960"/>
+            <a:ext cx="2200046" cy="365760"/>
+          </a:xfrm>
+          <a:prstGeom prst="roundRect">
+            <a:avLst/>
+          </a:prstGeom>
+          <a:solidFill>
+            <a:srgbClr val="E8EEF7"/>
+          </a:solidFill>
+          <a:ln>
+            <a:solidFill>
+              <a:srgbClr val="1F3A5F"/>
+            </a:solidFill>
+          </a:ln>
+        </p:spPr>
+        <p:style>
+          <a:lnRef idx="1">
+            <a:schemeClr val="accent1"/>
+          </a:lnRef>
+          <a:fillRef idx="3">
+            <a:schemeClr val="accent1"/>
+          </a:fillRef>
+          <a:effectRef idx="2">
+            <a:schemeClr val="accent1"/>
+          </a:effectRef>
+          <a:fontRef idx="minor">
+            <a:schemeClr val="lt1"/>
+          </a:fontRef>
+        </p:style>
+        <p:txBody>
+          <a:bodyPr rtlCol="0" anchor="ctr" lIns="45720" rIns="45720"/>
+          <a:lstStyle/>
+          <a:p>
+            <a:pPr algn="ctr"/>
+            <a:r>
+              <a:rPr sz="900">
+                <a:solidFill>
+                  <a:srgbClr val="1F3A5F"/>
+                </a:solidFill>
+              </a:rPr>
+              <a:t>Gram 17: FR Y-wing, Category 4, Hoth</a:t>
+            </a:r>
+          </a:p>
+        </p:txBody>
+      </p:sp>
+      <p:sp>
+        <p:nvSpPr>
+          <p:cNvPr id="32" name="TextBox 31"/>
+          <p:cNvSpPr txBox="1"/>
+          <p:nvPr/>
+        </p:nvSpPr>
+        <p:spPr>
+          <a:xfrm>
+            <a:off x="9531705" y="5017008"/>
+            <a:ext cx="2200046" cy="1447800"/>
+          </a:xfrm>
+          <a:prstGeom prst="rect">
+            <a:avLst/>
+          </a:prstGeom>
+          <a:noFill/>
+        </p:spPr>
+        <p:txBody>
+          <a:bodyPr wrap="square">
+            <a:spAutoFit/>
+          </a:bodyPr>
+          <a:lstStyle/>
+          <a:p>
+            <a:r>
+              <a:rPr sz="800">
+                <a:hlinkClick r:id="rId50"/>
+              </a:rPr>
+              <a:t>Lofar 1</a:t>
+            </a:r>
+          </a:p>
+          <a:p>
+            <a:r>
+              <a:rPr sz="800">
+                <a:hlinkClick r:id="rId51"/>
+              </a:rPr>
+              <a:t>Lofar 2</a:t>
+            </a:r>
+          </a:p>
+          <a:p>
+            <a:r>
+              <a:rPr sz="800">
+                <a:hlinkClick r:id="rId52"/>
+              </a:rPr>
+              <a:t>Lofar 3</a:t>
             </a:r>
           </a:p>
         </p:txBody>
@@ -3224,18 +4663,18 @@
                   <a:srgbClr val="FFFFFF"/>
                 </a:solidFill>
               </a:rPr>
-              <a:t>Instructor Week 1 Grams — Page 1 of 3</a:t>
-            </a:r>
-          </a:p>
-        </p:txBody>
-      </p:sp>
-      <p:sp>
-        <p:nvSpPr>
-          <p:cNvPr id="3" name="Rounded Rectangle 2"/>
+              <a:t>Instructor Week 1 Grams — Page 2 of 3</a:t>
+            </a:r>
+          </a:p>
+        </p:txBody>
+      </p:sp>
+      <p:sp>
+        <p:nvSpPr>
+          <p:cNvPr id="3" name="Rounded Rectangle 2">
+            <a:hlinkClick r:id="rId2"/>
+          </p:cNvPr>
           <p:cNvSpPr/>
-          <p:nvPr>
-            <a:hlinkClick r:id="rId2"/>
-          </p:nvPr>
+          <p:nvPr/>
         </p:nvSpPr>
         <p:spPr>
           <a:xfrm>
@@ -3279,7 +4718,7 @@
                   <a:srgbClr val="1F3A5F"/>
                 </a:solidFill>
               </a:rPr>
-              <a:t>Gram 1: FR Razor Crest, Category 3, Mustafar</a:t>
+              <a:t>Gram 19: FR TIE Bomber, Category 4, Kobol</a:t>
             </a:r>
           </a:p>
         </p:txBody>
@@ -3313,15 +4752,39 @@
               <a:t>Lofar 1</a:t>
             </a:r>
           </a:p>
-        </p:txBody>
-      </p:sp>
-      <p:sp>
-        <p:nvSpPr>
-          <p:cNvPr id="5" name="Rounded Rectangle 4"/>
+          <a:p>
+            <a:r>
+              <a:rPr sz="800">
+                <a:hlinkClick r:id="rId4"/>
+              </a:rPr>
+              <a:t>Lofar 2</a:t>
+            </a:r>
+          </a:p>
+          <a:p>
+            <a:r>
+              <a:rPr sz="800">
+                <a:hlinkClick r:id="rId5"/>
+              </a:rPr>
+              <a:t>Lofar 3</a:t>
+            </a:r>
+          </a:p>
+          <a:p>
+            <a:r>
+              <a:rPr sz="800">
+                <a:hlinkClick r:id="rId6"/>
+              </a:rPr>
+              <a:t>Lofar 4</a:t>
+            </a:r>
+          </a:p>
+        </p:txBody>
+      </p:sp>
+      <p:sp>
+        <p:nvSpPr>
+          <p:cNvPr id="5" name="Rounded Rectangle 4">
+            <a:hlinkClick r:id="rId7"/>
+          </p:cNvPr>
           <p:cNvSpPr/>
-          <p:nvPr>
-            <a:hlinkClick r:id="rId4"/>
-          </p:nvPr>
+          <p:nvPr/>
         </p:nvSpPr>
         <p:spPr>
           <a:xfrm>
@@ -3365,7 +4828,7 @@
                   <a:srgbClr val="1F3A5F"/>
                 </a:solidFill>
               </a:rPr>
-              <a:t>Gram 2: FR Tantive IV, Category 1, Romulus</a:t>
+              <a:t>Gram 21: FR Venator-class, Category 4, Endor</a:t>
             </a:r>
           </a:p>
         </p:txBody>
@@ -3394,7 +4857,7 @@
           <a:p>
             <a:r>
               <a:rPr sz="800">
-                <a:hlinkClick r:id="rId5"/>
+                <a:hlinkClick r:id="rId8"/>
               </a:rPr>
               <a:t>Lofar 1</a:t>
             </a:r>
@@ -3402,36 +4865,20 @@
           <a:p>
             <a:r>
               <a:rPr sz="800">
-                <a:hlinkClick r:id="rId6"/>
+                <a:hlinkClick r:id="rId9"/>
               </a:rPr>
               <a:t>Lofar 2</a:t>
             </a:r>
           </a:p>
-          <a:p>
-            <a:r>
-              <a:rPr sz="800">
-                <a:hlinkClick r:id="rId7"/>
-              </a:rPr>
-              <a:t>Lofar 3</a:t>
-            </a:r>
-          </a:p>
-          <a:p>
-            <a:r>
-              <a:rPr sz="800">
-                <a:hlinkClick r:id="rId8"/>
-              </a:rPr>
-              <a:t>Lofar 4</a:t>
-            </a:r>
-          </a:p>
-        </p:txBody>
-      </p:sp>
-      <p:sp>
-        <p:nvSpPr>
-          <p:cNvPr id="7" name="Rounded Rectangle 6"/>
+        </p:txBody>
+      </p:sp>
+      <p:sp>
+        <p:nvSpPr>
+          <p:cNvPr id="7" name="Rounded Rectangle 6">
+            <a:hlinkClick r:id="rId10"/>
+          </p:cNvPr>
           <p:cNvSpPr/>
-          <p:nvPr>
-            <a:hlinkClick r:id="rId9"/>
-          </p:nvPr>
+          <p:nvPr/>
         </p:nvSpPr>
         <p:spPr>
           <a:xfrm>
@@ -3475,7 +4922,7 @@
                   <a:srgbClr val="1F3A5F"/>
                 </a:solidFill>
               </a:rPr>
-              <a:t>Gram 3: FR Sovereign-class, Category 4, Defiant</a:t>
+              <a:t>Gram 22: FR Intrepid-class, Category 1, Bajor</a:t>
             </a:r>
           </a:p>
         </p:txBody>
@@ -3504,20 +4951,28 @@
           <a:p>
             <a:r>
               <a:rPr sz="800">
-                <a:hlinkClick r:id="rId10"/>
+                <a:hlinkClick r:id="rId11"/>
               </a:rPr>
               <a:t>Lofar 1</a:t>
             </a:r>
           </a:p>
-        </p:txBody>
-      </p:sp>
-      <p:sp>
-        <p:nvSpPr>
-          <p:cNvPr id="9" name="Rounded Rectangle 8"/>
+          <a:p>
+            <a:r>
+              <a:rPr sz="800">
+                <a:hlinkClick r:id="rId12"/>
+              </a:rPr>
+              <a:t>Lofar 2</a:t>
+            </a:r>
+          </a:p>
+        </p:txBody>
+      </p:sp>
+      <p:sp>
+        <p:nvSpPr>
+          <p:cNvPr id="9" name="Rounded Rectangle 8">
+            <a:hlinkClick r:id="rId13"/>
+          </p:cNvPr>
           <p:cNvSpPr/>
-          <p:nvPr>
-            <a:hlinkClick r:id="rId11"/>
-          </p:nvPr>
+          <p:nvPr/>
         </p:nvSpPr>
         <p:spPr>
           <a:xfrm>
@@ -3561,7 +5016,7 @@
                   <a:srgbClr val="1F3A5F"/>
                 </a:solidFill>
               </a:rPr>
-              <a:t>Gram 4: FR Cerritos, Category 3, Coruscant</a:t>
+              <a:t>Gram 23: FR Voyager, Category 4, Defiant</a:t>
             </a:r>
           </a:p>
         </p:txBody>
@@ -3590,7 +5045,7 @@
           <a:p>
             <a:r>
               <a:rPr sz="800">
-                <a:hlinkClick r:id="rId12"/>
+                <a:hlinkClick r:id="rId14"/>
               </a:rPr>
               <a:t>Lofar 1</a:t>
             </a:r>
@@ -3598,20 +5053,36 @@
           <a:p>
             <a:r>
               <a:rPr sz="800">
-                <a:hlinkClick r:id="rId13"/>
+                <a:hlinkClick r:id="rId15"/>
               </a:rPr>
               <a:t>Lofar 2</a:t>
             </a:r>
           </a:p>
-        </p:txBody>
-      </p:sp>
-      <p:sp>
-        <p:nvSpPr>
-          <p:cNvPr id="11" name="Rounded Rectangle 10"/>
+          <a:p>
+            <a:r>
+              <a:rPr sz="800">
+                <a:hlinkClick r:id="rId16"/>
+              </a:rPr>
+              <a:t>Lofar 3</a:t>
+            </a:r>
+          </a:p>
+          <a:p>
+            <a:r>
+              <a:rPr sz="800">
+                <a:hlinkClick r:id="rId17"/>
+              </a:rPr>
+              <a:t>Lofar 4</a:t>
+            </a:r>
+          </a:p>
+        </p:txBody>
+      </p:sp>
+      <p:sp>
+        <p:nvSpPr>
+          <p:cNvPr id="11" name="Rounded Rectangle 10">
+            <a:hlinkClick r:id="rId18"/>
+          </p:cNvPr>
           <p:cNvSpPr/>
-          <p:nvPr>
-            <a:hlinkClick r:id="rId14"/>
-          </p:nvPr>
+          <p:nvPr/>
         </p:nvSpPr>
         <p:spPr>
           <a:xfrm>
@@ -3655,7 +5126,7 @@
                   <a:srgbClr val="1F3A5F"/>
                 </a:solidFill>
               </a:rPr>
-              <a:t>Gram 5: FR Y-wing, Category 3, Gandalf</a:t>
+              <a:t>Gram 24: FR Tantive IV, Category 4, Tatooine</a:t>
             </a:r>
           </a:p>
         </p:txBody>
@@ -3684,20 +5155,28 @@
           <a:p>
             <a:r>
               <a:rPr sz="800">
-                <a:hlinkClick r:id="rId15"/>
+                <a:hlinkClick r:id="rId19"/>
               </a:rPr>
               <a:t>Lofar 1</a:t>
             </a:r>
           </a:p>
-        </p:txBody>
-      </p:sp>
-      <p:sp>
-        <p:nvSpPr>
-          <p:cNvPr id="13" name="Rounded Rectangle 12"/>
+          <a:p>
+            <a:r>
+              <a:rPr sz="800">
+                <a:hlinkClick r:id="rId20"/>
+              </a:rPr>
+              <a:t>Lofar 2</a:t>
+            </a:r>
+          </a:p>
+        </p:txBody>
+      </p:sp>
+      <p:sp>
+        <p:nvSpPr>
+          <p:cNvPr id="13" name="Rounded Rectangle 12">
+            <a:hlinkClick r:id="rId21"/>
+          </p:cNvPr>
           <p:cNvSpPr/>
-          <p:nvPr>
-            <a:hlinkClick r:id="rId16"/>
-          </p:nvPr>
+          <p:nvPr/>
         </p:nvSpPr>
         <p:spPr>
           <a:xfrm>
@@ -3741,7 +5220,7 @@
                   <a:srgbClr val="1F3A5F"/>
                 </a:solidFill>
               </a:rPr>
-              <a:t>Gram 6: FR Constitution-class, Category 2, Cardassia</a:t>
+              <a:t>Gram 25: Nebula-class contact bearing 065, codename Tantive</a:t>
             </a:r>
           </a:p>
         </p:txBody>
@@ -3770,7 +5249,7 @@
           <a:p>
             <a:r>
               <a:rPr sz="800">
-                <a:hlinkClick r:id="rId17"/>
+                <a:hlinkClick r:id="rId22"/>
               </a:rPr>
               <a:t>Lofar 1</a:t>
             </a:r>
@@ -3778,7 +5257,7 @@
           <a:p>
             <a:r>
               <a:rPr sz="800">
-                <a:hlinkClick r:id="rId18"/>
+                <a:hlinkClick r:id="rId23"/>
               </a:rPr>
               <a:t>Lofar 2</a:t>
             </a:r>
@@ -3786,7 +5265,7 @@
           <a:p>
             <a:r>
               <a:rPr sz="800">
-                <a:hlinkClick r:id="rId19"/>
+                <a:hlinkClick r:id="rId24"/>
               </a:rPr>
               <a:t>Lofar 3</a:t>
             </a:r>
@@ -3795,11 +5274,11 @@
       </p:sp>
       <p:sp>
         <p:nvSpPr>
-          <p:cNvPr id="15" name="Rounded Rectangle 14"/>
+          <p:cNvPr id="15" name="Rounded Rectangle 14">
+            <a:hlinkClick r:id="rId25"/>
+          </p:cNvPr>
           <p:cNvSpPr/>
-          <p:nvPr>
-            <a:hlinkClick r:id="rId20"/>
-          </p:nvPr>
+          <p:nvPr/>
         </p:nvSpPr>
         <p:spPr>
           <a:xfrm>
@@ -3843,7 +5322,7 @@
                   <a:srgbClr val="1F3A5F"/>
                 </a:solidFill>
               </a:rPr>
-              <a:t>Gram 7: Lambda Shuttle contact bearing 152, codename Tatooine</a:t>
+              <a:t>Gram 26: Nebula-class contact bearing 271, codename Trill</a:t>
             </a:r>
           </a:p>
         </p:txBody>
@@ -3872,20 +5351,44 @@
           <a:p>
             <a:r>
               <a:rPr sz="800">
-                <a:hlinkClick r:id="rId21"/>
+                <a:hlinkClick r:id="rId26"/>
               </a:rPr>
               <a:t>Lofar 1</a:t>
             </a:r>
           </a:p>
-        </p:txBody>
-      </p:sp>
-      <p:sp>
-        <p:nvSpPr>
-          <p:cNvPr id="17" name="Rounded Rectangle 16"/>
+          <a:p>
+            <a:r>
+              <a:rPr sz="800">
+                <a:hlinkClick r:id="rId27"/>
+              </a:rPr>
+              <a:t>Lofar 2</a:t>
+            </a:r>
+          </a:p>
+          <a:p>
+            <a:r>
+              <a:rPr sz="800">
+                <a:hlinkClick r:id="rId28"/>
+              </a:rPr>
+              <a:t>Lofar 3</a:t>
+            </a:r>
+          </a:p>
+          <a:p>
+            <a:r>
+              <a:rPr sz="800">
+                <a:hlinkClick r:id="rId29"/>
+              </a:rPr>
+              <a:t>Lofar 4</a:t>
+            </a:r>
+          </a:p>
+        </p:txBody>
+      </p:sp>
+      <p:sp>
+        <p:nvSpPr>
+          <p:cNvPr id="17" name="Rounded Rectangle 16">
+            <a:hlinkClick r:id="rId30"/>
+          </p:cNvPr>
           <p:cNvSpPr/>
-          <p:nvPr>
-            <a:hlinkClick r:id="rId22"/>
-          </p:nvPr>
+          <p:nvPr/>
         </p:nvSpPr>
         <p:spPr>
           <a:xfrm>
@@ -3929,7 +5432,7 @@
                   <a:srgbClr val="1F3A5F"/>
                 </a:solidFill>
               </a:rPr>
-              <a:t>Gram 8: FR Y-wing, Category 1, Betazed</a:t>
+              <a:t>Gram 28: Sovereign-class contact bearing 118, codename Yavin</a:t>
             </a:r>
           </a:p>
         </p:txBody>
@@ -3958,20 +5461,36 @@
           <a:p>
             <a:r>
               <a:rPr sz="800">
-                <a:hlinkClick r:id="rId23"/>
+                <a:hlinkClick r:id="rId31"/>
               </a:rPr>
               <a:t>Lofar 1</a:t>
             </a:r>
           </a:p>
-        </p:txBody>
-      </p:sp>
-      <p:sp>
-        <p:nvSpPr>
-          <p:cNvPr id="19" name="Rounded Rectangle 18"/>
+          <a:p>
+            <a:r>
+              <a:rPr sz="800">
+                <a:hlinkClick r:id="rId32"/>
+              </a:rPr>
+              <a:t>Lofar 2</a:t>
+            </a:r>
+          </a:p>
+          <a:p>
+            <a:r>
+              <a:rPr sz="800">
+                <a:hlinkClick r:id="rId33"/>
+              </a:rPr>
+              <a:t>Lofar 3</a:t>
+            </a:r>
+          </a:p>
+        </p:txBody>
+      </p:sp>
+      <p:sp>
+        <p:nvSpPr>
+          <p:cNvPr id="19" name="Rounded Rectangle 18">
+            <a:hlinkClick r:id="rId34"/>
+          </p:cNvPr>
           <p:cNvSpPr/>
-          <p:nvPr>
-            <a:hlinkClick r:id="rId24"/>
-          </p:nvPr>
+          <p:nvPr/>
         </p:nvSpPr>
         <p:spPr>
           <a:xfrm>
@@ -4015,7 +5534,7 @@
                   <a:srgbClr val="1F3A5F"/>
                 </a:solidFill>
               </a:rPr>
-              <a:t>Gram 9: FR Venator-class, Category 4, Kobol</a:t>
+              <a:t>Gram 30: FR Y-wing, Category 3, Yavin</a:t>
             </a:r>
           </a:p>
         </p:txBody>
@@ -4044,7 +5563,7 @@
           <a:p>
             <a:r>
               <a:rPr sz="800">
-                <a:hlinkClick r:id="rId25"/>
+                <a:hlinkClick r:id="rId35"/>
               </a:rPr>
               <a:t>Lofar 1</a:t>
             </a:r>
@@ -4052,7 +5571,7 @@
           <a:p>
             <a:r>
               <a:rPr sz="800">
-                <a:hlinkClick r:id="rId26"/>
+                <a:hlinkClick r:id="rId36"/>
               </a:rPr>
               <a:t>Lofar 2</a:t>
             </a:r>
@@ -4060,28 +5579,20 @@
           <a:p>
             <a:r>
               <a:rPr sz="800">
-                <a:hlinkClick r:id="rId27"/>
+                <a:hlinkClick r:id="rId37"/>
               </a:rPr>
               <a:t>Lofar 3</a:t>
             </a:r>
           </a:p>
-          <a:p>
-            <a:r>
-              <a:rPr sz="800">
-                <a:hlinkClick r:id="rId28"/>
-              </a:rPr>
-              <a:t>Lofar 4</a:t>
-            </a:r>
-          </a:p>
-        </p:txBody>
-      </p:sp>
-      <p:sp>
-        <p:nvSpPr>
-          <p:cNvPr id="21" name="Rounded Rectangle 20"/>
+        </p:txBody>
+      </p:sp>
+      <p:sp>
+        <p:nvSpPr>
+          <p:cNvPr id="21" name="Rounded Rectangle 20">
+            <a:hlinkClick r:id="rId38"/>
+          </p:cNvPr>
           <p:cNvSpPr/>
-          <p:nvPr>
-            <a:hlinkClick r:id="rId29"/>
-          </p:nvPr>
+          <p:nvPr/>
         </p:nvSpPr>
         <p:spPr>
           <a:xfrm>
@@ -4125,7 +5636,7 @@
                   <a:srgbClr val="1F3A5F"/>
                 </a:solidFill>
               </a:rPr>
-              <a:t>Gram 11: FR Sovereign-class, Category 4, Bespin</a:t>
+              <a:t>Gram 31: FR Nebula-class, Category 3, Bajor</a:t>
             </a:r>
           </a:p>
         </p:txBody>
@@ -4154,20 +5665,28 @@
           <a:p>
             <a:r>
               <a:rPr sz="800">
-                <a:hlinkClick r:id="rId30"/>
+                <a:hlinkClick r:id="rId39"/>
               </a:rPr>
               <a:t>Lofar 1</a:t>
             </a:r>
           </a:p>
-        </p:txBody>
-      </p:sp>
-      <p:sp>
-        <p:nvSpPr>
-          <p:cNvPr id="23" name="Rounded Rectangle 22"/>
+          <a:p>
+            <a:r>
+              <a:rPr sz="800">
+                <a:hlinkClick r:id="rId40"/>
+              </a:rPr>
+              <a:t>Lofar 2</a:t>
+            </a:r>
+          </a:p>
+        </p:txBody>
+      </p:sp>
+      <p:sp>
+        <p:nvSpPr>
+          <p:cNvPr id="23" name="Rounded Rectangle 22">
+            <a:hlinkClick r:id="rId41"/>
+          </p:cNvPr>
           <p:cNvSpPr/>
-          <p:nvPr>
-            <a:hlinkClick r:id="rId31"/>
-          </p:nvPr>
+          <p:nvPr/>
         </p:nvSpPr>
         <p:spPr>
           <a:xfrm>
@@ -4211,7 +5730,7 @@
                   <a:srgbClr val="1F3A5F"/>
                 </a:solidFill>
               </a:rPr>
-              <a:t>Gram 13: Razor Crest contact bearing 010, codename Bajor</a:t>
+              <a:t>Gram 32: FR Outrider, Category 4, Risa</a:t>
             </a:r>
           </a:p>
         </p:txBody>
@@ -4240,7 +5759,7 @@
           <a:p>
             <a:r>
               <a:rPr sz="800">
-                <a:hlinkClick r:id="rId32"/>
+                <a:hlinkClick r:id="rId42"/>
               </a:rPr>
               <a:t>Lofar 1</a:t>
             </a:r>
@@ -4248,36 +5767,20 @@
           <a:p>
             <a:r>
               <a:rPr sz="800">
-                <a:hlinkClick r:id="rId33"/>
+                <a:hlinkClick r:id="rId43"/>
               </a:rPr>
               <a:t>Lofar 2</a:t>
             </a:r>
           </a:p>
-          <a:p>
-            <a:r>
-              <a:rPr sz="800">
-                <a:hlinkClick r:id="rId34"/>
-              </a:rPr>
-              <a:t>Lofar 3</a:t>
-            </a:r>
-          </a:p>
-          <a:p>
-            <a:r>
-              <a:rPr sz="800">
-                <a:hlinkClick r:id="rId35"/>
-              </a:rPr>
-              <a:t>Lofar 4</a:t>
-            </a:r>
-          </a:p>
-        </p:txBody>
-      </p:sp>
-      <p:sp>
-        <p:nvSpPr>
-          <p:cNvPr id="25" name="Rounded Rectangle 24"/>
+        </p:txBody>
+      </p:sp>
+      <p:sp>
+        <p:nvSpPr>
+          <p:cNvPr id="25" name="Rounded Rectangle 24">
+            <a:hlinkClick r:id="rId44"/>
+          </p:cNvPr>
           <p:cNvSpPr/>
-          <p:nvPr>
-            <a:hlinkClick r:id="rId36"/>
-          </p:nvPr>
+          <p:nvPr/>
         </p:nvSpPr>
         <p:spPr>
           <a:xfrm>
@@ -4321,7 +5824,7 @@
                   <a:srgbClr val="1F3A5F"/>
                 </a:solidFill>
               </a:rPr>
-              <a:t>Gram 14: FR Defiant-class, Category 3, Romulus</a:t>
+              <a:t>Gram 33: FR A-wing, Category 4, Defiant</a:t>
             </a:r>
           </a:p>
         </p:txBody>
@@ -4350,44 +5853,20 @@
           <a:p>
             <a:r>
               <a:rPr sz="800">
-                <a:hlinkClick r:id="rId37"/>
+                <a:hlinkClick r:id="rId45"/>
               </a:rPr>
               <a:t>Lofar 1</a:t>
             </a:r>
           </a:p>
-          <a:p>
-            <a:r>
-              <a:rPr sz="800">
-                <a:hlinkClick r:id="rId38"/>
-              </a:rPr>
-              <a:t>Lofar 2</a:t>
-            </a:r>
-          </a:p>
-          <a:p>
-            <a:r>
-              <a:rPr sz="800">
-                <a:hlinkClick r:id="rId39"/>
-              </a:rPr>
-              <a:t>Lofar 3</a:t>
-            </a:r>
-          </a:p>
-          <a:p>
-            <a:r>
-              <a:rPr sz="800">
-                <a:hlinkClick r:id="rId40"/>
-              </a:rPr>
-              <a:t>Lofar 4</a:t>
-            </a:r>
-          </a:p>
-        </p:txBody>
-      </p:sp>
-      <p:sp>
-        <p:nvSpPr>
-          <p:cNvPr id="27" name="Rounded Rectangle 26"/>
+        </p:txBody>
+      </p:sp>
+      <p:sp>
+        <p:nvSpPr>
+          <p:cNvPr id="27" name="Rounded Rectangle 26">
+            <a:hlinkClick r:id="rId46"/>
+          </p:cNvPr>
           <p:cNvSpPr/>
-          <p:nvPr>
-            <a:hlinkClick r:id="rId41"/>
-          </p:nvPr>
+          <p:nvPr/>
         </p:nvSpPr>
         <p:spPr>
           <a:xfrm>
@@ -4431,7 +5910,7 @@
                   <a:srgbClr val="1F3A5F"/>
                 </a:solidFill>
               </a:rPr>
-              <a:t>Gram 15: FR Acclamator-class, Category 3, Dank</a:t>
+              <a:t>Gram 35: Reliant contact bearing 251, codename Bespin</a:t>
             </a:r>
           </a:p>
         </p:txBody>
@@ -4460,36 +5939,20 @@
           <a:p>
             <a:r>
               <a:rPr sz="800">
-                <a:hlinkClick r:id="rId42"/>
+                <a:hlinkClick r:id="rId47"/>
               </a:rPr>
               <a:t>Lofar 1</a:t>
             </a:r>
           </a:p>
-          <a:p>
-            <a:r>
-              <a:rPr sz="800">
-                <a:hlinkClick r:id="rId43"/>
-              </a:rPr>
-              <a:t>Lofar 2</a:t>
-            </a:r>
-          </a:p>
-          <a:p>
-            <a:r>
-              <a:rPr sz="800">
-                <a:hlinkClick r:id="rId44"/>
-              </a:rPr>
-              <a:t>Lofar 3</a:t>
-            </a:r>
-          </a:p>
-        </p:txBody>
-      </p:sp>
-      <p:sp>
-        <p:nvSpPr>
-          <p:cNvPr id="29" name="Rounded Rectangle 28"/>
+        </p:txBody>
+      </p:sp>
+      <p:sp>
+        <p:nvSpPr>
+          <p:cNvPr id="29" name="Rounded Rectangle 28">
+            <a:hlinkClick r:id="rId48"/>
+          </p:cNvPr>
           <p:cNvSpPr/>
-          <p:nvPr>
-            <a:hlinkClick r:id="rId45"/>
-          </p:nvPr>
+          <p:nvPr/>
         </p:nvSpPr>
         <p:spPr>
           <a:xfrm>
@@ -4533,7 +5996,7 @@
                   <a:srgbClr val="1F3A5F"/>
                 </a:solidFill>
               </a:rPr>
-              <a:t>Gram 16: FR Reliant, Category 1, Dank</a:t>
+              <a:t>Gram 36: FR Sovereign-class, Category 2, Yavin</a:t>
             </a:r>
           </a:p>
         </p:txBody>
@@ -4562,7 +6025,7 @@
           <a:p>
             <a:r>
               <a:rPr sz="800">
-                <a:hlinkClick r:id="rId46"/>
+                <a:hlinkClick r:id="rId49"/>
               </a:rPr>
               <a:t>Lofar 1</a:t>
             </a:r>
@@ -4570,7 +6033,7 @@
           <a:p>
             <a:r>
               <a:rPr sz="800">
-                <a:hlinkClick r:id="rId47"/>
+                <a:hlinkClick r:id="rId50"/>
               </a:rPr>
               <a:t>Lofar 2</a:t>
             </a:r>
@@ -4578,7 +6041,7 @@
           <a:p>
             <a:r>
               <a:rPr sz="800">
-                <a:hlinkClick r:id="rId48"/>
+                <a:hlinkClick r:id="rId51"/>
               </a:rPr>
               <a:t>Lofar 3</a:t>
             </a:r>
@@ -4587,11 +6050,11 @@
       </p:sp>
       <p:sp>
         <p:nvSpPr>
-          <p:cNvPr id="31" name="Rounded Rectangle 30"/>
+          <p:cNvPr id="31" name="Rounded Rectangle 30">
+            <a:hlinkClick r:id="rId52"/>
+          </p:cNvPr>
           <p:cNvSpPr/>
-          <p:nvPr>
-            <a:hlinkClick r:id="rId49"/>
-          </p:nvPr>
+          <p:nvPr/>
         </p:nvSpPr>
         <p:spPr>
           <a:xfrm>
@@ -4635,7 +6098,7 @@
                   <a:srgbClr val="1F3A5F"/>
                 </a:solidFill>
               </a:rPr>
-              <a:t>Gram 17: FR Y-wing, Category 4, Hoth</a:t>
+              <a:t>Gram 37: FR Akira-class, Category 4, Kobol</a:t>
             </a:r>
           </a:p>
         </p:txBody>
@@ -4664,25 +6127,9 @@
           <a:p>
             <a:r>
               <a:rPr sz="800">
-                <a:hlinkClick r:id="rId50"/>
+                <a:hlinkClick r:id="rId53"/>
               </a:rPr>
               <a:t>Lofar 1</a:t>
-            </a:r>
-          </a:p>
-          <a:p>
-            <a:r>
-              <a:rPr sz="800">
-                <a:hlinkClick r:id="rId51"/>
-              </a:rPr>
-              <a:t>Lofar 2</a:t>
-            </a:r>
-          </a:p>
-          <a:p>
-            <a:r>
-              <a:rPr sz="800">
-                <a:hlinkClick r:id="rId52"/>
-              </a:rPr>
-              <a:t>Lofar 3</a:t>
             </a:r>
           </a:p>
         </p:txBody>
@@ -4751,18 +6198,18 @@
                   <a:srgbClr val="FFFFFF"/>
                 </a:solidFill>
               </a:rPr>
-              <a:t>Instructor Week 1 Grams — Page 2 of 3</a:t>
-            </a:r>
-          </a:p>
-        </p:txBody>
-      </p:sp>
-      <p:sp>
-        <p:nvSpPr>
-          <p:cNvPr id="3" name="Rounded Rectangle 2"/>
+              <a:t>Instructor Week 1 Grams — Page 3 of 3</a:t>
+            </a:r>
+          </a:p>
+        </p:txBody>
+      </p:sp>
+      <p:sp>
+        <p:nvSpPr>
+          <p:cNvPr id="3" name="Rounded Rectangle 2">
+            <a:hlinkClick r:id="rId2"/>
+          </p:cNvPr>
           <p:cNvSpPr/>
-          <p:nvPr>
-            <a:hlinkClick r:id="rId2"/>
-          </p:nvPr>
+          <p:nvPr/>
         </p:nvSpPr>
         <p:spPr>
           <a:xfrm>
@@ -4806,7 +6253,7 @@
                   <a:srgbClr val="1F3A5F"/>
                 </a:solidFill>
               </a:rPr>
-              <a:t>Gram 19: FR TIE Bomber, Category 4, Kobol</a:t>
+              <a:t>Gram 38: FR Razor Crest, Category 3, Dank</a:t>
             </a:r>
           </a:p>
         </p:txBody>
@@ -4868,11 +6315,11 @@
       </p:sp>
       <p:sp>
         <p:nvSpPr>
-          <p:cNvPr id="5" name="Rounded Rectangle 4"/>
+          <p:cNvPr id="5" name="Rounded Rectangle 4">
+            <a:hlinkClick r:id="rId7"/>
+          </p:cNvPr>
           <p:cNvSpPr/>
-          <p:nvPr>
-            <a:hlinkClick r:id="rId7"/>
-          </p:nvPr>
+          <p:nvPr/>
         </p:nvSpPr>
         <p:spPr>
           <a:xfrm>
@@ -4916,7 +6363,7 @@
                   <a:srgbClr val="1F3A5F"/>
                 </a:solidFill>
               </a:rPr>
-              <a:t>Gram 21: FR Venator-class, Category 4, Endor</a:t>
+              <a:t>Gram 39: FR Slave I, Category 3, Kronos</a:t>
             </a:r>
           </a:p>
         </p:txBody>
@@ -4950,23 +6397,15 @@
               <a:t>Lofar 1</a:t>
             </a:r>
           </a:p>
-          <a:p>
-            <a:r>
-              <a:rPr sz="800">
-                <a:hlinkClick r:id="rId9"/>
-              </a:rPr>
-              <a:t>Lofar 2</a:t>
-            </a:r>
-          </a:p>
-        </p:txBody>
-      </p:sp>
-      <p:sp>
-        <p:nvSpPr>
-          <p:cNvPr id="7" name="Rounded Rectangle 6"/>
+        </p:txBody>
+      </p:sp>
+      <p:sp>
+        <p:nvSpPr>
+          <p:cNvPr id="7" name="Rounded Rectangle 6">
+            <a:hlinkClick r:id="rId9"/>
+          </p:cNvPr>
           <p:cNvSpPr/>
-          <p:nvPr>
-            <a:hlinkClick r:id="rId10"/>
-          </p:nvPr>
+          <p:nvPr/>
         </p:nvSpPr>
         <p:spPr>
           <a:xfrm>
@@ -5010,7 +6449,7 @@
                   <a:srgbClr val="1F3A5F"/>
                 </a:solidFill>
               </a:rPr>
-              <a:t>Gram 22: FR Intrepid-class, Category 1, Bajor</a:t>
+              <a:t>Gram 40: FR Razor Crest, Category 3, Dank</a:t>
             </a:r>
           </a:p>
         </p:txBody>
@@ -5039,9 +6478,17 @@
           <a:p>
             <a:r>
               <a:rPr sz="800">
+                <a:hlinkClick r:id="rId10"/>
+              </a:rPr>
+              <a:t>Lofar 1</a:t>
+            </a:r>
+          </a:p>
+          <a:p>
+            <a:r>
+              <a:rPr sz="800">
                 <a:hlinkClick r:id="rId11"/>
               </a:rPr>
-              <a:t>Lofar 1</a:t>
+              <a:t>Lofar 2</a:t>
             </a:r>
           </a:p>
           <a:p>
@@ -5049,18 +6496,26 @@
               <a:rPr sz="800">
                 <a:hlinkClick r:id="rId12"/>
               </a:rPr>
-              <a:t>Lofar 2</a:t>
-            </a:r>
-          </a:p>
-        </p:txBody>
-      </p:sp>
-      <p:sp>
-        <p:nvSpPr>
-          <p:cNvPr id="9" name="Rounded Rectangle 8"/>
+              <a:t>Lofar 3</a:t>
+            </a:r>
+          </a:p>
+          <a:p>
+            <a:r>
+              <a:rPr sz="800">
+                <a:hlinkClick r:id="rId13"/>
+              </a:rPr>
+              <a:t>Lofar 4</a:t>
+            </a:r>
+          </a:p>
+        </p:txBody>
+      </p:sp>
+      <p:sp>
+        <p:nvSpPr>
+          <p:cNvPr id="9" name="Rounded Rectangle 8">
+            <a:hlinkClick r:id="rId14"/>
+          </p:cNvPr>
           <p:cNvSpPr/>
-          <p:nvPr>
-            <a:hlinkClick r:id="rId13"/>
-          </p:nvPr>
+          <p:nvPr/>
         </p:nvSpPr>
         <p:spPr>
           <a:xfrm>
@@ -5104,7 +6559,7 @@
                   <a:srgbClr val="1F3A5F"/>
                 </a:solidFill>
               </a:rPr>
-              <a:t>Gram 23: FR Voyager, Category 4, Defiant</a:t>
+              <a:t>Gram 41: Ghost contact bearing 208, codename Betazed</a:t>
             </a:r>
           </a:p>
         </p:txBody>
@@ -5133,7 +6588,7 @@
           <a:p>
             <a:r>
               <a:rPr sz="800">
-                <a:hlinkClick r:id="rId14"/>
+                <a:hlinkClick r:id="rId15"/>
               </a:rPr>
               <a:t>Lofar 1</a:t>
             </a:r>
@@ -5141,7 +6596,7 @@
           <a:p>
             <a:r>
               <a:rPr sz="800">
-                <a:hlinkClick r:id="rId15"/>
+                <a:hlinkClick r:id="rId16"/>
               </a:rPr>
               <a:t>Lofar 2</a:t>
             </a:r>
@@ -5149,7 +6604,7 @@
           <a:p>
             <a:r>
               <a:rPr sz="800">
-                <a:hlinkClick r:id="rId16"/>
+                <a:hlinkClick r:id="rId17"/>
               </a:rPr>
               <a:t>Lofar 3</a:t>
             </a:r>
@@ -5157,7 +6612,7 @@
           <a:p>
             <a:r>
               <a:rPr sz="800">
-                <a:hlinkClick r:id="rId17"/>
+                <a:hlinkClick r:id="rId18"/>
               </a:rPr>
               <a:t>Lofar 4</a:t>
             </a:r>
@@ -5166,11 +6621,11 @@
       </p:sp>
       <p:sp>
         <p:nvSpPr>
-          <p:cNvPr id="11" name="Rounded Rectangle 10"/>
+          <p:cNvPr id="11" name="Rounded Rectangle 10">
+            <a:hlinkClick r:id="rId19"/>
+          </p:cNvPr>
           <p:cNvSpPr/>
-          <p:nvPr>
-            <a:hlinkClick r:id="rId18"/>
-          </p:nvPr>
+          <p:nvPr/>
         </p:nvSpPr>
         <p:spPr>
           <a:xfrm>
@@ -5214,7 +6669,7 @@
                   <a:srgbClr val="1F3A5F"/>
                 </a:solidFill>
               </a:rPr>
-              <a:t>Gram 24: FR Tantive IV, Category 4, Tatooine</a:t>
+              <a:t>Gram 42: FR Acclamator-class, Category 2, Trill</a:t>
             </a:r>
           </a:p>
         </p:txBody>
@@ -5243,7 +6698,7 @@
           <a:p>
             <a:r>
               <a:rPr sz="800">
-                <a:hlinkClick r:id="rId19"/>
+                <a:hlinkClick r:id="rId20"/>
               </a:rPr>
               <a:t>Lofar 1</a:t>
             </a:r>
@@ -5251,1646 +6706,17 @@
           <a:p>
             <a:r>
               <a:rPr sz="800">
-                <a:hlinkClick r:id="rId20"/>
+                <a:hlinkClick r:id="rId21"/>
               </a:rPr>
               <a:t>Lofar 2</a:t>
             </a:r>
           </a:p>
-        </p:txBody>
-      </p:sp>
-      <p:sp>
-        <p:nvSpPr>
-          <p:cNvPr id="13" name="Rounded Rectangle 12"/>
-          <p:cNvSpPr/>
-          <p:nvPr>
-            <a:hlinkClick r:id="rId21"/>
-          </p:nvPr>
-        </p:nvSpPr>
-        <p:spPr>
-          <a:xfrm>
-            <a:off x="365760" y="2682240"/>
-            <a:ext cx="2200046" cy="365760"/>
-          </a:xfrm>
-          <a:prstGeom prst="roundRect">
-            <a:avLst/>
-          </a:prstGeom>
-          <a:solidFill>
-            <a:srgbClr val="E8EEF7"/>
-          </a:solidFill>
-          <a:ln>
-            <a:solidFill>
-              <a:srgbClr val="1F3A5F"/>
-            </a:solidFill>
-          </a:ln>
-        </p:spPr>
-        <p:style>
-          <a:lnRef idx="1">
-            <a:schemeClr val="accent1"/>
-          </a:lnRef>
-          <a:fillRef idx="3">
-            <a:schemeClr val="accent1"/>
-          </a:fillRef>
-          <a:effectRef idx="2">
-            <a:schemeClr val="accent1"/>
-          </a:effectRef>
-          <a:fontRef idx="minor">
-            <a:schemeClr val="lt1"/>
-          </a:fontRef>
-        </p:style>
-        <p:txBody>
-          <a:bodyPr rtlCol="0" anchor="ctr" lIns="45720" rIns="45720"/>
-          <a:lstStyle/>
-          <a:p>
-            <a:pPr algn="ctr"/>
-            <a:r>
-              <a:rPr sz="900">
-                <a:solidFill>
-                  <a:srgbClr val="1F3A5F"/>
-                </a:solidFill>
-              </a:rPr>
-              <a:t>Gram 25: Nebula-class contact bearing 065, codename Tantive</a:t>
-            </a:r>
-          </a:p>
-        </p:txBody>
-      </p:sp>
-      <p:sp>
-        <p:nvSpPr>
-          <p:cNvPr id="14" name="TextBox 13"/>
-          <p:cNvSpPr txBox="1"/>
-          <p:nvPr/>
-        </p:nvSpPr>
-        <p:spPr>
-          <a:xfrm>
-            <a:off x="365760" y="3066288"/>
-            <a:ext cx="2200046" cy="1447800"/>
-          </a:xfrm>
-          <a:prstGeom prst="rect">
-            <a:avLst/>
-          </a:prstGeom>
-          <a:noFill/>
-        </p:spPr>
-        <p:txBody>
-          <a:bodyPr wrap="square">
-            <a:spAutoFit/>
-          </a:bodyPr>
-          <a:lstStyle/>
           <a:p>
             <a:r>
               <a:rPr sz="800">
                 <a:hlinkClick r:id="rId22"/>
               </a:rPr>
-              <a:t>Lofar 1</a:t>
-            </a:r>
-          </a:p>
-          <a:p>
-            <a:r>
-              <a:rPr sz="800">
-                <a:hlinkClick r:id="rId23"/>
-              </a:rPr>
-              <a:t>Lofar 2</a:t>
-            </a:r>
-          </a:p>
-          <a:p>
-            <a:r>
-              <a:rPr sz="800">
-                <a:hlinkClick r:id="rId24"/>
-              </a:rPr>
               <a:t>Lofar 3</a:t>
-            </a:r>
-          </a:p>
-        </p:txBody>
-      </p:sp>
-      <p:sp>
-        <p:nvSpPr>
-          <p:cNvPr id="15" name="Rounded Rectangle 14"/>
-          <p:cNvSpPr/>
-          <p:nvPr>
-            <a:hlinkClick r:id="rId25"/>
-          </p:nvPr>
-        </p:nvSpPr>
-        <p:spPr>
-          <a:xfrm>
-            <a:off x="2657246" y="2682240"/>
-            <a:ext cx="2200046" cy="365760"/>
-          </a:xfrm>
-          <a:prstGeom prst="roundRect">
-            <a:avLst/>
-          </a:prstGeom>
-          <a:solidFill>
-            <a:srgbClr val="E8EEF7"/>
-          </a:solidFill>
-          <a:ln>
-            <a:solidFill>
-              <a:srgbClr val="1F3A5F"/>
-            </a:solidFill>
-          </a:ln>
-        </p:spPr>
-        <p:style>
-          <a:lnRef idx="1">
-            <a:schemeClr val="accent1"/>
-          </a:lnRef>
-          <a:fillRef idx="3">
-            <a:schemeClr val="accent1"/>
-          </a:fillRef>
-          <a:effectRef idx="2">
-            <a:schemeClr val="accent1"/>
-          </a:effectRef>
-          <a:fontRef idx="minor">
-            <a:schemeClr val="lt1"/>
-          </a:fontRef>
-        </p:style>
-        <p:txBody>
-          <a:bodyPr rtlCol="0" anchor="ctr" lIns="45720" rIns="45720"/>
-          <a:lstStyle/>
-          <a:p>
-            <a:pPr algn="ctr"/>
-            <a:r>
-              <a:rPr sz="900">
-                <a:solidFill>
-                  <a:srgbClr val="1F3A5F"/>
-                </a:solidFill>
-              </a:rPr>
-              <a:t>Gram 26: Nebula-class contact bearing 271, codename Trill</a:t>
-            </a:r>
-          </a:p>
-        </p:txBody>
-      </p:sp>
-      <p:sp>
-        <p:nvSpPr>
-          <p:cNvPr id="16" name="TextBox 15"/>
-          <p:cNvSpPr txBox="1"/>
-          <p:nvPr/>
-        </p:nvSpPr>
-        <p:spPr>
-          <a:xfrm>
-            <a:off x="2657246" y="3066288"/>
-            <a:ext cx="2200046" cy="1447800"/>
-          </a:xfrm>
-          <a:prstGeom prst="rect">
-            <a:avLst/>
-          </a:prstGeom>
-          <a:noFill/>
-        </p:spPr>
-        <p:txBody>
-          <a:bodyPr wrap="square">
-            <a:spAutoFit/>
-          </a:bodyPr>
-          <a:lstStyle/>
-          <a:p>
-            <a:r>
-              <a:rPr sz="800">
-                <a:hlinkClick r:id="rId26"/>
-              </a:rPr>
-              <a:t>Lofar 1</a:t>
-            </a:r>
-          </a:p>
-          <a:p>
-            <a:r>
-              <a:rPr sz="800">
-                <a:hlinkClick r:id="rId27"/>
-              </a:rPr>
-              <a:t>Lofar 2</a:t>
-            </a:r>
-          </a:p>
-          <a:p>
-            <a:r>
-              <a:rPr sz="800">
-                <a:hlinkClick r:id="rId28"/>
-              </a:rPr>
-              <a:t>Lofar 3</a:t>
-            </a:r>
-          </a:p>
-          <a:p>
-            <a:r>
-              <a:rPr sz="800">
-                <a:hlinkClick r:id="rId29"/>
-              </a:rPr>
-              <a:t>Lofar 4</a:t>
-            </a:r>
-          </a:p>
-        </p:txBody>
-      </p:sp>
-      <p:sp>
-        <p:nvSpPr>
-          <p:cNvPr id="17" name="Rounded Rectangle 16"/>
-          <p:cNvSpPr/>
-          <p:nvPr>
-            <a:hlinkClick r:id="rId30"/>
-          </p:nvPr>
-        </p:nvSpPr>
-        <p:spPr>
-          <a:xfrm>
-            <a:off x="4948732" y="2682240"/>
-            <a:ext cx="2200046" cy="365760"/>
-          </a:xfrm>
-          <a:prstGeom prst="roundRect">
-            <a:avLst/>
-          </a:prstGeom>
-          <a:solidFill>
-            <a:srgbClr val="E8EEF7"/>
-          </a:solidFill>
-          <a:ln>
-            <a:solidFill>
-              <a:srgbClr val="1F3A5F"/>
-            </a:solidFill>
-          </a:ln>
-        </p:spPr>
-        <p:style>
-          <a:lnRef idx="1">
-            <a:schemeClr val="accent1"/>
-          </a:lnRef>
-          <a:fillRef idx="3">
-            <a:schemeClr val="accent1"/>
-          </a:fillRef>
-          <a:effectRef idx="2">
-            <a:schemeClr val="accent1"/>
-          </a:effectRef>
-          <a:fontRef idx="minor">
-            <a:schemeClr val="lt1"/>
-          </a:fontRef>
-        </p:style>
-        <p:txBody>
-          <a:bodyPr rtlCol="0" anchor="ctr" lIns="45720" rIns="45720"/>
-          <a:lstStyle/>
-          <a:p>
-            <a:pPr algn="ctr"/>
-            <a:r>
-              <a:rPr sz="900">
-                <a:solidFill>
-                  <a:srgbClr val="1F3A5F"/>
-                </a:solidFill>
-              </a:rPr>
-              <a:t>Gram 28: Sovereign-class contact bearing 118, codename Yavin</a:t>
-            </a:r>
-          </a:p>
-        </p:txBody>
-      </p:sp>
-      <p:sp>
-        <p:nvSpPr>
-          <p:cNvPr id="18" name="TextBox 17"/>
-          <p:cNvSpPr txBox="1"/>
-          <p:nvPr/>
-        </p:nvSpPr>
-        <p:spPr>
-          <a:xfrm>
-            <a:off x="4948732" y="3066288"/>
-            <a:ext cx="2200046" cy="1447800"/>
-          </a:xfrm>
-          <a:prstGeom prst="rect">
-            <a:avLst/>
-          </a:prstGeom>
-          <a:noFill/>
-        </p:spPr>
-        <p:txBody>
-          <a:bodyPr wrap="square">
-            <a:spAutoFit/>
-          </a:bodyPr>
-          <a:lstStyle/>
-          <a:p>
-            <a:r>
-              <a:rPr sz="800">
-                <a:hlinkClick r:id="rId31"/>
-              </a:rPr>
-              <a:t>Lofar 1</a:t>
-            </a:r>
-          </a:p>
-          <a:p>
-            <a:r>
-              <a:rPr sz="800">
-                <a:hlinkClick r:id="rId32"/>
-              </a:rPr>
-              <a:t>Lofar 2</a:t>
-            </a:r>
-          </a:p>
-          <a:p>
-            <a:r>
-              <a:rPr sz="800">
-                <a:hlinkClick r:id="rId33"/>
-              </a:rPr>
-              <a:t>Lofar 3</a:t>
-            </a:r>
-          </a:p>
-        </p:txBody>
-      </p:sp>
-      <p:sp>
-        <p:nvSpPr>
-          <p:cNvPr id="19" name="Rounded Rectangle 18"/>
-          <p:cNvSpPr/>
-          <p:nvPr>
-            <a:hlinkClick r:id="rId34"/>
-          </p:nvPr>
-        </p:nvSpPr>
-        <p:spPr>
-          <a:xfrm>
-            <a:off x="7240219" y="2682240"/>
-            <a:ext cx="2200046" cy="365760"/>
-          </a:xfrm>
-          <a:prstGeom prst="roundRect">
-            <a:avLst/>
-          </a:prstGeom>
-          <a:solidFill>
-            <a:srgbClr val="E8EEF7"/>
-          </a:solidFill>
-          <a:ln>
-            <a:solidFill>
-              <a:srgbClr val="1F3A5F"/>
-            </a:solidFill>
-          </a:ln>
-        </p:spPr>
-        <p:style>
-          <a:lnRef idx="1">
-            <a:schemeClr val="accent1"/>
-          </a:lnRef>
-          <a:fillRef idx="3">
-            <a:schemeClr val="accent1"/>
-          </a:fillRef>
-          <a:effectRef idx="2">
-            <a:schemeClr val="accent1"/>
-          </a:effectRef>
-          <a:fontRef idx="minor">
-            <a:schemeClr val="lt1"/>
-          </a:fontRef>
-        </p:style>
-        <p:txBody>
-          <a:bodyPr rtlCol="0" anchor="ctr" lIns="45720" rIns="45720"/>
-          <a:lstStyle/>
-          <a:p>
-            <a:pPr algn="ctr"/>
-            <a:r>
-              <a:rPr sz="900">
-                <a:solidFill>
-                  <a:srgbClr val="1F3A5F"/>
-                </a:solidFill>
-              </a:rPr>
-              <a:t>Gram 30: FR Y-wing, Category 3, Yavin</a:t>
-            </a:r>
-          </a:p>
-        </p:txBody>
-      </p:sp>
-      <p:sp>
-        <p:nvSpPr>
-          <p:cNvPr id="20" name="TextBox 19"/>
-          <p:cNvSpPr txBox="1"/>
-          <p:nvPr/>
-        </p:nvSpPr>
-        <p:spPr>
-          <a:xfrm>
-            <a:off x="7240219" y="3066288"/>
-            <a:ext cx="2200046" cy="1447800"/>
-          </a:xfrm>
-          <a:prstGeom prst="rect">
-            <a:avLst/>
-          </a:prstGeom>
-          <a:noFill/>
-        </p:spPr>
-        <p:txBody>
-          <a:bodyPr wrap="square">
-            <a:spAutoFit/>
-          </a:bodyPr>
-          <a:lstStyle/>
-          <a:p>
-            <a:r>
-              <a:rPr sz="800">
-                <a:hlinkClick r:id="rId35"/>
-              </a:rPr>
-              <a:t>Lofar 1</a:t>
-            </a:r>
-          </a:p>
-          <a:p>
-            <a:r>
-              <a:rPr sz="800">
-                <a:hlinkClick r:id="rId36"/>
-              </a:rPr>
-              <a:t>Lofar 2</a:t>
-            </a:r>
-          </a:p>
-          <a:p>
-            <a:r>
-              <a:rPr sz="800">
-                <a:hlinkClick r:id="rId37"/>
-              </a:rPr>
-              <a:t>Lofar 3</a:t>
-            </a:r>
-          </a:p>
-        </p:txBody>
-      </p:sp>
-      <p:sp>
-        <p:nvSpPr>
-          <p:cNvPr id="21" name="Rounded Rectangle 20"/>
-          <p:cNvSpPr/>
-          <p:nvPr>
-            <a:hlinkClick r:id="rId38"/>
-          </p:nvPr>
-        </p:nvSpPr>
-        <p:spPr>
-          <a:xfrm>
-            <a:off x="9531705" y="2682240"/>
-            <a:ext cx="2200046" cy="365760"/>
-          </a:xfrm>
-          <a:prstGeom prst="roundRect">
-            <a:avLst/>
-          </a:prstGeom>
-          <a:solidFill>
-            <a:srgbClr val="E8EEF7"/>
-          </a:solidFill>
-          <a:ln>
-            <a:solidFill>
-              <a:srgbClr val="1F3A5F"/>
-            </a:solidFill>
-          </a:ln>
-        </p:spPr>
-        <p:style>
-          <a:lnRef idx="1">
-            <a:schemeClr val="accent1"/>
-          </a:lnRef>
-          <a:fillRef idx="3">
-            <a:schemeClr val="accent1"/>
-          </a:fillRef>
-          <a:effectRef idx="2">
-            <a:schemeClr val="accent1"/>
-          </a:effectRef>
-          <a:fontRef idx="minor">
-            <a:schemeClr val="lt1"/>
-          </a:fontRef>
-        </p:style>
-        <p:txBody>
-          <a:bodyPr rtlCol="0" anchor="ctr" lIns="45720" rIns="45720"/>
-          <a:lstStyle/>
-          <a:p>
-            <a:pPr algn="ctr"/>
-            <a:r>
-              <a:rPr sz="900">
-                <a:solidFill>
-                  <a:srgbClr val="1F3A5F"/>
-                </a:solidFill>
-              </a:rPr>
-              <a:t>Gram 31: FR Nebula-class, Category 3, Bajor</a:t>
-            </a:r>
-          </a:p>
-        </p:txBody>
-      </p:sp>
-      <p:sp>
-        <p:nvSpPr>
-          <p:cNvPr id="22" name="TextBox 21"/>
-          <p:cNvSpPr txBox="1"/>
-          <p:nvPr/>
-        </p:nvSpPr>
-        <p:spPr>
-          <a:xfrm>
-            <a:off x="9531705" y="3066288"/>
-            <a:ext cx="2200046" cy="1447800"/>
-          </a:xfrm>
-          <a:prstGeom prst="rect">
-            <a:avLst/>
-          </a:prstGeom>
-          <a:noFill/>
-        </p:spPr>
-        <p:txBody>
-          <a:bodyPr wrap="square">
-            <a:spAutoFit/>
-          </a:bodyPr>
-          <a:lstStyle/>
-          <a:p>
-            <a:r>
-              <a:rPr sz="800">
-                <a:hlinkClick r:id="rId39"/>
-              </a:rPr>
-              <a:t>Lofar 1</a:t>
-            </a:r>
-          </a:p>
-          <a:p>
-            <a:r>
-              <a:rPr sz="800">
-                <a:hlinkClick r:id="rId40"/>
-              </a:rPr>
-              <a:t>Lofar 2</a:t>
-            </a:r>
-          </a:p>
-        </p:txBody>
-      </p:sp>
-      <p:sp>
-        <p:nvSpPr>
-          <p:cNvPr id="23" name="Rounded Rectangle 22"/>
-          <p:cNvSpPr/>
-          <p:nvPr>
-            <a:hlinkClick r:id="rId41"/>
-          </p:nvPr>
-        </p:nvSpPr>
-        <p:spPr>
-          <a:xfrm>
-            <a:off x="365760" y="4632960"/>
-            <a:ext cx="2200046" cy="365760"/>
-          </a:xfrm>
-          <a:prstGeom prst="roundRect">
-            <a:avLst/>
-          </a:prstGeom>
-          <a:solidFill>
-            <a:srgbClr val="E8EEF7"/>
-          </a:solidFill>
-          <a:ln>
-            <a:solidFill>
-              <a:srgbClr val="1F3A5F"/>
-            </a:solidFill>
-          </a:ln>
-        </p:spPr>
-        <p:style>
-          <a:lnRef idx="1">
-            <a:schemeClr val="accent1"/>
-          </a:lnRef>
-          <a:fillRef idx="3">
-            <a:schemeClr val="accent1"/>
-          </a:fillRef>
-          <a:effectRef idx="2">
-            <a:schemeClr val="accent1"/>
-          </a:effectRef>
-          <a:fontRef idx="minor">
-            <a:schemeClr val="lt1"/>
-          </a:fontRef>
-        </p:style>
-        <p:txBody>
-          <a:bodyPr rtlCol="0" anchor="ctr" lIns="45720" rIns="45720"/>
-          <a:lstStyle/>
-          <a:p>
-            <a:pPr algn="ctr"/>
-            <a:r>
-              <a:rPr sz="900">
-                <a:solidFill>
-                  <a:srgbClr val="1F3A5F"/>
-                </a:solidFill>
-              </a:rPr>
-              <a:t>Gram 32: FR Outrider, Category 4, Risa</a:t>
-            </a:r>
-          </a:p>
-        </p:txBody>
-      </p:sp>
-      <p:sp>
-        <p:nvSpPr>
-          <p:cNvPr id="24" name="TextBox 23"/>
-          <p:cNvSpPr txBox="1"/>
-          <p:nvPr/>
-        </p:nvSpPr>
-        <p:spPr>
-          <a:xfrm>
-            <a:off x="365760" y="5017008"/>
-            <a:ext cx="2200046" cy="1447800"/>
-          </a:xfrm>
-          <a:prstGeom prst="rect">
-            <a:avLst/>
-          </a:prstGeom>
-          <a:noFill/>
-        </p:spPr>
-        <p:txBody>
-          <a:bodyPr wrap="square">
-            <a:spAutoFit/>
-          </a:bodyPr>
-          <a:lstStyle/>
-          <a:p>
-            <a:r>
-              <a:rPr sz="800">
-                <a:hlinkClick r:id="rId42"/>
-              </a:rPr>
-              <a:t>Lofar 1</a:t>
-            </a:r>
-          </a:p>
-          <a:p>
-            <a:r>
-              <a:rPr sz="800">
-                <a:hlinkClick r:id="rId43"/>
-              </a:rPr>
-              <a:t>Lofar 2</a:t>
-            </a:r>
-          </a:p>
-        </p:txBody>
-      </p:sp>
-      <p:sp>
-        <p:nvSpPr>
-          <p:cNvPr id="25" name="Rounded Rectangle 24"/>
-          <p:cNvSpPr/>
-          <p:nvPr>
-            <a:hlinkClick r:id="rId44"/>
-          </p:nvPr>
-        </p:nvSpPr>
-        <p:spPr>
-          <a:xfrm>
-            <a:off x="2657246" y="4632960"/>
-            <a:ext cx="2200046" cy="365760"/>
-          </a:xfrm>
-          <a:prstGeom prst="roundRect">
-            <a:avLst/>
-          </a:prstGeom>
-          <a:solidFill>
-            <a:srgbClr val="E8EEF7"/>
-          </a:solidFill>
-          <a:ln>
-            <a:solidFill>
-              <a:srgbClr val="1F3A5F"/>
-            </a:solidFill>
-          </a:ln>
-        </p:spPr>
-        <p:style>
-          <a:lnRef idx="1">
-            <a:schemeClr val="accent1"/>
-          </a:lnRef>
-          <a:fillRef idx="3">
-            <a:schemeClr val="accent1"/>
-          </a:fillRef>
-          <a:effectRef idx="2">
-            <a:schemeClr val="accent1"/>
-          </a:effectRef>
-          <a:fontRef idx="minor">
-            <a:schemeClr val="lt1"/>
-          </a:fontRef>
-        </p:style>
-        <p:txBody>
-          <a:bodyPr rtlCol="0" anchor="ctr" lIns="45720" rIns="45720"/>
-          <a:lstStyle/>
-          <a:p>
-            <a:pPr algn="ctr"/>
-            <a:r>
-              <a:rPr sz="900">
-                <a:solidFill>
-                  <a:srgbClr val="1F3A5F"/>
-                </a:solidFill>
-              </a:rPr>
-              <a:t>Gram 33: FR A-wing, Category 4, Defiant</a:t>
-            </a:r>
-          </a:p>
-        </p:txBody>
-      </p:sp>
-      <p:sp>
-        <p:nvSpPr>
-          <p:cNvPr id="26" name="TextBox 25"/>
-          <p:cNvSpPr txBox="1"/>
-          <p:nvPr/>
-        </p:nvSpPr>
-        <p:spPr>
-          <a:xfrm>
-            <a:off x="2657246" y="5017008"/>
-            <a:ext cx="2200046" cy="1447800"/>
-          </a:xfrm>
-          <a:prstGeom prst="rect">
-            <a:avLst/>
-          </a:prstGeom>
-          <a:noFill/>
-        </p:spPr>
-        <p:txBody>
-          <a:bodyPr wrap="square">
-            <a:spAutoFit/>
-          </a:bodyPr>
-          <a:lstStyle/>
-          <a:p>
-            <a:r>
-              <a:rPr sz="800">
-                <a:hlinkClick r:id="rId45"/>
-              </a:rPr>
-              <a:t>Lofar 1</a:t>
-            </a:r>
-          </a:p>
-        </p:txBody>
-      </p:sp>
-      <p:sp>
-        <p:nvSpPr>
-          <p:cNvPr id="27" name="Rounded Rectangle 26"/>
-          <p:cNvSpPr/>
-          <p:nvPr>
-            <a:hlinkClick r:id="rId46"/>
-          </p:nvPr>
-        </p:nvSpPr>
-        <p:spPr>
-          <a:xfrm>
-            <a:off x="4948732" y="4632960"/>
-            <a:ext cx="2200046" cy="365760"/>
-          </a:xfrm>
-          <a:prstGeom prst="roundRect">
-            <a:avLst/>
-          </a:prstGeom>
-          <a:solidFill>
-            <a:srgbClr val="E8EEF7"/>
-          </a:solidFill>
-          <a:ln>
-            <a:solidFill>
-              <a:srgbClr val="1F3A5F"/>
-            </a:solidFill>
-          </a:ln>
-        </p:spPr>
-        <p:style>
-          <a:lnRef idx="1">
-            <a:schemeClr val="accent1"/>
-          </a:lnRef>
-          <a:fillRef idx="3">
-            <a:schemeClr val="accent1"/>
-          </a:fillRef>
-          <a:effectRef idx="2">
-            <a:schemeClr val="accent1"/>
-          </a:effectRef>
-          <a:fontRef idx="minor">
-            <a:schemeClr val="lt1"/>
-          </a:fontRef>
-        </p:style>
-        <p:txBody>
-          <a:bodyPr rtlCol="0" anchor="ctr" lIns="45720" rIns="45720"/>
-          <a:lstStyle/>
-          <a:p>
-            <a:pPr algn="ctr"/>
-            <a:r>
-              <a:rPr sz="900">
-                <a:solidFill>
-                  <a:srgbClr val="1F3A5F"/>
-                </a:solidFill>
-              </a:rPr>
-              <a:t>Gram 35: Reliant contact bearing 251, codename Bespin</a:t>
-            </a:r>
-          </a:p>
-        </p:txBody>
-      </p:sp>
-      <p:sp>
-        <p:nvSpPr>
-          <p:cNvPr id="28" name="TextBox 27"/>
-          <p:cNvSpPr txBox="1"/>
-          <p:nvPr/>
-        </p:nvSpPr>
-        <p:spPr>
-          <a:xfrm>
-            <a:off x="4948732" y="5017008"/>
-            <a:ext cx="2200046" cy="1447800"/>
-          </a:xfrm>
-          <a:prstGeom prst="rect">
-            <a:avLst/>
-          </a:prstGeom>
-          <a:noFill/>
-        </p:spPr>
-        <p:txBody>
-          <a:bodyPr wrap="square">
-            <a:spAutoFit/>
-          </a:bodyPr>
-          <a:lstStyle/>
-          <a:p>
-            <a:r>
-              <a:rPr sz="800">
-                <a:hlinkClick r:id="rId47"/>
-              </a:rPr>
-              <a:t>Lofar 1</a:t>
-            </a:r>
-          </a:p>
-        </p:txBody>
-      </p:sp>
-      <p:sp>
-        <p:nvSpPr>
-          <p:cNvPr id="29" name="Rounded Rectangle 28"/>
-          <p:cNvSpPr/>
-          <p:nvPr>
-            <a:hlinkClick r:id="rId48"/>
-          </p:nvPr>
-        </p:nvSpPr>
-        <p:spPr>
-          <a:xfrm>
-            <a:off x="7240219" y="4632960"/>
-            <a:ext cx="2200046" cy="365760"/>
-          </a:xfrm>
-          <a:prstGeom prst="roundRect">
-            <a:avLst/>
-          </a:prstGeom>
-          <a:solidFill>
-            <a:srgbClr val="E8EEF7"/>
-          </a:solidFill>
-          <a:ln>
-            <a:solidFill>
-              <a:srgbClr val="1F3A5F"/>
-            </a:solidFill>
-          </a:ln>
-        </p:spPr>
-        <p:style>
-          <a:lnRef idx="1">
-            <a:schemeClr val="accent1"/>
-          </a:lnRef>
-          <a:fillRef idx="3">
-            <a:schemeClr val="accent1"/>
-          </a:fillRef>
-          <a:effectRef idx="2">
-            <a:schemeClr val="accent1"/>
-          </a:effectRef>
-          <a:fontRef idx="minor">
-            <a:schemeClr val="lt1"/>
-          </a:fontRef>
-        </p:style>
-        <p:txBody>
-          <a:bodyPr rtlCol="0" anchor="ctr" lIns="45720" rIns="45720"/>
-          <a:lstStyle/>
-          <a:p>
-            <a:pPr algn="ctr"/>
-            <a:r>
-              <a:rPr sz="900">
-                <a:solidFill>
-                  <a:srgbClr val="1F3A5F"/>
-                </a:solidFill>
-              </a:rPr>
-              <a:t>Gram 36: FR Sovereign-class, Category 2, Yavin</a:t>
-            </a:r>
-          </a:p>
-        </p:txBody>
-      </p:sp>
-      <p:sp>
-        <p:nvSpPr>
-          <p:cNvPr id="30" name="TextBox 29"/>
-          <p:cNvSpPr txBox="1"/>
-          <p:nvPr/>
-        </p:nvSpPr>
-        <p:spPr>
-          <a:xfrm>
-            <a:off x="7240219" y="5017008"/>
-            <a:ext cx="2200046" cy="1447800"/>
-          </a:xfrm>
-          <a:prstGeom prst="rect">
-            <a:avLst/>
-          </a:prstGeom>
-          <a:noFill/>
-        </p:spPr>
-        <p:txBody>
-          <a:bodyPr wrap="square">
-            <a:spAutoFit/>
-          </a:bodyPr>
-          <a:lstStyle/>
-          <a:p>
-            <a:r>
-              <a:rPr sz="800">
-                <a:hlinkClick r:id="rId49"/>
-              </a:rPr>
-              <a:t>Lofar 1</a:t>
-            </a:r>
-          </a:p>
-          <a:p>
-            <a:r>
-              <a:rPr sz="800">
-                <a:hlinkClick r:id="rId50"/>
-              </a:rPr>
-              <a:t>Lofar 2</a:t>
-            </a:r>
-          </a:p>
-          <a:p>
-            <a:r>
-              <a:rPr sz="800">
-                <a:hlinkClick r:id="rId51"/>
-              </a:rPr>
-              <a:t>Lofar 3</a:t>
-            </a:r>
-          </a:p>
-        </p:txBody>
-      </p:sp>
-      <p:sp>
-        <p:nvSpPr>
-          <p:cNvPr id="31" name="Rounded Rectangle 30"/>
-          <p:cNvSpPr/>
-          <p:nvPr>
-            <a:hlinkClick r:id="rId52"/>
-          </p:nvPr>
-        </p:nvSpPr>
-        <p:spPr>
-          <a:xfrm>
-            <a:off x="9531705" y="4632960"/>
-            <a:ext cx="2200046" cy="365760"/>
-          </a:xfrm>
-          <a:prstGeom prst="roundRect">
-            <a:avLst/>
-          </a:prstGeom>
-          <a:solidFill>
-            <a:srgbClr val="E8EEF7"/>
-          </a:solidFill>
-          <a:ln>
-            <a:solidFill>
-              <a:srgbClr val="1F3A5F"/>
-            </a:solidFill>
-          </a:ln>
-        </p:spPr>
-        <p:style>
-          <a:lnRef idx="1">
-            <a:schemeClr val="accent1"/>
-          </a:lnRef>
-          <a:fillRef idx="3">
-            <a:schemeClr val="accent1"/>
-          </a:fillRef>
-          <a:effectRef idx="2">
-            <a:schemeClr val="accent1"/>
-          </a:effectRef>
-          <a:fontRef idx="minor">
-            <a:schemeClr val="lt1"/>
-          </a:fontRef>
-        </p:style>
-        <p:txBody>
-          <a:bodyPr rtlCol="0" anchor="ctr" lIns="45720" rIns="45720"/>
-          <a:lstStyle/>
-          <a:p>
-            <a:pPr algn="ctr"/>
-            <a:r>
-              <a:rPr sz="900">
-                <a:solidFill>
-                  <a:srgbClr val="1F3A5F"/>
-                </a:solidFill>
-              </a:rPr>
-              <a:t>Gram 37: FR Akira-class, Category 4, Kobol</a:t>
-            </a:r>
-          </a:p>
-        </p:txBody>
-      </p:sp>
-      <p:sp>
-        <p:nvSpPr>
-          <p:cNvPr id="32" name="TextBox 31"/>
-          <p:cNvSpPr txBox="1"/>
-          <p:nvPr/>
-        </p:nvSpPr>
-        <p:spPr>
-          <a:xfrm>
-            <a:off x="9531705" y="5017008"/>
-            <a:ext cx="2200046" cy="1447800"/>
-          </a:xfrm>
-          <a:prstGeom prst="rect">
-            <a:avLst/>
-          </a:prstGeom>
-          <a:noFill/>
-        </p:spPr>
-        <p:txBody>
-          <a:bodyPr wrap="square">
-            <a:spAutoFit/>
-          </a:bodyPr>
-          <a:lstStyle/>
-          <a:p>
-            <a:r>
-              <a:rPr sz="800">
-                <a:hlinkClick r:id="rId53"/>
-              </a:rPr>
-              <a:t>Lofar 1</a:t>
-            </a:r>
-          </a:p>
-        </p:txBody>
-      </p:sp>
-    </p:spTree>
-  </p:cSld>
-  <p:clrMapOvr>
-    <a:masterClrMapping/>
-  </p:clrMapOvr>
-</p:sld>
-</file>
-
-<file path=ppt/slides/slide4.xml><?xml version="1.0" encoding="utf-8"?>
-<p:sld xmlns:a="http://schemas.openxmlformats.org/drawingml/2006/main" xmlns:p="http://schemas.openxmlformats.org/presentationml/2006/main" xmlns:r="http://schemas.openxmlformats.org/officeDocument/2006/relationships">
-  <p:cSld>
-    <p:spTree>
-      <p:nvGrpSpPr>
-        <p:cNvPr id="1" name=""/>
-        <p:cNvGrpSpPr/>
-        <p:nvPr/>
-      </p:nvGrpSpPr>
-      <p:grpSpPr/>
-      <p:sp>
-        <p:nvSpPr>
-          <p:cNvPr id="2" name="Rectangle 1"/>
-          <p:cNvSpPr/>
-          <p:nvPr/>
-        </p:nvSpPr>
-        <p:spPr>
-          <a:xfrm>
-            <a:off x="0" y="0"/>
-            <a:ext cx="12188952" cy="548640"/>
-          </a:xfrm>
-          <a:prstGeom prst="rect">
-            <a:avLst/>
-          </a:prstGeom>
-          <a:solidFill>
-            <a:srgbClr val="1F3A5F"/>
-          </a:solidFill>
-          <a:ln>
-            <a:noFill/>
-          </a:ln>
-        </p:spPr>
-        <p:style>
-          <a:lnRef idx="1">
-            <a:schemeClr val="accent1"/>
-          </a:lnRef>
-          <a:fillRef idx="3">
-            <a:schemeClr val="accent1"/>
-          </a:fillRef>
-          <a:effectRef idx="2">
-            <a:schemeClr val="accent1"/>
-          </a:effectRef>
-          <a:fontRef idx="minor">
-            <a:schemeClr val="lt1"/>
-          </a:fontRef>
-        </p:style>
-        <p:txBody>
-          <a:bodyPr rtlCol="0" anchor="ctr" lIns="182880" rIns="182880"/>
-          <a:lstStyle/>
-          <a:p>
-            <a:pPr algn="ctr"/>
-            <a:r>
-              <a:rPr sz="2000" b="1">
-                <a:solidFill>
-                  <a:srgbClr val="FFFFFF"/>
-                </a:solidFill>
-              </a:rPr>
-              <a:t>Instructor Week 1 Grams — Page 3 of 3</a:t>
-            </a:r>
-          </a:p>
-        </p:txBody>
-      </p:sp>
-      <p:sp>
-        <p:nvSpPr>
-          <p:cNvPr id="3" name="Rounded Rectangle 2"/>
-          <p:cNvSpPr/>
-          <p:nvPr>
-            <a:hlinkClick r:id="rId2"/>
-          </p:nvPr>
-        </p:nvSpPr>
-        <p:spPr>
-          <a:xfrm>
-            <a:off x="365760" y="731520"/>
-            <a:ext cx="2200046" cy="365760"/>
-          </a:xfrm>
-          <a:prstGeom prst="roundRect">
-            <a:avLst/>
-          </a:prstGeom>
-          <a:solidFill>
-            <a:srgbClr val="E8EEF7"/>
-          </a:solidFill>
-          <a:ln>
-            <a:solidFill>
-              <a:srgbClr val="1F3A5F"/>
-            </a:solidFill>
-          </a:ln>
-        </p:spPr>
-        <p:style>
-          <a:lnRef idx="1">
-            <a:schemeClr val="accent1"/>
-          </a:lnRef>
-          <a:fillRef idx="3">
-            <a:schemeClr val="accent1"/>
-          </a:fillRef>
-          <a:effectRef idx="2">
-            <a:schemeClr val="accent1"/>
-          </a:effectRef>
-          <a:fontRef idx="minor">
-            <a:schemeClr val="lt1"/>
-          </a:fontRef>
-        </p:style>
-        <p:txBody>
-          <a:bodyPr rtlCol="0" anchor="ctr" lIns="45720" rIns="45720"/>
-          <a:lstStyle/>
-          <a:p>
-            <a:pPr algn="ctr"/>
-            <a:r>
-              <a:rPr sz="900">
-                <a:solidFill>
-                  <a:srgbClr val="1F3A5F"/>
-                </a:solidFill>
-              </a:rPr>
-              <a:t>Gram 38: FR Razor Crest, Category 3, Dank</a:t>
-            </a:r>
-          </a:p>
-        </p:txBody>
-      </p:sp>
-      <p:sp>
-        <p:nvSpPr>
-          <p:cNvPr id="4" name="TextBox 3"/>
-          <p:cNvSpPr txBox="1"/>
-          <p:nvPr/>
-        </p:nvSpPr>
-        <p:spPr>
-          <a:xfrm>
-            <a:off x="365760" y="1115568"/>
-            <a:ext cx="2200046" cy="1447800"/>
-          </a:xfrm>
-          <a:prstGeom prst="rect">
-            <a:avLst/>
-          </a:prstGeom>
-          <a:noFill/>
-        </p:spPr>
-        <p:txBody>
-          <a:bodyPr wrap="square">
-            <a:spAutoFit/>
-          </a:bodyPr>
-          <a:lstStyle/>
-          <a:p>
-            <a:r>
-              <a:rPr sz="800">
-                <a:hlinkClick r:id="rId3"/>
-              </a:rPr>
-              <a:t>Lofar 1</a:t>
-            </a:r>
-          </a:p>
-          <a:p>
-            <a:r>
-              <a:rPr sz="800">
-                <a:hlinkClick r:id="rId4"/>
-              </a:rPr>
-              <a:t>Lofar 2</a:t>
-            </a:r>
-          </a:p>
-          <a:p>
-            <a:r>
-              <a:rPr sz="800">
-                <a:hlinkClick r:id="rId5"/>
-              </a:rPr>
-              <a:t>Lofar 3</a:t>
-            </a:r>
-          </a:p>
-          <a:p>
-            <a:r>
-              <a:rPr sz="800">
-                <a:hlinkClick r:id="rId6"/>
-              </a:rPr>
-              <a:t>Lofar 4</a:t>
-            </a:r>
-          </a:p>
-        </p:txBody>
-      </p:sp>
-      <p:sp>
-        <p:nvSpPr>
-          <p:cNvPr id="5" name="Rounded Rectangle 4"/>
-          <p:cNvSpPr/>
-          <p:nvPr>
-            <a:hlinkClick r:id="rId7"/>
-          </p:nvPr>
-        </p:nvSpPr>
-        <p:spPr>
-          <a:xfrm>
-            <a:off x="2657246" y="731520"/>
-            <a:ext cx="2200046" cy="365760"/>
-          </a:xfrm>
-          <a:prstGeom prst="roundRect">
-            <a:avLst/>
-          </a:prstGeom>
-          <a:solidFill>
-            <a:srgbClr val="E8EEF7"/>
-          </a:solidFill>
-          <a:ln>
-            <a:solidFill>
-              <a:srgbClr val="1F3A5F"/>
-            </a:solidFill>
-          </a:ln>
-        </p:spPr>
-        <p:style>
-          <a:lnRef idx="1">
-            <a:schemeClr val="accent1"/>
-          </a:lnRef>
-          <a:fillRef idx="3">
-            <a:schemeClr val="accent1"/>
-          </a:fillRef>
-          <a:effectRef idx="2">
-            <a:schemeClr val="accent1"/>
-          </a:effectRef>
-          <a:fontRef idx="minor">
-            <a:schemeClr val="lt1"/>
-          </a:fontRef>
-        </p:style>
-        <p:txBody>
-          <a:bodyPr rtlCol="0" anchor="ctr" lIns="45720" rIns="45720"/>
-          <a:lstStyle/>
-          <a:p>
-            <a:pPr algn="ctr"/>
-            <a:r>
-              <a:rPr sz="900">
-                <a:solidFill>
-                  <a:srgbClr val="1F3A5F"/>
-                </a:solidFill>
-              </a:rPr>
-              <a:t>Gram 39: FR Slave I, Category 3, Kronos</a:t>
-            </a:r>
-          </a:p>
-        </p:txBody>
-      </p:sp>
-      <p:sp>
-        <p:nvSpPr>
-          <p:cNvPr id="6" name="TextBox 5"/>
-          <p:cNvSpPr txBox="1"/>
-          <p:nvPr/>
-        </p:nvSpPr>
-        <p:spPr>
-          <a:xfrm>
-            <a:off x="2657246" y="1115568"/>
-            <a:ext cx="2200046" cy="1447800"/>
-          </a:xfrm>
-          <a:prstGeom prst="rect">
-            <a:avLst/>
-          </a:prstGeom>
-          <a:noFill/>
-        </p:spPr>
-        <p:txBody>
-          <a:bodyPr wrap="square">
-            <a:spAutoFit/>
-          </a:bodyPr>
-          <a:lstStyle/>
-          <a:p>
-            <a:r>
-              <a:rPr sz="800">
-                <a:hlinkClick r:id="rId8"/>
-              </a:rPr>
-              <a:t>Lofar 1</a:t>
-            </a:r>
-          </a:p>
-        </p:txBody>
-      </p:sp>
-      <p:sp>
-        <p:nvSpPr>
-          <p:cNvPr id="7" name="Rounded Rectangle 6"/>
-          <p:cNvSpPr/>
-          <p:nvPr>
-            <a:hlinkClick r:id="rId9"/>
-          </p:nvPr>
-        </p:nvSpPr>
-        <p:spPr>
-          <a:xfrm>
-            <a:off x="4948732" y="731520"/>
-            <a:ext cx="2200046" cy="365760"/>
-          </a:xfrm>
-          <a:prstGeom prst="roundRect">
-            <a:avLst/>
-          </a:prstGeom>
-          <a:solidFill>
-            <a:srgbClr val="E8EEF7"/>
-          </a:solidFill>
-          <a:ln>
-            <a:solidFill>
-              <a:srgbClr val="1F3A5F"/>
-            </a:solidFill>
-          </a:ln>
-        </p:spPr>
-        <p:style>
-          <a:lnRef idx="1">
-            <a:schemeClr val="accent1"/>
-          </a:lnRef>
-          <a:fillRef idx="3">
-            <a:schemeClr val="accent1"/>
-          </a:fillRef>
-          <a:effectRef idx="2">
-            <a:schemeClr val="accent1"/>
-          </a:effectRef>
-          <a:fontRef idx="minor">
-            <a:schemeClr val="lt1"/>
-          </a:fontRef>
-        </p:style>
-        <p:txBody>
-          <a:bodyPr rtlCol="0" anchor="ctr" lIns="45720" rIns="45720"/>
-          <a:lstStyle/>
-          <a:p>
-            <a:pPr algn="ctr"/>
-            <a:r>
-              <a:rPr sz="900">
-                <a:solidFill>
-                  <a:srgbClr val="1F3A5F"/>
-                </a:solidFill>
-              </a:rPr>
-              <a:t>Gram 40: FR Razor Crest, Category 3, Dank</a:t>
-            </a:r>
-          </a:p>
-        </p:txBody>
-      </p:sp>
-      <p:sp>
-        <p:nvSpPr>
-          <p:cNvPr id="8" name="TextBox 7"/>
-          <p:cNvSpPr txBox="1"/>
-          <p:nvPr/>
-        </p:nvSpPr>
-        <p:spPr>
-          <a:xfrm>
-            <a:off x="4948732" y="1115568"/>
-            <a:ext cx="2200046" cy="1447800"/>
-          </a:xfrm>
-          <a:prstGeom prst="rect">
-            <a:avLst/>
-          </a:prstGeom>
-          <a:noFill/>
-        </p:spPr>
-        <p:txBody>
-          <a:bodyPr wrap="square">
-            <a:spAutoFit/>
-          </a:bodyPr>
-          <a:lstStyle/>
-          <a:p>
-            <a:r>
-              <a:rPr sz="800">
-                <a:hlinkClick r:id="rId10"/>
-              </a:rPr>
-              <a:t>Lofar 1</a:t>
-            </a:r>
-          </a:p>
-          <a:p>
-            <a:r>
-              <a:rPr sz="800">
-                <a:hlinkClick r:id="rId11"/>
-              </a:rPr>
-              <a:t>Lofar 2</a:t>
-            </a:r>
-          </a:p>
-          <a:p>
-            <a:r>
-              <a:rPr sz="800">
-                <a:hlinkClick r:id="rId12"/>
-              </a:rPr>
-              <a:t>Lofar 3</a:t>
-            </a:r>
-          </a:p>
-          <a:p>
-            <a:r>
-              <a:rPr sz="800">
-                <a:hlinkClick r:id="rId13"/>
-              </a:rPr>
-              <a:t>Lofar 4</a:t>
-            </a:r>
-          </a:p>
-        </p:txBody>
-      </p:sp>
-      <p:sp>
-        <p:nvSpPr>
-          <p:cNvPr id="9" name="Rounded Rectangle 8"/>
-          <p:cNvSpPr/>
-          <p:nvPr>
-            <a:hlinkClick r:id="rId14"/>
-          </p:nvPr>
-        </p:nvSpPr>
-        <p:spPr>
-          <a:xfrm>
-            <a:off x="7240219" y="731520"/>
-            <a:ext cx="2200046" cy="365760"/>
-          </a:xfrm>
-          <a:prstGeom prst="roundRect">
-            <a:avLst/>
-          </a:prstGeom>
-          <a:solidFill>
-            <a:srgbClr val="E8EEF7"/>
-          </a:solidFill>
-          <a:ln>
-            <a:solidFill>
-              <a:srgbClr val="1F3A5F"/>
-            </a:solidFill>
-          </a:ln>
-        </p:spPr>
-        <p:style>
-          <a:lnRef idx="1">
-            <a:schemeClr val="accent1"/>
-          </a:lnRef>
-          <a:fillRef idx="3">
-            <a:schemeClr val="accent1"/>
-          </a:fillRef>
-          <a:effectRef idx="2">
-            <a:schemeClr val="accent1"/>
-          </a:effectRef>
-          <a:fontRef idx="minor">
-            <a:schemeClr val="lt1"/>
-          </a:fontRef>
-        </p:style>
-        <p:txBody>
-          <a:bodyPr rtlCol="0" anchor="ctr" lIns="45720" rIns="45720"/>
-          <a:lstStyle/>
-          <a:p>
-            <a:pPr algn="ctr"/>
-            <a:r>
-              <a:rPr sz="900">
-                <a:solidFill>
-                  <a:srgbClr val="1F3A5F"/>
-                </a:solidFill>
-              </a:rPr>
-              <a:t>Gram 41: Ghost contact bearing 208, codename Betazed</a:t>
-            </a:r>
-          </a:p>
-        </p:txBody>
-      </p:sp>
-      <p:sp>
-        <p:nvSpPr>
-          <p:cNvPr id="10" name="TextBox 9"/>
-          <p:cNvSpPr txBox="1"/>
-          <p:nvPr/>
-        </p:nvSpPr>
-        <p:spPr>
-          <a:xfrm>
-            <a:off x="7240219" y="1115568"/>
-            <a:ext cx="2200046" cy="1447800"/>
-          </a:xfrm>
-          <a:prstGeom prst="rect">
-            <a:avLst/>
-          </a:prstGeom>
-          <a:noFill/>
-        </p:spPr>
-        <p:txBody>
-          <a:bodyPr wrap="square">
-            <a:spAutoFit/>
-          </a:bodyPr>
-          <a:lstStyle/>
-          <a:p>
-            <a:r>
-              <a:rPr sz="800">
-                <a:hlinkClick r:id="rId15"/>
-              </a:rPr>
-              <a:t>Lofar 1</a:t>
-            </a:r>
-          </a:p>
-          <a:p>
-            <a:r>
-              <a:rPr sz="800">
-                <a:hlinkClick r:id="rId16"/>
-              </a:rPr>
-              <a:t>Lofar 2</a:t>
-            </a:r>
-          </a:p>
-          <a:p>
-            <a:r>
-              <a:rPr sz="800">
-                <a:hlinkClick r:id="rId17"/>
-              </a:rPr>
-              <a:t>Lofar 3</a:t>
-            </a:r>
-          </a:p>
-          <a:p>
-            <a:r>
-              <a:rPr sz="800">
-                <a:hlinkClick r:id="rId18"/>
-              </a:rPr>
-              <a:t>Lofar 4</a:t>
-            </a:r>
-          </a:p>
-        </p:txBody>
-      </p:sp>
-      <p:sp>
-        <p:nvSpPr>
-          <p:cNvPr id="11" name="Rounded Rectangle 10"/>
-          <p:cNvSpPr/>
-          <p:nvPr>
-            <a:hlinkClick r:id="rId19"/>
-          </p:nvPr>
-        </p:nvSpPr>
-        <p:spPr>
-          <a:xfrm>
-            <a:off x="9531705" y="731520"/>
-            <a:ext cx="2200046" cy="365760"/>
-          </a:xfrm>
-          <a:prstGeom prst="roundRect">
-            <a:avLst/>
-          </a:prstGeom>
-          <a:solidFill>
-            <a:srgbClr val="E8EEF7"/>
-          </a:solidFill>
-          <a:ln>
-            <a:solidFill>
-              <a:srgbClr val="1F3A5F"/>
-            </a:solidFill>
-          </a:ln>
-        </p:spPr>
-        <p:style>
-          <a:lnRef idx="1">
-            <a:schemeClr val="accent1"/>
-          </a:lnRef>
-          <a:fillRef idx="3">
-            <a:schemeClr val="accent1"/>
-          </a:fillRef>
-          <a:effectRef idx="2">
-            <a:schemeClr val="accent1"/>
-          </a:effectRef>
-          <a:fontRef idx="minor">
-            <a:schemeClr val="lt1"/>
-          </a:fontRef>
-        </p:style>
-        <p:txBody>
-          <a:bodyPr rtlCol="0" anchor="ctr" lIns="45720" rIns="45720"/>
-          <a:lstStyle/>
-          <a:p>
-            <a:pPr algn="ctr"/>
-            <a:r>
-              <a:rPr sz="900">
-                <a:solidFill>
-                  <a:srgbClr val="1F3A5F"/>
-                </a:solidFill>
-              </a:rPr>
-              <a:t>Gram 42: FR Acclamator-class, Category 2, Trill</a:t>
-            </a:r>
-          </a:p>
-        </p:txBody>
-      </p:sp>
-      <p:sp>
-        <p:nvSpPr>
-          <p:cNvPr id="12" name="TextBox 11"/>
-          <p:cNvSpPr txBox="1"/>
-          <p:nvPr/>
-        </p:nvSpPr>
-        <p:spPr>
-          <a:xfrm>
-            <a:off x="9531705" y="1115568"/>
-            <a:ext cx="2200046" cy="1447800"/>
-          </a:xfrm>
-          <a:prstGeom prst="rect">
-            <a:avLst/>
-          </a:prstGeom>
-          <a:noFill/>
-        </p:spPr>
-        <p:txBody>
-          <a:bodyPr wrap="square">
-            <a:spAutoFit/>
-          </a:bodyPr>
-          <a:lstStyle/>
-          <a:p>
-            <a:r>
-              <a:rPr sz="800">
-                <a:hlinkClick r:id="rId20"/>
-              </a:rPr>
-              <a:t>Lofar 1</a:t>
-            </a:r>
-          </a:p>
-          <a:p>
-            <a:r>
-              <a:rPr sz="800">
-                <a:hlinkClick r:id="rId21"/>
-              </a:rPr>
-              <a:t>Lofar 2</a:t>
-            </a:r>
-          </a:p>
-          <a:p>
-            <a:r>
-              <a:rPr sz="800">
-                <a:hlinkClick r:id="rId22"/>
-              </a:rPr>
-              <a:t>Lofar 3</a:t>
-            </a:r>
-          </a:p>
-        </p:txBody>
-      </p:sp>
-    </p:spTree>
-  </p:cSld>
-  <p:clrMapOvr>
-    <a:masterClrMapping/>
-  </p:clrMapOvr>
-</p:sld>
-</file>
-
-<file path=ppt/slides/slide5.xml><?xml version="1.0" encoding="utf-8"?>
-<p:sld xmlns:a="http://schemas.openxmlformats.org/drawingml/2006/main" xmlns:p="http://schemas.openxmlformats.org/presentationml/2006/main" xmlns:r="http://schemas.openxmlformats.org/officeDocument/2006/relationships">
-  <p:cSld>
-    <p:spTree>
-      <p:nvGrpSpPr>
-        <p:cNvPr id="1" name=""/>
-        <p:cNvGrpSpPr/>
-        <p:nvPr/>
-      </p:nvGrpSpPr>
-      <p:grpSpPr/>
-      <p:sp>
-        <p:nvSpPr>
-          <p:cNvPr id="2" name="TextBox 1"/>
-          <p:cNvSpPr txBox="1"/>
-          <p:nvPr/>
-        </p:nvSpPr>
-        <p:spPr>
-          <a:xfrm>
-            <a:off x="914400" y="2377440"/>
-            <a:ext cx="10360152" cy="1280160"/>
-          </a:xfrm>
-          <a:prstGeom prst="rect">
-            <a:avLst/>
-          </a:prstGeom>
-          <a:noFill/>
-        </p:spPr>
-        <p:txBody>
-          <a:bodyPr wrap="square">
-            <a:spAutoFit/>
-          </a:bodyPr>
-          <a:lstStyle/>
-          <a:p>
-            <a:pPr algn="ctr"/>
-            <a:r>
-              <a:rPr sz="4000" b="1">
-                <a:solidFill>
-                  <a:srgbClr val="1F3A5F"/>
-                </a:solidFill>
-              </a:rPr>
-              <a:t>End of Instructor Week 1 Grams</a:t>
-            </a:r>
-          </a:p>
-        </p:txBody>
-      </p:sp>
-      <p:sp>
-        <p:nvSpPr>
-          <p:cNvPr id="3" name="TextBox 2"/>
-          <p:cNvSpPr txBox="1"/>
-          <p:nvPr/>
-        </p:nvSpPr>
-        <p:spPr>
-          <a:xfrm>
-            <a:off x="914400" y="3840480"/>
-            <a:ext cx="10360152" cy="731520"/>
-          </a:xfrm>
-          <a:prstGeom prst="rect">
-            <a:avLst/>
-          </a:prstGeom>
-          <a:noFill/>
-        </p:spPr>
-        <p:txBody>
-          <a:bodyPr wrap="none">
-            <a:spAutoFit/>
-          </a:bodyPr>
-          <a:lstStyle/>
-          <a:p>
-            <a:pPr algn="ctr"/>
-            <a:r>
-              <a:rPr sz="2400">
-                <a:solidFill>
-                  <a:srgbClr val="1F3A5F"/>
-                </a:solidFill>
-              </a:rPr>
-              <a:t>Instructor Version</a:t>
             </a:r>
           </a:p>
         </p:txBody>

--- a/source/Instructor Week 1 Grams/Instructor Week 1 Grams.pptx
+++ b/source/Instructor Week 1 Grams/Instructor Week 1 Grams.pptx
@@ -8,6 +8,8 @@
     <p:sldId id="256" r:id="rId7"/>
     <p:sldId id="257" r:id="rId8"/>
     <p:sldId id="258" r:id="rId9"/>
+    <p:sldId id="259" r:id="rId10"/>
+    <p:sldId id="260" r:id="rId11"/>
   </p:sldIdLst>
   <p:sldSz cx="12188952" cy="6858000" type="screen4x3"/>
   <p:notesSz cx="6858000" cy="9144000"/>
@@ -3092,120 +3094,48 @@
       <p:grpSpPr/>
       <p:sp>
         <p:nvSpPr>
-          <p:cNvPr id="2" name="Rectangle 1"/>
-          <p:cNvSpPr/>
-          <p:nvPr/>
-        </p:nvSpPr>
-        <p:spPr>
-          <a:xfrm>
-            <a:off x="0" y="0"/>
-            <a:ext cx="12188952" cy="548640"/>
+          <p:cNvPr id="2" name="TextBox 1"/>
+          <p:cNvSpPr txBox="1"/>
+          <p:nvPr/>
+        </p:nvSpPr>
+        <p:spPr>
+          <a:xfrm>
+            <a:off x="914400" y="2377440"/>
+            <a:ext cx="10360152" cy="1280160"/>
           </a:xfrm>
           <a:prstGeom prst="rect">
             <a:avLst/>
           </a:prstGeom>
-          <a:solidFill>
-            <a:srgbClr val="1F3A5F"/>
-          </a:solidFill>
-          <a:ln>
-            <a:noFill/>
-          </a:ln>
-        </p:spPr>
-        <p:style>
-          <a:lnRef idx="1">
-            <a:schemeClr val="accent1"/>
-          </a:lnRef>
-          <a:fillRef idx="3">
-            <a:schemeClr val="accent1"/>
-          </a:fillRef>
-          <a:effectRef idx="2">
-            <a:schemeClr val="accent1"/>
-          </a:effectRef>
-          <a:fontRef idx="minor">
-            <a:schemeClr val="lt1"/>
-          </a:fontRef>
-        </p:style>
-        <p:txBody>
-          <a:bodyPr rtlCol="0" anchor="ctr" lIns="182880" rIns="182880"/>
+          <a:noFill/>
+        </p:spPr>
+        <p:txBody>
+          <a:bodyPr wrap="square">
+            <a:spAutoFit/>
+          </a:bodyPr>
           <a:lstStyle/>
           <a:p>
             <a:pPr algn="ctr"/>
             <a:r>
-              <a:rPr sz="2000" b="1">
-                <a:solidFill>
-                  <a:srgbClr val="FFFFFF"/>
-                </a:solidFill>
-              </a:rPr>
-              <a:t>Instructor Week 1 Grams — Page 1 of 3</a:t>
-            </a:r>
-          </a:p>
-        </p:txBody>
-      </p:sp>
-      <p:sp>
-        <p:nvSpPr>
-          <p:cNvPr id="3" name="Rounded Rectangle 2">
-            <a:hlinkClick r:id="rId2"/>
-          </p:cNvPr>
-          <p:cNvSpPr/>
-          <p:nvPr/>
-        </p:nvSpPr>
-        <p:spPr>
-          <a:xfrm>
-            <a:off x="365760" y="731520"/>
-            <a:ext cx="2200046" cy="365760"/>
-          </a:xfrm>
-          <a:prstGeom prst="roundRect">
-            <a:avLst/>
-          </a:prstGeom>
-          <a:solidFill>
-            <a:srgbClr val="E8EEF7"/>
-          </a:solidFill>
-          <a:ln>
-            <a:solidFill>
-              <a:srgbClr val="1F3A5F"/>
-            </a:solidFill>
-          </a:ln>
-        </p:spPr>
-        <p:style>
-          <a:lnRef idx="1">
-            <a:schemeClr val="accent1"/>
-          </a:lnRef>
-          <a:fillRef idx="3">
-            <a:schemeClr val="accent1"/>
-          </a:fillRef>
-          <a:effectRef idx="2">
-            <a:schemeClr val="accent1"/>
-          </a:effectRef>
-          <a:fontRef idx="minor">
-            <a:schemeClr val="lt1"/>
-          </a:fontRef>
-        </p:style>
-        <p:txBody>
-          <a:bodyPr rtlCol="0" anchor="ctr" lIns="45720" rIns="45720"/>
-          <a:lstStyle/>
-          <a:p>
-            <a:pPr algn="ctr"/>
-            <a:r>
-              <a:rPr sz="900">
+              <a:rPr sz="4000" b="1">
                 <a:solidFill>
                   <a:srgbClr val="1F3A5F"/>
                 </a:solidFill>
               </a:rPr>
-              <a:t>Gram 1: FR Razor Crest, Category 3, Mustafar</a:t>
-            </a:r>
-          </a:p>
-        </p:txBody>
-      </p:sp>
-      <p:sp>
-        <p:nvSpPr>
-          <p:cNvPr id="4" name="TextBox 3"/>
+              <a:t>Welcome to Instructor Week 1 Grams</a:t>
+            </a:r>
+          </a:p>
+        </p:txBody>
+      </p:sp>
+      <p:sp>
+        <p:nvSpPr>
+          <p:cNvPr id="3" name="TextBox 2"/>
           <p:cNvSpPr txBox="1"/>
           <p:nvPr/>
         </p:nvSpPr>
         <p:spPr>
           <a:xfrm>
-            <a:off x="365760" y="1115568"/>
-            <a:ext cx="2200046" cy="1447800"/>
+            <a:off x="914400" y="3840480"/>
+            <a:ext cx="10360152" cy="731520"/>
           </a:xfrm>
           <a:prstGeom prst="rect">
             <a:avLst/>
@@ -3213,1388 +3143,19 @@
           <a:noFill/>
         </p:spPr>
         <p:txBody>
-          <a:bodyPr wrap="square">
+          <a:bodyPr wrap="none">
             <a:spAutoFit/>
           </a:bodyPr>
           <a:lstStyle/>
           <a:p>
-            <a:r>
-              <a:rPr sz="800">
-                <a:hlinkClick r:id="rId3"/>
-              </a:rPr>
-              <a:t>Lofar 1</a:t>
-            </a:r>
-          </a:p>
-        </p:txBody>
-      </p:sp>
-      <p:sp>
-        <p:nvSpPr>
-          <p:cNvPr id="5" name="Rounded Rectangle 4">
-            <a:hlinkClick r:id="rId4"/>
-          </p:cNvPr>
-          <p:cNvSpPr/>
-          <p:nvPr/>
-        </p:nvSpPr>
-        <p:spPr>
-          <a:xfrm>
-            <a:off x="2657246" y="731520"/>
-            <a:ext cx="2200046" cy="365760"/>
-          </a:xfrm>
-          <a:prstGeom prst="roundRect">
-            <a:avLst/>
-          </a:prstGeom>
-          <a:solidFill>
-            <a:srgbClr val="E8EEF7"/>
-          </a:solidFill>
-          <a:ln>
-            <a:solidFill>
-              <a:srgbClr val="1F3A5F"/>
-            </a:solidFill>
-          </a:ln>
-        </p:spPr>
-        <p:style>
-          <a:lnRef idx="1">
-            <a:schemeClr val="accent1"/>
-          </a:lnRef>
-          <a:fillRef idx="3">
-            <a:schemeClr val="accent1"/>
-          </a:fillRef>
-          <a:effectRef idx="2">
-            <a:schemeClr val="accent1"/>
-          </a:effectRef>
-          <a:fontRef idx="minor">
-            <a:schemeClr val="lt1"/>
-          </a:fontRef>
-        </p:style>
-        <p:txBody>
-          <a:bodyPr rtlCol="0" anchor="ctr" lIns="45720" rIns="45720"/>
-          <a:lstStyle/>
-          <a:p>
             <a:pPr algn="ctr"/>
             <a:r>
-              <a:rPr sz="900">
+              <a:rPr sz="2400">
                 <a:solidFill>
                   <a:srgbClr val="1F3A5F"/>
                 </a:solidFill>
               </a:rPr>
-              <a:t>Gram 2: FR Tantive IV, Category 1, Romulus</a:t>
-            </a:r>
-          </a:p>
-        </p:txBody>
-      </p:sp>
-      <p:sp>
-        <p:nvSpPr>
-          <p:cNvPr id="6" name="TextBox 5"/>
-          <p:cNvSpPr txBox="1"/>
-          <p:nvPr/>
-        </p:nvSpPr>
-        <p:spPr>
-          <a:xfrm>
-            <a:off x="2657246" y="1115568"/>
-            <a:ext cx="2200046" cy="1447800"/>
-          </a:xfrm>
-          <a:prstGeom prst="rect">
-            <a:avLst/>
-          </a:prstGeom>
-          <a:noFill/>
-        </p:spPr>
-        <p:txBody>
-          <a:bodyPr wrap="square">
-            <a:spAutoFit/>
-          </a:bodyPr>
-          <a:lstStyle/>
-          <a:p>
-            <a:r>
-              <a:rPr sz="800">
-                <a:hlinkClick r:id="rId5"/>
-              </a:rPr>
-              <a:t>Lofar 1</a:t>
-            </a:r>
-          </a:p>
-          <a:p>
-            <a:r>
-              <a:rPr sz="800">
-                <a:hlinkClick r:id="rId6"/>
-              </a:rPr>
-              <a:t>Lofar 2</a:t>
-            </a:r>
-          </a:p>
-          <a:p>
-            <a:r>
-              <a:rPr sz="800">
-                <a:hlinkClick r:id="rId7"/>
-              </a:rPr>
-              <a:t>Lofar 3</a:t>
-            </a:r>
-          </a:p>
-          <a:p>
-            <a:r>
-              <a:rPr sz="800">
-                <a:hlinkClick r:id="rId8"/>
-              </a:rPr>
-              <a:t>Lofar 4</a:t>
-            </a:r>
-          </a:p>
-        </p:txBody>
-      </p:sp>
-      <p:sp>
-        <p:nvSpPr>
-          <p:cNvPr id="7" name="Rounded Rectangle 6">
-            <a:hlinkClick r:id="rId9"/>
-          </p:cNvPr>
-          <p:cNvSpPr/>
-          <p:nvPr/>
-        </p:nvSpPr>
-        <p:spPr>
-          <a:xfrm>
-            <a:off x="4948732" y="731520"/>
-            <a:ext cx="2200046" cy="365760"/>
-          </a:xfrm>
-          <a:prstGeom prst="roundRect">
-            <a:avLst/>
-          </a:prstGeom>
-          <a:solidFill>
-            <a:srgbClr val="E8EEF7"/>
-          </a:solidFill>
-          <a:ln>
-            <a:solidFill>
-              <a:srgbClr val="1F3A5F"/>
-            </a:solidFill>
-          </a:ln>
-        </p:spPr>
-        <p:style>
-          <a:lnRef idx="1">
-            <a:schemeClr val="accent1"/>
-          </a:lnRef>
-          <a:fillRef idx="3">
-            <a:schemeClr val="accent1"/>
-          </a:fillRef>
-          <a:effectRef idx="2">
-            <a:schemeClr val="accent1"/>
-          </a:effectRef>
-          <a:fontRef idx="minor">
-            <a:schemeClr val="lt1"/>
-          </a:fontRef>
-        </p:style>
-        <p:txBody>
-          <a:bodyPr rtlCol="0" anchor="ctr" lIns="45720" rIns="45720"/>
-          <a:lstStyle/>
-          <a:p>
-            <a:pPr algn="ctr"/>
-            <a:r>
-              <a:rPr sz="900">
-                <a:solidFill>
-                  <a:srgbClr val="1F3A5F"/>
-                </a:solidFill>
-              </a:rPr>
-              <a:t>Gram 3: FR Sovereign-class, Category 4, Defiant</a:t>
-            </a:r>
-          </a:p>
-        </p:txBody>
-      </p:sp>
-      <p:sp>
-        <p:nvSpPr>
-          <p:cNvPr id="8" name="TextBox 7"/>
-          <p:cNvSpPr txBox="1"/>
-          <p:nvPr/>
-        </p:nvSpPr>
-        <p:spPr>
-          <a:xfrm>
-            <a:off x="4948732" y="1115568"/>
-            <a:ext cx="2200046" cy="1447800"/>
-          </a:xfrm>
-          <a:prstGeom prst="rect">
-            <a:avLst/>
-          </a:prstGeom>
-          <a:noFill/>
-        </p:spPr>
-        <p:txBody>
-          <a:bodyPr wrap="square">
-            <a:spAutoFit/>
-          </a:bodyPr>
-          <a:lstStyle/>
-          <a:p>
-            <a:r>
-              <a:rPr sz="800">
-                <a:hlinkClick r:id="rId10"/>
-              </a:rPr>
-              <a:t>Lofar 1</a:t>
-            </a:r>
-          </a:p>
-        </p:txBody>
-      </p:sp>
-      <p:sp>
-        <p:nvSpPr>
-          <p:cNvPr id="9" name="Rounded Rectangle 8">
-            <a:hlinkClick r:id="rId11"/>
-          </p:cNvPr>
-          <p:cNvSpPr/>
-          <p:nvPr/>
-        </p:nvSpPr>
-        <p:spPr>
-          <a:xfrm>
-            <a:off x="7240219" y="731520"/>
-            <a:ext cx="2200046" cy="365760"/>
-          </a:xfrm>
-          <a:prstGeom prst="roundRect">
-            <a:avLst/>
-          </a:prstGeom>
-          <a:solidFill>
-            <a:srgbClr val="E8EEF7"/>
-          </a:solidFill>
-          <a:ln>
-            <a:solidFill>
-              <a:srgbClr val="1F3A5F"/>
-            </a:solidFill>
-          </a:ln>
-        </p:spPr>
-        <p:style>
-          <a:lnRef idx="1">
-            <a:schemeClr val="accent1"/>
-          </a:lnRef>
-          <a:fillRef idx="3">
-            <a:schemeClr val="accent1"/>
-          </a:fillRef>
-          <a:effectRef idx="2">
-            <a:schemeClr val="accent1"/>
-          </a:effectRef>
-          <a:fontRef idx="minor">
-            <a:schemeClr val="lt1"/>
-          </a:fontRef>
-        </p:style>
-        <p:txBody>
-          <a:bodyPr rtlCol="0" anchor="ctr" lIns="45720" rIns="45720"/>
-          <a:lstStyle/>
-          <a:p>
-            <a:pPr algn="ctr"/>
-            <a:r>
-              <a:rPr sz="900">
-                <a:solidFill>
-                  <a:srgbClr val="1F3A5F"/>
-                </a:solidFill>
-              </a:rPr>
-              <a:t>Gram 4: FR Cerritos, Category 3, Coruscant</a:t>
-            </a:r>
-          </a:p>
-        </p:txBody>
-      </p:sp>
-      <p:sp>
-        <p:nvSpPr>
-          <p:cNvPr id="10" name="TextBox 9"/>
-          <p:cNvSpPr txBox="1"/>
-          <p:nvPr/>
-        </p:nvSpPr>
-        <p:spPr>
-          <a:xfrm>
-            <a:off x="7240219" y="1115568"/>
-            <a:ext cx="2200046" cy="1447800"/>
-          </a:xfrm>
-          <a:prstGeom prst="rect">
-            <a:avLst/>
-          </a:prstGeom>
-          <a:noFill/>
-        </p:spPr>
-        <p:txBody>
-          <a:bodyPr wrap="square">
-            <a:spAutoFit/>
-          </a:bodyPr>
-          <a:lstStyle/>
-          <a:p>
-            <a:r>
-              <a:rPr sz="800">
-                <a:hlinkClick r:id="rId12"/>
-              </a:rPr>
-              <a:t>Lofar 1</a:t>
-            </a:r>
-          </a:p>
-          <a:p>
-            <a:r>
-              <a:rPr sz="800">
-                <a:hlinkClick r:id="rId13"/>
-              </a:rPr>
-              <a:t>Lofar 2</a:t>
-            </a:r>
-          </a:p>
-        </p:txBody>
-      </p:sp>
-      <p:sp>
-        <p:nvSpPr>
-          <p:cNvPr id="11" name="Rounded Rectangle 10">
-            <a:hlinkClick r:id="rId14"/>
-          </p:cNvPr>
-          <p:cNvSpPr/>
-          <p:nvPr/>
-        </p:nvSpPr>
-        <p:spPr>
-          <a:xfrm>
-            <a:off x="9531705" y="731520"/>
-            <a:ext cx="2200046" cy="365760"/>
-          </a:xfrm>
-          <a:prstGeom prst="roundRect">
-            <a:avLst/>
-          </a:prstGeom>
-          <a:solidFill>
-            <a:srgbClr val="E8EEF7"/>
-          </a:solidFill>
-          <a:ln>
-            <a:solidFill>
-              <a:srgbClr val="1F3A5F"/>
-            </a:solidFill>
-          </a:ln>
-        </p:spPr>
-        <p:style>
-          <a:lnRef idx="1">
-            <a:schemeClr val="accent1"/>
-          </a:lnRef>
-          <a:fillRef idx="3">
-            <a:schemeClr val="accent1"/>
-          </a:fillRef>
-          <a:effectRef idx="2">
-            <a:schemeClr val="accent1"/>
-          </a:effectRef>
-          <a:fontRef idx="minor">
-            <a:schemeClr val="lt1"/>
-          </a:fontRef>
-        </p:style>
-        <p:txBody>
-          <a:bodyPr rtlCol="0" anchor="ctr" lIns="45720" rIns="45720"/>
-          <a:lstStyle/>
-          <a:p>
-            <a:pPr algn="ctr"/>
-            <a:r>
-              <a:rPr sz="900">
-                <a:solidFill>
-                  <a:srgbClr val="1F3A5F"/>
-                </a:solidFill>
-              </a:rPr>
-              <a:t>Gram 5: FR Y-wing, Category 3, Gandalf</a:t>
-            </a:r>
-          </a:p>
-        </p:txBody>
-      </p:sp>
-      <p:sp>
-        <p:nvSpPr>
-          <p:cNvPr id="12" name="TextBox 11"/>
-          <p:cNvSpPr txBox="1"/>
-          <p:nvPr/>
-        </p:nvSpPr>
-        <p:spPr>
-          <a:xfrm>
-            <a:off x="9531705" y="1115568"/>
-            <a:ext cx="2200046" cy="1447800"/>
-          </a:xfrm>
-          <a:prstGeom prst="rect">
-            <a:avLst/>
-          </a:prstGeom>
-          <a:noFill/>
-        </p:spPr>
-        <p:txBody>
-          <a:bodyPr wrap="square">
-            <a:spAutoFit/>
-          </a:bodyPr>
-          <a:lstStyle/>
-          <a:p>
-            <a:r>
-              <a:rPr sz="800">
-                <a:hlinkClick r:id="rId15"/>
-              </a:rPr>
-              <a:t>Lofar 1</a:t>
-            </a:r>
-          </a:p>
-        </p:txBody>
-      </p:sp>
-      <p:sp>
-        <p:nvSpPr>
-          <p:cNvPr id="13" name="Rounded Rectangle 12">
-            <a:hlinkClick r:id="rId16"/>
-          </p:cNvPr>
-          <p:cNvSpPr/>
-          <p:nvPr/>
-        </p:nvSpPr>
-        <p:spPr>
-          <a:xfrm>
-            <a:off x="365760" y="2682240"/>
-            <a:ext cx="2200046" cy="365760"/>
-          </a:xfrm>
-          <a:prstGeom prst="roundRect">
-            <a:avLst/>
-          </a:prstGeom>
-          <a:solidFill>
-            <a:srgbClr val="E8EEF7"/>
-          </a:solidFill>
-          <a:ln>
-            <a:solidFill>
-              <a:srgbClr val="1F3A5F"/>
-            </a:solidFill>
-          </a:ln>
-        </p:spPr>
-        <p:style>
-          <a:lnRef idx="1">
-            <a:schemeClr val="accent1"/>
-          </a:lnRef>
-          <a:fillRef idx="3">
-            <a:schemeClr val="accent1"/>
-          </a:fillRef>
-          <a:effectRef idx="2">
-            <a:schemeClr val="accent1"/>
-          </a:effectRef>
-          <a:fontRef idx="minor">
-            <a:schemeClr val="lt1"/>
-          </a:fontRef>
-        </p:style>
-        <p:txBody>
-          <a:bodyPr rtlCol="0" anchor="ctr" lIns="45720" rIns="45720"/>
-          <a:lstStyle/>
-          <a:p>
-            <a:pPr algn="ctr"/>
-            <a:r>
-              <a:rPr sz="900">
-                <a:solidFill>
-                  <a:srgbClr val="1F3A5F"/>
-                </a:solidFill>
-              </a:rPr>
-              <a:t>Gram 6: FR Constitution-class, Category 2, Cardassia</a:t>
-            </a:r>
-          </a:p>
-        </p:txBody>
-      </p:sp>
-      <p:sp>
-        <p:nvSpPr>
-          <p:cNvPr id="14" name="TextBox 13"/>
-          <p:cNvSpPr txBox="1"/>
-          <p:nvPr/>
-        </p:nvSpPr>
-        <p:spPr>
-          <a:xfrm>
-            <a:off x="365760" y="3066288"/>
-            <a:ext cx="2200046" cy="1447800"/>
-          </a:xfrm>
-          <a:prstGeom prst="rect">
-            <a:avLst/>
-          </a:prstGeom>
-          <a:noFill/>
-        </p:spPr>
-        <p:txBody>
-          <a:bodyPr wrap="square">
-            <a:spAutoFit/>
-          </a:bodyPr>
-          <a:lstStyle/>
-          <a:p>
-            <a:r>
-              <a:rPr sz="800">
-                <a:hlinkClick r:id="rId17"/>
-              </a:rPr>
-              <a:t>Lofar 1</a:t>
-            </a:r>
-          </a:p>
-          <a:p>
-            <a:r>
-              <a:rPr sz="800">
-                <a:hlinkClick r:id="rId18"/>
-              </a:rPr>
-              <a:t>Lofar 2</a:t>
-            </a:r>
-          </a:p>
-          <a:p>
-            <a:r>
-              <a:rPr sz="800">
-                <a:hlinkClick r:id="rId19"/>
-              </a:rPr>
-              <a:t>Lofar 3</a:t>
-            </a:r>
-          </a:p>
-        </p:txBody>
-      </p:sp>
-      <p:sp>
-        <p:nvSpPr>
-          <p:cNvPr id="15" name="Rounded Rectangle 14">
-            <a:hlinkClick r:id="rId20"/>
-          </p:cNvPr>
-          <p:cNvSpPr/>
-          <p:nvPr/>
-        </p:nvSpPr>
-        <p:spPr>
-          <a:xfrm>
-            <a:off x="2657246" y="2682240"/>
-            <a:ext cx="2200046" cy="365760"/>
-          </a:xfrm>
-          <a:prstGeom prst="roundRect">
-            <a:avLst/>
-          </a:prstGeom>
-          <a:solidFill>
-            <a:srgbClr val="E8EEF7"/>
-          </a:solidFill>
-          <a:ln>
-            <a:solidFill>
-              <a:srgbClr val="1F3A5F"/>
-            </a:solidFill>
-          </a:ln>
-        </p:spPr>
-        <p:style>
-          <a:lnRef idx="1">
-            <a:schemeClr val="accent1"/>
-          </a:lnRef>
-          <a:fillRef idx="3">
-            <a:schemeClr val="accent1"/>
-          </a:fillRef>
-          <a:effectRef idx="2">
-            <a:schemeClr val="accent1"/>
-          </a:effectRef>
-          <a:fontRef idx="minor">
-            <a:schemeClr val="lt1"/>
-          </a:fontRef>
-        </p:style>
-        <p:txBody>
-          <a:bodyPr rtlCol="0" anchor="ctr" lIns="45720" rIns="45720"/>
-          <a:lstStyle/>
-          <a:p>
-            <a:pPr algn="ctr"/>
-            <a:r>
-              <a:rPr sz="900">
-                <a:solidFill>
-                  <a:srgbClr val="1F3A5F"/>
-                </a:solidFill>
-              </a:rPr>
-              <a:t>Gram 7: Lambda Shuttle contact bearing 152, codename Tatooine</a:t>
-            </a:r>
-          </a:p>
-        </p:txBody>
-      </p:sp>
-      <p:sp>
-        <p:nvSpPr>
-          <p:cNvPr id="16" name="TextBox 15"/>
-          <p:cNvSpPr txBox="1"/>
-          <p:nvPr/>
-        </p:nvSpPr>
-        <p:spPr>
-          <a:xfrm>
-            <a:off x="2657246" y="3066288"/>
-            <a:ext cx="2200046" cy="1447800"/>
-          </a:xfrm>
-          <a:prstGeom prst="rect">
-            <a:avLst/>
-          </a:prstGeom>
-          <a:noFill/>
-        </p:spPr>
-        <p:txBody>
-          <a:bodyPr wrap="square">
-            <a:spAutoFit/>
-          </a:bodyPr>
-          <a:lstStyle/>
-          <a:p>
-            <a:r>
-              <a:rPr sz="800">
-                <a:hlinkClick r:id="rId21"/>
-              </a:rPr>
-              <a:t>Lofar 1</a:t>
-            </a:r>
-          </a:p>
-        </p:txBody>
-      </p:sp>
-      <p:sp>
-        <p:nvSpPr>
-          <p:cNvPr id="17" name="Rounded Rectangle 16">
-            <a:hlinkClick r:id="rId22"/>
-          </p:cNvPr>
-          <p:cNvSpPr/>
-          <p:nvPr/>
-        </p:nvSpPr>
-        <p:spPr>
-          <a:xfrm>
-            <a:off x="4948732" y="2682240"/>
-            <a:ext cx="2200046" cy="365760"/>
-          </a:xfrm>
-          <a:prstGeom prst="roundRect">
-            <a:avLst/>
-          </a:prstGeom>
-          <a:solidFill>
-            <a:srgbClr val="E8EEF7"/>
-          </a:solidFill>
-          <a:ln>
-            <a:solidFill>
-              <a:srgbClr val="1F3A5F"/>
-            </a:solidFill>
-          </a:ln>
-        </p:spPr>
-        <p:style>
-          <a:lnRef idx="1">
-            <a:schemeClr val="accent1"/>
-          </a:lnRef>
-          <a:fillRef idx="3">
-            <a:schemeClr val="accent1"/>
-          </a:fillRef>
-          <a:effectRef idx="2">
-            <a:schemeClr val="accent1"/>
-          </a:effectRef>
-          <a:fontRef idx="minor">
-            <a:schemeClr val="lt1"/>
-          </a:fontRef>
-        </p:style>
-        <p:txBody>
-          <a:bodyPr rtlCol="0" anchor="ctr" lIns="45720" rIns="45720"/>
-          <a:lstStyle/>
-          <a:p>
-            <a:pPr algn="ctr"/>
-            <a:r>
-              <a:rPr sz="900">
-                <a:solidFill>
-                  <a:srgbClr val="1F3A5F"/>
-                </a:solidFill>
-              </a:rPr>
-              <a:t>Gram 8: FR Y-wing, Category 1, Betazed</a:t>
-            </a:r>
-          </a:p>
-        </p:txBody>
-      </p:sp>
-      <p:sp>
-        <p:nvSpPr>
-          <p:cNvPr id="18" name="TextBox 17"/>
-          <p:cNvSpPr txBox="1"/>
-          <p:nvPr/>
-        </p:nvSpPr>
-        <p:spPr>
-          <a:xfrm>
-            <a:off x="4948732" y="3066288"/>
-            <a:ext cx="2200046" cy="1447800"/>
-          </a:xfrm>
-          <a:prstGeom prst="rect">
-            <a:avLst/>
-          </a:prstGeom>
-          <a:noFill/>
-        </p:spPr>
-        <p:txBody>
-          <a:bodyPr wrap="square">
-            <a:spAutoFit/>
-          </a:bodyPr>
-          <a:lstStyle/>
-          <a:p>
-            <a:r>
-              <a:rPr sz="800">
-                <a:hlinkClick r:id="rId23"/>
-              </a:rPr>
-              <a:t>Lofar 1</a:t>
-            </a:r>
-          </a:p>
-        </p:txBody>
-      </p:sp>
-      <p:sp>
-        <p:nvSpPr>
-          <p:cNvPr id="19" name="Rounded Rectangle 18">
-            <a:hlinkClick r:id="rId24"/>
-          </p:cNvPr>
-          <p:cNvSpPr/>
-          <p:nvPr/>
-        </p:nvSpPr>
-        <p:spPr>
-          <a:xfrm>
-            <a:off x="7240219" y="2682240"/>
-            <a:ext cx="2200046" cy="365760"/>
-          </a:xfrm>
-          <a:prstGeom prst="roundRect">
-            <a:avLst/>
-          </a:prstGeom>
-          <a:solidFill>
-            <a:srgbClr val="E8EEF7"/>
-          </a:solidFill>
-          <a:ln>
-            <a:solidFill>
-              <a:srgbClr val="1F3A5F"/>
-            </a:solidFill>
-          </a:ln>
-        </p:spPr>
-        <p:style>
-          <a:lnRef idx="1">
-            <a:schemeClr val="accent1"/>
-          </a:lnRef>
-          <a:fillRef idx="3">
-            <a:schemeClr val="accent1"/>
-          </a:fillRef>
-          <a:effectRef idx="2">
-            <a:schemeClr val="accent1"/>
-          </a:effectRef>
-          <a:fontRef idx="minor">
-            <a:schemeClr val="lt1"/>
-          </a:fontRef>
-        </p:style>
-        <p:txBody>
-          <a:bodyPr rtlCol="0" anchor="ctr" lIns="45720" rIns="45720"/>
-          <a:lstStyle/>
-          <a:p>
-            <a:pPr algn="ctr"/>
-            <a:r>
-              <a:rPr sz="900">
-                <a:solidFill>
-                  <a:srgbClr val="1F3A5F"/>
-                </a:solidFill>
-              </a:rPr>
-              <a:t>Gram 9: FR Venator-class, Category 4, Kobol</a:t>
-            </a:r>
-          </a:p>
-        </p:txBody>
-      </p:sp>
-      <p:sp>
-        <p:nvSpPr>
-          <p:cNvPr id="20" name="TextBox 19"/>
-          <p:cNvSpPr txBox="1"/>
-          <p:nvPr/>
-        </p:nvSpPr>
-        <p:spPr>
-          <a:xfrm>
-            <a:off x="7240219" y="3066288"/>
-            <a:ext cx="2200046" cy="1447800"/>
-          </a:xfrm>
-          <a:prstGeom prst="rect">
-            <a:avLst/>
-          </a:prstGeom>
-          <a:noFill/>
-        </p:spPr>
-        <p:txBody>
-          <a:bodyPr wrap="square">
-            <a:spAutoFit/>
-          </a:bodyPr>
-          <a:lstStyle/>
-          <a:p>
-            <a:r>
-              <a:rPr sz="800">
-                <a:hlinkClick r:id="rId25"/>
-              </a:rPr>
-              <a:t>Lofar 1</a:t>
-            </a:r>
-          </a:p>
-          <a:p>
-            <a:r>
-              <a:rPr sz="800">
-                <a:hlinkClick r:id="rId26"/>
-              </a:rPr>
-              <a:t>Lofar 2</a:t>
-            </a:r>
-          </a:p>
-          <a:p>
-            <a:r>
-              <a:rPr sz="800">
-                <a:hlinkClick r:id="rId27"/>
-              </a:rPr>
-              <a:t>Lofar 3</a:t>
-            </a:r>
-          </a:p>
-          <a:p>
-            <a:r>
-              <a:rPr sz="800">
-                <a:hlinkClick r:id="rId28"/>
-              </a:rPr>
-              <a:t>Lofar 4</a:t>
-            </a:r>
-          </a:p>
-        </p:txBody>
-      </p:sp>
-      <p:sp>
-        <p:nvSpPr>
-          <p:cNvPr id="21" name="Rounded Rectangle 20">
-            <a:hlinkClick r:id="rId29"/>
-          </p:cNvPr>
-          <p:cNvSpPr/>
-          <p:nvPr/>
-        </p:nvSpPr>
-        <p:spPr>
-          <a:xfrm>
-            <a:off x="9531705" y="2682240"/>
-            <a:ext cx="2200046" cy="365760"/>
-          </a:xfrm>
-          <a:prstGeom prst="roundRect">
-            <a:avLst/>
-          </a:prstGeom>
-          <a:solidFill>
-            <a:srgbClr val="E8EEF7"/>
-          </a:solidFill>
-          <a:ln>
-            <a:solidFill>
-              <a:srgbClr val="1F3A5F"/>
-            </a:solidFill>
-          </a:ln>
-        </p:spPr>
-        <p:style>
-          <a:lnRef idx="1">
-            <a:schemeClr val="accent1"/>
-          </a:lnRef>
-          <a:fillRef idx="3">
-            <a:schemeClr val="accent1"/>
-          </a:fillRef>
-          <a:effectRef idx="2">
-            <a:schemeClr val="accent1"/>
-          </a:effectRef>
-          <a:fontRef idx="minor">
-            <a:schemeClr val="lt1"/>
-          </a:fontRef>
-        </p:style>
-        <p:txBody>
-          <a:bodyPr rtlCol="0" anchor="ctr" lIns="45720" rIns="45720"/>
-          <a:lstStyle/>
-          <a:p>
-            <a:pPr algn="ctr"/>
-            <a:r>
-              <a:rPr sz="900">
-                <a:solidFill>
-                  <a:srgbClr val="1F3A5F"/>
-                </a:solidFill>
-              </a:rPr>
-              <a:t>Gram 11: FR Sovereign-class, Category 4, Bespin</a:t>
-            </a:r>
-          </a:p>
-        </p:txBody>
-      </p:sp>
-      <p:sp>
-        <p:nvSpPr>
-          <p:cNvPr id="22" name="TextBox 21"/>
-          <p:cNvSpPr txBox="1"/>
-          <p:nvPr/>
-        </p:nvSpPr>
-        <p:spPr>
-          <a:xfrm>
-            <a:off x="9531705" y="3066288"/>
-            <a:ext cx="2200046" cy="1447800"/>
-          </a:xfrm>
-          <a:prstGeom prst="rect">
-            <a:avLst/>
-          </a:prstGeom>
-          <a:noFill/>
-        </p:spPr>
-        <p:txBody>
-          <a:bodyPr wrap="square">
-            <a:spAutoFit/>
-          </a:bodyPr>
-          <a:lstStyle/>
-          <a:p>
-            <a:r>
-              <a:rPr sz="800">
-                <a:hlinkClick r:id="rId30"/>
-              </a:rPr>
-              <a:t>Lofar 1</a:t>
-            </a:r>
-          </a:p>
-        </p:txBody>
-      </p:sp>
-      <p:sp>
-        <p:nvSpPr>
-          <p:cNvPr id="23" name="Rounded Rectangle 22">
-            <a:hlinkClick r:id="rId31"/>
-          </p:cNvPr>
-          <p:cNvSpPr/>
-          <p:nvPr/>
-        </p:nvSpPr>
-        <p:spPr>
-          <a:xfrm>
-            <a:off x="365760" y="4632960"/>
-            <a:ext cx="2200046" cy="365760"/>
-          </a:xfrm>
-          <a:prstGeom prst="roundRect">
-            <a:avLst/>
-          </a:prstGeom>
-          <a:solidFill>
-            <a:srgbClr val="E8EEF7"/>
-          </a:solidFill>
-          <a:ln>
-            <a:solidFill>
-              <a:srgbClr val="1F3A5F"/>
-            </a:solidFill>
-          </a:ln>
-        </p:spPr>
-        <p:style>
-          <a:lnRef idx="1">
-            <a:schemeClr val="accent1"/>
-          </a:lnRef>
-          <a:fillRef idx="3">
-            <a:schemeClr val="accent1"/>
-          </a:fillRef>
-          <a:effectRef idx="2">
-            <a:schemeClr val="accent1"/>
-          </a:effectRef>
-          <a:fontRef idx="minor">
-            <a:schemeClr val="lt1"/>
-          </a:fontRef>
-        </p:style>
-        <p:txBody>
-          <a:bodyPr rtlCol="0" anchor="ctr" lIns="45720" rIns="45720"/>
-          <a:lstStyle/>
-          <a:p>
-            <a:pPr algn="ctr"/>
-            <a:r>
-              <a:rPr sz="900">
-                <a:solidFill>
-                  <a:srgbClr val="1F3A5F"/>
-                </a:solidFill>
-              </a:rPr>
-              <a:t>Gram 13: Razor Crest contact bearing 010, codename Bajor</a:t>
-            </a:r>
-          </a:p>
-        </p:txBody>
-      </p:sp>
-      <p:sp>
-        <p:nvSpPr>
-          <p:cNvPr id="24" name="TextBox 23"/>
-          <p:cNvSpPr txBox="1"/>
-          <p:nvPr/>
-        </p:nvSpPr>
-        <p:spPr>
-          <a:xfrm>
-            <a:off x="365760" y="5017008"/>
-            <a:ext cx="2200046" cy="1447800"/>
-          </a:xfrm>
-          <a:prstGeom prst="rect">
-            <a:avLst/>
-          </a:prstGeom>
-          <a:noFill/>
-        </p:spPr>
-        <p:txBody>
-          <a:bodyPr wrap="square">
-            <a:spAutoFit/>
-          </a:bodyPr>
-          <a:lstStyle/>
-          <a:p>
-            <a:r>
-              <a:rPr sz="800">
-                <a:hlinkClick r:id="rId32"/>
-              </a:rPr>
-              <a:t>Lofar 1</a:t>
-            </a:r>
-          </a:p>
-          <a:p>
-            <a:r>
-              <a:rPr sz="800">
-                <a:hlinkClick r:id="rId33"/>
-              </a:rPr>
-              <a:t>Lofar 2</a:t>
-            </a:r>
-          </a:p>
-          <a:p>
-            <a:r>
-              <a:rPr sz="800">
-                <a:hlinkClick r:id="rId34"/>
-              </a:rPr>
-              <a:t>Lofar 3</a:t>
-            </a:r>
-          </a:p>
-          <a:p>
-            <a:r>
-              <a:rPr sz="800">
-                <a:hlinkClick r:id="rId35"/>
-              </a:rPr>
-              <a:t>Lofar 4</a:t>
-            </a:r>
-          </a:p>
-        </p:txBody>
-      </p:sp>
-      <p:sp>
-        <p:nvSpPr>
-          <p:cNvPr id="25" name="Rounded Rectangle 24">
-            <a:hlinkClick r:id="rId36"/>
-          </p:cNvPr>
-          <p:cNvSpPr/>
-          <p:nvPr/>
-        </p:nvSpPr>
-        <p:spPr>
-          <a:xfrm>
-            <a:off x="2657246" y="4632960"/>
-            <a:ext cx="2200046" cy="365760"/>
-          </a:xfrm>
-          <a:prstGeom prst="roundRect">
-            <a:avLst/>
-          </a:prstGeom>
-          <a:solidFill>
-            <a:srgbClr val="E8EEF7"/>
-          </a:solidFill>
-          <a:ln>
-            <a:solidFill>
-              <a:srgbClr val="1F3A5F"/>
-            </a:solidFill>
-          </a:ln>
-        </p:spPr>
-        <p:style>
-          <a:lnRef idx="1">
-            <a:schemeClr val="accent1"/>
-          </a:lnRef>
-          <a:fillRef idx="3">
-            <a:schemeClr val="accent1"/>
-          </a:fillRef>
-          <a:effectRef idx="2">
-            <a:schemeClr val="accent1"/>
-          </a:effectRef>
-          <a:fontRef idx="minor">
-            <a:schemeClr val="lt1"/>
-          </a:fontRef>
-        </p:style>
-        <p:txBody>
-          <a:bodyPr rtlCol="0" anchor="ctr" lIns="45720" rIns="45720"/>
-          <a:lstStyle/>
-          <a:p>
-            <a:pPr algn="ctr"/>
-            <a:r>
-              <a:rPr sz="900">
-                <a:solidFill>
-                  <a:srgbClr val="1F3A5F"/>
-                </a:solidFill>
-              </a:rPr>
-              <a:t>Gram 14: FR Defiant-class, Category 3, Romulus</a:t>
-            </a:r>
-          </a:p>
-        </p:txBody>
-      </p:sp>
-      <p:sp>
-        <p:nvSpPr>
-          <p:cNvPr id="26" name="TextBox 25"/>
-          <p:cNvSpPr txBox="1"/>
-          <p:nvPr/>
-        </p:nvSpPr>
-        <p:spPr>
-          <a:xfrm>
-            <a:off x="2657246" y="5017008"/>
-            <a:ext cx="2200046" cy="1447800"/>
-          </a:xfrm>
-          <a:prstGeom prst="rect">
-            <a:avLst/>
-          </a:prstGeom>
-          <a:noFill/>
-        </p:spPr>
-        <p:txBody>
-          <a:bodyPr wrap="square">
-            <a:spAutoFit/>
-          </a:bodyPr>
-          <a:lstStyle/>
-          <a:p>
-            <a:r>
-              <a:rPr sz="800">
-                <a:hlinkClick r:id="rId37"/>
-              </a:rPr>
-              <a:t>Lofar 1</a:t>
-            </a:r>
-          </a:p>
-          <a:p>
-            <a:r>
-              <a:rPr sz="800">
-                <a:hlinkClick r:id="rId38"/>
-              </a:rPr>
-              <a:t>Lofar 2</a:t>
-            </a:r>
-          </a:p>
-          <a:p>
-            <a:r>
-              <a:rPr sz="800">
-                <a:hlinkClick r:id="rId39"/>
-              </a:rPr>
-              <a:t>Lofar 3</a:t>
-            </a:r>
-          </a:p>
-          <a:p>
-            <a:r>
-              <a:rPr sz="800">
-                <a:hlinkClick r:id="rId40"/>
-              </a:rPr>
-              <a:t>Lofar 4</a:t>
-            </a:r>
-          </a:p>
-        </p:txBody>
-      </p:sp>
-      <p:sp>
-        <p:nvSpPr>
-          <p:cNvPr id="27" name="Rounded Rectangle 26">
-            <a:hlinkClick r:id="rId41"/>
-          </p:cNvPr>
-          <p:cNvSpPr/>
-          <p:nvPr/>
-        </p:nvSpPr>
-        <p:spPr>
-          <a:xfrm>
-            <a:off x="4948732" y="4632960"/>
-            <a:ext cx="2200046" cy="365760"/>
-          </a:xfrm>
-          <a:prstGeom prst="roundRect">
-            <a:avLst/>
-          </a:prstGeom>
-          <a:solidFill>
-            <a:srgbClr val="E8EEF7"/>
-          </a:solidFill>
-          <a:ln>
-            <a:solidFill>
-              <a:srgbClr val="1F3A5F"/>
-            </a:solidFill>
-          </a:ln>
-        </p:spPr>
-        <p:style>
-          <a:lnRef idx="1">
-            <a:schemeClr val="accent1"/>
-          </a:lnRef>
-          <a:fillRef idx="3">
-            <a:schemeClr val="accent1"/>
-          </a:fillRef>
-          <a:effectRef idx="2">
-            <a:schemeClr val="accent1"/>
-          </a:effectRef>
-          <a:fontRef idx="minor">
-            <a:schemeClr val="lt1"/>
-          </a:fontRef>
-        </p:style>
-        <p:txBody>
-          <a:bodyPr rtlCol="0" anchor="ctr" lIns="45720" rIns="45720"/>
-          <a:lstStyle/>
-          <a:p>
-            <a:pPr algn="ctr"/>
-            <a:r>
-              <a:rPr sz="900">
-                <a:solidFill>
-                  <a:srgbClr val="1F3A5F"/>
-                </a:solidFill>
-              </a:rPr>
-              <a:t>Gram 15: FR Acclamator-class, Category 3, Dank</a:t>
-            </a:r>
-          </a:p>
-        </p:txBody>
-      </p:sp>
-      <p:sp>
-        <p:nvSpPr>
-          <p:cNvPr id="28" name="TextBox 27"/>
-          <p:cNvSpPr txBox="1"/>
-          <p:nvPr/>
-        </p:nvSpPr>
-        <p:spPr>
-          <a:xfrm>
-            <a:off x="4948732" y="5017008"/>
-            <a:ext cx="2200046" cy="1447800"/>
-          </a:xfrm>
-          <a:prstGeom prst="rect">
-            <a:avLst/>
-          </a:prstGeom>
-          <a:noFill/>
-        </p:spPr>
-        <p:txBody>
-          <a:bodyPr wrap="square">
-            <a:spAutoFit/>
-          </a:bodyPr>
-          <a:lstStyle/>
-          <a:p>
-            <a:r>
-              <a:rPr sz="800">
-                <a:hlinkClick r:id="rId42"/>
-              </a:rPr>
-              <a:t>Lofar 1</a:t>
-            </a:r>
-          </a:p>
-          <a:p>
-            <a:r>
-              <a:rPr sz="800">
-                <a:hlinkClick r:id="rId43"/>
-              </a:rPr>
-              <a:t>Lofar 2</a:t>
-            </a:r>
-          </a:p>
-          <a:p>
-            <a:r>
-              <a:rPr sz="800">
-                <a:hlinkClick r:id="rId44"/>
-              </a:rPr>
-              <a:t>Lofar 3</a:t>
-            </a:r>
-          </a:p>
-        </p:txBody>
-      </p:sp>
-      <p:sp>
-        <p:nvSpPr>
-          <p:cNvPr id="29" name="Rounded Rectangle 28">
-            <a:hlinkClick r:id="rId45"/>
-          </p:cNvPr>
-          <p:cNvSpPr/>
-          <p:nvPr/>
-        </p:nvSpPr>
-        <p:spPr>
-          <a:xfrm>
-            <a:off x="7240219" y="4632960"/>
-            <a:ext cx="2200046" cy="365760"/>
-          </a:xfrm>
-          <a:prstGeom prst="roundRect">
-            <a:avLst/>
-          </a:prstGeom>
-          <a:solidFill>
-            <a:srgbClr val="E8EEF7"/>
-          </a:solidFill>
-          <a:ln>
-            <a:solidFill>
-              <a:srgbClr val="1F3A5F"/>
-            </a:solidFill>
-          </a:ln>
-        </p:spPr>
-        <p:style>
-          <a:lnRef idx="1">
-            <a:schemeClr val="accent1"/>
-          </a:lnRef>
-          <a:fillRef idx="3">
-            <a:schemeClr val="accent1"/>
-          </a:fillRef>
-          <a:effectRef idx="2">
-            <a:schemeClr val="accent1"/>
-          </a:effectRef>
-          <a:fontRef idx="minor">
-            <a:schemeClr val="lt1"/>
-          </a:fontRef>
-        </p:style>
-        <p:txBody>
-          <a:bodyPr rtlCol="0" anchor="ctr" lIns="45720" rIns="45720"/>
-          <a:lstStyle/>
-          <a:p>
-            <a:pPr algn="ctr"/>
-            <a:r>
-              <a:rPr sz="900">
-                <a:solidFill>
-                  <a:srgbClr val="1F3A5F"/>
-                </a:solidFill>
-              </a:rPr>
-              <a:t>Gram 16: FR Reliant, Category 1, Dank</a:t>
-            </a:r>
-          </a:p>
-        </p:txBody>
-      </p:sp>
-      <p:sp>
-        <p:nvSpPr>
-          <p:cNvPr id="30" name="TextBox 29"/>
-          <p:cNvSpPr txBox="1"/>
-          <p:nvPr/>
-        </p:nvSpPr>
-        <p:spPr>
-          <a:xfrm>
-            <a:off x="7240219" y="5017008"/>
-            <a:ext cx="2200046" cy="1447800"/>
-          </a:xfrm>
-          <a:prstGeom prst="rect">
-            <a:avLst/>
-          </a:prstGeom>
-          <a:noFill/>
-        </p:spPr>
-        <p:txBody>
-          <a:bodyPr wrap="square">
-            <a:spAutoFit/>
-          </a:bodyPr>
-          <a:lstStyle/>
-          <a:p>
-            <a:r>
-              <a:rPr sz="800">
-                <a:hlinkClick r:id="rId46"/>
-              </a:rPr>
-              <a:t>Lofar 1</a:t>
-            </a:r>
-          </a:p>
-          <a:p>
-            <a:r>
-              <a:rPr sz="800">
-                <a:hlinkClick r:id="rId47"/>
-              </a:rPr>
-              <a:t>Lofar 2</a:t>
-            </a:r>
-          </a:p>
-          <a:p>
-            <a:r>
-              <a:rPr sz="800">
-                <a:hlinkClick r:id="rId48"/>
-              </a:rPr>
-              <a:t>Lofar 3</a:t>
-            </a:r>
-          </a:p>
-        </p:txBody>
-      </p:sp>
-      <p:sp>
-        <p:nvSpPr>
-          <p:cNvPr id="31" name="Rounded Rectangle 30">
-            <a:hlinkClick r:id="rId49"/>
-          </p:cNvPr>
-          <p:cNvSpPr/>
-          <p:nvPr/>
-        </p:nvSpPr>
-        <p:spPr>
-          <a:xfrm>
-            <a:off x="9531705" y="4632960"/>
-            <a:ext cx="2200046" cy="365760"/>
-          </a:xfrm>
-          <a:prstGeom prst="roundRect">
-            <a:avLst/>
-          </a:prstGeom>
-          <a:solidFill>
-            <a:srgbClr val="E8EEF7"/>
-          </a:solidFill>
-          <a:ln>
-            <a:solidFill>
-              <a:srgbClr val="1F3A5F"/>
-            </a:solidFill>
-          </a:ln>
-        </p:spPr>
-        <p:style>
-          <a:lnRef idx="1">
-            <a:schemeClr val="accent1"/>
-          </a:lnRef>
-          <a:fillRef idx="3">
-            <a:schemeClr val="accent1"/>
-          </a:fillRef>
-          <a:effectRef idx="2">
-            <a:schemeClr val="accent1"/>
-          </a:effectRef>
-          <a:fontRef idx="minor">
-            <a:schemeClr val="lt1"/>
-          </a:fontRef>
-        </p:style>
-        <p:txBody>
-          <a:bodyPr rtlCol="0" anchor="ctr" lIns="45720" rIns="45720"/>
-          <a:lstStyle/>
-          <a:p>
-            <a:pPr algn="ctr"/>
-            <a:r>
-              <a:rPr sz="900">
-                <a:solidFill>
-                  <a:srgbClr val="1F3A5F"/>
-                </a:solidFill>
-              </a:rPr>
-              <a:t>Gram 17: FR Y-wing, Category 4, Hoth</a:t>
-            </a:r>
-          </a:p>
-        </p:txBody>
-      </p:sp>
-      <p:sp>
-        <p:nvSpPr>
-          <p:cNvPr id="32" name="TextBox 31"/>
-          <p:cNvSpPr txBox="1"/>
-          <p:nvPr/>
-        </p:nvSpPr>
-        <p:spPr>
-          <a:xfrm>
-            <a:off x="9531705" y="5017008"/>
-            <a:ext cx="2200046" cy="1447800"/>
-          </a:xfrm>
-          <a:prstGeom prst="rect">
-            <a:avLst/>
-          </a:prstGeom>
-          <a:noFill/>
-        </p:spPr>
-        <p:txBody>
-          <a:bodyPr wrap="square">
-            <a:spAutoFit/>
-          </a:bodyPr>
-          <a:lstStyle/>
-          <a:p>
-            <a:r>
-              <a:rPr sz="800">
-                <a:hlinkClick r:id="rId50"/>
-              </a:rPr>
-              <a:t>Lofar 1</a:t>
-            </a:r>
-          </a:p>
-          <a:p>
-            <a:r>
-              <a:rPr sz="800">
-                <a:hlinkClick r:id="rId51"/>
-              </a:rPr>
-              <a:t>Lofar 2</a:t>
-            </a:r>
-          </a:p>
-          <a:p>
-            <a:r>
-              <a:rPr sz="800">
-                <a:hlinkClick r:id="rId52"/>
-              </a:rPr>
-              <a:t>Lofar 3</a:t>
+              <a:t>Instructor Version</a:t>
             </a:r>
           </a:p>
         </p:txBody>
@@ -4663,7 +3224,7 @@
                   <a:srgbClr val="FFFFFF"/>
                 </a:solidFill>
               </a:rPr>
-              <a:t>Instructor Week 1 Grams — Page 2 of 3</a:t>
+              <a:t>Instructor Week 1 Grams — Page 1 of 3</a:t>
             </a:r>
           </a:p>
         </p:txBody>
@@ -4718,7 +3279,7 @@
                   <a:srgbClr val="1F3A5F"/>
                 </a:solidFill>
               </a:rPr>
-              <a:t>Gram 19: FR TIE Bomber, Category 4, Kobol</a:t>
+              <a:t>Gram 1: FR Razor Crest, Category 3, Mustafar</a:t>
             </a:r>
           </a:p>
         </p:txBody>
@@ -4752,36 +3313,12 @@
               <a:t>Lofar 1</a:t>
             </a:r>
           </a:p>
-          <a:p>
-            <a:r>
-              <a:rPr sz="800">
-                <a:hlinkClick r:id="rId4"/>
-              </a:rPr>
-              <a:t>Lofar 2</a:t>
-            </a:r>
-          </a:p>
-          <a:p>
-            <a:r>
-              <a:rPr sz="800">
-                <a:hlinkClick r:id="rId5"/>
-              </a:rPr>
-              <a:t>Lofar 3</a:t>
-            </a:r>
-          </a:p>
-          <a:p>
-            <a:r>
-              <a:rPr sz="800">
-                <a:hlinkClick r:id="rId6"/>
-              </a:rPr>
-              <a:t>Lofar 4</a:t>
-            </a:r>
-          </a:p>
         </p:txBody>
       </p:sp>
       <p:sp>
         <p:nvSpPr>
           <p:cNvPr id="5" name="Rounded Rectangle 4">
-            <a:hlinkClick r:id="rId7"/>
+            <a:hlinkClick r:id="rId4"/>
           </p:cNvPr>
           <p:cNvSpPr/>
           <p:nvPr/>
@@ -4828,7 +3365,7 @@
                   <a:srgbClr val="1F3A5F"/>
                 </a:solidFill>
               </a:rPr>
-              <a:t>Gram 21: FR Venator-class, Category 4, Endor</a:t>
+              <a:t>Gram 2: FR Tantive IV, Category 1, Romulus</a:t>
             </a:r>
           </a:p>
         </p:txBody>
@@ -4857,17 +3394,33 @@
           <a:p>
             <a:r>
               <a:rPr sz="800">
+                <a:hlinkClick r:id="rId5"/>
+              </a:rPr>
+              <a:t>Lofar 1</a:t>
+            </a:r>
+          </a:p>
+          <a:p>
+            <a:r>
+              <a:rPr sz="800">
+                <a:hlinkClick r:id="rId6"/>
+              </a:rPr>
+              <a:t>Lofar 2</a:t>
+            </a:r>
+          </a:p>
+          <a:p>
+            <a:r>
+              <a:rPr sz="800">
+                <a:hlinkClick r:id="rId7"/>
+              </a:rPr>
+              <a:t>Lofar 3</a:t>
+            </a:r>
+          </a:p>
+          <a:p>
+            <a:r>
+              <a:rPr sz="800">
                 <a:hlinkClick r:id="rId8"/>
               </a:rPr>
-              <a:t>Lofar 1</a:t>
-            </a:r>
-          </a:p>
-          <a:p>
-            <a:r>
-              <a:rPr sz="800">
-                <a:hlinkClick r:id="rId9"/>
-              </a:rPr>
-              <a:t>Lofar 2</a:t>
+              <a:t>Lofar 4</a:t>
             </a:r>
           </a:p>
         </p:txBody>
@@ -4875,7 +3428,7 @@
       <p:sp>
         <p:nvSpPr>
           <p:cNvPr id="7" name="Rounded Rectangle 6">
-            <a:hlinkClick r:id="rId10"/>
+            <a:hlinkClick r:id="rId9"/>
           </p:cNvPr>
           <p:cNvSpPr/>
           <p:nvPr/>
@@ -4922,7 +3475,7 @@
                   <a:srgbClr val="1F3A5F"/>
                 </a:solidFill>
               </a:rPr>
-              <a:t>Gram 22: FR Intrepid-class, Category 1, Bajor</a:t>
+              <a:t>Gram 3: FR Sovereign-class, Category 4, Defiant</a:t>
             </a:r>
           </a:p>
         </p:txBody>
@@ -4951,25 +3504,17 @@
           <a:p>
             <a:r>
               <a:rPr sz="800">
-                <a:hlinkClick r:id="rId11"/>
+                <a:hlinkClick r:id="rId10"/>
               </a:rPr>
               <a:t>Lofar 1</a:t>
             </a:r>
           </a:p>
-          <a:p>
-            <a:r>
-              <a:rPr sz="800">
-                <a:hlinkClick r:id="rId12"/>
-              </a:rPr>
-              <a:t>Lofar 2</a:t>
-            </a:r>
-          </a:p>
         </p:txBody>
       </p:sp>
       <p:sp>
         <p:nvSpPr>
           <p:cNvPr id="9" name="Rounded Rectangle 8">
-            <a:hlinkClick r:id="rId13"/>
+            <a:hlinkClick r:id="rId11"/>
           </p:cNvPr>
           <p:cNvSpPr/>
           <p:nvPr/>
@@ -5016,7 +3561,7 @@
                   <a:srgbClr val="1F3A5F"/>
                 </a:solidFill>
               </a:rPr>
-              <a:t>Gram 23: FR Voyager, Category 4, Defiant</a:t>
+              <a:t>Gram 4: FR Cerritos, Category 3, Coruscant</a:t>
             </a:r>
           </a:p>
         </p:txBody>
@@ -5045,7 +3590,7 @@
           <a:p>
             <a:r>
               <a:rPr sz="800">
-                <a:hlinkClick r:id="rId14"/>
+                <a:hlinkClick r:id="rId12"/>
               </a:rPr>
               <a:t>Lofar 1</a:t>
             </a:r>
@@ -5053,33 +3598,17 @@
           <a:p>
             <a:r>
               <a:rPr sz="800">
-                <a:hlinkClick r:id="rId15"/>
+                <a:hlinkClick r:id="rId13"/>
               </a:rPr>
               <a:t>Lofar 2</a:t>
             </a:r>
           </a:p>
-          <a:p>
-            <a:r>
-              <a:rPr sz="800">
-                <a:hlinkClick r:id="rId16"/>
-              </a:rPr>
-              <a:t>Lofar 3</a:t>
-            </a:r>
-          </a:p>
-          <a:p>
-            <a:r>
-              <a:rPr sz="800">
-                <a:hlinkClick r:id="rId17"/>
-              </a:rPr>
-              <a:t>Lofar 4</a:t>
-            </a:r>
-          </a:p>
         </p:txBody>
       </p:sp>
       <p:sp>
         <p:nvSpPr>
           <p:cNvPr id="11" name="Rounded Rectangle 10">
-            <a:hlinkClick r:id="rId18"/>
+            <a:hlinkClick r:id="rId14"/>
           </p:cNvPr>
           <p:cNvSpPr/>
           <p:nvPr/>
@@ -5126,7 +3655,7 @@
                   <a:srgbClr val="1F3A5F"/>
                 </a:solidFill>
               </a:rPr>
-              <a:t>Gram 24: FR Tantive IV, Category 4, Tatooine</a:t>
+              <a:t>Gram 5: FR Y-wing, Category 3, Gandalf</a:t>
             </a:r>
           </a:p>
         </p:txBody>
@@ -5155,25 +3684,17 @@
           <a:p>
             <a:r>
               <a:rPr sz="800">
-                <a:hlinkClick r:id="rId19"/>
+                <a:hlinkClick r:id="rId15"/>
               </a:rPr>
               <a:t>Lofar 1</a:t>
             </a:r>
           </a:p>
-          <a:p>
-            <a:r>
-              <a:rPr sz="800">
-                <a:hlinkClick r:id="rId20"/>
-              </a:rPr>
-              <a:t>Lofar 2</a:t>
-            </a:r>
-          </a:p>
         </p:txBody>
       </p:sp>
       <p:sp>
         <p:nvSpPr>
           <p:cNvPr id="13" name="Rounded Rectangle 12">
-            <a:hlinkClick r:id="rId21"/>
+            <a:hlinkClick r:id="rId16"/>
           </p:cNvPr>
           <p:cNvSpPr/>
           <p:nvPr/>
@@ -5220,7 +3741,7 @@
                   <a:srgbClr val="1F3A5F"/>
                 </a:solidFill>
               </a:rPr>
-              <a:t>Gram 25: Nebula-class contact bearing 065, codename Tantive</a:t>
+              <a:t>Gram 6: FR Constitution-class, Category 2, Cardassia</a:t>
             </a:r>
           </a:p>
         </p:txBody>
@@ -5249,7 +3770,7 @@
           <a:p>
             <a:r>
               <a:rPr sz="800">
-                <a:hlinkClick r:id="rId22"/>
+                <a:hlinkClick r:id="rId17"/>
               </a:rPr>
               <a:t>Lofar 1</a:t>
             </a:r>
@@ -5257,7 +3778,7 @@
           <a:p>
             <a:r>
               <a:rPr sz="800">
-                <a:hlinkClick r:id="rId23"/>
+                <a:hlinkClick r:id="rId18"/>
               </a:rPr>
               <a:t>Lofar 2</a:t>
             </a:r>
@@ -5265,7 +3786,7 @@
           <a:p>
             <a:r>
               <a:rPr sz="800">
-                <a:hlinkClick r:id="rId24"/>
+                <a:hlinkClick r:id="rId19"/>
               </a:rPr>
               <a:t>Lofar 3</a:t>
             </a:r>
@@ -5275,7 +3796,7 @@
       <p:sp>
         <p:nvSpPr>
           <p:cNvPr id="15" name="Rounded Rectangle 14">
-            <a:hlinkClick r:id="rId25"/>
+            <a:hlinkClick r:id="rId20"/>
           </p:cNvPr>
           <p:cNvSpPr/>
           <p:nvPr/>
@@ -5322,7 +3843,7 @@
                   <a:srgbClr val="1F3A5F"/>
                 </a:solidFill>
               </a:rPr>
-              <a:t>Gram 26: Nebula-class contact bearing 271, codename Trill</a:t>
+              <a:t>Gram 7: Lambda Shuttle contact bearing 152, codename Tatooine</a:t>
             </a:r>
           </a:p>
         </p:txBody>
@@ -5351,41 +3872,17 @@
           <a:p>
             <a:r>
               <a:rPr sz="800">
-                <a:hlinkClick r:id="rId26"/>
+                <a:hlinkClick r:id="rId21"/>
               </a:rPr>
               <a:t>Lofar 1</a:t>
             </a:r>
           </a:p>
-          <a:p>
-            <a:r>
-              <a:rPr sz="800">
-                <a:hlinkClick r:id="rId27"/>
-              </a:rPr>
-              <a:t>Lofar 2</a:t>
-            </a:r>
-          </a:p>
-          <a:p>
-            <a:r>
-              <a:rPr sz="800">
-                <a:hlinkClick r:id="rId28"/>
-              </a:rPr>
-              <a:t>Lofar 3</a:t>
-            </a:r>
-          </a:p>
-          <a:p>
-            <a:r>
-              <a:rPr sz="800">
-                <a:hlinkClick r:id="rId29"/>
-              </a:rPr>
-              <a:t>Lofar 4</a:t>
-            </a:r>
-          </a:p>
         </p:txBody>
       </p:sp>
       <p:sp>
         <p:nvSpPr>
           <p:cNvPr id="17" name="Rounded Rectangle 16">
-            <a:hlinkClick r:id="rId30"/>
+            <a:hlinkClick r:id="rId22"/>
           </p:cNvPr>
           <p:cNvSpPr/>
           <p:nvPr/>
@@ -5432,7 +3929,7 @@
                   <a:srgbClr val="1F3A5F"/>
                 </a:solidFill>
               </a:rPr>
-              <a:t>Gram 28: Sovereign-class contact bearing 118, codename Yavin</a:t>
+              <a:t>Gram 8: FR Y-wing, Category 1, Betazed</a:t>
             </a:r>
           </a:p>
         </p:txBody>
@@ -5461,33 +3958,17 @@
           <a:p>
             <a:r>
               <a:rPr sz="800">
-                <a:hlinkClick r:id="rId31"/>
+                <a:hlinkClick r:id="rId23"/>
               </a:rPr>
               <a:t>Lofar 1</a:t>
             </a:r>
           </a:p>
-          <a:p>
-            <a:r>
-              <a:rPr sz="800">
-                <a:hlinkClick r:id="rId32"/>
-              </a:rPr>
-              <a:t>Lofar 2</a:t>
-            </a:r>
-          </a:p>
-          <a:p>
-            <a:r>
-              <a:rPr sz="800">
-                <a:hlinkClick r:id="rId33"/>
-              </a:rPr>
-              <a:t>Lofar 3</a:t>
-            </a:r>
-          </a:p>
         </p:txBody>
       </p:sp>
       <p:sp>
         <p:nvSpPr>
           <p:cNvPr id="19" name="Rounded Rectangle 18">
-            <a:hlinkClick r:id="rId34"/>
+            <a:hlinkClick r:id="rId24"/>
           </p:cNvPr>
           <p:cNvSpPr/>
           <p:nvPr/>
@@ -5534,7 +4015,7 @@
                   <a:srgbClr val="1F3A5F"/>
                 </a:solidFill>
               </a:rPr>
-              <a:t>Gram 30: FR Y-wing, Category 3, Yavin</a:t>
+              <a:t>Gram 9: FR Venator-class, Category 4, Kobol</a:t>
             </a:r>
           </a:p>
         </p:txBody>
@@ -5563,7 +4044,7 @@
           <a:p>
             <a:r>
               <a:rPr sz="800">
-                <a:hlinkClick r:id="rId35"/>
+                <a:hlinkClick r:id="rId25"/>
               </a:rPr>
               <a:t>Lofar 1</a:t>
             </a:r>
@@ -5571,7 +4052,7 @@
           <a:p>
             <a:r>
               <a:rPr sz="800">
-                <a:hlinkClick r:id="rId36"/>
+                <a:hlinkClick r:id="rId26"/>
               </a:rPr>
               <a:t>Lofar 2</a:t>
             </a:r>
@@ -5579,17 +4060,25 @@
           <a:p>
             <a:r>
               <a:rPr sz="800">
-                <a:hlinkClick r:id="rId37"/>
+                <a:hlinkClick r:id="rId27"/>
               </a:rPr>
               <a:t>Lofar 3</a:t>
             </a:r>
           </a:p>
+          <a:p>
+            <a:r>
+              <a:rPr sz="800">
+                <a:hlinkClick r:id="rId28"/>
+              </a:rPr>
+              <a:t>Lofar 4</a:t>
+            </a:r>
+          </a:p>
         </p:txBody>
       </p:sp>
       <p:sp>
         <p:nvSpPr>
           <p:cNvPr id="21" name="Rounded Rectangle 20">
-            <a:hlinkClick r:id="rId38"/>
+            <a:hlinkClick r:id="rId29"/>
           </p:cNvPr>
           <p:cNvSpPr/>
           <p:nvPr/>
@@ -5636,7 +4125,7 @@
                   <a:srgbClr val="1F3A5F"/>
                 </a:solidFill>
               </a:rPr>
-              <a:t>Gram 31: FR Nebula-class, Category 3, Bajor</a:t>
+              <a:t>Gram 11: FR Sovereign-class, Category 4, Bespin</a:t>
             </a:r>
           </a:p>
         </p:txBody>
@@ -5665,25 +4154,17 @@
           <a:p>
             <a:r>
               <a:rPr sz="800">
-                <a:hlinkClick r:id="rId39"/>
+                <a:hlinkClick r:id="rId30"/>
               </a:rPr>
               <a:t>Lofar 1</a:t>
             </a:r>
           </a:p>
-          <a:p>
-            <a:r>
-              <a:rPr sz="800">
-                <a:hlinkClick r:id="rId40"/>
-              </a:rPr>
-              <a:t>Lofar 2</a:t>
-            </a:r>
-          </a:p>
         </p:txBody>
       </p:sp>
       <p:sp>
         <p:nvSpPr>
           <p:cNvPr id="23" name="Rounded Rectangle 22">
-            <a:hlinkClick r:id="rId41"/>
+            <a:hlinkClick r:id="rId31"/>
           </p:cNvPr>
           <p:cNvSpPr/>
           <p:nvPr/>
@@ -5730,7 +4211,7 @@
                   <a:srgbClr val="1F3A5F"/>
                 </a:solidFill>
               </a:rPr>
-              <a:t>Gram 32: FR Outrider, Category 4, Risa</a:t>
+              <a:t>Gram 13: Razor Crest contact bearing 010, codename Bajor</a:t>
             </a:r>
           </a:p>
         </p:txBody>
@@ -5759,7 +4240,7 @@
           <a:p>
             <a:r>
               <a:rPr sz="800">
-                <a:hlinkClick r:id="rId42"/>
+                <a:hlinkClick r:id="rId32"/>
               </a:rPr>
               <a:t>Lofar 1</a:t>
             </a:r>
@@ -5767,17 +4248,33 @@
           <a:p>
             <a:r>
               <a:rPr sz="800">
-                <a:hlinkClick r:id="rId43"/>
+                <a:hlinkClick r:id="rId33"/>
               </a:rPr>
               <a:t>Lofar 2</a:t>
             </a:r>
           </a:p>
+          <a:p>
+            <a:r>
+              <a:rPr sz="800">
+                <a:hlinkClick r:id="rId34"/>
+              </a:rPr>
+              <a:t>Lofar 3</a:t>
+            </a:r>
+          </a:p>
+          <a:p>
+            <a:r>
+              <a:rPr sz="800">
+                <a:hlinkClick r:id="rId35"/>
+              </a:rPr>
+              <a:t>Lofar 4</a:t>
+            </a:r>
+          </a:p>
         </p:txBody>
       </p:sp>
       <p:sp>
         <p:nvSpPr>
           <p:cNvPr id="25" name="Rounded Rectangle 24">
-            <a:hlinkClick r:id="rId44"/>
+            <a:hlinkClick r:id="rId36"/>
           </p:cNvPr>
           <p:cNvSpPr/>
           <p:nvPr/>
@@ -5824,7 +4321,7 @@
                   <a:srgbClr val="1F3A5F"/>
                 </a:solidFill>
               </a:rPr>
-              <a:t>Gram 33: FR A-wing, Category 4, Defiant</a:t>
+              <a:t>Gram 14: FR Defiant-class, Category 3, Romulus</a:t>
             </a:r>
           </a:p>
         </p:txBody>
@@ -5853,17 +4350,41 @@
           <a:p>
             <a:r>
               <a:rPr sz="800">
-                <a:hlinkClick r:id="rId45"/>
+                <a:hlinkClick r:id="rId37"/>
               </a:rPr>
               <a:t>Lofar 1</a:t>
             </a:r>
           </a:p>
+          <a:p>
+            <a:r>
+              <a:rPr sz="800">
+                <a:hlinkClick r:id="rId38"/>
+              </a:rPr>
+              <a:t>Lofar 2</a:t>
+            </a:r>
+          </a:p>
+          <a:p>
+            <a:r>
+              <a:rPr sz="800">
+                <a:hlinkClick r:id="rId39"/>
+              </a:rPr>
+              <a:t>Lofar 3</a:t>
+            </a:r>
+          </a:p>
+          <a:p>
+            <a:r>
+              <a:rPr sz="800">
+                <a:hlinkClick r:id="rId40"/>
+              </a:rPr>
+              <a:t>Lofar 4</a:t>
+            </a:r>
+          </a:p>
         </p:txBody>
       </p:sp>
       <p:sp>
         <p:nvSpPr>
           <p:cNvPr id="27" name="Rounded Rectangle 26">
-            <a:hlinkClick r:id="rId46"/>
+            <a:hlinkClick r:id="rId41"/>
           </p:cNvPr>
           <p:cNvSpPr/>
           <p:nvPr/>
@@ -5910,7 +4431,7 @@
                   <a:srgbClr val="1F3A5F"/>
                 </a:solidFill>
               </a:rPr>
-              <a:t>Gram 35: Reliant contact bearing 251, codename Bespin</a:t>
+              <a:t>Gram 15: FR Acclamator-class, Category 3, Dank</a:t>
             </a:r>
           </a:p>
         </p:txBody>
@@ -5939,17 +4460,33 @@
           <a:p>
             <a:r>
               <a:rPr sz="800">
-                <a:hlinkClick r:id="rId47"/>
+                <a:hlinkClick r:id="rId42"/>
               </a:rPr>
               <a:t>Lofar 1</a:t>
             </a:r>
           </a:p>
+          <a:p>
+            <a:r>
+              <a:rPr sz="800">
+                <a:hlinkClick r:id="rId43"/>
+              </a:rPr>
+              <a:t>Lofar 2</a:t>
+            </a:r>
+          </a:p>
+          <a:p>
+            <a:r>
+              <a:rPr sz="800">
+                <a:hlinkClick r:id="rId44"/>
+              </a:rPr>
+              <a:t>Lofar 3</a:t>
+            </a:r>
+          </a:p>
         </p:txBody>
       </p:sp>
       <p:sp>
         <p:nvSpPr>
           <p:cNvPr id="29" name="Rounded Rectangle 28">
-            <a:hlinkClick r:id="rId48"/>
+            <a:hlinkClick r:id="rId45"/>
           </p:cNvPr>
           <p:cNvSpPr/>
           <p:nvPr/>
@@ -5996,7 +4533,7 @@
                   <a:srgbClr val="1F3A5F"/>
                 </a:solidFill>
               </a:rPr>
-              <a:t>Gram 36: FR Sovereign-class, Category 2, Yavin</a:t>
+              <a:t>Gram 16: FR Reliant, Category 1, Dank</a:t>
             </a:r>
           </a:p>
         </p:txBody>
@@ -6025,7 +4562,7 @@
           <a:p>
             <a:r>
               <a:rPr sz="800">
-                <a:hlinkClick r:id="rId49"/>
+                <a:hlinkClick r:id="rId46"/>
               </a:rPr>
               <a:t>Lofar 1</a:t>
             </a:r>
@@ -6033,7 +4570,7 @@
           <a:p>
             <a:r>
               <a:rPr sz="800">
-                <a:hlinkClick r:id="rId50"/>
+                <a:hlinkClick r:id="rId47"/>
               </a:rPr>
               <a:t>Lofar 2</a:t>
             </a:r>
@@ -6041,7 +4578,7 @@
           <a:p>
             <a:r>
               <a:rPr sz="800">
-                <a:hlinkClick r:id="rId51"/>
+                <a:hlinkClick r:id="rId48"/>
               </a:rPr>
               <a:t>Lofar 3</a:t>
             </a:r>
@@ -6051,7 +4588,7 @@
       <p:sp>
         <p:nvSpPr>
           <p:cNvPr id="31" name="Rounded Rectangle 30">
-            <a:hlinkClick r:id="rId52"/>
+            <a:hlinkClick r:id="rId49"/>
           </p:cNvPr>
           <p:cNvSpPr/>
           <p:nvPr/>
@@ -6098,7 +4635,7 @@
                   <a:srgbClr val="1F3A5F"/>
                 </a:solidFill>
               </a:rPr>
-              <a:t>Gram 37: FR Akira-class, Category 4, Kobol</a:t>
+              <a:t>Gram 17: FR Y-wing, Category 4, Hoth</a:t>
             </a:r>
           </a:p>
         </p:txBody>
@@ -6127,9 +4664,25 @@
           <a:p>
             <a:r>
               <a:rPr sz="800">
-                <a:hlinkClick r:id="rId53"/>
+                <a:hlinkClick r:id="rId50"/>
               </a:rPr>
               <a:t>Lofar 1</a:t>
+            </a:r>
+          </a:p>
+          <a:p>
+            <a:r>
+              <a:rPr sz="800">
+                <a:hlinkClick r:id="rId51"/>
+              </a:rPr>
+              <a:t>Lofar 2</a:t>
+            </a:r>
+          </a:p>
+          <a:p>
+            <a:r>
+              <a:rPr sz="800">
+                <a:hlinkClick r:id="rId52"/>
+              </a:rPr>
+              <a:t>Lofar 3</a:t>
             </a:r>
           </a:p>
         </p:txBody>
@@ -6198,7 +4751,7 @@
                   <a:srgbClr val="FFFFFF"/>
                 </a:solidFill>
               </a:rPr>
-              <a:t>Instructor Week 1 Grams — Page 3 of 3</a:t>
+              <a:t>Instructor Week 1 Grams — Page 2 of 3</a:t>
             </a:r>
           </a:p>
         </p:txBody>
@@ -6253,7 +4806,7 @@
                   <a:srgbClr val="1F3A5F"/>
                 </a:solidFill>
               </a:rPr>
-              <a:t>Gram 38: FR Razor Crest, Category 3, Dank</a:t>
+              <a:t>Gram 19: FR TIE Bomber, Category 4, Kobol</a:t>
             </a:r>
           </a:p>
         </p:txBody>
@@ -6363,7 +4916,7 @@
                   <a:srgbClr val="1F3A5F"/>
                 </a:solidFill>
               </a:rPr>
-              <a:t>Gram 39: FR Slave I, Category 3, Kronos</a:t>
+              <a:t>Gram 21: FR Venator-class, Category 4, Endor</a:t>
             </a:r>
           </a:p>
         </p:txBody>
@@ -6397,12 +4950,20 @@
               <a:t>Lofar 1</a:t>
             </a:r>
           </a:p>
+          <a:p>
+            <a:r>
+              <a:rPr sz="800">
+                <a:hlinkClick r:id="rId9"/>
+              </a:rPr>
+              <a:t>Lofar 2</a:t>
+            </a:r>
+          </a:p>
         </p:txBody>
       </p:sp>
       <p:sp>
         <p:nvSpPr>
           <p:cNvPr id="7" name="Rounded Rectangle 6">
-            <a:hlinkClick r:id="rId9"/>
+            <a:hlinkClick r:id="rId10"/>
           </p:cNvPr>
           <p:cNvSpPr/>
           <p:nvPr/>
@@ -6449,7 +5010,7 @@
                   <a:srgbClr val="1F3A5F"/>
                 </a:solidFill>
               </a:rPr>
-              <a:t>Gram 40: FR Razor Crest, Category 3, Dank</a:t>
+              <a:t>Gram 22: FR Intrepid-class, Category 1, Bajor</a:t>
             </a:r>
           </a:p>
         </p:txBody>
@@ -6478,7 +5039,7 @@
           <a:p>
             <a:r>
               <a:rPr sz="800">
-                <a:hlinkClick r:id="rId10"/>
+                <a:hlinkClick r:id="rId11"/>
               </a:rPr>
               <a:t>Lofar 1</a:t>
             </a:r>
@@ -6486,33 +5047,17 @@
           <a:p>
             <a:r>
               <a:rPr sz="800">
-                <a:hlinkClick r:id="rId11"/>
+                <a:hlinkClick r:id="rId12"/>
               </a:rPr>
               <a:t>Lofar 2</a:t>
             </a:r>
           </a:p>
-          <a:p>
-            <a:r>
-              <a:rPr sz="800">
-                <a:hlinkClick r:id="rId12"/>
-              </a:rPr>
-              <a:t>Lofar 3</a:t>
-            </a:r>
-          </a:p>
-          <a:p>
-            <a:r>
-              <a:rPr sz="800">
-                <a:hlinkClick r:id="rId13"/>
-              </a:rPr>
-              <a:t>Lofar 4</a:t>
-            </a:r>
-          </a:p>
         </p:txBody>
       </p:sp>
       <p:sp>
         <p:nvSpPr>
           <p:cNvPr id="9" name="Rounded Rectangle 8">
-            <a:hlinkClick r:id="rId14"/>
+            <a:hlinkClick r:id="rId13"/>
           </p:cNvPr>
           <p:cNvSpPr/>
           <p:nvPr/>
@@ -6559,7 +5104,7 @@
                   <a:srgbClr val="1F3A5F"/>
                 </a:solidFill>
               </a:rPr>
-              <a:t>Gram 41: Ghost contact bearing 208, codename Betazed</a:t>
+              <a:t>Gram 23: FR Voyager, Category 4, Defiant</a:t>
             </a:r>
           </a:p>
         </p:txBody>
@@ -6588,9 +5133,17 @@
           <a:p>
             <a:r>
               <a:rPr sz="800">
+                <a:hlinkClick r:id="rId14"/>
+              </a:rPr>
+              <a:t>Lofar 1</a:t>
+            </a:r>
+          </a:p>
+          <a:p>
+            <a:r>
+              <a:rPr sz="800">
                 <a:hlinkClick r:id="rId15"/>
               </a:rPr>
-              <a:t>Lofar 1</a:t>
+              <a:t>Lofar 2</a:t>
             </a:r>
           </a:p>
           <a:p>
@@ -6598,7 +5151,7 @@
               <a:rPr sz="800">
                 <a:hlinkClick r:id="rId16"/>
               </a:rPr>
-              <a:t>Lofar 2</a:t>
+              <a:t>Lofar 3</a:t>
             </a:r>
           </a:p>
           <a:p>
@@ -6606,14 +5159,6 @@
               <a:rPr sz="800">
                 <a:hlinkClick r:id="rId17"/>
               </a:rPr>
-              <a:t>Lofar 3</a:t>
-            </a:r>
-          </a:p>
-          <a:p>
-            <a:r>
-              <a:rPr sz="800">
-                <a:hlinkClick r:id="rId18"/>
-              </a:rPr>
               <a:t>Lofar 4</a:t>
             </a:r>
           </a:p>
@@ -6622,7 +5167,7 @@
       <p:sp>
         <p:nvSpPr>
           <p:cNvPr id="11" name="Rounded Rectangle 10">
-            <a:hlinkClick r:id="rId19"/>
+            <a:hlinkClick r:id="rId18"/>
           </p:cNvPr>
           <p:cNvSpPr/>
           <p:nvPr/>
@@ -6669,7 +5214,7 @@
                   <a:srgbClr val="1F3A5F"/>
                 </a:solidFill>
               </a:rPr>
-              <a:t>Gram 42: FR Acclamator-class, Category 2, Trill</a:t>
+              <a:t>Gram 24: FR Tantive IV, Category 4, Tatooine</a:t>
             </a:r>
           </a:p>
         </p:txBody>
@@ -6698,14 +5243,1557 @@
           <a:p>
             <a:r>
               <a:rPr sz="800">
+                <a:hlinkClick r:id="rId19"/>
+              </a:rPr>
+              <a:t>Lofar 1</a:t>
+            </a:r>
+          </a:p>
+          <a:p>
+            <a:r>
+              <a:rPr sz="800">
                 <a:hlinkClick r:id="rId20"/>
               </a:rPr>
+              <a:t>Lofar 2</a:t>
+            </a:r>
+          </a:p>
+        </p:txBody>
+      </p:sp>
+      <p:sp>
+        <p:nvSpPr>
+          <p:cNvPr id="13" name="Rounded Rectangle 12">
+            <a:hlinkClick r:id="rId21"/>
+          </p:cNvPr>
+          <p:cNvSpPr/>
+          <p:nvPr/>
+        </p:nvSpPr>
+        <p:spPr>
+          <a:xfrm>
+            <a:off x="365760" y="2682240"/>
+            <a:ext cx="2200046" cy="365760"/>
+          </a:xfrm>
+          <a:prstGeom prst="roundRect">
+            <a:avLst/>
+          </a:prstGeom>
+          <a:solidFill>
+            <a:srgbClr val="E8EEF7"/>
+          </a:solidFill>
+          <a:ln>
+            <a:solidFill>
+              <a:srgbClr val="1F3A5F"/>
+            </a:solidFill>
+          </a:ln>
+        </p:spPr>
+        <p:style>
+          <a:lnRef idx="1">
+            <a:schemeClr val="accent1"/>
+          </a:lnRef>
+          <a:fillRef idx="3">
+            <a:schemeClr val="accent1"/>
+          </a:fillRef>
+          <a:effectRef idx="2">
+            <a:schemeClr val="accent1"/>
+          </a:effectRef>
+          <a:fontRef idx="minor">
+            <a:schemeClr val="lt1"/>
+          </a:fontRef>
+        </p:style>
+        <p:txBody>
+          <a:bodyPr rtlCol="0" anchor="ctr" lIns="45720" rIns="45720"/>
+          <a:lstStyle/>
+          <a:p>
+            <a:pPr algn="ctr"/>
+            <a:r>
+              <a:rPr sz="900">
+                <a:solidFill>
+                  <a:srgbClr val="1F3A5F"/>
+                </a:solidFill>
+              </a:rPr>
+              <a:t>Gram 25: Nebula-class contact bearing 065, codename Tantive</a:t>
+            </a:r>
+          </a:p>
+        </p:txBody>
+      </p:sp>
+      <p:sp>
+        <p:nvSpPr>
+          <p:cNvPr id="14" name="TextBox 13"/>
+          <p:cNvSpPr txBox="1"/>
+          <p:nvPr/>
+        </p:nvSpPr>
+        <p:spPr>
+          <a:xfrm>
+            <a:off x="365760" y="3066288"/>
+            <a:ext cx="2200046" cy="1447800"/>
+          </a:xfrm>
+          <a:prstGeom prst="rect">
+            <a:avLst/>
+          </a:prstGeom>
+          <a:noFill/>
+        </p:spPr>
+        <p:txBody>
+          <a:bodyPr wrap="square">
+            <a:spAutoFit/>
+          </a:bodyPr>
+          <a:lstStyle/>
+          <a:p>
+            <a:r>
+              <a:rPr sz="800">
+                <a:hlinkClick r:id="rId22"/>
+              </a:rPr>
               <a:t>Lofar 1</a:t>
             </a:r>
           </a:p>
           <a:p>
             <a:r>
               <a:rPr sz="800">
+                <a:hlinkClick r:id="rId23"/>
+              </a:rPr>
+              <a:t>Lofar 2</a:t>
+            </a:r>
+          </a:p>
+          <a:p>
+            <a:r>
+              <a:rPr sz="800">
+                <a:hlinkClick r:id="rId24"/>
+              </a:rPr>
+              <a:t>Lofar 3</a:t>
+            </a:r>
+          </a:p>
+        </p:txBody>
+      </p:sp>
+      <p:sp>
+        <p:nvSpPr>
+          <p:cNvPr id="15" name="Rounded Rectangle 14">
+            <a:hlinkClick r:id="rId25"/>
+          </p:cNvPr>
+          <p:cNvSpPr/>
+          <p:nvPr/>
+        </p:nvSpPr>
+        <p:spPr>
+          <a:xfrm>
+            <a:off x="2657246" y="2682240"/>
+            <a:ext cx="2200046" cy="365760"/>
+          </a:xfrm>
+          <a:prstGeom prst="roundRect">
+            <a:avLst/>
+          </a:prstGeom>
+          <a:solidFill>
+            <a:srgbClr val="E8EEF7"/>
+          </a:solidFill>
+          <a:ln>
+            <a:solidFill>
+              <a:srgbClr val="1F3A5F"/>
+            </a:solidFill>
+          </a:ln>
+        </p:spPr>
+        <p:style>
+          <a:lnRef idx="1">
+            <a:schemeClr val="accent1"/>
+          </a:lnRef>
+          <a:fillRef idx="3">
+            <a:schemeClr val="accent1"/>
+          </a:fillRef>
+          <a:effectRef idx="2">
+            <a:schemeClr val="accent1"/>
+          </a:effectRef>
+          <a:fontRef idx="minor">
+            <a:schemeClr val="lt1"/>
+          </a:fontRef>
+        </p:style>
+        <p:txBody>
+          <a:bodyPr rtlCol="0" anchor="ctr" lIns="45720" rIns="45720"/>
+          <a:lstStyle/>
+          <a:p>
+            <a:pPr algn="ctr"/>
+            <a:r>
+              <a:rPr sz="900">
+                <a:solidFill>
+                  <a:srgbClr val="1F3A5F"/>
+                </a:solidFill>
+              </a:rPr>
+              <a:t>Gram 26: Nebula-class contact bearing 271, codename Trill</a:t>
+            </a:r>
+          </a:p>
+        </p:txBody>
+      </p:sp>
+      <p:sp>
+        <p:nvSpPr>
+          <p:cNvPr id="16" name="TextBox 15"/>
+          <p:cNvSpPr txBox="1"/>
+          <p:nvPr/>
+        </p:nvSpPr>
+        <p:spPr>
+          <a:xfrm>
+            <a:off x="2657246" y="3066288"/>
+            <a:ext cx="2200046" cy="1447800"/>
+          </a:xfrm>
+          <a:prstGeom prst="rect">
+            <a:avLst/>
+          </a:prstGeom>
+          <a:noFill/>
+        </p:spPr>
+        <p:txBody>
+          <a:bodyPr wrap="square">
+            <a:spAutoFit/>
+          </a:bodyPr>
+          <a:lstStyle/>
+          <a:p>
+            <a:r>
+              <a:rPr sz="800">
+                <a:hlinkClick r:id="rId26"/>
+              </a:rPr>
+              <a:t>Lofar 1</a:t>
+            </a:r>
+          </a:p>
+          <a:p>
+            <a:r>
+              <a:rPr sz="800">
+                <a:hlinkClick r:id="rId27"/>
+              </a:rPr>
+              <a:t>Lofar 2</a:t>
+            </a:r>
+          </a:p>
+          <a:p>
+            <a:r>
+              <a:rPr sz="800">
+                <a:hlinkClick r:id="rId28"/>
+              </a:rPr>
+              <a:t>Lofar 3</a:t>
+            </a:r>
+          </a:p>
+          <a:p>
+            <a:r>
+              <a:rPr sz="800">
+                <a:hlinkClick r:id="rId29"/>
+              </a:rPr>
+              <a:t>Lofar 4</a:t>
+            </a:r>
+          </a:p>
+        </p:txBody>
+      </p:sp>
+      <p:sp>
+        <p:nvSpPr>
+          <p:cNvPr id="17" name="Rounded Rectangle 16">
+            <a:hlinkClick r:id="rId30"/>
+          </p:cNvPr>
+          <p:cNvSpPr/>
+          <p:nvPr/>
+        </p:nvSpPr>
+        <p:spPr>
+          <a:xfrm>
+            <a:off x="4948732" y="2682240"/>
+            <a:ext cx="2200046" cy="365760"/>
+          </a:xfrm>
+          <a:prstGeom prst="roundRect">
+            <a:avLst/>
+          </a:prstGeom>
+          <a:solidFill>
+            <a:srgbClr val="E8EEF7"/>
+          </a:solidFill>
+          <a:ln>
+            <a:solidFill>
+              <a:srgbClr val="1F3A5F"/>
+            </a:solidFill>
+          </a:ln>
+        </p:spPr>
+        <p:style>
+          <a:lnRef idx="1">
+            <a:schemeClr val="accent1"/>
+          </a:lnRef>
+          <a:fillRef idx="3">
+            <a:schemeClr val="accent1"/>
+          </a:fillRef>
+          <a:effectRef idx="2">
+            <a:schemeClr val="accent1"/>
+          </a:effectRef>
+          <a:fontRef idx="minor">
+            <a:schemeClr val="lt1"/>
+          </a:fontRef>
+        </p:style>
+        <p:txBody>
+          <a:bodyPr rtlCol="0" anchor="ctr" lIns="45720" rIns="45720"/>
+          <a:lstStyle/>
+          <a:p>
+            <a:pPr algn="ctr"/>
+            <a:r>
+              <a:rPr sz="900">
+                <a:solidFill>
+                  <a:srgbClr val="1F3A5F"/>
+                </a:solidFill>
+              </a:rPr>
+              <a:t>Gram 28: Sovereign-class contact bearing 118, codename Yavin</a:t>
+            </a:r>
+          </a:p>
+        </p:txBody>
+      </p:sp>
+      <p:sp>
+        <p:nvSpPr>
+          <p:cNvPr id="18" name="TextBox 17"/>
+          <p:cNvSpPr txBox="1"/>
+          <p:nvPr/>
+        </p:nvSpPr>
+        <p:spPr>
+          <a:xfrm>
+            <a:off x="4948732" y="3066288"/>
+            <a:ext cx="2200046" cy="1447800"/>
+          </a:xfrm>
+          <a:prstGeom prst="rect">
+            <a:avLst/>
+          </a:prstGeom>
+          <a:noFill/>
+        </p:spPr>
+        <p:txBody>
+          <a:bodyPr wrap="square">
+            <a:spAutoFit/>
+          </a:bodyPr>
+          <a:lstStyle/>
+          <a:p>
+            <a:r>
+              <a:rPr sz="800">
+                <a:hlinkClick r:id="rId31"/>
+              </a:rPr>
+              <a:t>Lofar 1</a:t>
+            </a:r>
+          </a:p>
+          <a:p>
+            <a:r>
+              <a:rPr sz="800">
+                <a:hlinkClick r:id="rId32"/>
+              </a:rPr>
+              <a:t>Lofar 2</a:t>
+            </a:r>
+          </a:p>
+          <a:p>
+            <a:r>
+              <a:rPr sz="800">
+                <a:hlinkClick r:id="rId33"/>
+              </a:rPr>
+              <a:t>Lofar 3</a:t>
+            </a:r>
+          </a:p>
+        </p:txBody>
+      </p:sp>
+      <p:sp>
+        <p:nvSpPr>
+          <p:cNvPr id="19" name="Rounded Rectangle 18">
+            <a:hlinkClick r:id="rId34"/>
+          </p:cNvPr>
+          <p:cNvSpPr/>
+          <p:nvPr/>
+        </p:nvSpPr>
+        <p:spPr>
+          <a:xfrm>
+            <a:off x="7240219" y="2682240"/>
+            <a:ext cx="2200046" cy="365760"/>
+          </a:xfrm>
+          <a:prstGeom prst="roundRect">
+            <a:avLst/>
+          </a:prstGeom>
+          <a:solidFill>
+            <a:srgbClr val="E8EEF7"/>
+          </a:solidFill>
+          <a:ln>
+            <a:solidFill>
+              <a:srgbClr val="1F3A5F"/>
+            </a:solidFill>
+          </a:ln>
+        </p:spPr>
+        <p:style>
+          <a:lnRef idx="1">
+            <a:schemeClr val="accent1"/>
+          </a:lnRef>
+          <a:fillRef idx="3">
+            <a:schemeClr val="accent1"/>
+          </a:fillRef>
+          <a:effectRef idx="2">
+            <a:schemeClr val="accent1"/>
+          </a:effectRef>
+          <a:fontRef idx="minor">
+            <a:schemeClr val="lt1"/>
+          </a:fontRef>
+        </p:style>
+        <p:txBody>
+          <a:bodyPr rtlCol="0" anchor="ctr" lIns="45720" rIns="45720"/>
+          <a:lstStyle/>
+          <a:p>
+            <a:pPr algn="ctr"/>
+            <a:r>
+              <a:rPr sz="900">
+                <a:solidFill>
+                  <a:srgbClr val="1F3A5F"/>
+                </a:solidFill>
+              </a:rPr>
+              <a:t>Gram 30: FR Y-wing, Category 3, Yavin</a:t>
+            </a:r>
+          </a:p>
+        </p:txBody>
+      </p:sp>
+      <p:sp>
+        <p:nvSpPr>
+          <p:cNvPr id="20" name="TextBox 19"/>
+          <p:cNvSpPr txBox="1"/>
+          <p:nvPr/>
+        </p:nvSpPr>
+        <p:spPr>
+          <a:xfrm>
+            <a:off x="7240219" y="3066288"/>
+            <a:ext cx="2200046" cy="1447800"/>
+          </a:xfrm>
+          <a:prstGeom prst="rect">
+            <a:avLst/>
+          </a:prstGeom>
+          <a:noFill/>
+        </p:spPr>
+        <p:txBody>
+          <a:bodyPr wrap="square">
+            <a:spAutoFit/>
+          </a:bodyPr>
+          <a:lstStyle/>
+          <a:p>
+            <a:r>
+              <a:rPr sz="800">
+                <a:hlinkClick r:id="rId35"/>
+              </a:rPr>
+              <a:t>Lofar 1</a:t>
+            </a:r>
+          </a:p>
+          <a:p>
+            <a:r>
+              <a:rPr sz="800">
+                <a:hlinkClick r:id="rId36"/>
+              </a:rPr>
+              <a:t>Lofar 2</a:t>
+            </a:r>
+          </a:p>
+          <a:p>
+            <a:r>
+              <a:rPr sz="800">
+                <a:hlinkClick r:id="rId37"/>
+              </a:rPr>
+              <a:t>Lofar 3</a:t>
+            </a:r>
+          </a:p>
+        </p:txBody>
+      </p:sp>
+      <p:sp>
+        <p:nvSpPr>
+          <p:cNvPr id="21" name="Rounded Rectangle 20">
+            <a:hlinkClick r:id="rId38"/>
+          </p:cNvPr>
+          <p:cNvSpPr/>
+          <p:nvPr/>
+        </p:nvSpPr>
+        <p:spPr>
+          <a:xfrm>
+            <a:off x="9531705" y="2682240"/>
+            <a:ext cx="2200046" cy="365760"/>
+          </a:xfrm>
+          <a:prstGeom prst="roundRect">
+            <a:avLst/>
+          </a:prstGeom>
+          <a:solidFill>
+            <a:srgbClr val="E8EEF7"/>
+          </a:solidFill>
+          <a:ln>
+            <a:solidFill>
+              <a:srgbClr val="1F3A5F"/>
+            </a:solidFill>
+          </a:ln>
+        </p:spPr>
+        <p:style>
+          <a:lnRef idx="1">
+            <a:schemeClr val="accent1"/>
+          </a:lnRef>
+          <a:fillRef idx="3">
+            <a:schemeClr val="accent1"/>
+          </a:fillRef>
+          <a:effectRef idx="2">
+            <a:schemeClr val="accent1"/>
+          </a:effectRef>
+          <a:fontRef idx="minor">
+            <a:schemeClr val="lt1"/>
+          </a:fontRef>
+        </p:style>
+        <p:txBody>
+          <a:bodyPr rtlCol="0" anchor="ctr" lIns="45720" rIns="45720"/>
+          <a:lstStyle/>
+          <a:p>
+            <a:pPr algn="ctr"/>
+            <a:r>
+              <a:rPr sz="900">
+                <a:solidFill>
+                  <a:srgbClr val="1F3A5F"/>
+                </a:solidFill>
+              </a:rPr>
+              <a:t>Gram 31: FR Nebula-class, Category 3, Bajor</a:t>
+            </a:r>
+          </a:p>
+        </p:txBody>
+      </p:sp>
+      <p:sp>
+        <p:nvSpPr>
+          <p:cNvPr id="22" name="TextBox 21"/>
+          <p:cNvSpPr txBox="1"/>
+          <p:nvPr/>
+        </p:nvSpPr>
+        <p:spPr>
+          <a:xfrm>
+            <a:off x="9531705" y="3066288"/>
+            <a:ext cx="2200046" cy="1447800"/>
+          </a:xfrm>
+          <a:prstGeom prst="rect">
+            <a:avLst/>
+          </a:prstGeom>
+          <a:noFill/>
+        </p:spPr>
+        <p:txBody>
+          <a:bodyPr wrap="square">
+            <a:spAutoFit/>
+          </a:bodyPr>
+          <a:lstStyle/>
+          <a:p>
+            <a:r>
+              <a:rPr sz="800">
+                <a:hlinkClick r:id="rId39"/>
+              </a:rPr>
+              <a:t>Lofar 1</a:t>
+            </a:r>
+          </a:p>
+          <a:p>
+            <a:r>
+              <a:rPr sz="800">
+                <a:hlinkClick r:id="rId40"/>
+              </a:rPr>
+              <a:t>Lofar 2</a:t>
+            </a:r>
+          </a:p>
+        </p:txBody>
+      </p:sp>
+      <p:sp>
+        <p:nvSpPr>
+          <p:cNvPr id="23" name="Rounded Rectangle 22">
+            <a:hlinkClick r:id="rId41"/>
+          </p:cNvPr>
+          <p:cNvSpPr/>
+          <p:nvPr/>
+        </p:nvSpPr>
+        <p:spPr>
+          <a:xfrm>
+            <a:off x="365760" y="4632960"/>
+            <a:ext cx="2200046" cy="365760"/>
+          </a:xfrm>
+          <a:prstGeom prst="roundRect">
+            <a:avLst/>
+          </a:prstGeom>
+          <a:solidFill>
+            <a:srgbClr val="E8EEF7"/>
+          </a:solidFill>
+          <a:ln>
+            <a:solidFill>
+              <a:srgbClr val="1F3A5F"/>
+            </a:solidFill>
+          </a:ln>
+        </p:spPr>
+        <p:style>
+          <a:lnRef idx="1">
+            <a:schemeClr val="accent1"/>
+          </a:lnRef>
+          <a:fillRef idx="3">
+            <a:schemeClr val="accent1"/>
+          </a:fillRef>
+          <a:effectRef idx="2">
+            <a:schemeClr val="accent1"/>
+          </a:effectRef>
+          <a:fontRef idx="minor">
+            <a:schemeClr val="lt1"/>
+          </a:fontRef>
+        </p:style>
+        <p:txBody>
+          <a:bodyPr rtlCol="0" anchor="ctr" lIns="45720" rIns="45720"/>
+          <a:lstStyle/>
+          <a:p>
+            <a:pPr algn="ctr"/>
+            <a:r>
+              <a:rPr sz="900">
+                <a:solidFill>
+                  <a:srgbClr val="1F3A5F"/>
+                </a:solidFill>
+              </a:rPr>
+              <a:t>Gram 32: FR Outrider, Category 4, Risa</a:t>
+            </a:r>
+          </a:p>
+        </p:txBody>
+      </p:sp>
+      <p:sp>
+        <p:nvSpPr>
+          <p:cNvPr id="24" name="TextBox 23"/>
+          <p:cNvSpPr txBox="1"/>
+          <p:nvPr/>
+        </p:nvSpPr>
+        <p:spPr>
+          <a:xfrm>
+            <a:off x="365760" y="5017008"/>
+            <a:ext cx="2200046" cy="1447800"/>
+          </a:xfrm>
+          <a:prstGeom prst="rect">
+            <a:avLst/>
+          </a:prstGeom>
+          <a:noFill/>
+        </p:spPr>
+        <p:txBody>
+          <a:bodyPr wrap="square">
+            <a:spAutoFit/>
+          </a:bodyPr>
+          <a:lstStyle/>
+          <a:p>
+            <a:r>
+              <a:rPr sz="800">
+                <a:hlinkClick r:id="rId42"/>
+              </a:rPr>
+              <a:t>Lofar 1</a:t>
+            </a:r>
+          </a:p>
+          <a:p>
+            <a:r>
+              <a:rPr sz="800">
+                <a:hlinkClick r:id="rId43"/>
+              </a:rPr>
+              <a:t>Lofar 2</a:t>
+            </a:r>
+          </a:p>
+        </p:txBody>
+      </p:sp>
+      <p:sp>
+        <p:nvSpPr>
+          <p:cNvPr id="25" name="Rounded Rectangle 24">
+            <a:hlinkClick r:id="rId44"/>
+          </p:cNvPr>
+          <p:cNvSpPr/>
+          <p:nvPr/>
+        </p:nvSpPr>
+        <p:spPr>
+          <a:xfrm>
+            <a:off x="2657246" y="4632960"/>
+            <a:ext cx="2200046" cy="365760"/>
+          </a:xfrm>
+          <a:prstGeom prst="roundRect">
+            <a:avLst/>
+          </a:prstGeom>
+          <a:solidFill>
+            <a:srgbClr val="E8EEF7"/>
+          </a:solidFill>
+          <a:ln>
+            <a:solidFill>
+              <a:srgbClr val="1F3A5F"/>
+            </a:solidFill>
+          </a:ln>
+        </p:spPr>
+        <p:style>
+          <a:lnRef idx="1">
+            <a:schemeClr val="accent1"/>
+          </a:lnRef>
+          <a:fillRef idx="3">
+            <a:schemeClr val="accent1"/>
+          </a:fillRef>
+          <a:effectRef idx="2">
+            <a:schemeClr val="accent1"/>
+          </a:effectRef>
+          <a:fontRef idx="minor">
+            <a:schemeClr val="lt1"/>
+          </a:fontRef>
+        </p:style>
+        <p:txBody>
+          <a:bodyPr rtlCol="0" anchor="ctr" lIns="45720" rIns="45720"/>
+          <a:lstStyle/>
+          <a:p>
+            <a:pPr algn="ctr"/>
+            <a:r>
+              <a:rPr sz="900">
+                <a:solidFill>
+                  <a:srgbClr val="1F3A5F"/>
+                </a:solidFill>
+              </a:rPr>
+              <a:t>Gram 33: FR A-wing, Category 4, Defiant</a:t>
+            </a:r>
+          </a:p>
+        </p:txBody>
+      </p:sp>
+      <p:sp>
+        <p:nvSpPr>
+          <p:cNvPr id="26" name="TextBox 25"/>
+          <p:cNvSpPr txBox="1"/>
+          <p:nvPr/>
+        </p:nvSpPr>
+        <p:spPr>
+          <a:xfrm>
+            <a:off x="2657246" y="5017008"/>
+            <a:ext cx="2200046" cy="1447800"/>
+          </a:xfrm>
+          <a:prstGeom prst="rect">
+            <a:avLst/>
+          </a:prstGeom>
+          <a:noFill/>
+        </p:spPr>
+        <p:txBody>
+          <a:bodyPr wrap="square">
+            <a:spAutoFit/>
+          </a:bodyPr>
+          <a:lstStyle/>
+          <a:p>
+            <a:r>
+              <a:rPr sz="800">
+                <a:hlinkClick r:id="rId45"/>
+              </a:rPr>
+              <a:t>Lofar 1</a:t>
+            </a:r>
+          </a:p>
+        </p:txBody>
+      </p:sp>
+      <p:sp>
+        <p:nvSpPr>
+          <p:cNvPr id="27" name="Rounded Rectangle 26">
+            <a:hlinkClick r:id="rId46"/>
+          </p:cNvPr>
+          <p:cNvSpPr/>
+          <p:nvPr/>
+        </p:nvSpPr>
+        <p:spPr>
+          <a:xfrm>
+            <a:off x="4948732" y="4632960"/>
+            <a:ext cx="2200046" cy="365760"/>
+          </a:xfrm>
+          <a:prstGeom prst="roundRect">
+            <a:avLst/>
+          </a:prstGeom>
+          <a:solidFill>
+            <a:srgbClr val="E8EEF7"/>
+          </a:solidFill>
+          <a:ln>
+            <a:solidFill>
+              <a:srgbClr val="1F3A5F"/>
+            </a:solidFill>
+          </a:ln>
+        </p:spPr>
+        <p:style>
+          <a:lnRef idx="1">
+            <a:schemeClr val="accent1"/>
+          </a:lnRef>
+          <a:fillRef idx="3">
+            <a:schemeClr val="accent1"/>
+          </a:fillRef>
+          <a:effectRef idx="2">
+            <a:schemeClr val="accent1"/>
+          </a:effectRef>
+          <a:fontRef idx="minor">
+            <a:schemeClr val="lt1"/>
+          </a:fontRef>
+        </p:style>
+        <p:txBody>
+          <a:bodyPr rtlCol="0" anchor="ctr" lIns="45720" rIns="45720"/>
+          <a:lstStyle/>
+          <a:p>
+            <a:pPr algn="ctr"/>
+            <a:r>
+              <a:rPr sz="900">
+                <a:solidFill>
+                  <a:srgbClr val="1F3A5F"/>
+                </a:solidFill>
+              </a:rPr>
+              <a:t>Gram 35: Reliant contact bearing 251, codename Bespin</a:t>
+            </a:r>
+          </a:p>
+        </p:txBody>
+      </p:sp>
+      <p:sp>
+        <p:nvSpPr>
+          <p:cNvPr id="28" name="TextBox 27"/>
+          <p:cNvSpPr txBox="1"/>
+          <p:nvPr/>
+        </p:nvSpPr>
+        <p:spPr>
+          <a:xfrm>
+            <a:off x="4948732" y="5017008"/>
+            <a:ext cx="2200046" cy="1447800"/>
+          </a:xfrm>
+          <a:prstGeom prst="rect">
+            <a:avLst/>
+          </a:prstGeom>
+          <a:noFill/>
+        </p:spPr>
+        <p:txBody>
+          <a:bodyPr wrap="square">
+            <a:spAutoFit/>
+          </a:bodyPr>
+          <a:lstStyle/>
+          <a:p>
+            <a:r>
+              <a:rPr sz="800">
+                <a:hlinkClick r:id="rId47"/>
+              </a:rPr>
+              <a:t>Lofar 1</a:t>
+            </a:r>
+          </a:p>
+        </p:txBody>
+      </p:sp>
+      <p:sp>
+        <p:nvSpPr>
+          <p:cNvPr id="29" name="Rounded Rectangle 28">
+            <a:hlinkClick r:id="rId48"/>
+          </p:cNvPr>
+          <p:cNvSpPr/>
+          <p:nvPr/>
+        </p:nvSpPr>
+        <p:spPr>
+          <a:xfrm>
+            <a:off x="7240219" y="4632960"/>
+            <a:ext cx="2200046" cy="365760"/>
+          </a:xfrm>
+          <a:prstGeom prst="roundRect">
+            <a:avLst/>
+          </a:prstGeom>
+          <a:solidFill>
+            <a:srgbClr val="E8EEF7"/>
+          </a:solidFill>
+          <a:ln>
+            <a:solidFill>
+              <a:srgbClr val="1F3A5F"/>
+            </a:solidFill>
+          </a:ln>
+        </p:spPr>
+        <p:style>
+          <a:lnRef idx="1">
+            <a:schemeClr val="accent1"/>
+          </a:lnRef>
+          <a:fillRef idx="3">
+            <a:schemeClr val="accent1"/>
+          </a:fillRef>
+          <a:effectRef idx="2">
+            <a:schemeClr val="accent1"/>
+          </a:effectRef>
+          <a:fontRef idx="minor">
+            <a:schemeClr val="lt1"/>
+          </a:fontRef>
+        </p:style>
+        <p:txBody>
+          <a:bodyPr rtlCol="0" anchor="ctr" lIns="45720" rIns="45720"/>
+          <a:lstStyle/>
+          <a:p>
+            <a:pPr algn="ctr"/>
+            <a:r>
+              <a:rPr sz="900">
+                <a:solidFill>
+                  <a:srgbClr val="1F3A5F"/>
+                </a:solidFill>
+              </a:rPr>
+              <a:t>Gram 36: FR Sovereign-class, Category 2, Yavin</a:t>
+            </a:r>
+          </a:p>
+        </p:txBody>
+      </p:sp>
+      <p:sp>
+        <p:nvSpPr>
+          <p:cNvPr id="30" name="TextBox 29"/>
+          <p:cNvSpPr txBox="1"/>
+          <p:nvPr/>
+        </p:nvSpPr>
+        <p:spPr>
+          <a:xfrm>
+            <a:off x="7240219" y="5017008"/>
+            <a:ext cx="2200046" cy="1447800"/>
+          </a:xfrm>
+          <a:prstGeom prst="rect">
+            <a:avLst/>
+          </a:prstGeom>
+          <a:noFill/>
+        </p:spPr>
+        <p:txBody>
+          <a:bodyPr wrap="square">
+            <a:spAutoFit/>
+          </a:bodyPr>
+          <a:lstStyle/>
+          <a:p>
+            <a:r>
+              <a:rPr sz="800">
+                <a:hlinkClick r:id="rId49"/>
+              </a:rPr>
+              <a:t>Lofar 1</a:t>
+            </a:r>
+          </a:p>
+          <a:p>
+            <a:r>
+              <a:rPr sz="800">
+                <a:hlinkClick r:id="rId50"/>
+              </a:rPr>
+              <a:t>Lofar 2</a:t>
+            </a:r>
+          </a:p>
+          <a:p>
+            <a:r>
+              <a:rPr sz="800">
+                <a:hlinkClick r:id="rId51"/>
+              </a:rPr>
+              <a:t>Lofar 3</a:t>
+            </a:r>
+          </a:p>
+        </p:txBody>
+      </p:sp>
+      <p:sp>
+        <p:nvSpPr>
+          <p:cNvPr id="31" name="Rounded Rectangle 30">
+            <a:hlinkClick r:id="rId52"/>
+          </p:cNvPr>
+          <p:cNvSpPr/>
+          <p:nvPr/>
+        </p:nvSpPr>
+        <p:spPr>
+          <a:xfrm>
+            <a:off x="9531705" y="4632960"/>
+            <a:ext cx="2200046" cy="365760"/>
+          </a:xfrm>
+          <a:prstGeom prst="roundRect">
+            <a:avLst/>
+          </a:prstGeom>
+          <a:solidFill>
+            <a:srgbClr val="E8EEF7"/>
+          </a:solidFill>
+          <a:ln>
+            <a:solidFill>
+              <a:srgbClr val="1F3A5F"/>
+            </a:solidFill>
+          </a:ln>
+        </p:spPr>
+        <p:style>
+          <a:lnRef idx="1">
+            <a:schemeClr val="accent1"/>
+          </a:lnRef>
+          <a:fillRef idx="3">
+            <a:schemeClr val="accent1"/>
+          </a:fillRef>
+          <a:effectRef idx="2">
+            <a:schemeClr val="accent1"/>
+          </a:effectRef>
+          <a:fontRef idx="minor">
+            <a:schemeClr val="lt1"/>
+          </a:fontRef>
+        </p:style>
+        <p:txBody>
+          <a:bodyPr rtlCol="0" anchor="ctr" lIns="45720" rIns="45720"/>
+          <a:lstStyle/>
+          <a:p>
+            <a:pPr algn="ctr"/>
+            <a:r>
+              <a:rPr sz="900">
+                <a:solidFill>
+                  <a:srgbClr val="1F3A5F"/>
+                </a:solidFill>
+              </a:rPr>
+              <a:t>Gram 37: FR Akira-class, Category 4, Kobol</a:t>
+            </a:r>
+          </a:p>
+        </p:txBody>
+      </p:sp>
+      <p:sp>
+        <p:nvSpPr>
+          <p:cNvPr id="32" name="TextBox 31"/>
+          <p:cNvSpPr txBox="1"/>
+          <p:nvPr/>
+        </p:nvSpPr>
+        <p:spPr>
+          <a:xfrm>
+            <a:off x="9531705" y="5017008"/>
+            <a:ext cx="2200046" cy="1447800"/>
+          </a:xfrm>
+          <a:prstGeom prst="rect">
+            <a:avLst/>
+          </a:prstGeom>
+          <a:noFill/>
+        </p:spPr>
+        <p:txBody>
+          <a:bodyPr wrap="square">
+            <a:spAutoFit/>
+          </a:bodyPr>
+          <a:lstStyle/>
+          <a:p>
+            <a:r>
+              <a:rPr sz="800">
+                <a:hlinkClick r:id="rId53"/>
+              </a:rPr>
+              <a:t>Lofar 1</a:t>
+            </a:r>
+          </a:p>
+        </p:txBody>
+      </p:sp>
+    </p:spTree>
+  </p:cSld>
+  <p:clrMapOvr>
+    <a:masterClrMapping/>
+  </p:clrMapOvr>
+</p:sld>
+</file>
+
+<file path=ppt/slides/slide4.xml><?xml version="1.0" encoding="utf-8"?>
+<p:sld xmlns:a="http://schemas.openxmlformats.org/drawingml/2006/main" xmlns:p="http://schemas.openxmlformats.org/presentationml/2006/main" xmlns:r="http://schemas.openxmlformats.org/officeDocument/2006/relationships">
+  <p:cSld>
+    <p:spTree>
+      <p:nvGrpSpPr>
+        <p:cNvPr id="1" name=""/>
+        <p:cNvGrpSpPr/>
+        <p:nvPr/>
+      </p:nvGrpSpPr>
+      <p:grpSpPr/>
+      <p:sp>
+        <p:nvSpPr>
+          <p:cNvPr id="2" name="Rectangle 1"/>
+          <p:cNvSpPr/>
+          <p:nvPr/>
+        </p:nvSpPr>
+        <p:spPr>
+          <a:xfrm>
+            <a:off x="0" y="0"/>
+            <a:ext cx="12188952" cy="548640"/>
+          </a:xfrm>
+          <a:prstGeom prst="rect">
+            <a:avLst/>
+          </a:prstGeom>
+          <a:solidFill>
+            <a:srgbClr val="1F3A5F"/>
+          </a:solidFill>
+          <a:ln>
+            <a:noFill/>
+          </a:ln>
+        </p:spPr>
+        <p:style>
+          <a:lnRef idx="1">
+            <a:schemeClr val="accent1"/>
+          </a:lnRef>
+          <a:fillRef idx="3">
+            <a:schemeClr val="accent1"/>
+          </a:fillRef>
+          <a:effectRef idx="2">
+            <a:schemeClr val="accent1"/>
+          </a:effectRef>
+          <a:fontRef idx="minor">
+            <a:schemeClr val="lt1"/>
+          </a:fontRef>
+        </p:style>
+        <p:txBody>
+          <a:bodyPr rtlCol="0" anchor="ctr" lIns="182880" rIns="182880"/>
+          <a:lstStyle/>
+          <a:p>
+            <a:pPr algn="ctr"/>
+            <a:r>
+              <a:rPr sz="2000" b="1">
+                <a:solidFill>
+                  <a:srgbClr val="FFFFFF"/>
+                </a:solidFill>
+              </a:rPr>
+              <a:t>Instructor Week 1 Grams — Page 3 of 3</a:t>
+            </a:r>
+          </a:p>
+        </p:txBody>
+      </p:sp>
+      <p:sp>
+        <p:nvSpPr>
+          <p:cNvPr id="3" name="Rounded Rectangle 2">
+            <a:hlinkClick r:id="rId2"/>
+          </p:cNvPr>
+          <p:cNvSpPr/>
+          <p:nvPr/>
+        </p:nvSpPr>
+        <p:spPr>
+          <a:xfrm>
+            <a:off x="365760" y="731520"/>
+            <a:ext cx="2200046" cy="365760"/>
+          </a:xfrm>
+          <a:prstGeom prst="roundRect">
+            <a:avLst/>
+          </a:prstGeom>
+          <a:solidFill>
+            <a:srgbClr val="E8EEF7"/>
+          </a:solidFill>
+          <a:ln>
+            <a:solidFill>
+              <a:srgbClr val="1F3A5F"/>
+            </a:solidFill>
+          </a:ln>
+        </p:spPr>
+        <p:style>
+          <a:lnRef idx="1">
+            <a:schemeClr val="accent1"/>
+          </a:lnRef>
+          <a:fillRef idx="3">
+            <a:schemeClr val="accent1"/>
+          </a:fillRef>
+          <a:effectRef idx="2">
+            <a:schemeClr val="accent1"/>
+          </a:effectRef>
+          <a:fontRef idx="minor">
+            <a:schemeClr val="lt1"/>
+          </a:fontRef>
+        </p:style>
+        <p:txBody>
+          <a:bodyPr rtlCol="0" anchor="ctr" lIns="45720" rIns="45720"/>
+          <a:lstStyle/>
+          <a:p>
+            <a:pPr algn="ctr"/>
+            <a:r>
+              <a:rPr sz="900">
+                <a:solidFill>
+                  <a:srgbClr val="1F3A5F"/>
+                </a:solidFill>
+              </a:rPr>
+              <a:t>Gram 38: FR Razor Crest, Category 3, Dank</a:t>
+            </a:r>
+          </a:p>
+        </p:txBody>
+      </p:sp>
+      <p:sp>
+        <p:nvSpPr>
+          <p:cNvPr id="4" name="TextBox 3"/>
+          <p:cNvSpPr txBox="1"/>
+          <p:nvPr/>
+        </p:nvSpPr>
+        <p:spPr>
+          <a:xfrm>
+            <a:off x="365760" y="1115568"/>
+            <a:ext cx="2200046" cy="1447800"/>
+          </a:xfrm>
+          <a:prstGeom prst="rect">
+            <a:avLst/>
+          </a:prstGeom>
+          <a:noFill/>
+        </p:spPr>
+        <p:txBody>
+          <a:bodyPr wrap="square">
+            <a:spAutoFit/>
+          </a:bodyPr>
+          <a:lstStyle/>
+          <a:p>
+            <a:r>
+              <a:rPr sz="800">
+                <a:hlinkClick r:id="rId3"/>
+              </a:rPr>
+              <a:t>Lofar 1</a:t>
+            </a:r>
+          </a:p>
+          <a:p>
+            <a:r>
+              <a:rPr sz="800">
+                <a:hlinkClick r:id="rId4"/>
+              </a:rPr>
+              <a:t>Lofar 2</a:t>
+            </a:r>
+          </a:p>
+          <a:p>
+            <a:r>
+              <a:rPr sz="800">
+                <a:hlinkClick r:id="rId5"/>
+              </a:rPr>
+              <a:t>Lofar 3</a:t>
+            </a:r>
+          </a:p>
+          <a:p>
+            <a:r>
+              <a:rPr sz="800">
+                <a:hlinkClick r:id="rId6"/>
+              </a:rPr>
+              <a:t>Lofar 4</a:t>
+            </a:r>
+          </a:p>
+        </p:txBody>
+      </p:sp>
+      <p:sp>
+        <p:nvSpPr>
+          <p:cNvPr id="5" name="Rounded Rectangle 4">
+            <a:hlinkClick r:id="rId7"/>
+          </p:cNvPr>
+          <p:cNvSpPr/>
+          <p:nvPr/>
+        </p:nvSpPr>
+        <p:spPr>
+          <a:xfrm>
+            <a:off x="2657246" y="731520"/>
+            <a:ext cx="2200046" cy="365760"/>
+          </a:xfrm>
+          <a:prstGeom prst="roundRect">
+            <a:avLst/>
+          </a:prstGeom>
+          <a:solidFill>
+            <a:srgbClr val="E8EEF7"/>
+          </a:solidFill>
+          <a:ln>
+            <a:solidFill>
+              <a:srgbClr val="1F3A5F"/>
+            </a:solidFill>
+          </a:ln>
+        </p:spPr>
+        <p:style>
+          <a:lnRef idx="1">
+            <a:schemeClr val="accent1"/>
+          </a:lnRef>
+          <a:fillRef idx="3">
+            <a:schemeClr val="accent1"/>
+          </a:fillRef>
+          <a:effectRef idx="2">
+            <a:schemeClr val="accent1"/>
+          </a:effectRef>
+          <a:fontRef idx="minor">
+            <a:schemeClr val="lt1"/>
+          </a:fontRef>
+        </p:style>
+        <p:txBody>
+          <a:bodyPr rtlCol="0" anchor="ctr" lIns="45720" rIns="45720"/>
+          <a:lstStyle/>
+          <a:p>
+            <a:pPr algn="ctr"/>
+            <a:r>
+              <a:rPr sz="900">
+                <a:solidFill>
+                  <a:srgbClr val="1F3A5F"/>
+                </a:solidFill>
+              </a:rPr>
+              <a:t>Gram 39: FR Slave I, Category 3, Kronos</a:t>
+            </a:r>
+          </a:p>
+        </p:txBody>
+      </p:sp>
+      <p:sp>
+        <p:nvSpPr>
+          <p:cNvPr id="6" name="TextBox 5"/>
+          <p:cNvSpPr txBox="1"/>
+          <p:nvPr/>
+        </p:nvSpPr>
+        <p:spPr>
+          <a:xfrm>
+            <a:off x="2657246" y="1115568"/>
+            <a:ext cx="2200046" cy="1447800"/>
+          </a:xfrm>
+          <a:prstGeom prst="rect">
+            <a:avLst/>
+          </a:prstGeom>
+          <a:noFill/>
+        </p:spPr>
+        <p:txBody>
+          <a:bodyPr wrap="square">
+            <a:spAutoFit/>
+          </a:bodyPr>
+          <a:lstStyle/>
+          <a:p>
+            <a:r>
+              <a:rPr sz="800">
+                <a:hlinkClick r:id="rId8"/>
+              </a:rPr>
+              <a:t>Lofar 1</a:t>
+            </a:r>
+          </a:p>
+        </p:txBody>
+      </p:sp>
+      <p:sp>
+        <p:nvSpPr>
+          <p:cNvPr id="7" name="Rounded Rectangle 6">
+            <a:hlinkClick r:id="rId9"/>
+          </p:cNvPr>
+          <p:cNvSpPr/>
+          <p:nvPr/>
+        </p:nvSpPr>
+        <p:spPr>
+          <a:xfrm>
+            <a:off x="4948732" y="731520"/>
+            <a:ext cx="2200046" cy="365760"/>
+          </a:xfrm>
+          <a:prstGeom prst="roundRect">
+            <a:avLst/>
+          </a:prstGeom>
+          <a:solidFill>
+            <a:srgbClr val="E8EEF7"/>
+          </a:solidFill>
+          <a:ln>
+            <a:solidFill>
+              <a:srgbClr val="1F3A5F"/>
+            </a:solidFill>
+          </a:ln>
+        </p:spPr>
+        <p:style>
+          <a:lnRef idx="1">
+            <a:schemeClr val="accent1"/>
+          </a:lnRef>
+          <a:fillRef idx="3">
+            <a:schemeClr val="accent1"/>
+          </a:fillRef>
+          <a:effectRef idx="2">
+            <a:schemeClr val="accent1"/>
+          </a:effectRef>
+          <a:fontRef idx="minor">
+            <a:schemeClr val="lt1"/>
+          </a:fontRef>
+        </p:style>
+        <p:txBody>
+          <a:bodyPr rtlCol="0" anchor="ctr" lIns="45720" rIns="45720"/>
+          <a:lstStyle/>
+          <a:p>
+            <a:pPr algn="ctr"/>
+            <a:r>
+              <a:rPr sz="900">
+                <a:solidFill>
+                  <a:srgbClr val="1F3A5F"/>
+                </a:solidFill>
+              </a:rPr>
+              <a:t>Gram 40: FR Razor Crest, Category 3, Dank</a:t>
+            </a:r>
+          </a:p>
+        </p:txBody>
+      </p:sp>
+      <p:sp>
+        <p:nvSpPr>
+          <p:cNvPr id="8" name="TextBox 7"/>
+          <p:cNvSpPr txBox="1"/>
+          <p:nvPr/>
+        </p:nvSpPr>
+        <p:spPr>
+          <a:xfrm>
+            <a:off x="4948732" y="1115568"/>
+            <a:ext cx="2200046" cy="1447800"/>
+          </a:xfrm>
+          <a:prstGeom prst="rect">
+            <a:avLst/>
+          </a:prstGeom>
+          <a:noFill/>
+        </p:spPr>
+        <p:txBody>
+          <a:bodyPr wrap="square">
+            <a:spAutoFit/>
+          </a:bodyPr>
+          <a:lstStyle/>
+          <a:p>
+            <a:r>
+              <a:rPr sz="800">
+                <a:hlinkClick r:id="rId10"/>
+              </a:rPr>
+              <a:t>Lofar 1</a:t>
+            </a:r>
+          </a:p>
+          <a:p>
+            <a:r>
+              <a:rPr sz="800">
+                <a:hlinkClick r:id="rId11"/>
+              </a:rPr>
+              <a:t>Lofar 2</a:t>
+            </a:r>
+          </a:p>
+          <a:p>
+            <a:r>
+              <a:rPr sz="800">
+                <a:hlinkClick r:id="rId12"/>
+              </a:rPr>
+              <a:t>Lofar 3</a:t>
+            </a:r>
+          </a:p>
+          <a:p>
+            <a:r>
+              <a:rPr sz="800">
+                <a:hlinkClick r:id="rId13"/>
+              </a:rPr>
+              <a:t>Lofar 4</a:t>
+            </a:r>
+          </a:p>
+        </p:txBody>
+      </p:sp>
+      <p:sp>
+        <p:nvSpPr>
+          <p:cNvPr id="9" name="Rounded Rectangle 8">
+            <a:hlinkClick r:id="rId14"/>
+          </p:cNvPr>
+          <p:cNvSpPr/>
+          <p:nvPr/>
+        </p:nvSpPr>
+        <p:spPr>
+          <a:xfrm>
+            <a:off x="7240219" y="731520"/>
+            <a:ext cx="2200046" cy="365760"/>
+          </a:xfrm>
+          <a:prstGeom prst="roundRect">
+            <a:avLst/>
+          </a:prstGeom>
+          <a:solidFill>
+            <a:srgbClr val="E8EEF7"/>
+          </a:solidFill>
+          <a:ln>
+            <a:solidFill>
+              <a:srgbClr val="1F3A5F"/>
+            </a:solidFill>
+          </a:ln>
+        </p:spPr>
+        <p:style>
+          <a:lnRef idx="1">
+            <a:schemeClr val="accent1"/>
+          </a:lnRef>
+          <a:fillRef idx="3">
+            <a:schemeClr val="accent1"/>
+          </a:fillRef>
+          <a:effectRef idx="2">
+            <a:schemeClr val="accent1"/>
+          </a:effectRef>
+          <a:fontRef idx="minor">
+            <a:schemeClr val="lt1"/>
+          </a:fontRef>
+        </p:style>
+        <p:txBody>
+          <a:bodyPr rtlCol="0" anchor="ctr" lIns="45720" rIns="45720"/>
+          <a:lstStyle/>
+          <a:p>
+            <a:pPr algn="ctr"/>
+            <a:r>
+              <a:rPr sz="900">
+                <a:solidFill>
+                  <a:srgbClr val="1F3A5F"/>
+                </a:solidFill>
+              </a:rPr>
+              <a:t>Gram 41: Ghost contact bearing 208, codename Betazed</a:t>
+            </a:r>
+          </a:p>
+        </p:txBody>
+      </p:sp>
+      <p:sp>
+        <p:nvSpPr>
+          <p:cNvPr id="10" name="TextBox 9"/>
+          <p:cNvSpPr txBox="1"/>
+          <p:nvPr/>
+        </p:nvSpPr>
+        <p:spPr>
+          <a:xfrm>
+            <a:off x="7240219" y="1115568"/>
+            <a:ext cx="2200046" cy="1447800"/>
+          </a:xfrm>
+          <a:prstGeom prst="rect">
+            <a:avLst/>
+          </a:prstGeom>
+          <a:noFill/>
+        </p:spPr>
+        <p:txBody>
+          <a:bodyPr wrap="square">
+            <a:spAutoFit/>
+          </a:bodyPr>
+          <a:lstStyle/>
+          <a:p>
+            <a:r>
+              <a:rPr sz="800">
+                <a:hlinkClick r:id="rId15"/>
+              </a:rPr>
+              <a:t>Lofar 1</a:t>
+            </a:r>
+          </a:p>
+          <a:p>
+            <a:r>
+              <a:rPr sz="800">
+                <a:hlinkClick r:id="rId16"/>
+              </a:rPr>
+              <a:t>Lofar 2</a:t>
+            </a:r>
+          </a:p>
+          <a:p>
+            <a:r>
+              <a:rPr sz="800">
+                <a:hlinkClick r:id="rId17"/>
+              </a:rPr>
+              <a:t>Lofar 3</a:t>
+            </a:r>
+          </a:p>
+          <a:p>
+            <a:r>
+              <a:rPr sz="800">
+                <a:hlinkClick r:id="rId18"/>
+              </a:rPr>
+              <a:t>Lofar 4</a:t>
+            </a:r>
+          </a:p>
+        </p:txBody>
+      </p:sp>
+      <p:sp>
+        <p:nvSpPr>
+          <p:cNvPr id="11" name="Rounded Rectangle 10">
+            <a:hlinkClick r:id="rId19"/>
+          </p:cNvPr>
+          <p:cNvSpPr/>
+          <p:nvPr/>
+        </p:nvSpPr>
+        <p:spPr>
+          <a:xfrm>
+            <a:off x="9531705" y="731520"/>
+            <a:ext cx="2200046" cy="365760"/>
+          </a:xfrm>
+          <a:prstGeom prst="roundRect">
+            <a:avLst/>
+          </a:prstGeom>
+          <a:solidFill>
+            <a:srgbClr val="E8EEF7"/>
+          </a:solidFill>
+          <a:ln>
+            <a:solidFill>
+              <a:srgbClr val="1F3A5F"/>
+            </a:solidFill>
+          </a:ln>
+        </p:spPr>
+        <p:style>
+          <a:lnRef idx="1">
+            <a:schemeClr val="accent1"/>
+          </a:lnRef>
+          <a:fillRef idx="3">
+            <a:schemeClr val="accent1"/>
+          </a:fillRef>
+          <a:effectRef idx="2">
+            <a:schemeClr val="accent1"/>
+          </a:effectRef>
+          <a:fontRef idx="minor">
+            <a:schemeClr val="lt1"/>
+          </a:fontRef>
+        </p:style>
+        <p:txBody>
+          <a:bodyPr rtlCol="0" anchor="ctr" lIns="45720" rIns="45720"/>
+          <a:lstStyle/>
+          <a:p>
+            <a:pPr algn="ctr"/>
+            <a:r>
+              <a:rPr sz="900">
+                <a:solidFill>
+                  <a:srgbClr val="1F3A5F"/>
+                </a:solidFill>
+              </a:rPr>
+              <a:t>Gram 42: FR Acclamator-class, Category 2, Trill</a:t>
+            </a:r>
+          </a:p>
+        </p:txBody>
+      </p:sp>
+      <p:sp>
+        <p:nvSpPr>
+          <p:cNvPr id="12" name="TextBox 11"/>
+          <p:cNvSpPr txBox="1"/>
+          <p:nvPr/>
+        </p:nvSpPr>
+        <p:spPr>
+          <a:xfrm>
+            <a:off x="9531705" y="1115568"/>
+            <a:ext cx="2200046" cy="1447800"/>
+          </a:xfrm>
+          <a:prstGeom prst="rect">
+            <a:avLst/>
+          </a:prstGeom>
+          <a:noFill/>
+        </p:spPr>
+        <p:txBody>
+          <a:bodyPr wrap="square">
+            <a:spAutoFit/>
+          </a:bodyPr>
+          <a:lstStyle/>
+          <a:p>
+            <a:r>
+              <a:rPr sz="800">
+                <a:hlinkClick r:id="rId20"/>
+              </a:rPr>
+              <a:t>Lofar 1</a:t>
+            </a:r>
+          </a:p>
+          <a:p>
+            <a:r>
+              <a:rPr sz="800">
                 <a:hlinkClick r:id="rId21"/>
               </a:rPr>
               <a:t>Lofar 2</a:t>
@@ -6717,6 +6805,92 @@
                 <a:hlinkClick r:id="rId22"/>
               </a:rPr>
               <a:t>Lofar 3</a:t>
+            </a:r>
+          </a:p>
+        </p:txBody>
+      </p:sp>
+    </p:spTree>
+  </p:cSld>
+  <p:clrMapOvr>
+    <a:masterClrMapping/>
+  </p:clrMapOvr>
+</p:sld>
+</file>
+
+<file path=ppt/slides/slide5.xml><?xml version="1.0" encoding="utf-8"?>
+<p:sld xmlns:a="http://schemas.openxmlformats.org/drawingml/2006/main" xmlns:p="http://schemas.openxmlformats.org/presentationml/2006/main" xmlns:r="http://schemas.openxmlformats.org/officeDocument/2006/relationships">
+  <p:cSld>
+    <p:spTree>
+      <p:nvGrpSpPr>
+        <p:cNvPr id="1" name=""/>
+        <p:cNvGrpSpPr/>
+        <p:nvPr/>
+      </p:nvGrpSpPr>
+      <p:grpSpPr/>
+      <p:sp>
+        <p:nvSpPr>
+          <p:cNvPr id="2" name="TextBox 1"/>
+          <p:cNvSpPr txBox="1"/>
+          <p:nvPr/>
+        </p:nvSpPr>
+        <p:spPr>
+          <a:xfrm>
+            <a:off x="914400" y="2377440"/>
+            <a:ext cx="10360152" cy="1280160"/>
+          </a:xfrm>
+          <a:prstGeom prst="rect">
+            <a:avLst/>
+          </a:prstGeom>
+          <a:noFill/>
+        </p:spPr>
+        <p:txBody>
+          <a:bodyPr wrap="square">
+            <a:spAutoFit/>
+          </a:bodyPr>
+          <a:lstStyle/>
+          <a:p>
+            <a:pPr algn="ctr"/>
+            <a:r>
+              <a:rPr sz="4000" b="1">
+                <a:solidFill>
+                  <a:srgbClr val="1F3A5F"/>
+                </a:solidFill>
+              </a:rPr>
+              <a:t>End of Instructor Week 1 Grams</a:t>
+            </a:r>
+          </a:p>
+        </p:txBody>
+      </p:sp>
+      <p:sp>
+        <p:nvSpPr>
+          <p:cNvPr id="3" name="TextBox 2"/>
+          <p:cNvSpPr txBox="1"/>
+          <p:nvPr/>
+        </p:nvSpPr>
+        <p:spPr>
+          <a:xfrm>
+            <a:off x="914400" y="3840480"/>
+            <a:ext cx="10360152" cy="731520"/>
+          </a:xfrm>
+          <a:prstGeom prst="rect">
+            <a:avLst/>
+          </a:prstGeom>
+          <a:noFill/>
+        </p:spPr>
+        <p:txBody>
+          <a:bodyPr wrap="none">
+            <a:spAutoFit/>
+          </a:bodyPr>
+          <a:lstStyle/>
+          <a:p>
+            <a:pPr algn="ctr"/>
+            <a:r>
+              <a:rPr sz="2400">
+                <a:solidFill>
+                  <a:srgbClr val="1F3A5F"/>
+                </a:solidFill>
+              </a:rPr>
+              <a:t>Instructor Version</a:t>
             </a:r>
           </a:p>
         </p:txBody>

--- a/source/Instructor Week 1 Grams/Instructor Week 1 Grams.pptx
+++ b/source/Instructor Week 1 Grams/Instructor Week 1 Grams.pptx
@@ -3279,7 +3279,7 @@
                   <a:srgbClr val="1F3A5F"/>
                 </a:solidFill>
               </a:rPr>
-              <a:t>Gram 1: FR Razor Crest, Category 3, Mustafar</a:t>
+              <a:t>Gram 3: FR Constitution-class, Category 2, Endor</a:t>
             </a:r>
           </a:p>
         </p:txBody>
@@ -3313,12 +3313,20 @@
               <a:t>Lofar 1</a:t>
             </a:r>
           </a:p>
+          <a:p>
+            <a:r>
+              <a:rPr sz="800">
+                <a:hlinkClick r:id="rId4"/>
+              </a:rPr>
+              <a:t>Lofar 2</a:t>
+            </a:r>
+          </a:p>
         </p:txBody>
       </p:sp>
       <p:sp>
         <p:nvSpPr>
           <p:cNvPr id="5" name="Rounded Rectangle 4">
-            <a:hlinkClick r:id="rId4"/>
+            <a:hlinkClick r:id="rId5"/>
           </p:cNvPr>
           <p:cNvSpPr/>
           <p:nvPr/>
@@ -3365,7 +3373,7 @@
                   <a:srgbClr val="1F3A5F"/>
                 </a:solidFill>
               </a:rPr>
-              <a:t>Gram 2: FR Tantive IV, Category 1, Romulus</a:t>
+              <a:t>Gram 7: FR Defiant, Category 1, Vulcan</a:t>
             </a:r>
           </a:p>
         </p:txBody>
@@ -3394,41 +3402,17 @@
           <a:p>
             <a:r>
               <a:rPr sz="800">
-                <a:hlinkClick r:id="rId5"/>
+                <a:hlinkClick r:id="rId6"/>
               </a:rPr>
               <a:t>Lofar 1</a:t>
             </a:r>
           </a:p>
-          <a:p>
-            <a:r>
-              <a:rPr sz="800">
-                <a:hlinkClick r:id="rId6"/>
-              </a:rPr>
-              <a:t>Lofar 2</a:t>
-            </a:r>
-          </a:p>
-          <a:p>
-            <a:r>
-              <a:rPr sz="800">
-                <a:hlinkClick r:id="rId7"/>
-              </a:rPr>
-              <a:t>Lofar 3</a:t>
-            </a:r>
-          </a:p>
-          <a:p>
-            <a:r>
-              <a:rPr sz="800">
-                <a:hlinkClick r:id="rId8"/>
-              </a:rPr>
-              <a:t>Lofar 4</a:t>
-            </a:r>
-          </a:p>
         </p:txBody>
       </p:sp>
       <p:sp>
         <p:nvSpPr>
           <p:cNvPr id="7" name="Rounded Rectangle 6">
-            <a:hlinkClick r:id="rId9"/>
+            <a:hlinkClick r:id="rId7"/>
           </p:cNvPr>
           <p:cNvSpPr/>
           <p:nvPr/>
@@ -3475,7 +3459,7 @@
                   <a:srgbClr val="1F3A5F"/>
                 </a:solidFill>
               </a:rPr>
-              <a:t>Gram 3: FR Sovereign-class, Category 4, Defiant</a:t>
+              <a:t>Gram 11: FR Voyager, Category 3, Risa</a:t>
             </a:r>
           </a:p>
         </p:txBody>
@@ -3504,9 +3488,25 @@
           <a:p>
             <a:r>
               <a:rPr sz="800">
+                <a:hlinkClick r:id="rId8"/>
+              </a:rPr>
+              <a:t>Lofar 1</a:t>
+            </a:r>
+          </a:p>
+          <a:p>
+            <a:r>
+              <a:rPr sz="800">
+                <a:hlinkClick r:id="rId9"/>
+              </a:rPr>
+              <a:t>Lofar 2</a:t>
+            </a:r>
+          </a:p>
+          <a:p>
+            <a:r>
+              <a:rPr sz="800">
                 <a:hlinkClick r:id="rId10"/>
               </a:rPr>
-              <a:t>Lofar 1</a:t>
+              <a:t>Lofar 3</a:t>
             </a:r>
           </a:p>
         </p:txBody>
@@ -3561,7 +3561,7 @@
                   <a:srgbClr val="1F3A5F"/>
                 </a:solidFill>
               </a:rPr>
-              <a:t>Gram 4: FR Cerritos, Category 3, Coruscant</a:t>
+              <a:t>Gram 1: FR Razor Crest, Category 3, Mustafar</a:t>
             </a:r>
           </a:p>
         </p:txBody>
@@ -3595,20 +3595,12 @@
               <a:t>Lofar 1</a:t>
             </a:r>
           </a:p>
-          <a:p>
-            <a:r>
-              <a:rPr sz="800">
-                <a:hlinkClick r:id="rId13"/>
-              </a:rPr>
-              <a:t>Lofar 2</a:t>
-            </a:r>
-          </a:p>
         </p:txBody>
       </p:sp>
       <p:sp>
         <p:nvSpPr>
           <p:cNvPr id="11" name="Rounded Rectangle 10">
-            <a:hlinkClick r:id="rId14"/>
+            <a:hlinkClick r:id="rId13"/>
           </p:cNvPr>
           <p:cNvSpPr/>
           <p:nvPr/>
@@ -3655,7 +3647,7 @@
                   <a:srgbClr val="1F3A5F"/>
                 </a:solidFill>
               </a:rPr>
-              <a:t>Gram 5: FR Y-wing, Category 3, Gandalf</a:t>
+              <a:t>Gram 2: FR Tantive IV, Category 1, Romulus</a:t>
             </a:r>
           </a:p>
         </p:txBody>
@@ -3684,9 +3676,33 @@
           <a:p>
             <a:r>
               <a:rPr sz="800">
+                <a:hlinkClick r:id="rId14"/>
+              </a:rPr>
+              <a:t>Lofar 1</a:t>
+            </a:r>
+          </a:p>
+          <a:p>
+            <a:r>
+              <a:rPr sz="800">
                 <a:hlinkClick r:id="rId15"/>
               </a:rPr>
-              <a:t>Lofar 1</a:t>
+              <a:t>Lofar 2</a:t>
+            </a:r>
+          </a:p>
+          <a:p>
+            <a:r>
+              <a:rPr sz="800">
+                <a:hlinkClick r:id="rId16"/>
+              </a:rPr>
+              <a:t>Lofar 3</a:t>
+            </a:r>
+          </a:p>
+          <a:p>
+            <a:r>
+              <a:rPr sz="800">
+                <a:hlinkClick r:id="rId17"/>
+              </a:rPr>
+              <a:t>Lofar 4</a:t>
             </a:r>
           </a:p>
         </p:txBody>
@@ -3694,7 +3710,7 @@
       <p:sp>
         <p:nvSpPr>
           <p:cNvPr id="13" name="Rounded Rectangle 12">
-            <a:hlinkClick r:id="rId16"/>
+            <a:hlinkClick r:id="rId18"/>
           </p:cNvPr>
           <p:cNvSpPr/>
           <p:nvPr/>
@@ -3741,7 +3757,7 @@
                   <a:srgbClr val="1F3A5F"/>
                 </a:solidFill>
               </a:rPr>
-              <a:t>Gram 6: FR Constitution-class, Category 2, Cardassia</a:t>
+              <a:t>Gram 4: FR Cerritos, Category 3, Coruscant</a:t>
             </a:r>
           </a:p>
         </p:txBody>
@@ -3770,7 +3786,7 @@
           <a:p>
             <a:r>
               <a:rPr sz="800">
-                <a:hlinkClick r:id="rId17"/>
+                <a:hlinkClick r:id="rId19"/>
               </a:rPr>
               <a:t>Lofar 1</a:t>
             </a:r>
@@ -3778,25 +3794,17 @@
           <a:p>
             <a:r>
               <a:rPr sz="800">
-                <a:hlinkClick r:id="rId18"/>
+                <a:hlinkClick r:id="rId20"/>
               </a:rPr>
               <a:t>Lofar 2</a:t>
             </a:r>
           </a:p>
-          <a:p>
-            <a:r>
-              <a:rPr sz="800">
-                <a:hlinkClick r:id="rId19"/>
-              </a:rPr>
-              <a:t>Lofar 3</a:t>
-            </a:r>
-          </a:p>
         </p:txBody>
       </p:sp>
       <p:sp>
         <p:nvSpPr>
           <p:cNvPr id="15" name="Rounded Rectangle 14">
-            <a:hlinkClick r:id="rId20"/>
+            <a:hlinkClick r:id="rId21"/>
           </p:cNvPr>
           <p:cNvSpPr/>
           <p:nvPr/>
@@ -3843,7 +3851,7 @@
                   <a:srgbClr val="1F3A5F"/>
                 </a:solidFill>
               </a:rPr>
-              <a:t>Gram 7: Lambda Shuttle contact bearing 152, codename Tatooine</a:t>
+              <a:t>Gram 5: FR Y-wing, Category 3, Gandalf</a:t>
             </a:r>
           </a:p>
         </p:txBody>
@@ -3872,7 +3880,7 @@
           <a:p>
             <a:r>
               <a:rPr sz="800">
-                <a:hlinkClick r:id="rId21"/>
+                <a:hlinkClick r:id="rId22"/>
               </a:rPr>
               <a:t>Lofar 1</a:t>
             </a:r>
@@ -3882,7 +3890,7 @@
       <p:sp>
         <p:nvSpPr>
           <p:cNvPr id="17" name="Rounded Rectangle 16">
-            <a:hlinkClick r:id="rId22"/>
+            <a:hlinkClick r:id="rId23"/>
           </p:cNvPr>
           <p:cNvSpPr/>
           <p:nvPr/>
@@ -3929,7 +3937,7 @@
                   <a:srgbClr val="1F3A5F"/>
                 </a:solidFill>
               </a:rPr>
-              <a:t>Gram 8: FR Y-wing, Category 1, Betazed</a:t>
+              <a:t>Gram 6: FR Constitution-class, Category 2, Cardassia</a:t>
             </a:r>
           </a:p>
         </p:txBody>
@@ -3958,17 +3966,33 @@
           <a:p>
             <a:r>
               <a:rPr sz="800">
-                <a:hlinkClick r:id="rId23"/>
+                <a:hlinkClick r:id="rId24"/>
               </a:rPr>
               <a:t>Lofar 1</a:t>
             </a:r>
           </a:p>
+          <a:p>
+            <a:r>
+              <a:rPr sz="800">
+                <a:hlinkClick r:id="rId25"/>
+              </a:rPr>
+              <a:t>Lofar 2</a:t>
+            </a:r>
+          </a:p>
+          <a:p>
+            <a:r>
+              <a:rPr sz="800">
+                <a:hlinkClick r:id="rId26"/>
+              </a:rPr>
+              <a:t>Lofar 3</a:t>
+            </a:r>
+          </a:p>
         </p:txBody>
       </p:sp>
       <p:sp>
         <p:nvSpPr>
           <p:cNvPr id="19" name="Rounded Rectangle 18">
-            <a:hlinkClick r:id="rId24"/>
+            <a:hlinkClick r:id="rId27"/>
           </p:cNvPr>
           <p:cNvSpPr/>
           <p:nvPr/>
@@ -4015,7 +4039,7 @@
                   <a:srgbClr val="1F3A5F"/>
                 </a:solidFill>
               </a:rPr>
-              <a:t>Gram 9: FR Venator-class, Category 4, Kobol</a:t>
+              <a:t>Gram 8: FR Y-wing, Category 1, Betazed</a:t>
             </a:r>
           </a:p>
         </p:txBody>
@@ -4044,33 +4068,9 @@
           <a:p>
             <a:r>
               <a:rPr sz="800">
-                <a:hlinkClick r:id="rId25"/>
+                <a:hlinkClick r:id="rId28"/>
               </a:rPr>
               <a:t>Lofar 1</a:t>
-            </a:r>
-          </a:p>
-          <a:p>
-            <a:r>
-              <a:rPr sz="800">
-                <a:hlinkClick r:id="rId26"/>
-              </a:rPr>
-              <a:t>Lofar 2</a:t>
-            </a:r>
-          </a:p>
-          <a:p>
-            <a:r>
-              <a:rPr sz="800">
-                <a:hlinkClick r:id="rId27"/>
-              </a:rPr>
-              <a:t>Lofar 3</a:t>
-            </a:r>
-          </a:p>
-          <a:p>
-            <a:r>
-              <a:rPr sz="800">
-                <a:hlinkClick r:id="rId28"/>
-              </a:rPr>
-              <a:t>Lofar 4</a:t>
             </a:r>
           </a:p>
         </p:txBody>
@@ -4125,7 +4125,7 @@
                   <a:srgbClr val="1F3A5F"/>
                 </a:solidFill>
               </a:rPr>
-              <a:t>Gram 11: FR Sovereign-class, Category 4, Bespin</a:t>
+              <a:t>Gram 9: FR Venator-class, Category 4, Kobol</a:t>
             </a:r>
           </a:p>
         </p:txBody>
@@ -4159,12 +4159,36 @@
               <a:t>Lofar 1</a:t>
             </a:r>
           </a:p>
+          <a:p>
+            <a:r>
+              <a:rPr sz="800">
+                <a:hlinkClick r:id="rId31"/>
+              </a:rPr>
+              <a:t>Lofar 2</a:t>
+            </a:r>
+          </a:p>
+          <a:p>
+            <a:r>
+              <a:rPr sz="800">
+                <a:hlinkClick r:id="rId32"/>
+              </a:rPr>
+              <a:t>Lofar 3</a:t>
+            </a:r>
+          </a:p>
+          <a:p>
+            <a:r>
+              <a:rPr sz="800">
+                <a:hlinkClick r:id="rId33"/>
+              </a:rPr>
+              <a:t>Lofar 4</a:t>
+            </a:r>
+          </a:p>
         </p:txBody>
       </p:sp>
       <p:sp>
         <p:nvSpPr>
           <p:cNvPr id="23" name="Rounded Rectangle 22">
-            <a:hlinkClick r:id="rId31"/>
+            <a:hlinkClick r:id="rId34"/>
           </p:cNvPr>
           <p:cNvSpPr/>
           <p:nvPr/>
@@ -4240,7 +4264,7 @@
           <a:p>
             <a:r>
               <a:rPr sz="800">
-                <a:hlinkClick r:id="rId32"/>
+                <a:hlinkClick r:id="rId35"/>
               </a:rPr>
               <a:t>Lofar 1</a:t>
             </a:r>
@@ -4248,7 +4272,7 @@
           <a:p>
             <a:r>
               <a:rPr sz="800">
-                <a:hlinkClick r:id="rId33"/>
+                <a:hlinkClick r:id="rId36"/>
               </a:rPr>
               <a:t>Lofar 2</a:t>
             </a:r>
@@ -4256,7 +4280,7 @@
           <a:p>
             <a:r>
               <a:rPr sz="800">
-                <a:hlinkClick r:id="rId34"/>
+                <a:hlinkClick r:id="rId37"/>
               </a:rPr>
               <a:t>Lofar 3</a:t>
             </a:r>
@@ -4264,7 +4288,7 @@
           <a:p>
             <a:r>
               <a:rPr sz="800">
-                <a:hlinkClick r:id="rId35"/>
+                <a:hlinkClick r:id="rId38"/>
               </a:rPr>
               <a:t>Lofar 4</a:t>
             </a:r>
@@ -4274,7 +4298,7 @@
       <p:sp>
         <p:nvSpPr>
           <p:cNvPr id="25" name="Rounded Rectangle 24">
-            <a:hlinkClick r:id="rId36"/>
+            <a:hlinkClick r:id="rId39"/>
           </p:cNvPr>
           <p:cNvSpPr/>
           <p:nvPr/>
@@ -4350,7 +4374,7 @@
           <a:p>
             <a:r>
               <a:rPr sz="800">
-                <a:hlinkClick r:id="rId37"/>
+                <a:hlinkClick r:id="rId40"/>
               </a:rPr>
               <a:t>Lofar 1</a:t>
             </a:r>
@@ -4358,7 +4382,7 @@
           <a:p>
             <a:r>
               <a:rPr sz="800">
-                <a:hlinkClick r:id="rId38"/>
+                <a:hlinkClick r:id="rId41"/>
               </a:rPr>
               <a:t>Lofar 2</a:t>
             </a:r>
@@ -4366,7 +4390,7 @@
           <a:p>
             <a:r>
               <a:rPr sz="800">
-                <a:hlinkClick r:id="rId39"/>
+                <a:hlinkClick r:id="rId42"/>
               </a:rPr>
               <a:t>Lofar 3</a:t>
             </a:r>
@@ -4374,7 +4398,7 @@
           <a:p>
             <a:r>
               <a:rPr sz="800">
-                <a:hlinkClick r:id="rId40"/>
+                <a:hlinkClick r:id="rId43"/>
               </a:rPr>
               <a:t>Lofar 4</a:t>
             </a:r>
@@ -4384,7 +4408,7 @@
       <p:sp>
         <p:nvSpPr>
           <p:cNvPr id="27" name="Rounded Rectangle 26">
-            <a:hlinkClick r:id="rId41"/>
+            <a:hlinkClick r:id="rId44"/>
           </p:cNvPr>
           <p:cNvSpPr/>
           <p:nvPr/>
@@ -4460,7 +4484,7 @@
           <a:p>
             <a:r>
               <a:rPr sz="800">
-                <a:hlinkClick r:id="rId42"/>
+                <a:hlinkClick r:id="rId45"/>
               </a:rPr>
               <a:t>Lofar 1</a:t>
             </a:r>
@@ -4468,7 +4492,7 @@
           <a:p>
             <a:r>
               <a:rPr sz="800">
-                <a:hlinkClick r:id="rId43"/>
+                <a:hlinkClick r:id="rId46"/>
               </a:rPr>
               <a:t>Lofar 2</a:t>
             </a:r>
@@ -4476,7 +4500,7 @@
           <a:p>
             <a:r>
               <a:rPr sz="800">
-                <a:hlinkClick r:id="rId44"/>
+                <a:hlinkClick r:id="rId47"/>
               </a:rPr>
               <a:t>Lofar 3</a:t>
             </a:r>
@@ -4486,7 +4510,7 @@
       <p:sp>
         <p:nvSpPr>
           <p:cNvPr id="29" name="Rounded Rectangle 28">
-            <a:hlinkClick r:id="rId45"/>
+            <a:hlinkClick r:id="rId48"/>
           </p:cNvPr>
           <p:cNvSpPr/>
           <p:nvPr/>
@@ -4562,7 +4586,7 @@
           <a:p>
             <a:r>
               <a:rPr sz="800">
-                <a:hlinkClick r:id="rId46"/>
+                <a:hlinkClick r:id="rId49"/>
               </a:rPr>
               <a:t>Lofar 1</a:t>
             </a:r>
@@ -4570,7 +4594,7 @@
           <a:p>
             <a:r>
               <a:rPr sz="800">
-                <a:hlinkClick r:id="rId47"/>
+                <a:hlinkClick r:id="rId50"/>
               </a:rPr>
               <a:t>Lofar 2</a:t>
             </a:r>
@@ -4578,7 +4602,7 @@
           <a:p>
             <a:r>
               <a:rPr sz="800">
-                <a:hlinkClick r:id="rId48"/>
+                <a:hlinkClick r:id="rId51"/>
               </a:rPr>
               <a:t>Lofar 3</a:t>
             </a:r>
@@ -4588,7 +4612,7 @@
       <p:sp>
         <p:nvSpPr>
           <p:cNvPr id="31" name="Rounded Rectangle 30">
-            <a:hlinkClick r:id="rId49"/>
+            <a:hlinkClick r:id="rId52"/>
           </p:cNvPr>
           <p:cNvSpPr/>
           <p:nvPr/>
@@ -4664,7 +4688,7 @@
           <a:p>
             <a:r>
               <a:rPr sz="800">
-                <a:hlinkClick r:id="rId50"/>
+                <a:hlinkClick r:id="rId53"/>
               </a:rPr>
               <a:t>Lofar 1</a:t>
             </a:r>
@@ -4672,7 +4696,7 @@
           <a:p>
             <a:r>
               <a:rPr sz="800">
-                <a:hlinkClick r:id="rId51"/>
+                <a:hlinkClick r:id="rId54"/>
               </a:rPr>
               <a:t>Lofar 2</a:t>
             </a:r>
@@ -4680,7 +4704,7 @@
           <a:p>
             <a:r>
               <a:rPr sz="800">
-                <a:hlinkClick r:id="rId52"/>
+                <a:hlinkClick r:id="rId55"/>
               </a:rPr>
               <a:t>Lofar 3</a:t>
             </a:r>
